--- a/deliverables/smb_bundles/smb_bundles_4_scale.pptx
+++ b/deliverables/smb_bundles/smb_bundles_4_scale.pptx
@@ -1,19 +1,19 @@
 
 <file path=ppt/presentation.xml><?xml version="1.0" encoding="utf-8"?>
-<p:presentation xmlns:a="http://schemas.openxmlformats.org/drawingml/2006/main" xmlns:ns3="http://schemas.microsoft.com/office/powerpoint/2012/main" xmlns:p="http://schemas.openxmlformats.org/presentationml/2006/main" xmlns:r="http://schemas.openxmlformats.org/officeDocument/2006/relationships" saveSubsetFonts="1" autoCompressPictures="0">
+<p:presentation xmlns:a="http://schemas.openxmlformats.org/drawingml/2006/main" xmlns:r="http://schemas.openxmlformats.org/officeDocument/2006/relationships" xmlns:p="http://schemas.openxmlformats.org/presentationml/2006/main" saveSubsetFonts="1" autoCompressPictures="0">
   <p:sldMasterIdLst>
     <p:sldMasterId id="2147483648" r:id="rId1"/>
   </p:sldMasterIdLst>
   <p:notesMasterIdLst>
-    <p:notesMasterId r:id="rId10"/>
+    <p:notesMasterId r:id="rId9"/>
   </p:notesMasterIdLst>
   <p:sldIdLst>
     <p:sldId id="262" r:id="rId2"/>
     <p:sldId id="256" r:id="rId3"/>
     <p:sldId id="257" r:id="rId4"/>
     <p:sldId id="263" r:id="rId5"/>
-    <p:sldId r:id="rId6" id="258"/>
-    <p:sldId r:id="rId7" id="259"/>
+    <p:sldId id="258" r:id="rId6"/>
+    <p:sldId id="259" r:id="rId7"/>
     <p:sldId id="260" r:id="rId8"/>
   </p:sldIdLst>
   <p:sldSz cx="12192000" cy="6858000"/>
@@ -112,7 +112,7 @@
   </p:defaultTextStyle>
   <p:extLst>
     <p:ext uri="{EFAFB233-063F-42B5-8137-9DF3F51BA10A}">
-      <ns3:sldGuideLst/>
+      <p15:sldGuideLst xmlns:p15="http://schemas.microsoft.com/office/powerpoint/2012/main"/>
     </p:ext>
   </p:extLst>
 </p:presentation>
@@ -663,90 +663,6 @@
 </p:notes>
 </file>
 
-<file path=ppt/notesSlides/notesSlide6.xml><?xml version="1.0" encoding="utf-8"?>
-<p:notes xmlns:a="http://schemas.openxmlformats.org/drawingml/2006/main" xmlns:r="http://schemas.openxmlformats.org/officeDocument/2006/relationships" xmlns:p="http://schemas.openxmlformats.org/presentationml/2006/main">
-  <p:cSld>
-    <p:spTree>
-      <p:nvGrpSpPr>
-        <p:cNvPr id="1" name=""/>
-        <p:cNvGrpSpPr/>
-        <p:nvPr/>
-      </p:nvGrpSpPr>
-      <p:grpSpPr>
-        <a:xfrm>
-          <a:off x="0" y="0"/>
-          <a:ext cx="0" cy="0"/>
-          <a:chOff x="0" y="0"/>
-          <a:chExt cx="0" cy="0"/>
-        </a:xfrm>
-      </p:grpSpPr>
-      <p:sp>
-        <p:nvSpPr>
-          <p:cNvPr id="2" name="Slide Image Placeholder 1"/>
-          <p:cNvSpPr>
-            <a:spLocks noGrp="1" noRot="1" noChangeAspect="1"/>
-          </p:cNvSpPr>
-          <p:nvPr>
-            <p:ph type="sldImg"/>
-          </p:nvPr>
-        </p:nvSpPr>
-        <p:spPr/>
-      </p:sp>
-      <p:sp>
-        <p:nvSpPr>
-          <p:cNvPr id="3" name="Notes Placeholder 2"/>
-          <p:cNvSpPr>
-            <a:spLocks noGrp="1"/>
-          </p:cNvSpPr>
-          <p:nvPr>
-            <p:ph type="body" idx="1"/>
-          </p:nvPr>
-        </p:nvSpPr>
-        <p:spPr/>
-        <p:txBody>
-          <a:bodyPr/>
-          <a:lstStyle/>
-          <a:p>
-            <a:endParaRPr lang="en-US" dirty="0"/>
-          </a:p>
-        </p:txBody>
-      </p:sp>
-      <p:sp>
-        <p:nvSpPr>
-          <p:cNvPr id="4" name="Slide Number Placeholder 3"/>
-          <p:cNvSpPr>
-            <a:spLocks noGrp="1"/>
-          </p:cNvSpPr>
-          <p:nvPr>
-            <p:ph type="sldNum" sz="quarter" idx="10"/>
-          </p:nvPr>
-        </p:nvSpPr>
-        <p:spPr/>
-        <p:txBody>
-          <a:bodyPr/>
-          <a:lstStyle/>
-          <a:p>
-            <a:fld id="{F7021451-1387-4CA6-816F-3879F97B5CBC}" type="slidenum">
-              <a:rPr lang="en-US"/>
-              <a:t>8</a:t>
-            </a:fld>
-            <a:endParaRPr lang="en-US"/>
-          </a:p>
-        </p:txBody>
-      </p:sp>
-    </p:spTree>
-    <p:extLst>
-      <p:ext uri="{BB962C8B-B14F-4D97-AF65-F5344CB8AC3E}">
-        <p14:creationId xmlns:p14="http://schemas.microsoft.com/office/powerpoint/2010/main" val="1024086991"/>
-      </p:ext>
-    </p:extLst>
-  </p:cSld>
-  <p:clrMapOvr>
-    <a:masterClrMapping/>
-  </p:clrMapOvr>
-</p:notes>
-</file>
-
 <file path=ppt/slideLayouts/slideLayout1.xml><?xml version="1.0" encoding="utf-8"?>
 <p:sldLayout xmlns:a="http://schemas.openxmlformats.org/drawingml/2006/main" xmlns:r="http://schemas.openxmlformats.org/officeDocument/2006/relationships" xmlns:p="http://schemas.openxmlformats.org/presentationml/2006/main" preserve="1">
   <p:cSld name="DEFAULT">
@@ -1060,7 +976,7 @@
 </file>
 
 <file path=ppt/slides/slide1.xml><?xml version="1.0" encoding="utf-8"?>
-<p:sld xmlns:a="http://schemas.openxmlformats.org/drawingml/2006/main" xmlns:ns2="http://schemas.microsoft.com/office/powerpoint/2010/main" xmlns:p="http://schemas.openxmlformats.org/presentationml/2006/main">
+<p:sld xmlns:a="http://schemas.openxmlformats.org/drawingml/2006/main" xmlns:ns2="http://schemas.microsoft.com/office/drawing/2014/main" xmlns:ns3="http://schemas.microsoft.com/office/powerpoint/2010/main" xmlns:p="http://schemas.openxmlformats.org/presentationml/2006/main">
   <p:cSld>
     <p:bg>
       <p:bgPr>
@@ -1173,7 +1089,7 @@
           <a:lstStyle/>
           <a:p>
             <a:r>
-              <a:rPr sz="2200" b="1">
+              <a:rPr lang="en-US" sz="2200" dirty="0">
                 <a:solidFill>
                   <a:srgbClr val="A7A7A7"/>
                 </a:solidFill>
@@ -1181,8 +1097,16 @@
                 <a:ea typeface="Arial"/>
                 <a:cs typeface="Arial"/>
               </a:rPr>
-              <a:t>Promote SMB bundles through targeted campaigns and KPI guardrails</a:t>
+              <a:t>Use Lifecycle and in-product prompts to grow adoption</a:t>
             </a:r>
+            <a:endParaRPr sz="2200" dirty="0">
+              <a:solidFill>
+                <a:srgbClr val="A7A7A7"/>
+              </a:solidFill>
+              <a:latin typeface="Arial"/>
+              <a:ea typeface="Arial"/>
+              <a:cs typeface="Arial"/>
+            </a:endParaRPr>
           </a:p>
         </p:txBody>
       </p:sp>
@@ -1274,31 +1198,63 @@
             </a:solidFill>
           </a:ln>
         </p:spPr>
+        <p:txBody>
+          <a:bodyPr/>
+          <a:lstStyle/>
+          <a:p>
+            <a:endParaRPr lang="en-US"/>
+          </a:p>
+        </p:txBody>
       </p:sp>
       <p:sp>
         <p:nvSpPr>
-          <p:cNvPr id="10" name="Q4 preview page marker"/>
-          <p:cNvSpPr/>
+          <p:cNvPr id="10" name="Q4 preview page marker">
+            <a:extLst>
+              <a:ext uri="{FF2B5EF4-FFF2-40B4-BE49-F238E27FC236}">
+                <ns2:creationId id="{639743E6-45F5-5FCD-A928-9E2EA9A5B01C}"/>
+              </a:ext>
+            </a:extLst>
+          </p:cNvPr>
+          <p:cNvSpPr>
+            <a:spLocks noGrp="1"/>
+          </p:cNvSpPr>
           <p:nvPr/>
         </p:nvSpPr>
         <p:spPr>
           <a:xfrm>
-            <a:off x="10744200" y="6286500"/>
-            <a:ext cx="990600" cy="228600"/>
+            <a:off x="11146536" y="6291072"/>
+            <a:ext cx="590550" cy="228600"/>
           </a:xfrm>
-          <a:noFill/>
-          <a:ln>
-            <a:noFill/>
+          <a:prstGeom prst="rect">
+            <a:avLst/>
+          </a:prstGeom>
+          <a:ln w="0">
+            <a:solidFill>
+              <a:srgbClr val="000000">
+                <a:alpha val="0"/>
+              </a:srgbClr>
+            </a:solidFill>
           </a:ln>
         </p:spPr>
         <p:txBody>
-          <a:bodyPr lIns="0" tIns="0" rIns="0" bIns="0" anchor="t"/>
+          <a:bodyPr lIns="57150" tIns="38100" rIns="57150" bIns="38100" anchor="t"/>
           <a:lstStyle/>
           <a:p>
+            <a:pPr algn="r">
+              <a:buNone/>
+              <a:defRPr sz="900" b="0">
+                <a:solidFill>
+                  <a:srgbClr val="A5A5A5"/>
+                </a:solidFill>
+                <a:latin typeface="Arial"/>
+                <a:ea typeface="Arial"/>
+                <a:cs typeface="Arial"/>
+              </a:defRPr>
+            </a:pPr>
             <a:r>
-              <a:rPr sz="950" b="0">
+              <a:rPr lang="en-US" sz="900" b="0" dirty="0">
                 <a:solidFill>
-                  <a:srgbClr val="A7A7A7"/>
+                  <a:srgbClr val="A5A5A5"/>
                 </a:solidFill>
                 <a:latin typeface="Arial"/>
                 <a:ea typeface="Arial"/>
@@ -1306,13 +1262,24 @@
               </a:rPr>
               <a:t>01 / 07</a:t>
             </a:r>
+            <a:r>
+              <a:rPr sz="900" b="0" dirty="0">
+                <a:solidFill>
+                  <a:srgbClr val="A5A5A5"/>
+                </a:solidFill>
+                <a:latin typeface="Arial"/>
+                <a:ea typeface="Arial"/>
+                <a:cs typeface="Arial"/>
+              </a:rPr>
+              <a:t/>
+            </a:r>
           </a:p>
         </p:txBody>
       </p:sp>
     </p:spTree>
     <p:extLst>
       <p:ext uri="{BB962C8B-B14F-4D97-AF65-F5344CB8AC3E}">
-        <ns2:creationId val="1264683463"/>
+        <ns3:creationId val="1264683463"/>
       </p:ext>
     </p:extLst>
   </p:cSld>
@@ -1323,7 +1290,7 @@
 </file>
 
 <file path=ppt/slides/slide2.xml><?xml version="1.0" encoding="utf-8"?>
-<p:sld xmlns:a="http://schemas.openxmlformats.org/drawingml/2006/main" xmlns:p="http://schemas.openxmlformats.org/presentationml/2006/main">
+<p:sld xmlns:a="http://schemas.openxmlformats.org/drawingml/2006/main" xmlns:ns2="http://schemas.microsoft.com/office/drawing/2014/main" xmlns:p="http://schemas.openxmlformats.org/presentationml/2006/main">
   <p:cSld name="Slide 1">
     <p:bg>
       <p:bgPr>
@@ -1467,8 +1434,8 @@
         </p:nvSpPr>
         <p:spPr>
           <a:xfrm>
-            <a:off x="457200" y="6199632"/>
-            <a:ext cx="10972800" cy="0"/>
+            <a:off x="457200" y="6210300"/>
+            <a:ext cx="11277600" cy="0"/>
           </a:xfrm>
           <a:prstGeom prst="line">
             <a:avLst/>
@@ -1532,42 +1499,71 @@
       </p:sp>
       <p:sp>
         <p:nvSpPr>
-          <p:cNvPr id="7" name="Text 5"/>
-          <p:cNvSpPr/>
+          <p:cNvPr id="7" name="Text 5">
+            <a:extLst>
+              <a:ext uri="{FF2B5EF4-FFF2-40B4-BE49-F238E27FC236}">
+                <ns2:creationId id="{639743E6-45F5-5FCD-A928-9E2EA9A5B01C}"/>
+              </a:ext>
+            </a:extLst>
+          </p:cNvPr>
+          <p:cNvSpPr>
+            <a:spLocks noGrp="1"/>
+          </p:cNvSpPr>
           <p:nvPr/>
         </p:nvSpPr>
         <p:spPr>
           <a:xfrm>
-            <a:off x="10744200" y="6236208"/>
-            <a:ext cx="868680" cy="164592"/>
+            <a:off x="11146536" y="6291072"/>
+            <a:ext cx="590550" cy="228600"/>
           </a:xfrm>
           <a:prstGeom prst="rect">
             <a:avLst/>
           </a:prstGeom>
-          <a:noFill/>
-          <a:ln/>
+          <a:ln w="0">
+            <a:solidFill>
+              <a:srgbClr val="000000">
+                <a:alpha val="0"/>
+              </a:srgbClr>
+            </a:solidFill>
+          </a:ln>
         </p:spPr>
         <p:txBody>
-          <a:bodyPr wrap="square" lIns="0" tIns="0" rIns="0" bIns="0" rtlCol="0" anchor="ctr">
-            <a:normAutofit/>
-          </a:bodyPr>
+          <a:bodyPr lIns="57150" tIns="38100" rIns="57150" bIns="38100" anchor="t"/>
           <a:lstStyle/>
           <a:p>
-            <a:pPr marL="0" indent="0" algn="r">
+            <a:pPr algn="r">
               <a:buNone/>
-            </a:pPr>
-            <a:r>
-              <a:rPr lang="en-US" sz="750" dirty="0">
+              <a:defRPr sz="900" b="0">
                 <a:solidFill>
                   <a:srgbClr val="A5A5A5"/>
                 </a:solidFill>
-                <a:latin typeface="Arial" pitchFamily="34" charset="0"/>
-                <a:ea typeface="Arial" pitchFamily="34" charset="-122"/>
-                <a:cs typeface="Arial" pitchFamily="34" charset="-120"/>
+                <a:latin typeface="Arial"/>
+                <a:ea typeface="Arial"/>
+                <a:cs typeface="Arial"/>
+              </a:defRPr>
+            </a:pPr>
+            <a:r>
+              <a:rPr lang="en-US" sz="900" b="0" dirty="0">
+                <a:solidFill>
+                  <a:srgbClr val="A5A5A5"/>
+                </a:solidFill>
+                <a:latin typeface="Arial"/>
+                <a:ea typeface="Arial"/>
+                <a:cs typeface="Arial"/>
               </a:rPr>
               <a:t>02 / 07</a:t>
             </a:r>
-            <a:endParaRPr lang="en-US" sz="750" dirty="0"/>
+            <a:r>
+              <a:rPr sz="900" b="0" dirty="0">
+                <a:solidFill>
+                  <a:srgbClr val="A5A5A5"/>
+                </a:solidFill>
+                <a:latin typeface="Arial"/>
+                <a:ea typeface="Arial"/>
+                <a:cs typeface="Arial"/>
+              </a:rPr>
+              <a:t/>
+            </a:r>
           </a:p>
         </p:txBody>
       </p:sp>
@@ -2430,7 +2426,7 @@
 </file>
 
 <file path=ppt/slides/slide3.xml><?xml version="1.0" encoding="utf-8"?>
-<p:sld xmlns:a="http://schemas.openxmlformats.org/drawingml/2006/main" xmlns:ns2="http://schemas.microsoft.com/office/powerpoint/2010/main" xmlns:ns3="http://schemas.microsoft.com/office/drawing/2014/main" xmlns:p="http://schemas.openxmlformats.org/presentationml/2006/main">
+<p:sld xmlns:a="http://schemas.openxmlformats.org/drawingml/2006/main" xmlns:ns2="http://schemas.microsoft.com/office/drawing/2014/main" xmlns:ns3="http://schemas.microsoft.com/office/powerpoint/2010/main" xmlns:p="http://schemas.openxmlformats.org/presentationml/2006/main">
   <p:cSld name="Slide 2">
     <p:bg>
       <p:bgPr>
@@ -2574,8 +2570,8 @@
         </p:nvSpPr>
         <p:spPr>
           <a:xfrm>
-            <a:off x="457200" y="6199632"/>
-            <a:ext cx="10972800" cy="0"/>
+            <a:off x="457200" y="6210300"/>
+            <a:ext cx="11277600" cy="0"/>
           </a:xfrm>
           <a:prstGeom prst="line">
             <a:avLst/>
@@ -2639,42 +2635,71 @@
       </p:sp>
       <p:sp>
         <p:nvSpPr>
-          <p:cNvPr id="7" name="Text 5"/>
-          <p:cNvSpPr/>
+          <p:cNvPr id="7" name="Text 5">
+            <a:extLst>
+              <a:ext uri="{FF2B5EF4-FFF2-40B4-BE49-F238E27FC236}">
+                <ns2:creationId id="{639743E6-45F5-5FCD-A928-9E2EA9A5B01C}"/>
+              </a:ext>
+            </a:extLst>
+          </p:cNvPr>
+          <p:cNvSpPr>
+            <a:spLocks noGrp="1"/>
+          </p:cNvSpPr>
           <p:nvPr/>
         </p:nvSpPr>
         <p:spPr>
           <a:xfrm>
-            <a:off x="10744200" y="6236208"/>
-            <a:ext cx="868680" cy="164592"/>
+            <a:off x="11146536" y="6291072"/>
+            <a:ext cx="590550" cy="228600"/>
           </a:xfrm>
           <a:prstGeom prst="rect">
             <a:avLst/>
           </a:prstGeom>
-          <a:noFill/>
-          <a:ln/>
+          <a:ln w="0">
+            <a:solidFill>
+              <a:srgbClr val="000000">
+                <a:alpha val="0"/>
+              </a:srgbClr>
+            </a:solidFill>
+          </a:ln>
         </p:spPr>
         <p:txBody>
-          <a:bodyPr wrap="square" lIns="0" tIns="0" rIns="0" bIns="0" rtlCol="0" anchor="ctr">
-            <a:normAutofit/>
-          </a:bodyPr>
+          <a:bodyPr lIns="57150" tIns="38100" rIns="57150" bIns="38100" anchor="t"/>
           <a:lstStyle/>
           <a:p>
-            <a:pPr marL="0" indent="0" algn="r">
+            <a:pPr algn="r">
               <a:buNone/>
-            </a:pPr>
-            <a:r>
-              <a:rPr lang="en-US" sz="750" dirty="0">
+              <a:defRPr sz="900" b="0">
                 <a:solidFill>
                   <a:srgbClr val="A5A5A5"/>
                 </a:solidFill>
-                <a:latin typeface="Arial" pitchFamily="34" charset="0"/>
-                <a:ea typeface="Arial" pitchFamily="34" charset="-122"/>
-                <a:cs typeface="Arial" pitchFamily="34" charset="-120"/>
+                <a:latin typeface="Arial"/>
+                <a:ea typeface="Arial"/>
+                <a:cs typeface="Arial"/>
+              </a:defRPr>
+            </a:pPr>
+            <a:r>
+              <a:rPr lang="en-US" sz="900" b="0" dirty="0">
+                <a:solidFill>
+                  <a:srgbClr val="A5A5A5"/>
+                </a:solidFill>
+                <a:latin typeface="Arial"/>
+                <a:ea typeface="Arial"/>
+                <a:cs typeface="Arial"/>
               </a:rPr>
               <a:t>03 / 07</a:t>
             </a:r>
-            <a:endParaRPr lang="en-US" sz="750" dirty="0"/>
+            <a:r>
+              <a:rPr sz="900" b="0" dirty="0">
+                <a:solidFill>
+                  <a:srgbClr val="A5A5A5"/>
+                </a:solidFill>
+                <a:latin typeface="Arial"/>
+                <a:ea typeface="Arial"/>
+                <a:cs typeface="Arial"/>
+              </a:rPr>
+              <a:t/>
+            </a:r>
           </a:p>
         </p:txBody>
       </p:sp>
@@ -2769,7 +2794,7 @@
           <p:nvPr>
             <p:extLst>
               <p:ext uri="{D42A27DB-BD31-4B8C-83A1-F6EECF244321}">
-                <ns2:modId val="1579011935"/>
+                <ns3:modId val="1579011935"/>
               </p:ext>
             </p:extLst>
           </p:nvPr>
@@ -2783,9 +2808,27 @@
             <a:tbl>
               <a:tblPr/>
               <a:tblGrid>
-                <a:gridCol w="1260000"/>
-                <a:gridCol w="3740000"/>
-                <a:gridCol w="4480000"/>
+                <a:gridCol w="1260000">
+                  <a:extLst>
+                    <a:ext uri="{9D8B030D-6E8A-4147-A177-3AD203B41FA5}">
+                      <ns2:colId val="20000"/>
+                    </a:ext>
+                  </a:extLst>
+                </a:gridCol>
+                <a:gridCol w="3740000">
+                  <a:extLst>
+                    <a:ext uri="{9D8B030D-6E8A-4147-A177-3AD203B41FA5}">
+                      <ns2:colId val="20001"/>
+                    </a:ext>
+                  </a:extLst>
+                </a:gridCol>
+                <a:gridCol w="4480000">
+                  <a:extLst>
+                    <a:ext uri="{9D8B030D-6E8A-4147-A177-3AD203B41FA5}">
+                      <ns2:colId val="20002"/>
+                    </a:ext>
+                  </a:extLst>
+                </a:gridCol>
               </a:tblGrid>
               <a:tr h="470000">
                 <a:tc>
@@ -2970,7 +3013,7 @@
                 </a:tc>
                 <a:extLst>
                   <a:ext uri="{0D108BD9-81ED-4DB2-BD59-A6C34878D82A}">
-                    <ns3:rowId val="10000"/>
+                    <ns2:rowId val="10000"/>
                   </a:ext>
                 </a:extLst>
               </a:tr>
@@ -3157,7 +3200,7 @@
                 </a:tc>
                 <a:extLst>
                   <a:ext uri="{0D108BD9-81ED-4DB2-BD59-A6C34878D82A}">
-                    <ns3:rowId val="10001"/>
+                    <ns2:rowId val="10001"/>
                   </a:ext>
                 </a:extLst>
               </a:tr>
@@ -3344,7 +3387,7 @@
                 </a:tc>
                 <a:extLst>
                   <a:ext uri="{0D108BD9-81ED-4DB2-BD59-A6C34878D82A}">
-                    <ns3:rowId val="10001"/>
+                    <ns2:rowId val="4021254877"/>
                   </a:ext>
                 </a:extLst>
               </a:tr>
@@ -3531,7 +3574,7 @@
                 </a:tc>
                 <a:extLst>
                   <a:ext uri="{0D108BD9-81ED-4DB2-BD59-A6C34878D82A}">
-                    <ns3:rowId val="10001"/>
+                    <ns2:rowId val="2169815287"/>
                   </a:ext>
                 </a:extLst>
               </a:tr>
@@ -3718,7 +3761,7 @@
                 </a:tc>
                 <a:extLst>
                   <a:ext uri="{0D108BD9-81ED-4DB2-BD59-A6C34878D82A}">
-                    <ns3:rowId val="10001"/>
+                    <ns2:rowId val="1406103413"/>
                   </a:ext>
                 </a:extLst>
               </a:tr>
@@ -3772,7 +3815,7 @@
 </file>
 
 <file path=ppt/slides/slide4.xml><?xml version="1.0" encoding="utf-8"?>
-<p:sld xmlns:a="http://schemas.openxmlformats.org/drawingml/2006/main" xmlns:p="http://schemas.openxmlformats.org/presentationml/2006/main">
+<p:sld xmlns:a="http://schemas.openxmlformats.org/drawingml/2006/main" xmlns:ns2="http://schemas.microsoft.com/office/drawing/2014/main" xmlns:p="http://schemas.openxmlformats.org/presentationml/2006/main">
   <p:cSld name="Slide 2">
     <p:bg>
       <p:bgPr>
@@ -3916,8 +3959,8 @@
         </p:nvSpPr>
         <p:spPr>
           <a:xfrm>
-            <a:off x="457200" y="6199632"/>
-            <a:ext cx="10972800" cy="0"/>
+            <a:off x="457200" y="6210300"/>
+            <a:ext cx="11277600" cy="0"/>
           </a:xfrm>
           <a:prstGeom prst="line">
             <a:avLst/>
@@ -3981,42 +4024,71 @@
       </p:sp>
       <p:sp>
         <p:nvSpPr>
-          <p:cNvPr id="7" name="Text 5"/>
-          <p:cNvSpPr/>
+          <p:cNvPr id="7" name="Text 5">
+            <a:extLst>
+              <a:ext uri="{FF2B5EF4-FFF2-40B4-BE49-F238E27FC236}">
+                <ns2:creationId id="{639743E6-45F5-5FCD-A928-9E2EA9A5B01C}"/>
+              </a:ext>
+            </a:extLst>
+          </p:cNvPr>
+          <p:cNvSpPr>
+            <a:spLocks noGrp="1"/>
+          </p:cNvSpPr>
           <p:nvPr/>
         </p:nvSpPr>
         <p:spPr>
           <a:xfrm>
-            <a:off x="10744200" y="6236208"/>
-            <a:ext cx="868680" cy="164592"/>
+            <a:off x="11146536" y="6291072"/>
+            <a:ext cx="590550" cy="228600"/>
           </a:xfrm>
           <a:prstGeom prst="rect">
             <a:avLst/>
           </a:prstGeom>
-          <a:noFill/>
-          <a:ln/>
+          <a:ln w="0">
+            <a:solidFill>
+              <a:srgbClr val="000000">
+                <a:alpha val="0"/>
+              </a:srgbClr>
+            </a:solidFill>
+          </a:ln>
         </p:spPr>
         <p:txBody>
-          <a:bodyPr wrap="square" lIns="0" tIns="0" rIns="0" bIns="0" rtlCol="0" anchor="ctr">
-            <a:normAutofit/>
-          </a:bodyPr>
+          <a:bodyPr lIns="57150" tIns="38100" rIns="57150" bIns="38100" anchor="t"/>
           <a:lstStyle/>
           <a:p>
-            <a:pPr marL="0" indent="0" algn="r">
+            <a:pPr algn="r">
               <a:buNone/>
-            </a:pPr>
-            <a:r>
-              <a:rPr lang="en-US" sz="750" dirty="0">
+              <a:defRPr sz="900" b="0">
                 <a:solidFill>
                   <a:srgbClr val="A5A5A5"/>
                 </a:solidFill>
-                <a:latin typeface="Arial" pitchFamily="34" charset="0"/>
-                <a:ea typeface="Arial" pitchFamily="34" charset="-122"/>
-                <a:cs typeface="Arial" pitchFamily="34" charset="-120"/>
+                <a:latin typeface="Arial"/>
+                <a:ea typeface="Arial"/>
+                <a:cs typeface="Arial"/>
+              </a:defRPr>
+            </a:pPr>
+            <a:r>
+              <a:rPr lang="en-US" sz="900" b="0" dirty="0">
+                <a:solidFill>
+                  <a:srgbClr val="A5A5A5"/>
+                </a:solidFill>
+                <a:latin typeface="Arial"/>
+                <a:ea typeface="Arial"/>
+                <a:cs typeface="Arial"/>
               </a:rPr>
               <a:t>04 / 07</a:t>
             </a:r>
-            <a:endParaRPr lang="en-US" sz="750" dirty="0"/>
+            <a:r>
+              <a:rPr sz="900" b="0" dirty="0">
+                <a:solidFill>
+                  <a:srgbClr val="A5A5A5"/>
+                </a:solidFill>
+                <a:latin typeface="Arial"/>
+                <a:ea typeface="Arial"/>
+                <a:cs typeface="Arial"/>
+              </a:rPr>
+              <a:t/>
+            </a:r>
           </a:p>
         </p:txBody>
       </p:sp>
@@ -4111,6 +4183,10 @@
           </a:xfrm>
           <a:custGeom>
             <a:avLst/>
+            <a:gdLst/>
+            <a:ahLst/>
+            <a:cxnLst/>
+            <a:rect l="0" t="0" r="0" b="0"/>
             <a:pathLst>
               <a:path w="5029200" h="1828800">
                 <a:moveTo>
@@ -4322,6 +4398,10 @@
           </a:xfrm>
           <a:custGeom>
             <a:avLst/>
+            <a:gdLst/>
+            <a:ahLst/>
+            <a:cxnLst/>
+            <a:rect l="0" t="0" r="0" b="0"/>
             <a:pathLst>
               <a:path w="5029200" h="1828800">
                 <a:moveTo>
@@ -4607,7 +4687,7 @@
 </file>
 
 <file path=ppt/slides/slide5.xml><?xml version="1.0" encoding="utf-8"?>
-<p:sld xmlns:a="http://schemas.openxmlformats.org/drawingml/2006/main" xmlns:ns2="http://schemas.microsoft.com/office/powerpoint/2010/main" xmlns:ns3="http://schemas.microsoft.com/office/drawing/2014/main" xmlns:p="http://schemas.openxmlformats.org/presentationml/2006/main">
+<p:sld xmlns:a="http://schemas.openxmlformats.org/drawingml/2006/main" xmlns:ns2="http://schemas.microsoft.com/office/drawing/2014/main" xmlns:ns3="http://schemas.microsoft.com/office/powerpoint/2010/main" xmlns:p="http://schemas.openxmlformats.org/presentationml/2006/main">
   <p:cSld name="Slide 3">
     <p:bg>
       <p:bgPr>
@@ -4751,8 +4831,8 @@
         </p:nvSpPr>
         <p:spPr>
           <a:xfrm>
-            <a:off x="457200" y="6199632"/>
-            <a:ext cx="10972800" cy="0"/>
+            <a:off x="457200" y="6210300"/>
+            <a:ext cx="11277600" cy="0"/>
           </a:xfrm>
           <a:prstGeom prst="line">
             <a:avLst/>
@@ -4816,42 +4896,71 @@
       </p:sp>
       <p:sp>
         <p:nvSpPr>
-          <p:cNvPr id="7" name="Text 5"/>
-          <p:cNvSpPr/>
+          <p:cNvPr id="7" name="Text 5">
+            <a:extLst>
+              <a:ext uri="{FF2B5EF4-FFF2-40B4-BE49-F238E27FC236}">
+                <ns2:creationId id="{639743E6-45F5-5FCD-A928-9E2EA9A5B01C}"/>
+              </a:ext>
+            </a:extLst>
+          </p:cNvPr>
+          <p:cNvSpPr>
+            <a:spLocks noGrp="1"/>
+          </p:cNvSpPr>
           <p:nvPr/>
         </p:nvSpPr>
         <p:spPr>
           <a:xfrm>
-            <a:off x="10744200" y="6236208"/>
-            <a:ext cx="868680" cy="164592"/>
+            <a:off x="11146536" y="6291072"/>
+            <a:ext cx="590550" cy="228600"/>
           </a:xfrm>
           <a:prstGeom prst="rect">
             <a:avLst/>
           </a:prstGeom>
-          <a:noFill/>
-          <a:ln/>
+          <a:ln w="0">
+            <a:solidFill>
+              <a:srgbClr val="000000">
+                <a:alpha val="0"/>
+              </a:srgbClr>
+            </a:solidFill>
+          </a:ln>
         </p:spPr>
         <p:txBody>
-          <a:bodyPr wrap="square" lIns="0" tIns="0" rIns="0" bIns="0" rtlCol="0" anchor="ctr">
-            <a:normAutofit/>
-          </a:bodyPr>
+          <a:bodyPr lIns="57150" tIns="38100" rIns="57150" bIns="38100" anchor="t"/>
           <a:lstStyle/>
           <a:p>
-            <a:pPr marL="0" indent="0" algn="r">
+            <a:pPr algn="r">
               <a:buNone/>
-            </a:pPr>
-            <a:r>
-              <a:rPr lang="en-US" sz="750" dirty="0">
+              <a:defRPr sz="900" b="0">
                 <a:solidFill>
                   <a:srgbClr val="A5A5A5"/>
                 </a:solidFill>
-                <a:latin typeface="Arial" pitchFamily="34" charset="0"/>
-                <a:ea typeface="Arial" pitchFamily="34" charset="-122"/>
-                <a:cs typeface="Arial" pitchFamily="34" charset="-120"/>
+                <a:latin typeface="Arial"/>
+                <a:ea typeface="Arial"/>
+                <a:cs typeface="Arial"/>
+              </a:defRPr>
+            </a:pPr>
+            <a:r>
+              <a:rPr lang="en-US" sz="900" b="0" dirty="0">
+                <a:solidFill>
+                  <a:srgbClr val="A5A5A5"/>
+                </a:solidFill>
+                <a:latin typeface="Arial"/>
+                <a:ea typeface="Arial"/>
+                <a:cs typeface="Arial"/>
               </a:rPr>
               <a:t>05 / 07</a:t>
             </a:r>
-            <a:endParaRPr lang="en-US" sz="750" dirty="0"/>
+            <a:r>
+              <a:rPr sz="900" b="0" dirty="0">
+                <a:solidFill>
+                  <a:srgbClr val="A5A5A5"/>
+                </a:solidFill>
+                <a:latin typeface="Arial"/>
+                <a:ea typeface="Arial"/>
+                <a:cs typeface="Arial"/>
+              </a:rPr>
+              <a:t/>
+            </a:r>
           </a:p>
         </p:txBody>
       </p:sp>
@@ -4946,7 +5055,7 @@
           <p:nvPr>
             <p:extLst>
               <p:ext uri="{D42A27DB-BD31-4B8C-83A1-F6EECF244321}">
-                <ns2:modId val="1579011935"/>
+                <ns3:modId val="1579011935"/>
               </p:ext>
             </p:extLst>
           </p:nvPr>
@@ -4960,8 +5069,20 @@
             <a:tbl>
               <a:tblPr/>
               <a:tblGrid>
-                <a:gridCol w="3400000"/>
-                <a:gridCol w="6640000"/>
+                <a:gridCol w="3400000">
+                  <a:extLst>
+                    <a:ext uri="{9D8B030D-6E8A-4147-A177-3AD203B41FA5}">
+                      <ns2:colId val="20000"/>
+                    </a:ext>
+                  </a:extLst>
+                </a:gridCol>
+                <a:gridCol w="6640000">
+                  <a:extLst>
+                    <a:ext uri="{9D8B030D-6E8A-4147-A177-3AD203B41FA5}">
+                      <ns2:colId val="20001"/>
+                    </a:ext>
+                  </a:extLst>
+                </a:gridCol>
               </a:tblGrid>
               <a:tr h="452000">
                 <a:tc>
@@ -5086,7 +5207,7 @@
                 </a:tc>
                 <a:extLst>
                   <a:ext uri="{0D108BD9-81ED-4DB2-BD59-A6C34878D82A}">
-                    <ns3:rowId val="10000"/>
+                    <ns2:rowId val="10000"/>
                   </a:ext>
                 </a:extLst>
               </a:tr>
@@ -5213,7 +5334,7 @@
                 </a:tc>
                 <a:extLst>
                   <a:ext uri="{0D108BD9-81ED-4DB2-BD59-A6C34878D82A}">
-                    <ns3:rowId val="10001"/>
+                    <ns2:rowId val="10001"/>
                   </a:ext>
                 </a:extLst>
               </a:tr>
@@ -5340,7 +5461,7 @@
                 </a:tc>
                 <a:extLst>
                   <a:ext uri="{0D108BD9-81ED-4DB2-BD59-A6C34878D82A}">
-                    <ns3:rowId val="10001"/>
+                    <ns2:rowId val="373867942"/>
                   </a:ext>
                 </a:extLst>
               </a:tr>
@@ -5467,7 +5588,7 @@
                 </a:tc>
                 <a:extLst>
                   <a:ext uri="{0D108BD9-81ED-4DB2-BD59-A6C34878D82A}">
-                    <ns3:rowId val="10001"/>
+                    <ns2:rowId val="232773239"/>
                   </a:ext>
                 </a:extLst>
               </a:tr>
@@ -5594,7 +5715,7 @@
                 </a:tc>
                 <a:extLst>
                   <a:ext uri="{0D108BD9-81ED-4DB2-BD59-A6C34878D82A}">
-                    <ns3:rowId val="10001"/>
+                    <ns2:rowId val="3708948510"/>
                   </a:ext>
                 </a:extLst>
               </a:tr>
@@ -5648,23 +5769,41 @@
           <p:nvPr>
             <p:extLst>
               <p:ext uri="{D42A27DB-BD31-4B8C-83A1-F6EECF244321}">
-                <ns2:modId val="1579011935"/>
+                <ns3:modId val="1579011935"/>
               </p:ext>
             </p:extLst>
           </p:nvPr>
         </p:nvGraphicFramePr>
         <p:xfrm>
           <a:off x="650000" y="4980000"/>
-          <a:ext cx="10040000" cy="1020000"/>
+          <a:ext cx="10040000" cy="1463040"/>
         </p:xfrm>
         <a:graphic>
           <a:graphicData uri="http://schemas.openxmlformats.org/drawingml/2006/table">
             <a:tbl>
               <a:tblPr/>
               <a:tblGrid>
-                <a:gridCol w="1000000"/>
-                <a:gridCol w="4300000"/>
-                <a:gridCol w="4740000"/>
+                <a:gridCol w="1000000">
+                  <a:extLst>
+                    <a:ext uri="{9D8B030D-6E8A-4147-A177-3AD203B41FA5}">
+                      <ns2:colId val="20000"/>
+                    </a:ext>
+                  </a:extLst>
+                </a:gridCol>
+                <a:gridCol w="4300000">
+                  <a:extLst>
+                    <a:ext uri="{9D8B030D-6E8A-4147-A177-3AD203B41FA5}">
+                      <ns2:colId val="20001"/>
+                    </a:ext>
+                  </a:extLst>
+                </a:gridCol>
+                <a:gridCol w="4740000">
+                  <a:extLst>
+                    <a:ext uri="{9D8B030D-6E8A-4147-A177-3AD203B41FA5}">
+                      <ns2:colId val="20002"/>
+                    </a:ext>
+                  </a:extLst>
+                </a:gridCol>
               </a:tblGrid>
               <a:tr h="255000">
                 <a:tc>
@@ -5787,30 +5926,15 @@
                     </a:solidFill>
                   </a:tcPr>
                 </a:tc>
-                <a:extLst>
-                  <a:ext uri="{0D108BD9-81ED-4DB2-BD59-A6C34878D82A}">
-                    <ns3:rowId val="10000"/>
-                  </a:ext>
-                </a:extLst>
                 <a:tc>
                   <a:txBody>
                     <a:bodyPr/>
                     <a:lstStyle/>
                     <a:p>
-                      <a:pPr marL="0" indent="0">
-                        <a:buNone/>
-                      </a:pPr>
-                      <a:r>
-                        <a:rPr sz="1000" b="1">
-                          <a:solidFill>
-                            <a:srgbClr val="F2F2F2"/>
-                          </a:solidFill>
-                        </a:rPr>
-                        <a:t>Frequency</a:t>
-                      </a:r>
+                      <a:endParaRPr lang="en-US"/>
                     </a:p>
                   </a:txBody>
-                  <a:tcPr marL="26000" marR="26000" marT="18000" marB="18000" anchor="ctr">
+                  <a:tcPr>
                     <a:lnL w="12700" cap="flat" cmpd="sng" algn="ctr">
                       <a:solidFill>
                         <a:srgbClr val="2D2D2D"/>
@@ -5820,38 +5944,13 @@
                       <a:headEnd type="none" w="med" len="med"/>
                       <a:tailEnd type="none" w="med" len="med"/>
                     </a:lnL>
-                    <a:lnR w="12700" cap="flat" cmpd="sng" algn="ctr">
-                      <a:solidFill>
-                        <a:srgbClr val="2D2D2D"/>
-                      </a:solidFill>
-                      <a:prstDash val="solid"/>
-                      <a:round/>
-                      <a:headEnd type="none" w="med" len="med"/>
-                      <a:tailEnd type="none" w="med" len="med"/>
-                    </a:lnR>
-                    <a:lnT w="12700" cap="flat" cmpd="sng" algn="ctr">
-                      <a:solidFill>
-                        <a:srgbClr val="2D2D2D"/>
-                      </a:solidFill>
-                      <a:prstDash val="solid"/>
-                      <a:round/>
-                      <a:headEnd type="none" w="med" len="med"/>
-                      <a:tailEnd type="none" w="med" len="med"/>
-                    </a:lnT>
-                    <a:lnB w="12700" cap="flat" cmpd="sng" algn="ctr">
-                      <a:solidFill>
-                        <a:srgbClr val="2D2D2D"/>
-                      </a:solidFill>
-                      <a:prstDash val="solid"/>
-                      <a:round/>
-                      <a:headEnd type="none" w="med" len="med"/>
-                      <a:tailEnd type="none" w="med" len="med"/>
-                    </a:lnB>
-                    <a:solidFill>
-                      <a:srgbClr val="161616"/>
-                    </a:solidFill>
                   </a:tcPr>
                 </a:tc>
+                <a:extLst>
+                  <a:ext uri="{0D108BD9-81ED-4DB2-BD59-A6C34878D82A}">
+                    <ns2:rowId val="10000"/>
+                  </a:ext>
+                </a:extLst>
               </a:tr>
               <a:tr h="255000">
                 <a:tc>
@@ -5974,30 +6073,15 @@
                     </a:solidFill>
                   </a:tcPr>
                 </a:tc>
-                <a:extLst>
-                  <a:ext uri="{0D108BD9-81ED-4DB2-BD59-A6C34878D82A}">
-                    <ns3:rowId val="10001"/>
-                  </a:ext>
-                </a:extLst>
                 <a:tc>
                   <a:txBody>
                     <a:bodyPr/>
                     <a:lstStyle/>
                     <a:p>
-                      <a:pPr marL="0" indent="0">
-                        <a:buNone/>
-                      </a:pPr>
-                      <a:r>
-                        <a:rPr sz="930" b="0">
-                          <a:solidFill>
-                            <a:srgbClr val="D9D9D9"/>
-                          </a:solidFill>
-                        </a:rPr>
-                        <a:t>Full journey, capped over first 2 weeks</a:t>
-                      </a:r>
+                      <a:endParaRPr lang="en-US"/>
                     </a:p>
                   </a:txBody>
-                  <a:tcPr marL="26000" marR="26000" marT="18000" marB="18000" anchor="ctr">
+                  <a:tcPr>
                     <a:lnL w="12700" cap="flat" cmpd="sng" algn="ctr">
                       <a:solidFill>
                         <a:srgbClr val="2D2D2D"/>
@@ -6007,38 +6091,13 @@
                       <a:headEnd type="none" w="med" len="med"/>
                       <a:tailEnd type="none" w="med" len="med"/>
                     </a:lnL>
-                    <a:lnR w="12700" cap="flat" cmpd="sng" algn="ctr">
-                      <a:solidFill>
-                        <a:srgbClr val="2D2D2D"/>
-                      </a:solidFill>
-                      <a:prstDash val="solid"/>
-                      <a:round/>
-                      <a:headEnd type="none" w="med" len="med"/>
-                      <a:tailEnd type="none" w="med" len="med"/>
-                    </a:lnR>
-                    <a:lnT w="12700" cap="flat" cmpd="sng" algn="ctr">
-                      <a:solidFill>
-                        <a:srgbClr val="2D2D2D"/>
-                      </a:solidFill>
-                      <a:prstDash val="solid"/>
-                      <a:round/>
-                      <a:headEnd type="none" w="med" len="med"/>
-                      <a:tailEnd type="none" w="med" len="med"/>
-                    </a:lnT>
-                    <a:lnB w="12700" cap="flat" cmpd="sng" algn="ctr">
-                      <a:solidFill>
-                        <a:srgbClr val="2D2D2D"/>
-                      </a:solidFill>
-                      <a:prstDash val="solid"/>
-                      <a:round/>
-                      <a:headEnd type="none" w="med" len="med"/>
-                      <a:tailEnd type="none" w="med" len="med"/>
-                    </a:lnB>
-                    <a:solidFill>
-                      <a:srgbClr val="101010"/>
-                    </a:solidFill>
                   </a:tcPr>
                 </a:tc>
+                <a:extLst>
+                  <a:ext uri="{0D108BD9-81ED-4DB2-BD59-A6C34878D82A}">
+                    <ns2:rowId val="10001"/>
+                  </a:ext>
+                </a:extLst>
               </a:tr>
               <a:tr h="255000">
                 <a:tc>
@@ -6161,30 +6220,15 @@
                     </a:solidFill>
                   </a:tcPr>
                 </a:tc>
-                <a:extLst>
-                  <a:ext uri="{0D108BD9-81ED-4DB2-BD59-A6C34878D82A}">
-                    <ns3:rowId val="10001"/>
-                  </a:ext>
-                </a:extLst>
                 <a:tc>
                   <a:txBody>
                     <a:bodyPr/>
                     <a:lstStyle/>
                     <a:p>
-                      <a:pPr marL="0" indent="0">
-                        <a:buNone/>
-                      </a:pPr>
-                      <a:r>
-                        <a:rPr sz="930" b="0">
-                          <a:solidFill>
-                            <a:srgbClr val="D9D9D9"/>
-                          </a:solidFill>
-                        </a:rPr>
-                        <a:t>Limited nurture, lower frequency</a:t>
-                      </a:r>
+                      <a:endParaRPr lang="en-US"/>
                     </a:p>
                   </a:txBody>
-                  <a:tcPr marL="26000" marR="26000" marT="18000" marB="18000" anchor="ctr">
+                  <a:tcPr>
                     <a:lnL w="12700" cap="flat" cmpd="sng" algn="ctr">
                       <a:solidFill>
                         <a:srgbClr val="2D2D2D"/>
@@ -6194,38 +6238,13 @@
                       <a:headEnd type="none" w="med" len="med"/>
                       <a:tailEnd type="none" w="med" len="med"/>
                     </a:lnL>
-                    <a:lnR w="12700" cap="flat" cmpd="sng" algn="ctr">
-                      <a:solidFill>
-                        <a:srgbClr val="2D2D2D"/>
-                      </a:solidFill>
-                      <a:prstDash val="solid"/>
-                      <a:round/>
-                      <a:headEnd type="none" w="med" len="med"/>
-                      <a:tailEnd type="none" w="med" len="med"/>
-                    </a:lnR>
-                    <a:lnT w="12700" cap="flat" cmpd="sng" algn="ctr">
-                      <a:solidFill>
-                        <a:srgbClr val="2D2D2D"/>
-                      </a:solidFill>
-                      <a:prstDash val="solid"/>
-                      <a:round/>
-                      <a:headEnd type="none" w="med" len="med"/>
-                      <a:tailEnd type="none" w="med" len="med"/>
-                    </a:lnT>
-                    <a:lnB w="12700" cap="flat" cmpd="sng" algn="ctr">
-                      <a:solidFill>
-                        <a:srgbClr val="2D2D2D"/>
-                      </a:solidFill>
-                      <a:prstDash val="solid"/>
-                      <a:round/>
-                      <a:headEnd type="none" w="med" len="med"/>
-                      <a:tailEnd type="none" w="med" len="med"/>
-                    </a:lnB>
-                    <a:solidFill>
-                      <a:srgbClr val="101010"/>
-                    </a:solidFill>
                   </a:tcPr>
                 </a:tc>
+                <a:extLst>
+                  <a:ext uri="{0D108BD9-81ED-4DB2-BD59-A6C34878D82A}">
+                    <ns2:rowId val="408783487"/>
+                  </a:ext>
+                </a:extLst>
               </a:tr>
               <a:tr h="255000">
                 <a:tc>
@@ -6348,30 +6367,15 @@
                     </a:solidFill>
                   </a:tcPr>
                 </a:tc>
-                <a:extLst>
-                  <a:ext uri="{0D108BD9-81ED-4DB2-BD59-A6C34878D82A}">
-                    <ns3:rowId val="10001"/>
-                  </a:ext>
-                </a:extLst>
                 <a:tc>
                   <a:txBody>
                     <a:bodyPr/>
                     <a:lstStyle/>
                     <a:p>
-                      <a:pPr marL="0" indent="0">
-                        <a:buNone/>
-                      </a:pPr>
-                      <a:r>
-                        <a:rPr sz="930" b="0">
-                          <a:solidFill>
-                            <a:srgbClr val="D9D9D9"/>
-                          </a:solidFill>
-                        </a:rPr>
-                        <a:t>One touch</a:t>
-                      </a:r>
+                      <a:endParaRPr lang="en-US"/>
                     </a:p>
                   </a:txBody>
-                  <a:tcPr marL="26000" marR="26000" marT="18000" marB="18000" anchor="ctr">
+                  <a:tcPr>
                     <a:lnL w="12700" cap="flat" cmpd="sng" algn="ctr">
                       <a:solidFill>
                         <a:srgbClr val="2D2D2D"/>
@@ -6381,38 +6385,13 @@
                       <a:headEnd type="none" w="med" len="med"/>
                       <a:tailEnd type="none" w="med" len="med"/>
                     </a:lnL>
-                    <a:lnR w="12700" cap="flat" cmpd="sng" algn="ctr">
-                      <a:solidFill>
-                        <a:srgbClr val="2D2D2D"/>
-                      </a:solidFill>
-                      <a:prstDash val="solid"/>
-                      <a:round/>
-                      <a:headEnd type="none" w="med" len="med"/>
-                      <a:tailEnd type="none" w="med" len="med"/>
-                    </a:lnR>
-                    <a:lnT w="12700" cap="flat" cmpd="sng" algn="ctr">
-                      <a:solidFill>
-                        <a:srgbClr val="2D2D2D"/>
-                      </a:solidFill>
-                      <a:prstDash val="solid"/>
-                      <a:round/>
-                      <a:headEnd type="none" w="med" len="med"/>
-                      <a:tailEnd type="none" w="med" len="med"/>
-                    </a:lnT>
-                    <a:lnB w="12700" cap="flat" cmpd="sng" algn="ctr">
-                      <a:solidFill>
-                        <a:srgbClr val="2D2D2D"/>
-                      </a:solidFill>
-                      <a:prstDash val="solid"/>
-                      <a:round/>
-                      <a:headEnd type="none" w="med" len="med"/>
-                      <a:tailEnd type="none" w="med" len="med"/>
-                    </a:lnB>
-                    <a:solidFill>
-                      <a:srgbClr val="101010"/>
-                    </a:solidFill>
                   </a:tcPr>
                 </a:tc>
+                <a:extLst>
+                  <a:ext uri="{0D108BD9-81ED-4DB2-BD59-A6C34878D82A}">
+                    <ns2:rowId val="528063812"/>
+                  </a:ext>
+                </a:extLst>
               </a:tr>
             </a:tbl>
           </a:graphicData>
@@ -6427,7 +6406,7 @@
 </file>
 
 <file path=ppt/slides/slide6.xml><?xml version="1.0" encoding="utf-8"?>
-<p:sld xmlns:a="http://schemas.openxmlformats.org/drawingml/2006/main" xmlns:ns2="http://schemas.microsoft.com/office/powerpoint/2010/main" xmlns:ns3="http://schemas.microsoft.com/office/drawing/2014/main" xmlns:p="http://schemas.openxmlformats.org/presentationml/2006/main">
+<p:sld xmlns:a="http://schemas.openxmlformats.org/drawingml/2006/main" xmlns:ns2="http://schemas.microsoft.com/office/drawing/2014/main" xmlns:ns3="http://schemas.microsoft.com/office/powerpoint/2010/main" xmlns:p="http://schemas.openxmlformats.org/presentationml/2006/main">
   <p:cSld name="Slide 4">
     <p:bg>
       <p:bgPr>
@@ -6571,8 +6550,8 @@
         </p:nvSpPr>
         <p:spPr>
           <a:xfrm>
-            <a:off x="457200" y="6199632"/>
-            <a:ext cx="10972800" cy="0"/>
+            <a:off x="457200" y="6210300"/>
+            <a:ext cx="11277600" cy="0"/>
           </a:xfrm>
           <a:prstGeom prst="line">
             <a:avLst/>
@@ -6636,42 +6615,71 @@
       </p:sp>
       <p:sp>
         <p:nvSpPr>
-          <p:cNvPr id="7" name="Text 5"/>
-          <p:cNvSpPr/>
+          <p:cNvPr id="7" name="Text 5">
+            <a:extLst>
+              <a:ext uri="{FF2B5EF4-FFF2-40B4-BE49-F238E27FC236}">
+                <ns2:creationId id="{639743E6-45F5-5FCD-A928-9E2EA9A5B01C}"/>
+              </a:ext>
+            </a:extLst>
+          </p:cNvPr>
+          <p:cNvSpPr>
+            <a:spLocks noGrp="1"/>
+          </p:cNvSpPr>
           <p:nvPr/>
         </p:nvSpPr>
         <p:spPr>
           <a:xfrm>
-            <a:off x="10744200" y="6236208"/>
-            <a:ext cx="868680" cy="164592"/>
+            <a:off x="11146536" y="6291072"/>
+            <a:ext cx="590550" cy="228600"/>
           </a:xfrm>
           <a:prstGeom prst="rect">
             <a:avLst/>
           </a:prstGeom>
-          <a:noFill/>
-          <a:ln/>
+          <a:ln w="0">
+            <a:solidFill>
+              <a:srgbClr val="000000">
+                <a:alpha val="0"/>
+              </a:srgbClr>
+            </a:solidFill>
+          </a:ln>
         </p:spPr>
         <p:txBody>
-          <a:bodyPr wrap="square" lIns="0" tIns="0" rIns="0" bIns="0" rtlCol="0" anchor="ctr">
-            <a:normAutofit/>
-          </a:bodyPr>
+          <a:bodyPr lIns="57150" tIns="38100" rIns="57150" bIns="38100" anchor="t"/>
           <a:lstStyle/>
           <a:p>
-            <a:pPr marL="0" indent="0" algn="r">
+            <a:pPr algn="r">
               <a:buNone/>
-            </a:pPr>
-            <a:r>
-              <a:rPr lang="en-US" sz="750" dirty="0">
+              <a:defRPr sz="900" b="0">
                 <a:solidFill>
                   <a:srgbClr val="A5A5A5"/>
                 </a:solidFill>
-                <a:latin typeface="Arial" pitchFamily="34" charset="0"/>
-                <a:ea typeface="Arial" pitchFamily="34" charset="-122"/>
-                <a:cs typeface="Arial" pitchFamily="34" charset="-120"/>
+                <a:latin typeface="Arial"/>
+                <a:ea typeface="Arial"/>
+                <a:cs typeface="Arial"/>
+              </a:defRPr>
+            </a:pPr>
+            <a:r>
+              <a:rPr lang="en-US" sz="900" b="0" dirty="0">
+                <a:solidFill>
+                  <a:srgbClr val="A5A5A5"/>
+                </a:solidFill>
+                <a:latin typeface="Arial"/>
+                <a:ea typeface="Arial"/>
+                <a:cs typeface="Arial"/>
               </a:rPr>
               <a:t>06 / 07</a:t>
             </a:r>
-            <a:endParaRPr lang="en-US" sz="750" dirty="0"/>
+            <a:r>
+              <a:rPr sz="900" b="0" dirty="0">
+                <a:solidFill>
+                  <a:srgbClr val="A5A5A5"/>
+                </a:solidFill>
+                <a:latin typeface="Arial"/>
+                <a:ea typeface="Arial"/>
+                <a:cs typeface="Arial"/>
+              </a:rPr>
+              <a:t/>
+            </a:r>
           </a:p>
         </p:txBody>
       </p:sp>
@@ -6766,7 +6774,7 @@
           <p:nvPr>
             <p:extLst>
               <p:ext uri="{D42A27DB-BD31-4B8C-83A1-F6EECF244321}">
-                <ns2:modId val="1579011935"/>
+                <ns3:modId val="1579011935"/>
               </p:ext>
             </p:extLst>
           </p:nvPr>
@@ -6780,8 +6788,20 @@
             <a:tbl>
               <a:tblPr/>
               <a:tblGrid>
-                <a:gridCol w="3200000"/>
-                <a:gridCol w="6840000"/>
+                <a:gridCol w="3200000">
+                  <a:extLst>
+                    <a:ext uri="{9D8B030D-6E8A-4147-A177-3AD203B41FA5}">
+                      <ns2:colId val="20000"/>
+                    </a:ext>
+                  </a:extLst>
+                </a:gridCol>
+                <a:gridCol w="6840000">
+                  <a:extLst>
+                    <a:ext uri="{9D8B030D-6E8A-4147-A177-3AD203B41FA5}">
+                      <ns2:colId val="20001"/>
+                    </a:ext>
+                  </a:extLst>
+                </a:gridCol>
               </a:tblGrid>
               <a:tr h="452000">
                 <a:tc>
@@ -6906,7 +6926,7 @@
                 </a:tc>
                 <a:extLst>
                   <a:ext uri="{0D108BD9-81ED-4DB2-BD59-A6C34878D82A}">
-                    <ns3:rowId val="10000"/>
+                    <ns2:rowId val="10000"/>
                   </a:ext>
                 </a:extLst>
               </a:tr>
@@ -7033,7 +7053,7 @@
                 </a:tc>
                 <a:extLst>
                   <a:ext uri="{0D108BD9-81ED-4DB2-BD59-A6C34878D82A}">
-                    <ns3:rowId val="10001"/>
+                    <ns2:rowId val="10001"/>
                   </a:ext>
                 </a:extLst>
               </a:tr>
@@ -7160,7 +7180,7 @@
                 </a:tc>
                 <a:extLst>
                   <a:ext uri="{0D108BD9-81ED-4DB2-BD59-A6C34878D82A}">
-                    <ns3:rowId val="10001"/>
+                    <ns2:rowId val="2764092538"/>
                   </a:ext>
                 </a:extLst>
               </a:tr>
@@ -7287,7 +7307,7 @@
                 </a:tc>
                 <a:extLst>
                   <a:ext uri="{0D108BD9-81ED-4DB2-BD59-A6C34878D82A}">
-                    <ns3:rowId val="10001"/>
+                    <ns2:rowId val="4212111096"/>
                   </a:ext>
                 </a:extLst>
               </a:tr>
@@ -7414,7 +7434,7 @@
                 </a:tc>
                 <a:extLst>
                   <a:ext uri="{0D108BD9-81ED-4DB2-BD59-A6C34878D82A}">
-                    <ns3:rowId val="10001"/>
+                    <ns2:rowId val="1013337409"/>
                   </a:ext>
                 </a:extLst>
               </a:tr>
@@ -7468,23 +7488,41 @@
           <p:nvPr>
             <p:extLst>
               <p:ext uri="{D42A27DB-BD31-4B8C-83A1-F6EECF244321}">
-                <ns2:modId val="1579011935"/>
+                <ns3:modId val="1579011935"/>
               </p:ext>
             </p:extLst>
           </p:nvPr>
         </p:nvGraphicFramePr>
         <p:xfrm>
           <a:off x="650000" y="4980000"/>
-          <a:ext cx="10040000" cy="1020000"/>
+          <a:ext cx="10040000" cy="1463040"/>
         </p:xfrm>
         <a:graphic>
           <a:graphicData uri="http://schemas.openxmlformats.org/drawingml/2006/table">
             <a:tbl>
               <a:tblPr/>
               <a:tblGrid>
-                <a:gridCol w="1000000"/>
-                <a:gridCol w="4300000"/>
-                <a:gridCol w="4740000"/>
+                <a:gridCol w="1000000">
+                  <a:extLst>
+                    <a:ext uri="{9D8B030D-6E8A-4147-A177-3AD203B41FA5}">
+                      <ns2:colId val="20000"/>
+                    </a:ext>
+                  </a:extLst>
+                </a:gridCol>
+                <a:gridCol w="4300000">
+                  <a:extLst>
+                    <a:ext uri="{9D8B030D-6E8A-4147-A177-3AD203B41FA5}">
+                      <ns2:colId val="20001"/>
+                    </a:ext>
+                  </a:extLst>
+                </a:gridCol>
+                <a:gridCol w="4740000">
+                  <a:extLst>
+                    <a:ext uri="{9D8B030D-6E8A-4147-A177-3AD203B41FA5}">
+                      <ns2:colId val="20002"/>
+                    </a:ext>
+                  </a:extLst>
+                </a:gridCol>
               </a:tblGrid>
               <a:tr h="255000">
                 <a:tc>
@@ -7607,30 +7645,15 @@
                     </a:solidFill>
                   </a:tcPr>
                 </a:tc>
-                <a:extLst>
-                  <a:ext uri="{0D108BD9-81ED-4DB2-BD59-A6C34878D82A}">
-                    <ns3:rowId val="10000"/>
-                  </a:ext>
-                </a:extLst>
                 <a:tc>
                   <a:txBody>
                     <a:bodyPr/>
                     <a:lstStyle/>
                     <a:p>
-                      <a:pPr marL="0" indent="0">
-                        <a:buNone/>
-                      </a:pPr>
-                      <a:r>
-                        <a:rPr sz="1000" b="1">
-                          <a:solidFill>
-                            <a:srgbClr val="F2F2F2"/>
-                          </a:solidFill>
-                        </a:rPr>
-                        <a:t>Frequency</a:t>
-                      </a:r>
+                      <a:endParaRPr lang="en-US"/>
                     </a:p>
                   </a:txBody>
-                  <a:tcPr marL="26000" marR="26000" marT="18000" marB="18000" anchor="ctr">
+                  <a:tcPr>
                     <a:lnL w="12700" cap="flat" cmpd="sng" algn="ctr">
                       <a:solidFill>
                         <a:srgbClr val="2D2D2D"/>
@@ -7640,38 +7663,13 @@
                       <a:headEnd type="none" w="med" len="med"/>
                       <a:tailEnd type="none" w="med" len="med"/>
                     </a:lnL>
-                    <a:lnR w="12700" cap="flat" cmpd="sng" algn="ctr">
-                      <a:solidFill>
-                        <a:srgbClr val="2D2D2D"/>
-                      </a:solidFill>
-                      <a:prstDash val="solid"/>
-                      <a:round/>
-                      <a:headEnd type="none" w="med" len="med"/>
-                      <a:tailEnd type="none" w="med" len="med"/>
-                    </a:lnR>
-                    <a:lnT w="12700" cap="flat" cmpd="sng" algn="ctr">
-                      <a:solidFill>
-                        <a:srgbClr val="2D2D2D"/>
-                      </a:solidFill>
-                      <a:prstDash val="solid"/>
-                      <a:round/>
-                      <a:headEnd type="none" w="med" len="med"/>
-                      <a:tailEnd type="none" w="med" len="med"/>
-                    </a:lnT>
-                    <a:lnB w="12700" cap="flat" cmpd="sng" algn="ctr">
-                      <a:solidFill>
-                        <a:srgbClr val="2D2D2D"/>
-                      </a:solidFill>
-                      <a:prstDash val="solid"/>
-                      <a:round/>
-                      <a:headEnd type="none" w="med" len="med"/>
-                      <a:tailEnd type="none" w="med" len="med"/>
-                    </a:lnB>
-                    <a:solidFill>
-                      <a:srgbClr val="161616"/>
-                    </a:solidFill>
                   </a:tcPr>
                 </a:tc>
+                <a:extLst>
+                  <a:ext uri="{0D108BD9-81ED-4DB2-BD59-A6C34878D82A}">
+                    <ns2:rowId val="10000"/>
+                  </a:ext>
+                </a:extLst>
               </a:tr>
               <a:tr h="255000">
                 <a:tc>
@@ -7794,30 +7792,15 @@
                     </a:solidFill>
                   </a:tcPr>
                 </a:tc>
-                <a:extLst>
-                  <a:ext uri="{0D108BD9-81ED-4DB2-BD59-A6C34878D82A}">
-                    <ns3:rowId val="10001"/>
-                  </a:ext>
-                </a:extLst>
                 <a:tc>
                   <a:txBody>
                     <a:bodyPr/>
                     <a:lstStyle/>
                     <a:p>
-                      <a:pPr marL="0" indent="0">
-                        <a:buNone/>
-                      </a:pPr>
-                      <a:r>
-                        <a:rPr sz="930" b="0">
-                          <a:solidFill>
-                            <a:srgbClr val="D9D9D9"/>
-                          </a:solidFill>
-                        </a:rPr>
-                        <a:t>Full prompt set, capped over first 2 weeks</a:t>
-                      </a:r>
+                      <a:endParaRPr lang="en-US"/>
                     </a:p>
                   </a:txBody>
-                  <a:tcPr marL="26000" marR="26000" marT="18000" marB="18000" anchor="ctr">
+                  <a:tcPr>
                     <a:lnL w="12700" cap="flat" cmpd="sng" algn="ctr">
                       <a:solidFill>
                         <a:srgbClr val="2D2D2D"/>
@@ -7827,38 +7810,13 @@
                       <a:headEnd type="none" w="med" len="med"/>
                       <a:tailEnd type="none" w="med" len="med"/>
                     </a:lnL>
-                    <a:lnR w="12700" cap="flat" cmpd="sng" algn="ctr">
-                      <a:solidFill>
-                        <a:srgbClr val="2D2D2D"/>
-                      </a:solidFill>
-                      <a:prstDash val="solid"/>
-                      <a:round/>
-                      <a:headEnd type="none" w="med" len="med"/>
-                      <a:tailEnd type="none" w="med" len="med"/>
-                    </a:lnR>
-                    <a:lnT w="12700" cap="flat" cmpd="sng" algn="ctr">
-                      <a:solidFill>
-                        <a:srgbClr val="2D2D2D"/>
-                      </a:solidFill>
-                      <a:prstDash val="solid"/>
-                      <a:round/>
-                      <a:headEnd type="none" w="med" len="med"/>
-                      <a:tailEnd type="none" w="med" len="med"/>
-                    </a:lnT>
-                    <a:lnB w="12700" cap="flat" cmpd="sng" algn="ctr">
-                      <a:solidFill>
-                        <a:srgbClr val="2D2D2D"/>
-                      </a:solidFill>
-                      <a:prstDash val="solid"/>
-                      <a:round/>
-                      <a:headEnd type="none" w="med" len="med"/>
-                      <a:tailEnd type="none" w="med" len="med"/>
-                    </a:lnB>
-                    <a:solidFill>
-                      <a:srgbClr val="101010"/>
-                    </a:solidFill>
                   </a:tcPr>
                 </a:tc>
+                <a:extLst>
+                  <a:ext uri="{0D108BD9-81ED-4DB2-BD59-A6C34878D82A}">
+                    <ns2:rowId val="10001"/>
+                  </a:ext>
+                </a:extLst>
               </a:tr>
               <a:tr h="255000">
                 <a:tc>
@@ -7981,30 +7939,15 @@
                     </a:solidFill>
                   </a:tcPr>
                 </a:tc>
-                <a:extLst>
-                  <a:ext uri="{0D108BD9-81ED-4DB2-BD59-A6C34878D82A}">
-                    <ns3:rowId val="10001"/>
-                  </a:ext>
-                </a:extLst>
                 <a:tc>
                   <a:txBody>
                     <a:bodyPr/>
                     <a:lstStyle/>
                     <a:p>
-                      <a:pPr marL="0" indent="0">
-                        <a:buNone/>
-                      </a:pPr>
-                      <a:r>
-                        <a:rPr sz="930" b="0">
-                          <a:solidFill>
-                            <a:srgbClr val="D9D9D9"/>
-                          </a:solidFill>
-                        </a:rPr>
-                        <a:t>Limited prompts, lower frequency</a:t>
-                      </a:r>
+                      <a:endParaRPr lang="en-US"/>
                     </a:p>
                   </a:txBody>
-                  <a:tcPr marL="26000" marR="26000" marT="18000" marB="18000" anchor="ctr">
+                  <a:tcPr>
                     <a:lnL w="12700" cap="flat" cmpd="sng" algn="ctr">
                       <a:solidFill>
                         <a:srgbClr val="2D2D2D"/>
@@ -8014,38 +7957,13 @@
                       <a:headEnd type="none" w="med" len="med"/>
                       <a:tailEnd type="none" w="med" len="med"/>
                     </a:lnL>
-                    <a:lnR w="12700" cap="flat" cmpd="sng" algn="ctr">
-                      <a:solidFill>
-                        <a:srgbClr val="2D2D2D"/>
-                      </a:solidFill>
-                      <a:prstDash val="solid"/>
-                      <a:round/>
-                      <a:headEnd type="none" w="med" len="med"/>
-                      <a:tailEnd type="none" w="med" len="med"/>
-                    </a:lnR>
-                    <a:lnT w="12700" cap="flat" cmpd="sng" algn="ctr">
-                      <a:solidFill>
-                        <a:srgbClr val="2D2D2D"/>
-                      </a:solidFill>
-                      <a:prstDash val="solid"/>
-                      <a:round/>
-                      <a:headEnd type="none" w="med" len="med"/>
-                      <a:tailEnd type="none" w="med" len="med"/>
-                    </a:lnT>
-                    <a:lnB w="12700" cap="flat" cmpd="sng" algn="ctr">
-                      <a:solidFill>
-                        <a:srgbClr val="2D2D2D"/>
-                      </a:solidFill>
-                      <a:prstDash val="solid"/>
-                      <a:round/>
-                      <a:headEnd type="none" w="med" len="med"/>
-                      <a:tailEnd type="none" w="med" len="med"/>
-                    </a:lnB>
-                    <a:solidFill>
-                      <a:srgbClr val="101010"/>
-                    </a:solidFill>
                   </a:tcPr>
                 </a:tc>
+                <a:extLst>
+                  <a:ext uri="{0D108BD9-81ED-4DB2-BD59-A6C34878D82A}">
+                    <ns2:rowId val="3137132510"/>
+                  </a:ext>
+                </a:extLst>
               </a:tr>
               <a:tr h="255000">
                 <a:tc>
@@ -8168,30 +8086,15 @@
                     </a:solidFill>
                   </a:tcPr>
                 </a:tc>
-                <a:extLst>
-                  <a:ext uri="{0D108BD9-81ED-4DB2-BD59-A6C34878D82A}">
-                    <ns3:rowId val="10001"/>
-                  </a:ext>
-                </a:extLst>
                 <a:tc>
                   <a:txBody>
                     <a:bodyPr/>
                     <a:lstStyle/>
                     <a:p>
-                      <a:pPr marL="0" indent="0">
-                        <a:buNone/>
-                      </a:pPr>
-                      <a:r>
-                        <a:rPr sz="930" b="0">
-                          <a:solidFill>
-                            <a:srgbClr val="D9D9D9"/>
-                          </a:solidFill>
-                        </a:rPr>
-                        <a:t>One touch</a:t>
-                      </a:r>
+                      <a:endParaRPr lang="en-US"/>
                     </a:p>
                   </a:txBody>
-                  <a:tcPr marL="26000" marR="26000" marT="18000" marB="18000" anchor="ctr">
+                  <a:tcPr>
                     <a:lnL w="12700" cap="flat" cmpd="sng" algn="ctr">
                       <a:solidFill>
                         <a:srgbClr val="2D2D2D"/>
@@ -8201,38 +8104,13 @@
                       <a:headEnd type="none" w="med" len="med"/>
                       <a:tailEnd type="none" w="med" len="med"/>
                     </a:lnL>
-                    <a:lnR w="12700" cap="flat" cmpd="sng" algn="ctr">
-                      <a:solidFill>
-                        <a:srgbClr val="2D2D2D"/>
-                      </a:solidFill>
-                      <a:prstDash val="solid"/>
-                      <a:round/>
-                      <a:headEnd type="none" w="med" len="med"/>
-                      <a:tailEnd type="none" w="med" len="med"/>
-                    </a:lnR>
-                    <a:lnT w="12700" cap="flat" cmpd="sng" algn="ctr">
-                      <a:solidFill>
-                        <a:srgbClr val="2D2D2D"/>
-                      </a:solidFill>
-                      <a:prstDash val="solid"/>
-                      <a:round/>
-                      <a:headEnd type="none" w="med" len="med"/>
-                      <a:tailEnd type="none" w="med" len="med"/>
-                    </a:lnT>
-                    <a:lnB w="12700" cap="flat" cmpd="sng" algn="ctr">
-                      <a:solidFill>
-                        <a:srgbClr val="2D2D2D"/>
-                      </a:solidFill>
-                      <a:prstDash val="solid"/>
-                      <a:round/>
-                      <a:headEnd type="none" w="med" len="med"/>
-                      <a:tailEnd type="none" w="med" len="med"/>
-                    </a:lnB>
-                    <a:solidFill>
-                      <a:srgbClr val="101010"/>
-                    </a:solidFill>
                   </a:tcPr>
                 </a:tc>
+                <a:extLst>
+                  <a:ext uri="{0D108BD9-81ED-4DB2-BD59-A6C34878D82A}">
+                    <ns2:rowId val="2667059301"/>
+                  </a:ext>
+                </a:extLst>
               </a:tr>
             </a:tbl>
           </a:graphicData>
@@ -8247,7 +8125,7 @@
 </file>
 
 <file path=ppt/slides/slide7.xml><?xml version="1.0" encoding="utf-8"?>
-<p:sld xmlns:a="http://schemas.openxmlformats.org/drawingml/2006/main" xmlns:ns2="http://schemas.microsoft.com/office/powerpoint/2010/main" xmlns:ns3="http://schemas.microsoft.com/office/drawing/2014/main" xmlns:p="http://schemas.openxmlformats.org/presentationml/2006/main">
+<p:sld xmlns:a="http://schemas.openxmlformats.org/drawingml/2006/main" xmlns:ns2="http://schemas.microsoft.com/office/drawing/2014/main" xmlns:ns3="http://schemas.microsoft.com/office/powerpoint/2010/main" xmlns:p="http://schemas.openxmlformats.org/presentationml/2006/main">
   <p:cSld name="Slide 5">
     <p:bg>
       <p:bgPr>
@@ -8391,8 +8269,8 @@
         </p:nvSpPr>
         <p:spPr>
           <a:xfrm>
-            <a:off x="457200" y="6199632"/>
-            <a:ext cx="10972800" cy="0"/>
+            <a:off x="457200" y="6210300"/>
+            <a:ext cx="11277600" cy="0"/>
           </a:xfrm>
           <a:prstGeom prst="line">
             <a:avLst/>
@@ -8456,42 +8334,71 @@
       </p:sp>
       <p:sp>
         <p:nvSpPr>
-          <p:cNvPr id="7" name="Text 5"/>
-          <p:cNvSpPr/>
+          <p:cNvPr id="7" name="Text 5">
+            <a:extLst>
+              <a:ext uri="{FF2B5EF4-FFF2-40B4-BE49-F238E27FC236}">
+                <ns2:creationId id="{639743E6-45F5-5FCD-A928-9E2EA9A5B01C}"/>
+              </a:ext>
+            </a:extLst>
+          </p:cNvPr>
+          <p:cNvSpPr>
+            <a:spLocks noGrp="1"/>
+          </p:cNvSpPr>
           <p:nvPr/>
         </p:nvSpPr>
         <p:spPr>
           <a:xfrm>
-            <a:off x="10744200" y="6236208"/>
-            <a:ext cx="868680" cy="164592"/>
+            <a:off x="11146536" y="6291072"/>
+            <a:ext cx="590550" cy="228600"/>
           </a:xfrm>
           <a:prstGeom prst="rect">
             <a:avLst/>
           </a:prstGeom>
-          <a:noFill/>
-          <a:ln/>
+          <a:ln w="0">
+            <a:solidFill>
+              <a:srgbClr val="000000">
+                <a:alpha val="0"/>
+              </a:srgbClr>
+            </a:solidFill>
+          </a:ln>
         </p:spPr>
         <p:txBody>
-          <a:bodyPr wrap="square" lIns="0" tIns="0" rIns="0" bIns="0" rtlCol="0" anchor="ctr">
-            <a:normAutofit/>
-          </a:bodyPr>
+          <a:bodyPr lIns="57150" tIns="38100" rIns="57150" bIns="38100" anchor="t"/>
           <a:lstStyle/>
           <a:p>
-            <a:pPr marL="0" indent="0" algn="r">
+            <a:pPr algn="r">
               <a:buNone/>
-            </a:pPr>
-            <a:r>
-              <a:rPr lang="en-US" sz="750" dirty="0">
+              <a:defRPr sz="900" b="0">
                 <a:solidFill>
                   <a:srgbClr val="A5A5A5"/>
                 </a:solidFill>
-                <a:latin typeface="Arial" pitchFamily="34" charset="0"/>
-                <a:ea typeface="Arial" pitchFamily="34" charset="-122"/>
-                <a:cs typeface="Arial" pitchFamily="34" charset="-120"/>
+                <a:latin typeface="Arial"/>
+                <a:ea typeface="Arial"/>
+                <a:cs typeface="Arial"/>
+              </a:defRPr>
+            </a:pPr>
+            <a:r>
+              <a:rPr lang="en-US" sz="900" b="0" dirty="0">
+                <a:solidFill>
+                  <a:srgbClr val="A5A5A5"/>
+                </a:solidFill>
+                <a:latin typeface="Arial"/>
+                <a:ea typeface="Arial"/>
+                <a:cs typeface="Arial"/>
               </a:rPr>
               <a:t>07 / 07</a:t>
             </a:r>
-            <a:endParaRPr lang="en-US" sz="750" dirty="0"/>
+            <a:r>
+              <a:rPr sz="900" b="0" dirty="0">
+                <a:solidFill>
+                  <a:srgbClr val="A5A5A5"/>
+                </a:solidFill>
+                <a:latin typeface="Arial"/>
+                <a:ea typeface="Arial"/>
+                <a:cs typeface="Arial"/>
+              </a:rPr>
+              <a:t/>
+            </a:r>
           </a:p>
         </p:txBody>
       </p:sp>
@@ -8545,7 +8452,7 @@
           <p:nvPr>
             <p:extLst>
               <p:ext uri="{D42A27DB-BD31-4B8C-83A1-F6EECF244321}">
-                <ns2:modId val="1579011935"/>
+                <ns3:modId val="1579011935"/>
               </p:ext>
             </p:extLst>
           </p:nvPr>
@@ -8559,9 +8466,27 @@
             <a:tbl>
               <a:tblPr/>
               <a:tblGrid>
-                <a:gridCol w="3000000"/>
-                <a:gridCol w="4700000"/>
-                <a:gridCol w="2724160"/>
+                <a:gridCol w="3000000">
+                  <a:extLst>
+                    <a:ext uri="{9D8B030D-6E8A-4147-A177-3AD203B41FA5}">
+                      <ns2:colId val="20000"/>
+                    </a:ext>
+                  </a:extLst>
+                </a:gridCol>
+                <a:gridCol w="4700000">
+                  <a:extLst>
+                    <a:ext uri="{9D8B030D-6E8A-4147-A177-3AD203B41FA5}">
+                      <ns2:colId val="20001"/>
+                    </a:ext>
+                  </a:extLst>
+                </a:gridCol>
+                <a:gridCol w="2724160">
+                  <a:extLst>
+                    <a:ext uri="{9D8B030D-6E8A-4147-A177-3AD203B41FA5}">
+                      <ns2:colId val="20002"/>
+                    </a:ext>
+                  </a:extLst>
+                </a:gridCol>
               </a:tblGrid>
               <a:tr h="510000">
                 <a:tc>
@@ -8746,7 +8671,7 @@
                 </a:tc>
                 <a:extLst>
                   <a:ext uri="{0D108BD9-81ED-4DB2-BD59-A6C34878D82A}">
-                    <ns3:rowId val="10000"/>
+                    <ns2:rowId val="10000"/>
                   </a:ext>
                 </a:extLst>
               </a:tr>
@@ -8933,7 +8858,7 @@
                 </a:tc>
                 <a:extLst>
                   <a:ext uri="{0D108BD9-81ED-4DB2-BD59-A6C34878D82A}">
-                    <ns3:rowId val="10001"/>
+                    <ns2:rowId val="10001"/>
                   </a:ext>
                 </a:extLst>
               </a:tr>
@@ -8991,7 +8916,7 @@
           <p:nvPr>
             <p:extLst>
               <p:ext uri="{D42A27DB-BD31-4B8C-83A1-F6EECF244321}">
-                <ns2:modId val="1579011935"/>
+                <ns3:modId val="1579011935"/>
               </p:ext>
             </p:extLst>
           </p:nvPr>
@@ -9005,9 +8930,27 @@
             <a:tbl>
               <a:tblPr/>
               <a:tblGrid>
-                <a:gridCol w="1500000"/>
-                <a:gridCol w="2450000"/>
-                <a:gridCol w="2300000"/>
+                <a:gridCol w="1500000">
+                  <a:extLst>
+                    <a:ext uri="{9D8B030D-6E8A-4147-A177-3AD203B41FA5}">
+                      <ns2:colId val="20000"/>
+                    </a:ext>
+                  </a:extLst>
+                </a:gridCol>
+                <a:gridCol w="2450000">
+                  <a:extLst>
+                    <a:ext uri="{9D8B030D-6E8A-4147-A177-3AD203B41FA5}">
+                      <ns2:colId val="20001"/>
+                    </a:ext>
+                  </a:extLst>
+                </a:gridCol>
+                <a:gridCol w="2300000">
+                  <a:extLst>
+                    <a:ext uri="{9D8B030D-6E8A-4147-A177-3AD203B41FA5}">
+                      <ns2:colId val="20002"/>
+                    </a:ext>
+                  </a:extLst>
+                </a:gridCol>
               </a:tblGrid>
               <a:tr h="490000">
                 <a:tc>
@@ -9192,7 +9135,7 @@
                 </a:tc>
                 <a:extLst>
                   <a:ext uri="{0D108BD9-81ED-4DB2-BD59-A6C34878D82A}">
-                    <ns3:rowId val="10000"/>
+                    <ns2:rowId val="10000"/>
                   </a:ext>
                 </a:extLst>
               </a:tr>
@@ -9379,7 +9322,7 @@
                 </a:tc>
                 <a:extLst>
                   <a:ext uri="{0D108BD9-81ED-4DB2-BD59-A6C34878D82A}">
-                    <ns3:rowId val="10001"/>
+                    <ns2:rowId val="10001"/>
                   </a:ext>
                 </a:extLst>
               </a:tr>
@@ -9566,7 +9509,7 @@
                 </a:tc>
                 <a:extLst>
                   <a:ext uri="{0D108BD9-81ED-4DB2-BD59-A6C34878D82A}">
-                    <ns3:rowId val="10001"/>
+                    <ns2:rowId val="193352143"/>
                   </a:ext>
                 </a:extLst>
               </a:tr>
@@ -9753,7 +9696,7 @@
                 </a:tc>
                 <a:extLst>
                   <a:ext uri="{0D108BD9-81ED-4DB2-BD59-A6C34878D82A}">
-                    <ns3:rowId val="10001"/>
+                    <ns2:rowId val="2131940011"/>
                   </a:ext>
                 </a:extLst>
               </a:tr>
@@ -9788,7 +9731,7 @@
               <a:buNone/>
             </a:pPr>
             <a:r>
-              <a:rPr lang="en-US" sz="1500" dirty="0" b="0">
+              <a:rPr lang="en-US" sz="1500" b="0" dirty="0">
                 <a:solidFill>
                   <a:srgbClr val="F2F2F2"/>
                 </a:solidFill>
@@ -9870,7 +9813,7 @@
               <a:buNone/>
             </a:pPr>
             <a:r>
-              <a:rPr lang="en-US" sz="950" dirty="0" b="0">
+              <a:rPr lang="en-US" sz="950" b="0" dirty="0">
                 <a:solidFill>
                   <a:srgbClr val="D9D9D9"/>
                 </a:solidFill>
@@ -9893,7 +9836,7 @@
           <p:nvPr>
             <p:extLst>
               <p:ext uri="{D42A27DB-BD31-4B8C-83A1-F6EECF244321}">
-                <ns2:modId val="1579011935"/>
+                <ns3:modId val="1579011935"/>
               </p:ext>
             </p:extLst>
           </p:nvPr>
@@ -9907,9 +9850,27 @@
             <a:tbl>
               <a:tblPr/>
               <a:tblGrid>
-                <a:gridCol w="1450000"/>
-                <a:gridCol w="1400000"/>
-                <a:gridCol w="1050000"/>
+                <a:gridCol w="1450000">
+                  <a:extLst>
+                    <a:ext uri="{9D8B030D-6E8A-4147-A177-3AD203B41FA5}">
+                      <ns2:colId val="20000"/>
+                    </a:ext>
+                  </a:extLst>
+                </a:gridCol>
+                <a:gridCol w="1400000">
+                  <a:extLst>
+                    <a:ext uri="{9D8B030D-6E8A-4147-A177-3AD203B41FA5}">
+                      <ns2:colId val="20001"/>
+                    </a:ext>
+                  </a:extLst>
+                </a:gridCol>
+                <a:gridCol w="1050000">
+                  <a:extLst>
+                    <a:ext uri="{9D8B030D-6E8A-4147-A177-3AD203B41FA5}">
+                      <ns2:colId val="20002"/>
+                    </a:ext>
+                  </a:extLst>
+                </a:gridCol>
               </a:tblGrid>
               <a:tr h="456666">
                 <a:tc>
@@ -10094,7 +10055,7 @@
                 </a:tc>
                 <a:extLst>
                   <a:ext uri="{0D108BD9-81ED-4DB2-BD59-A6C34878D82A}">
-                    <ns3:rowId val="10000"/>
+                    <ns2:rowId val="10000"/>
                   </a:ext>
                 </a:extLst>
               </a:tr>
@@ -10281,7 +10242,7 @@
                 </a:tc>
                 <a:extLst>
                   <a:ext uri="{0D108BD9-81ED-4DB2-BD59-A6C34878D82A}">
-                    <ns3:rowId val="10001"/>
+                    <ns2:rowId val="10001"/>
                   </a:ext>
                 </a:extLst>
               </a:tr>
@@ -10468,7 +10429,7 @@
                 </a:tc>
                 <a:extLst>
                   <a:ext uri="{0D108BD9-81ED-4DB2-BD59-A6C34878D82A}">
-                    <ns3:rowId val="10001"/>
+                    <ns2:rowId val="4031142651"/>
                   </a:ext>
                 </a:extLst>
               </a:tr>
@@ -10476,1435 +10437,6 @@
           </a:graphicData>
         </a:graphic>
       </p:graphicFrame>
-    </p:spTree>
-  </p:cSld>
-  <p:clrMapOvr>
-    <a:masterClrMapping/>
-  </p:clrMapOvr>
-</p:sld>
-</file>
-
-<file path=ppt/slides/slide8.xml><?xml version="1.0" encoding="utf-8"?>
-<p:sld xmlns:a="http://schemas.openxmlformats.org/drawingml/2006/main" xmlns:ns2="http://schemas.microsoft.com/office/powerpoint/2010/main" xmlns:ns3="http://schemas.microsoft.com/office/drawing/2014/main" xmlns:p="http://schemas.openxmlformats.org/presentationml/2006/main">
-  <p:cSld name="Slide 6">
-    <p:bg>
-      <p:bgPr>
-        <a:solidFill>
-          <a:srgbClr val="050505"/>
-        </a:solidFill>
-        <a:effectLst/>
-      </p:bgPr>
-    </p:bg>
-    <p:spTree>
-      <p:nvGrpSpPr>
-        <p:cNvPr id="1" name=""/>
-        <p:cNvGrpSpPr/>
-        <p:nvPr/>
-      </p:nvGrpSpPr>
-      <p:grpSpPr>
-        <a:xfrm>
-          <a:off x="0" y="0"/>
-          <a:ext cx="0" cy="0"/>
-          <a:chOff x="0" y="0"/>
-          <a:chExt cx="0" cy="0"/>
-        </a:xfrm>
-      </p:grpSpPr>
-      <p:sp>
-        <p:nvSpPr>
-          <p:cNvPr id="2" name="Text 0"/>
-          <p:cNvSpPr/>
-          <p:nvPr/>
-        </p:nvSpPr>
-        <p:spPr>
-          <a:xfrm>
-            <a:off x="361950" y="323850"/>
-            <a:ext cx="819150" cy="628650"/>
-          </a:xfrm>
-          <a:prstGeom prst="rect">
-            <a:avLst/>
-          </a:prstGeom>
-          <a:noFill/>
-          <a:ln/>
-        </p:spPr>
-        <p:txBody>
-          <a:bodyPr lIns="57150" tIns="38100" rIns="57150" bIns="38100" anchor="t">
-            <a:normAutofit/>
-          </a:bodyPr>
-          <a:lstStyle/>
-          <a:p>
-            <a:pPr marL="0" indent="0">
-              <a:buNone/>
-            </a:pPr>
-            <a:r>
-              <a:rPr lang="en-US" sz="3600" b="1" dirty="0">
-                <a:solidFill>
-                  <a:srgbClr val="FF785A"/>
-                </a:solidFill>
-                <a:latin typeface="Arial" pitchFamily="34" charset="0"/>
-                <a:ea typeface="Arial" pitchFamily="34" charset="-122"/>
-                <a:cs typeface="Arial" pitchFamily="34" charset="-120"/>
-              </a:rPr>
-              <a:t>04</a:t>
-            </a:r>
-            <a:endParaRPr lang="en-US" sz="3600" dirty="0"/>
-          </a:p>
-        </p:txBody>
-      </p:sp>
-      <p:sp>
-        <p:nvSpPr>
-          <p:cNvPr id="3" name="Text 1"/>
-          <p:cNvSpPr/>
-          <p:nvPr/>
-        </p:nvSpPr>
-        <p:spPr>
-          <a:xfrm>
-            <a:off x="1257300" y="323850"/>
-            <a:ext cx="9953625" cy="714375"/>
-          </a:xfrm>
-          <a:prstGeom prst="rect">
-            <a:avLst/>
-          </a:prstGeom>
-          <a:noFill/>
-          <a:ln/>
-        </p:spPr>
-        <p:txBody>
-          <a:bodyPr lIns="57150" tIns="38100" rIns="57150" bIns="38100" anchor="t">
-            <a:normAutofit/>
-          </a:bodyPr>
-          <a:lstStyle/>
-          <a:p>
-            <a:pPr marL="0" indent="0">
-              <a:buNone/>
-            </a:pPr>
-            <a:r>
-              <a:rPr lang="en-US" sz="3600" b="1" dirty="0">
-                <a:solidFill>
-                  <a:srgbClr val="F2F2F2"/>
-                </a:solidFill>
-                <a:latin typeface="Arial" pitchFamily="34" charset="0"/>
-                <a:ea typeface="Arial" pitchFamily="34" charset="-122"/>
-                <a:cs typeface="Arial" pitchFamily="34" charset="-120"/>
-              </a:rPr>
-              <a:t>4.3 Guardrail KPIs</a:t>
-            </a:r>
-            <a:endParaRPr lang="en-US" sz="3600" dirty="0"/>
-          </a:p>
-        </p:txBody>
-      </p:sp>
-      <p:sp>
-        <p:nvSpPr>
-          <p:cNvPr id="4" name="Shape 2"/>
-          <p:cNvSpPr/>
-          <p:nvPr/>
-        </p:nvSpPr>
-        <p:spPr>
-          <a:xfrm>
-            <a:off x="457200" y="1078992"/>
-            <a:ext cx="10972800" cy="0"/>
-          </a:xfrm>
-          <a:prstGeom prst="line">
-            <a:avLst/>
-          </a:prstGeom>
-          <a:noFill/>
-          <a:ln w="12700">
-            <a:solidFill>
-              <a:srgbClr val="3A3A3A"/>
-            </a:solidFill>
-            <a:prstDash val="solid"/>
-          </a:ln>
-        </p:spPr>
-        <p:txBody>
-          <a:bodyPr/>
-          <a:lstStyle/>
-          <a:p>
-            <a:endParaRPr lang="en-US"/>
-          </a:p>
-        </p:txBody>
-      </p:sp>
-      <p:sp>
-        <p:nvSpPr>
-          <p:cNvPr id="5" name="Shape 3"/>
-          <p:cNvSpPr/>
-          <p:nvPr/>
-        </p:nvSpPr>
-        <p:spPr>
-          <a:xfrm>
-            <a:off x="457200" y="6199632"/>
-            <a:ext cx="10972800" cy="0"/>
-          </a:xfrm>
-          <a:prstGeom prst="line">
-            <a:avLst/>
-          </a:prstGeom>
-          <a:noFill/>
-          <a:ln w="12700">
-            <a:solidFill>
-              <a:srgbClr val="3A3A3A"/>
-            </a:solidFill>
-            <a:prstDash val="solid"/>
-          </a:ln>
-        </p:spPr>
-        <p:txBody>
-          <a:bodyPr/>
-          <a:lstStyle/>
-          <a:p>
-            <a:endParaRPr lang="en-US"/>
-          </a:p>
-        </p:txBody>
-      </p:sp>
-      <p:sp>
-        <p:nvSpPr>
-          <p:cNvPr id="6" name="Text 4"/>
-          <p:cNvSpPr/>
-          <p:nvPr/>
-        </p:nvSpPr>
-        <p:spPr>
-          <a:xfrm>
-            <a:off x="502920" y="6236208"/>
-            <a:ext cx="6400800" cy="164592"/>
-          </a:xfrm>
-          <a:prstGeom prst="rect">
-            <a:avLst/>
-          </a:prstGeom>
-          <a:noFill/>
-          <a:ln/>
-        </p:spPr>
-        <p:txBody>
-          <a:bodyPr wrap="square" lIns="0" tIns="0" rIns="0" bIns="0" rtlCol="0" anchor="ctr">
-            <a:normAutofit/>
-          </a:bodyPr>
-          <a:lstStyle/>
-          <a:p>
-            <a:pPr marL="0" indent="0">
-              <a:buNone/>
-            </a:pPr>
-            <a:r>
-              <a:rPr lang="en-US" sz="750" dirty="0">
-                <a:solidFill>
-                  <a:srgbClr val="A5A5A5"/>
-                </a:solidFill>
-                <a:latin typeface="Arial" pitchFamily="34" charset="0"/>
-                <a:ea typeface="Arial" pitchFamily="34" charset="-122"/>
-                <a:cs typeface="Arial" pitchFamily="34" charset="-120"/>
-              </a:rPr>
-              <a:t>SMB Scale</a:t>
-            </a:r>
-            <a:endParaRPr lang="en-US" sz="750" dirty="0"/>
-          </a:p>
-        </p:txBody>
-      </p:sp>
-      <p:sp>
-        <p:nvSpPr>
-          <p:cNvPr id="7" name="Text 5"/>
-          <p:cNvSpPr/>
-          <p:nvPr/>
-        </p:nvSpPr>
-        <p:spPr>
-          <a:xfrm>
-            <a:off x="10744200" y="6236208"/>
-            <a:ext cx="868680" cy="164592"/>
-          </a:xfrm>
-          <a:prstGeom prst="rect">
-            <a:avLst/>
-          </a:prstGeom>
-          <a:noFill/>
-          <a:ln/>
-        </p:spPr>
-        <p:txBody>
-          <a:bodyPr wrap="square" lIns="0" tIns="0" rIns="0" bIns="0" rtlCol="0" anchor="ctr">
-            <a:normAutofit/>
-          </a:bodyPr>
-          <a:lstStyle/>
-          <a:p>
-            <a:pPr marL="0" indent="0" algn="r">
-              <a:buNone/>
-            </a:pPr>
-            <a:r>
-              <a:rPr lang="en-US" sz="750" dirty="0">
-                <a:solidFill>
-                  <a:srgbClr val="A5A5A5"/>
-                </a:solidFill>
-                <a:latin typeface="Arial" pitchFamily="34" charset="0"/>
-                <a:ea typeface="Arial" pitchFamily="34" charset="-122"/>
-                <a:cs typeface="Arial" pitchFamily="34" charset="-120"/>
-              </a:rPr>
-              <a:t>08 / 08</a:t>
-            </a:r>
-            <a:endParaRPr lang="en-US" sz="750" dirty="0"/>
-          </a:p>
-        </p:txBody>
-      </p:sp>
-      <p:sp>
-        <p:nvSpPr>
-          <p:cNvPr id="8" name="Text 6"/>
-          <p:cNvSpPr/>
-          <p:nvPr/>
-        </p:nvSpPr>
-        <p:spPr>
-          <a:xfrm>
-            <a:off x="621792" y="1371600"/>
-            <a:ext cx="10241280" cy="411480"/>
-          </a:xfrm>
-          <a:prstGeom prst="rect">
-            <a:avLst/>
-          </a:prstGeom>
-          <a:noFill/>
-          <a:ln/>
-        </p:spPr>
-        <p:txBody>
-          <a:bodyPr wrap="square" lIns="0" tIns="0" rIns="0" bIns="0" rtlCol="0" anchor="t">
-            <a:normAutofit lnSpcReduction="10000"/>
-          </a:bodyPr>
-          <a:lstStyle/>
-          <a:p>
-            <a:pPr marL="0" indent="0">
-              <a:buNone/>
-            </a:pPr>
-            <a:r>
-              <a:rPr lang="en-US" sz="1400" dirty="0">
-                <a:solidFill>
-                  <a:srgbClr val="F3F4F6"/>
-                </a:solidFill>
-                <a:latin typeface="Arial" pitchFamily="34" charset="0"/>
-                <a:ea typeface="Arial" pitchFamily="34" charset="-122"/>
-                <a:cs typeface="Arial" pitchFamily="34" charset="-120"/>
-              </a:rPr>
-              <a:t>Guardrails ensure the campaign does not overfit to short-term adoption at the expense of seller fit, product trust, or support burden.</a:t>
-            </a:r>
-            <a:endParaRPr lang="en-US" sz="1400" dirty="0"/>
-          </a:p>
-        </p:txBody>
-      </p:sp>
-      <p:sp>
-        <p:nvSpPr>
-          <p:cNvPr id="9" name="Text 7"/>
-          <p:cNvSpPr/>
-          <p:nvPr/>
-        </p:nvSpPr>
-        <p:spPr>
-          <a:xfrm>
-            <a:off x="621792" y="2029968"/>
-            <a:ext cx="2743200" cy="256032"/>
-          </a:xfrm>
-          <a:prstGeom prst="rect">
-            <a:avLst/>
-          </a:prstGeom>
-          <a:noFill/>
-          <a:ln/>
-        </p:spPr>
-        <p:txBody>
-          <a:bodyPr wrap="square" lIns="0" tIns="0" rIns="0" bIns="0" rtlCol="0" anchor="ctr">
-            <a:normAutofit lnSpcReduction="10000"/>
-          </a:bodyPr>
-          <a:lstStyle/>
-          <a:p>
-            <a:pPr marL="0" indent="0">
-              <a:buNone/>
-            </a:pPr>
-            <a:r>
-              <a:rPr lang="en-US" sz="1600" b="1" dirty="0">
-                <a:solidFill>
-                  <a:srgbClr val="FF735B"/>
-                </a:solidFill>
-                <a:latin typeface="Arial" pitchFamily="34" charset="0"/>
-                <a:ea typeface="Arial" pitchFamily="34" charset="-122"/>
-                <a:cs typeface="Arial" pitchFamily="34" charset="-120"/>
-              </a:rPr>
-              <a:t>4.3 Guardrail KPIs</a:t>
-            </a:r>
-            <a:endParaRPr lang="en-US" sz="1800" dirty="0"/>
-          </a:p>
-        </p:txBody>
-      </p:sp>
-      <p:graphicFrame>
-        <p:nvGraphicFramePr>
-          <p:cNvPr id="10" name="Table 0"/>
-          <p:cNvGraphicFramePr>
-            <a:graphicFrameLocks noGrp="1"/>
-          </p:cNvGraphicFramePr>
-          <p:nvPr>
-            <p:extLst>
-              <p:ext uri="{D42A27DB-BD31-4B8C-83A1-F6EECF244321}">
-                <ns2:modId val="1579011935"/>
-              </p:ext>
-            </p:extLst>
-          </p:nvPr>
-        </p:nvGraphicFramePr>
-        <p:xfrm>
-          <a:off x="650000" y="2320000"/>
-          <a:ext cx="10040000" cy="1860000"/>
-        </p:xfrm>
-        <a:graphic>
-          <a:graphicData uri="http://schemas.openxmlformats.org/drawingml/2006/table">
-            <a:tbl>
-              <a:tblPr/>
-              <a:tblGrid>
-                <a:gridCol w="3000000"/>
-                <a:gridCol w="4000000"/>
-                <a:gridCol w="3040000"/>
-              </a:tblGrid>
-              <a:tr h="620000">
-                <a:tc>
-                  <a:txBody>
-                    <a:bodyPr/>
-                    <a:lstStyle/>
-                    <a:p>
-                      <a:pPr marL="0" indent="0">
-                        <a:buNone/>
-                      </a:pPr>
-                      <a:r>
-                        <a:rPr sz="1150" b="1">
-                          <a:solidFill>
-                            <a:srgbClr val="F2F2F2"/>
-                          </a:solidFill>
-                        </a:rPr>
-                        <a:t>KPI</a:t>
-                      </a:r>
-                    </a:p>
-                  </a:txBody>
-                  <a:tcPr marL="33000" marR="33000" marT="30000" marB="30000" anchor="ctr">
-                    <a:lnL w="12700" cap="flat" cmpd="sng" algn="ctr">
-                      <a:solidFill>
-                        <a:srgbClr val="2D2D2D"/>
-                      </a:solidFill>
-                      <a:prstDash val="solid"/>
-                      <a:round/>
-                      <a:headEnd type="none" w="med" len="med"/>
-                      <a:tailEnd type="none" w="med" len="med"/>
-                    </a:lnL>
-                    <a:lnR w="12700" cap="flat" cmpd="sng" algn="ctr">
-                      <a:solidFill>
-                        <a:srgbClr val="2D2D2D"/>
-                      </a:solidFill>
-                      <a:prstDash val="solid"/>
-                      <a:round/>
-                      <a:headEnd type="none" w="med" len="med"/>
-                      <a:tailEnd type="none" w="med" len="med"/>
-                    </a:lnR>
-                    <a:lnT w="12700" cap="flat" cmpd="sng" algn="ctr">
-                      <a:solidFill>
-                        <a:srgbClr val="2D2D2D"/>
-                      </a:solidFill>
-                      <a:prstDash val="solid"/>
-                      <a:round/>
-                      <a:headEnd type="none" w="med" len="med"/>
-                      <a:tailEnd type="none" w="med" len="med"/>
-                    </a:lnT>
-                    <a:lnB w="12700" cap="flat" cmpd="sng" algn="ctr">
-                      <a:solidFill>
-                        <a:srgbClr val="2D2D2D"/>
-                      </a:solidFill>
-                      <a:prstDash val="solid"/>
-                      <a:round/>
-                      <a:headEnd type="none" w="med" len="med"/>
-                      <a:tailEnd type="none" w="med" len="med"/>
-                    </a:lnB>
-                    <a:solidFill>
-                      <a:srgbClr val="161616"/>
-                    </a:solidFill>
-                  </a:tcPr>
-                </a:tc>
-                <a:tc>
-                  <a:txBody>
-                    <a:bodyPr/>
-                    <a:lstStyle/>
-                    <a:p>
-                      <a:pPr marL="0" indent="0">
-                        <a:buNone/>
-                      </a:pPr>
-                      <a:r>
-                        <a:rPr sz="1150" b="1">
-                          <a:solidFill>
-                            <a:srgbClr val="F2F2F2"/>
-                          </a:solidFill>
-                        </a:rPr>
-                        <a:t>Definition</a:t>
-                      </a:r>
-                    </a:p>
-                  </a:txBody>
-                  <a:tcPr marL="33000" marR="33000" marT="30000" marB="30000" anchor="ctr">
-                    <a:lnL w="12700" cap="flat" cmpd="sng" algn="ctr">
-                      <a:solidFill>
-                        <a:srgbClr val="2D2D2D"/>
-                      </a:solidFill>
-                      <a:prstDash val="solid"/>
-                      <a:round/>
-                      <a:headEnd type="none" w="med" len="med"/>
-                      <a:tailEnd type="none" w="med" len="med"/>
-                    </a:lnL>
-                    <a:lnR w="12700" cap="flat" cmpd="sng" algn="ctr">
-                      <a:solidFill>
-                        <a:srgbClr val="2D2D2D"/>
-                      </a:solidFill>
-                      <a:prstDash val="solid"/>
-                      <a:round/>
-                      <a:headEnd type="none" w="med" len="med"/>
-                      <a:tailEnd type="none" w="med" len="med"/>
-                    </a:lnR>
-                    <a:lnT w="12700" cap="flat" cmpd="sng" algn="ctr">
-                      <a:solidFill>
-                        <a:srgbClr val="2D2D2D"/>
-                      </a:solidFill>
-                      <a:prstDash val="solid"/>
-                      <a:round/>
-                      <a:headEnd type="none" w="med" len="med"/>
-                      <a:tailEnd type="none" w="med" len="med"/>
-                    </a:lnT>
-                    <a:lnB w="12700" cap="flat" cmpd="sng" algn="ctr">
-                      <a:solidFill>
-                        <a:srgbClr val="2D2D2D"/>
-                      </a:solidFill>
-                      <a:prstDash val="solid"/>
-                      <a:round/>
-                      <a:headEnd type="none" w="med" len="med"/>
-                      <a:tailEnd type="none" w="med" len="med"/>
-                    </a:lnB>
-                    <a:solidFill>
-                      <a:srgbClr val="161616"/>
-                    </a:solidFill>
-                  </a:tcPr>
-                </a:tc>
-                <a:tc>
-                  <a:txBody>
-                    <a:bodyPr/>
-                    <a:lstStyle/>
-                    <a:p>
-                      <a:pPr marL="0" indent="0">
-                        <a:buNone/>
-                      </a:pPr>
-                      <a:r>
-                        <a:rPr sz="1150" b="1">
-                          <a:solidFill>
-                            <a:srgbClr val="F2F2F2"/>
-                          </a:solidFill>
-                        </a:rPr>
-                        <a:t>Why it matters</a:t>
-                      </a:r>
-                    </a:p>
-                  </a:txBody>
-                  <a:tcPr marL="33000" marR="33000" marT="30000" marB="30000" anchor="ctr">
-                    <a:lnL w="12700" cap="flat" cmpd="sng" algn="ctr">
-                      <a:solidFill>
-                        <a:srgbClr val="2D2D2D"/>
-                      </a:solidFill>
-                      <a:prstDash val="solid"/>
-                      <a:round/>
-                      <a:headEnd type="none" w="med" len="med"/>
-                      <a:tailEnd type="none" w="med" len="med"/>
-                    </a:lnL>
-                    <a:lnR w="12700" cap="flat" cmpd="sng" algn="ctr">
-                      <a:solidFill>
-                        <a:srgbClr val="2D2D2D"/>
-                      </a:solidFill>
-                      <a:prstDash val="solid"/>
-                      <a:round/>
-                      <a:headEnd type="none" w="med" len="med"/>
-                      <a:tailEnd type="none" w="med" len="med"/>
-                    </a:lnR>
-                    <a:lnT w="12700" cap="flat" cmpd="sng" algn="ctr">
-                      <a:solidFill>
-                        <a:srgbClr val="2D2D2D"/>
-                      </a:solidFill>
-                      <a:prstDash val="solid"/>
-                      <a:round/>
-                      <a:headEnd type="none" w="med" len="med"/>
-                      <a:tailEnd type="none" w="med" len="med"/>
-                    </a:lnT>
-                    <a:lnB w="12700" cap="flat" cmpd="sng" algn="ctr">
-                      <a:solidFill>
-                        <a:srgbClr val="2D2D2D"/>
-                      </a:solidFill>
-                      <a:prstDash val="solid"/>
-                      <a:round/>
-                      <a:headEnd type="none" w="med" len="med"/>
-                      <a:tailEnd type="none" w="med" len="med"/>
-                    </a:lnB>
-                    <a:solidFill>
-                      <a:srgbClr val="161616"/>
-                    </a:solidFill>
-                  </a:tcPr>
-                </a:tc>
-                <a:extLst>
-                  <a:ext uri="{0D108BD9-81ED-4DB2-BD59-A6C34878D82A}">
-                    <ns3:rowId val="10000"/>
-                  </a:ext>
-                </a:extLst>
-              </a:tr>
-              <a:tr h="620000">
-                <a:tc>
-                  <a:txBody>
-                    <a:bodyPr/>
-                    <a:lstStyle/>
-                    <a:p>
-                      <a:pPr marL="0" indent="0">
-                        <a:buNone/>
-                      </a:pPr>
-                      <a:r>
-                        <a:rPr sz="1080" b="0">
-                          <a:solidFill>
-                            <a:srgbClr val="D9D9D9"/>
-                          </a:solidFill>
-                        </a:rPr>
-                        <a:t>Early cancellation / downgrade rate</a:t>
-                      </a:r>
-                    </a:p>
-                  </a:txBody>
-                  <a:tcPr marL="33000" marR="33000" marT="30000" marB="30000" anchor="ctr">
-                    <a:lnL w="12700" cap="flat" cmpd="sng" algn="ctr">
-                      <a:solidFill>
-                        <a:srgbClr val="2D2D2D"/>
-                      </a:solidFill>
-                      <a:prstDash val="solid"/>
-                      <a:round/>
-                      <a:headEnd type="none" w="med" len="med"/>
-                      <a:tailEnd type="none" w="med" len="med"/>
-                    </a:lnL>
-                    <a:lnR w="12700" cap="flat" cmpd="sng" algn="ctr">
-                      <a:solidFill>
-                        <a:srgbClr val="2D2D2D"/>
-                      </a:solidFill>
-                      <a:prstDash val="solid"/>
-                      <a:round/>
-                      <a:headEnd type="none" w="med" len="med"/>
-                      <a:tailEnd type="none" w="med" len="med"/>
-                    </a:lnR>
-                    <a:lnT w="12700" cap="flat" cmpd="sng" algn="ctr">
-                      <a:solidFill>
-                        <a:srgbClr val="2D2D2D"/>
-                      </a:solidFill>
-                      <a:prstDash val="solid"/>
-                      <a:round/>
-                      <a:headEnd type="none" w="med" len="med"/>
-                      <a:tailEnd type="none" w="med" len="med"/>
-                    </a:lnT>
-                    <a:lnB w="12700" cap="flat" cmpd="sng" algn="ctr">
-                      <a:solidFill>
-                        <a:srgbClr val="2D2D2D"/>
-                      </a:solidFill>
-                      <a:prstDash val="solid"/>
-                      <a:round/>
-                      <a:headEnd type="none" w="med" len="med"/>
-                      <a:tailEnd type="none" w="med" len="med"/>
-                    </a:lnB>
-                    <a:solidFill>
-                      <a:srgbClr val="101010"/>
-                    </a:solidFill>
-                  </a:tcPr>
-                </a:tc>
-                <a:tc>
-                  <a:txBody>
-                    <a:bodyPr/>
-                    <a:lstStyle/>
-                    <a:p>
-                      <a:pPr marL="0" indent="0">
-                        <a:buNone/>
-                      </a:pPr>
-                      <a:r>
-                        <a:rPr sz="1080" b="0">
-                          <a:solidFill>
-                            <a:srgbClr val="D9D9D9"/>
-                          </a:solidFill>
-                        </a:rPr>
-                        <a:t>Share of adopters who cancel or downgrade early</a:t>
-                      </a:r>
-                    </a:p>
-                  </a:txBody>
-                  <a:tcPr marL="33000" marR="33000" marT="30000" marB="30000" anchor="ctr">
-                    <a:lnL w="12700" cap="flat" cmpd="sng" algn="ctr">
-                      <a:solidFill>
-                        <a:srgbClr val="2D2D2D"/>
-                      </a:solidFill>
-                      <a:prstDash val="solid"/>
-                      <a:round/>
-                      <a:headEnd type="none" w="med" len="med"/>
-                      <a:tailEnd type="none" w="med" len="med"/>
-                    </a:lnL>
-                    <a:lnR w="12700" cap="flat" cmpd="sng" algn="ctr">
-                      <a:solidFill>
-                        <a:srgbClr val="2D2D2D"/>
-                      </a:solidFill>
-                      <a:prstDash val="solid"/>
-                      <a:round/>
-                      <a:headEnd type="none" w="med" len="med"/>
-                      <a:tailEnd type="none" w="med" len="med"/>
-                    </a:lnR>
-                    <a:lnT w="12700" cap="flat" cmpd="sng" algn="ctr">
-                      <a:solidFill>
-                        <a:srgbClr val="2D2D2D"/>
-                      </a:solidFill>
-                      <a:prstDash val="solid"/>
-                      <a:round/>
-                      <a:headEnd type="none" w="med" len="med"/>
-                      <a:tailEnd type="none" w="med" len="med"/>
-                    </a:lnT>
-                    <a:lnB w="12700" cap="flat" cmpd="sng" algn="ctr">
-                      <a:solidFill>
-                        <a:srgbClr val="2D2D2D"/>
-                      </a:solidFill>
-                      <a:prstDash val="solid"/>
-                      <a:round/>
-                      <a:headEnd type="none" w="med" len="med"/>
-                      <a:tailEnd type="none" w="med" len="med"/>
-                    </a:lnB>
-                    <a:solidFill>
-                      <a:srgbClr val="101010"/>
-                    </a:solidFill>
-                  </a:tcPr>
-                </a:tc>
-                <a:tc>
-                  <a:txBody>
-                    <a:bodyPr/>
-                    <a:lstStyle/>
-                    <a:p>
-                      <a:pPr marL="0" indent="0">
-                        <a:buNone/>
-                      </a:pPr>
-                      <a:r>
-                        <a:rPr sz="1080" b="0">
-                          <a:solidFill>
-                            <a:srgbClr val="D9D9D9"/>
-                          </a:solidFill>
-                        </a:rPr>
-                        <a:t>Flags poor-fit or over-pushed sellers.</a:t>
-                      </a:r>
-                    </a:p>
-                  </a:txBody>
-                  <a:tcPr marL="33000" marR="33000" marT="30000" marB="30000" anchor="ctr">
-                    <a:lnL w="12700" cap="flat" cmpd="sng" algn="ctr">
-                      <a:solidFill>
-                        <a:srgbClr val="2D2D2D"/>
-                      </a:solidFill>
-                      <a:prstDash val="solid"/>
-                      <a:round/>
-                      <a:headEnd type="none" w="med" len="med"/>
-                      <a:tailEnd type="none" w="med" len="med"/>
-                    </a:lnL>
-                    <a:lnR w="12700" cap="flat" cmpd="sng" algn="ctr">
-                      <a:solidFill>
-                        <a:srgbClr val="2D2D2D"/>
-                      </a:solidFill>
-                      <a:prstDash val="solid"/>
-                      <a:round/>
-                      <a:headEnd type="none" w="med" len="med"/>
-                      <a:tailEnd type="none" w="med" len="med"/>
-                    </a:lnR>
-                    <a:lnT w="12700" cap="flat" cmpd="sng" algn="ctr">
-                      <a:solidFill>
-                        <a:srgbClr val="2D2D2D"/>
-                      </a:solidFill>
-                      <a:prstDash val="solid"/>
-                      <a:round/>
-                      <a:headEnd type="none" w="med" len="med"/>
-                      <a:tailEnd type="none" w="med" len="med"/>
-                    </a:lnT>
-                    <a:lnB w="12700" cap="flat" cmpd="sng" algn="ctr">
-                      <a:solidFill>
-                        <a:srgbClr val="2D2D2D"/>
-                      </a:solidFill>
-                      <a:prstDash val="solid"/>
-                      <a:round/>
-                      <a:headEnd type="none" w="med" len="med"/>
-                      <a:tailEnd type="none" w="med" len="med"/>
-                    </a:lnB>
-                    <a:solidFill>
-                      <a:srgbClr val="101010"/>
-                    </a:solidFill>
-                  </a:tcPr>
-                </a:tc>
-                <a:extLst>
-                  <a:ext uri="{0D108BD9-81ED-4DB2-BD59-A6C34878D82A}">
-                    <ns3:rowId val="10001"/>
-                  </a:ext>
-                </a:extLst>
-              </a:tr>
-              <a:tr h="620000">
-                <a:tc>
-                  <a:txBody>
-                    <a:bodyPr/>
-                    <a:lstStyle/>
-                    <a:p>
-                      <a:pPr marL="0" indent="0">
-                        <a:buNone/>
-                      </a:pPr>
-                      <a:r>
-                        <a:rPr sz="1080" b="0">
-                          <a:solidFill>
-                            <a:srgbClr val="D9D9D9"/>
-                          </a:solidFill>
-                        </a:rPr>
-                        <a:t>Seller opt-out or complaint rate</a:t>
-                      </a:r>
-                    </a:p>
-                  </a:txBody>
-                  <a:tcPr marL="33000" marR="33000" marT="30000" marB="30000" anchor="ctr">
-                    <a:lnL w="12700" cap="flat" cmpd="sng" algn="ctr">
-                      <a:solidFill>
-                        <a:srgbClr val="2D2D2D"/>
-                      </a:solidFill>
-                      <a:prstDash val="solid"/>
-                      <a:round/>
-                      <a:headEnd type="none" w="med" len="med"/>
-                      <a:tailEnd type="none" w="med" len="med"/>
-                    </a:lnL>
-                    <a:lnR w="12700" cap="flat" cmpd="sng" algn="ctr">
-                      <a:solidFill>
-                        <a:srgbClr val="2D2D2D"/>
-                      </a:solidFill>
-                      <a:prstDash val="solid"/>
-                      <a:round/>
-                      <a:headEnd type="none" w="med" len="med"/>
-                      <a:tailEnd type="none" w="med" len="med"/>
-                    </a:lnR>
-                    <a:lnT w="12700" cap="flat" cmpd="sng" algn="ctr">
-                      <a:solidFill>
-                        <a:srgbClr val="2D2D2D"/>
-                      </a:solidFill>
-                      <a:prstDash val="solid"/>
-                      <a:round/>
-                      <a:headEnd type="none" w="med" len="med"/>
-                      <a:tailEnd type="none" w="med" len="med"/>
-                    </a:lnT>
-                    <a:lnB w="12700" cap="flat" cmpd="sng" algn="ctr">
-                      <a:solidFill>
-                        <a:srgbClr val="2D2D2D"/>
-                      </a:solidFill>
-                      <a:prstDash val="solid"/>
-                      <a:round/>
-                      <a:headEnd type="none" w="med" len="med"/>
-                      <a:tailEnd type="none" w="med" len="med"/>
-                    </a:lnB>
-                    <a:solidFill>
-                      <a:srgbClr val="101010"/>
-                    </a:solidFill>
-                  </a:tcPr>
-                </a:tc>
-                <a:tc>
-                  <a:txBody>
-                    <a:bodyPr/>
-                    <a:lstStyle/>
-                    <a:p>
-                      <a:pPr marL="0" indent="0">
-                        <a:buNone/>
-                      </a:pPr>
-                      <a:r>
-                        <a:rPr sz="1080" b="0">
-                          <a:solidFill>
-                            <a:srgbClr val="D9D9D9"/>
-                          </a:solidFill>
-                        </a:rPr>
-                        <a:t>Share of exposed sellers who opt out or complain</a:t>
-                      </a:r>
-                    </a:p>
-                  </a:txBody>
-                  <a:tcPr marL="33000" marR="33000" marT="30000" marB="30000" anchor="ctr">
-                    <a:lnL w="12700" cap="flat" cmpd="sng" algn="ctr">
-                      <a:solidFill>
-                        <a:srgbClr val="2D2D2D"/>
-                      </a:solidFill>
-                      <a:prstDash val="solid"/>
-                      <a:round/>
-                      <a:headEnd type="none" w="med" len="med"/>
-                      <a:tailEnd type="none" w="med" len="med"/>
-                    </a:lnL>
-                    <a:lnR w="12700" cap="flat" cmpd="sng" algn="ctr">
-                      <a:solidFill>
-                        <a:srgbClr val="2D2D2D"/>
-                      </a:solidFill>
-                      <a:prstDash val="solid"/>
-                      <a:round/>
-                      <a:headEnd type="none" w="med" len="med"/>
-                      <a:tailEnd type="none" w="med" len="med"/>
-                    </a:lnR>
-                    <a:lnT w="12700" cap="flat" cmpd="sng" algn="ctr">
-                      <a:solidFill>
-                        <a:srgbClr val="2D2D2D"/>
-                      </a:solidFill>
-                      <a:prstDash val="solid"/>
-                      <a:round/>
-                      <a:headEnd type="none" w="med" len="med"/>
-                      <a:tailEnd type="none" w="med" len="med"/>
-                    </a:lnT>
-                    <a:lnB w="12700" cap="flat" cmpd="sng" algn="ctr">
-                      <a:solidFill>
-                        <a:srgbClr val="2D2D2D"/>
-                      </a:solidFill>
-                      <a:prstDash val="solid"/>
-                      <a:round/>
-                      <a:headEnd type="none" w="med" len="med"/>
-                      <a:tailEnd type="none" w="med" len="med"/>
-                    </a:lnB>
-                    <a:solidFill>
-                      <a:srgbClr val="101010"/>
-                    </a:solidFill>
-                  </a:tcPr>
-                </a:tc>
-                <a:tc>
-                  <a:txBody>
-                    <a:bodyPr/>
-                    <a:lstStyle/>
-                    <a:p>
-                      <a:pPr marL="0" indent="0">
-                        <a:buNone/>
-                      </a:pPr>
-                      <a:r>
-                        <a:rPr sz="1080" b="0">
-                          <a:solidFill>
-                            <a:srgbClr val="D9D9D9"/>
-                          </a:solidFill>
-                        </a:rPr>
-                        <a:t>Caps campaign pressure before trust suffers.</a:t>
-                      </a:r>
-                    </a:p>
-                  </a:txBody>
-                  <a:tcPr marL="33000" marR="33000" marT="30000" marB="30000" anchor="ctr">
-                    <a:lnL w="12700" cap="flat" cmpd="sng" algn="ctr">
-                      <a:solidFill>
-                        <a:srgbClr val="2D2D2D"/>
-                      </a:solidFill>
-                      <a:prstDash val="solid"/>
-                      <a:round/>
-                      <a:headEnd type="none" w="med" len="med"/>
-                      <a:tailEnd type="none" w="med" len="med"/>
-                    </a:lnL>
-                    <a:lnR w="12700" cap="flat" cmpd="sng" algn="ctr">
-                      <a:solidFill>
-                        <a:srgbClr val="2D2D2D"/>
-                      </a:solidFill>
-                      <a:prstDash val="solid"/>
-                      <a:round/>
-                      <a:headEnd type="none" w="med" len="med"/>
-                      <a:tailEnd type="none" w="med" len="med"/>
-                    </a:lnR>
-                    <a:lnT w="12700" cap="flat" cmpd="sng" algn="ctr">
-                      <a:solidFill>
-                        <a:srgbClr val="2D2D2D"/>
-                      </a:solidFill>
-                      <a:prstDash val="solid"/>
-                      <a:round/>
-                      <a:headEnd type="none" w="med" len="med"/>
-                      <a:tailEnd type="none" w="med" len="med"/>
-                    </a:lnT>
-                    <a:lnB w="12700" cap="flat" cmpd="sng" algn="ctr">
-                      <a:solidFill>
-                        <a:srgbClr val="2D2D2D"/>
-                      </a:solidFill>
-                      <a:prstDash val="solid"/>
-                      <a:round/>
-                      <a:headEnd type="none" w="med" len="med"/>
-                      <a:tailEnd type="none" w="med" len="med"/>
-                    </a:lnB>
-                    <a:solidFill>
-                      <a:srgbClr val="101010"/>
-                    </a:solidFill>
-                  </a:tcPr>
-                </a:tc>
-                <a:extLst>
-                  <a:ext uri="{0D108BD9-81ED-4DB2-BD59-A6C34878D82A}">
-                    <ns3:rowId val="10001"/>
-                  </a:ext>
-                </a:extLst>
-              </a:tr>
-            </a:tbl>
-          </a:graphicData>
-        </a:graphic>
-      </p:graphicFrame>
-      <p:sp>
-        <p:nvSpPr>
-          <p:cNvPr id="11" name="Text 8"/>
-          <p:cNvSpPr/>
-          <p:nvPr/>
-        </p:nvSpPr>
-        <p:spPr>
-          <a:xfrm>
-            <a:off x="621792" y="4590288"/>
-            <a:ext cx="2743200" cy="256032"/>
-          </a:xfrm>
-          <a:prstGeom prst="rect">
-            <a:avLst/>
-          </a:prstGeom>
-          <a:noFill/>
-          <a:ln/>
-        </p:spPr>
-        <p:txBody>
-          <a:bodyPr wrap="square" lIns="0" tIns="0" rIns="0" bIns="0" rtlCol="0" anchor="ctr">
-            <a:normAutofit lnSpcReduction="10000"/>
-          </a:bodyPr>
-          <a:lstStyle/>
-          <a:p>
-            <a:pPr marL="0" indent="0">
-              <a:buNone/>
-            </a:pPr>
-            <a:r>
-              <a:rPr lang="en-US" sz="1800" b="1" dirty="0">
-                <a:solidFill>
-                  <a:srgbClr val="FF785A"/>
-                </a:solidFill>
-                <a:latin typeface="Arial" pitchFamily="34" charset="0"/>
-                <a:ea typeface="Arial" pitchFamily="34" charset="-122"/>
-                <a:cs typeface="Arial" pitchFamily="34" charset="-120"/>
-              </a:rPr>
-              <a:t>Measurement Discipline</a:t>
-            </a:r>
-            <a:endParaRPr lang="en-US" sz="1800" dirty="0"/>
-          </a:p>
-        </p:txBody>
-      </p:sp>
-      <p:sp>
-        <p:nvSpPr>
-          <p:cNvPr id="12" name="Shape 9"/>
-          <p:cNvSpPr/>
-          <p:nvPr/>
-        </p:nvSpPr>
-        <p:spPr>
-          <a:xfrm>
-            <a:off x="621792" y="4864608"/>
-            <a:ext cx="3246120" cy="877824"/>
-          </a:xfrm>
-          <a:prstGeom prst="roundRect">
-            <a:avLst>
-              <a:gd name="adj" fmla="val 8333"/>
-            </a:avLst>
-          </a:prstGeom>
-          <a:solidFill>
-            <a:srgbClr val="0E0E0E"/>
-          </a:solidFill>
-          <a:ln w="12700">
-            <a:solidFill>
-              <a:srgbClr val="3A3A3A"/>
-            </a:solidFill>
-            <a:prstDash val="solid"/>
-          </a:ln>
-        </p:spPr>
-        <p:txBody>
-          <a:bodyPr/>
-          <a:lstStyle/>
-          <a:p>
-            <a:endParaRPr lang="en-US"/>
-          </a:p>
-        </p:txBody>
-      </p:sp>
-      <p:sp>
-        <p:nvSpPr>
-          <p:cNvPr id="13" name="Shape 10"/>
-          <p:cNvSpPr/>
-          <p:nvPr/>
-        </p:nvSpPr>
-        <p:spPr>
-          <a:xfrm>
-            <a:off x="621792" y="4864608"/>
-            <a:ext cx="3246120" cy="36576"/>
-          </a:xfrm>
-          <a:prstGeom prst="rect">
-            <a:avLst/>
-          </a:prstGeom>
-          <a:solidFill>
-            <a:srgbClr val="FF785A"/>
-          </a:solidFill>
-          <a:ln w="12700">
-            <a:solidFill>
-              <a:srgbClr val="FF785A">
-                <a:alpha val="0"/>
-              </a:srgbClr>
-            </a:solidFill>
-            <a:prstDash val="solid"/>
-          </a:ln>
-        </p:spPr>
-        <p:txBody>
-          <a:bodyPr/>
-          <a:lstStyle/>
-          <a:p>
-            <a:endParaRPr lang="en-US"/>
-          </a:p>
-        </p:txBody>
-      </p:sp>
-      <p:sp>
-        <p:nvSpPr>
-          <p:cNvPr id="14" name="Text 11"/>
-          <p:cNvSpPr/>
-          <p:nvPr/>
-        </p:nvSpPr>
-        <p:spPr>
-          <a:xfrm>
-            <a:off x="786384" y="5029200"/>
-            <a:ext cx="2916936" cy="256032"/>
-          </a:xfrm>
-          <a:prstGeom prst="rect">
-            <a:avLst/>
-          </a:prstGeom>
-          <a:noFill/>
-          <a:ln/>
-        </p:spPr>
-        <p:txBody>
-          <a:bodyPr wrap="square" lIns="0" tIns="0" rIns="0" bIns="0" rtlCol="0" anchor="ctr">
-            <a:normAutofit/>
-          </a:bodyPr>
-          <a:lstStyle/>
-          <a:p>
-            <a:pPr marL="0" indent="0">
-              <a:buNone/>
-            </a:pPr>
-            <a:r>
-              <a:rPr lang="en-US" sz="1400" b="1" dirty="0">
-                <a:solidFill>
-                  <a:srgbClr val="F3F4F6"/>
-                </a:solidFill>
-                <a:latin typeface="Arial" pitchFamily="34" charset="0"/>
-                <a:ea typeface="Arial" pitchFamily="34" charset="-122"/>
-                <a:cs typeface="Arial" pitchFamily="34" charset="-120"/>
-              </a:rPr>
-              <a:t>Incrementality</a:t>
-            </a:r>
-            <a:endParaRPr lang="en-US" sz="1400" dirty="0"/>
-          </a:p>
-        </p:txBody>
-      </p:sp>
-      <p:sp>
-        <p:nvSpPr>
-          <p:cNvPr id="15" name="Text 12"/>
-          <p:cNvSpPr/>
-          <p:nvPr/>
-        </p:nvSpPr>
-        <p:spPr>
-          <a:xfrm>
-            <a:off x="786384" y="5358384"/>
-            <a:ext cx="2916936" cy="283464"/>
-          </a:xfrm>
-          <a:prstGeom prst="rect">
-            <a:avLst/>
-          </a:prstGeom>
-          <a:noFill/>
-          <a:ln/>
-        </p:spPr>
-        <p:txBody>
-          <a:bodyPr wrap="square" lIns="0" tIns="0" rIns="0" bIns="0" rtlCol="0" anchor="t">
-            <a:normAutofit fontScale="92500" lnSpcReduction="20000"/>
-          </a:bodyPr>
-          <a:lstStyle/>
-          <a:p>
-            <a:pPr marL="0" indent="0">
-              <a:buNone/>
-            </a:pPr>
-            <a:r>
-              <a:rPr lang="en-US" sz="1150" dirty="0">
-                <a:solidFill>
-                  <a:srgbClr val="D8D8D2"/>
-                </a:solidFill>
-                <a:latin typeface="Arial" pitchFamily="34" charset="0"/>
-                <a:ea typeface="Arial" pitchFamily="34" charset="-122"/>
-                <a:cs typeface="Arial" pitchFamily="34" charset="-120"/>
-              </a:rPr>
-              <a:t>Use exposed sellers vs. a holdout/control group for adoption and revenue.</a:t>
-            </a:r>
-            <a:endParaRPr lang="en-US" sz="1150" dirty="0"/>
-          </a:p>
-        </p:txBody>
-      </p:sp>
-      <p:sp>
-        <p:nvSpPr>
-          <p:cNvPr id="16" name="Shape 13"/>
-          <p:cNvSpPr/>
-          <p:nvPr/>
-        </p:nvSpPr>
-        <p:spPr>
-          <a:xfrm>
-            <a:off x="4187952" y="4864608"/>
-            <a:ext cx="3246120" cy="877824"/>
-          </a:xfrm>
-          <a:prstGeom prst="roundRect">
-            <a:avLst>
-              <a:gd name="adj" fmla="val 8333"/>
-            </a:avLst>
-          </a:prstGeom>
-          <a:solidFill>
-            <a:srgbClr val="0E0E0E"/>
-          </a:solidFill>
-          <a:ln w="12700">
-            <a:solidFill>
-              <a:srgbClr val="3A3A3A"/>
-            </a:solidFill>
-            <a:prstDash val="solid"/>
-          </a:ln>
-        </p:spPr>
-        <p:txBody>
-          <a:bodyPr/>
-          <a:lstStyle/>
-          <a:p>
-            <a:endParaRPr lang="en-US"/>
-          </a:p>
-        </p:txBody>
-      </p:sp>
-      <p:sp>
-        <p:nvSpPr>
-          <p:cNvPr id="17" name="Shape 14"/>
-          <p:cNvSpPr/>
-          <p:nvPr/>
-        </p:nvSpPr>
-        <p:spPr>
-          <a:xfrm>
-            <a:off x="4187952" y="4864608"/>
-            <a:ext cx="3246120" cy="36576"/>
-          </a:xfrm>
-          <a:prstGeom prst="rect">
-            <a:avLst/>
-          </a:prstGeom>
-          <a:solidFill>
-            <a:srgbClr val="FF785A"/>
-          </a:solidFill>
-          <a:ln w="12700">
-            <a:solidFill>
-              <a:srgbClr val="FF785A">
-                <a:alpha val="0"/>
-              </a:srgbClr>
-            </a:solidFill>
-            <a:prstDash val="solid"/>
-          </a:ln>
-        </p:spPr>
-        <p:txBody>
-          <a:bodyPr/>
-          <a:lstStyle/>
-          <a:p>
-            <a:endParaRPr lang="en-US"/>
-          </a:p>
-        </p:txBody>
-      </p:sp>
-      <p:sp>
-        <p:nvSpPr>
-          <p:cNvPr id="18" name="Text 15"/>
-          <p:cNvSpPr/>
-          <p:nvPr/>
-        </p:nvSpPr>
-        <p:spPr>
-          <a:xfrm>
-            <a:off x="4352544" y="5029200"/>
-            <a:ext cx="2916936" cy="256032"/>
-          </a:xfrm>
-          <a:prstGeom prst="rect">
-            <a:avLst/>
-          </a:prstGeom>
-          <a:noFill/>
-          <a:ln/>
-        </p:spPr>
-        <p:txBody>
-          <a:bodyPr wrap="square" lIns="0" tIns="0" rIns="0" bIns="0" rtlCol="0" anchor="ctr">
-            <a:normAutofit/>
-          </a:bodyPr>
-          <a:lstStyle/>
-          <a:p>
-            <a:pPr marL="0" indent="0">
-              <a:buNone/>
-            </a:pPr>
-            <a:r>
-              <a:rPr lang="en-US" sz="1400" b="1" dirty="0">
-                <a:solidFill>
-                  <a:srgbClr val="F3F4F6"/>
-                </a:solidFill>
-                <a:latin typeface="Arial" pitchFamily="34" charset="0"/>
-                <a:ea typeface="Arial" pitchFamily="34" charset="-122"/>
-                <a:cs typeface="Arial" pitchFamily="34" charset="-120"/>
-              </a:rPr>
-              <a:t>Quality</a:t>
-            </a:r>
-            <a:endParaRPr lang="en-US" sz="1400" dirty="0"/>
-          </a:p>
-        </p:txBody>
-      </p:sp>
-      <p:sp>
-        <p:nvSpPr>
-          <p:cNvPr id="19" name="Text 16"/>
-          <p:cNvSpPr/>
-          <p:nvPr/>
-        </p:nvSpPr>
-        <p:spPr>
-          <a:xfrm>
-            <a:off x="4352544" y="5358384"/>
-            <a:ext cx="2916936" cy="283464"/>
-          </a:xfrm>
-          <a:prstGeom prst="rect">
-            <a:avLst/>
-          </a:prstGeom>
-          <a:noFill/>
-          <a:ln/>
-        </p:spPr>
-        <p:txBody>
-          <a:bodyPr wrap="square" lIns="0" tIns="0" rIns="0" bIns="0" rtlCol="0" anchor="t">
-            <a:normAutofit fontScale="92500" lnSpcReduction="20000"/>
-          </a:bodyPr>
-          <a:lstStyle/>
-          <a:p>
-            <a:pPr marL="0" indent="0">
-              <a:buNone/>
-            </a:pPr>
-            <a:r>
-              <a:rPr lang="en-US" sz="1150" dirty="0">
-                <a:solidFill>
-                  <a:srgbClr val="D9D9D9"/>
-                </a:solidFill>
-                <a:latin typeface="Arial" pitchFamily="34" charset="0"/>
-                <a:ea typeface="Arial" pitchFamily="34" charset="-122"/>
-                <a:cs typeface="Arial" pitchFamily="34" charset="-120"/>
-              </a:rPr>
-              <a:t>Track early cancellation and downgrade behavior.</a:t>
-            </a:r>
-            <a:endParaRPr lang="en-US" sz="1150" dirty="0"/>
-          </a:p>
-        </p:txBody>
-      </p:sp>
-      <p:sp>
-        <p:nvSpPr>
-          <p:cNvPr id="20" name="Shape 17"/>
-          <p:cNvSpPr/>
-          <p:nvPr/>
-        </p:nvSpPr>
-        <p:spPr>
-          <a:xfrm>
-            <a:off x="7754112" y="4864608"/>
-            <a:ext cx="3246120" cy="877824"/>
-          </a:xfrm>
-          <a:prstGeom prst="roundRect">
-            <a:avLst>
-              <a:gd name="adj" fmla="val 8333"/>
-            </a:avLst>
-          </a:prstGeom>
-          <a:solidFill>
-            <a:srgbClr val="0E0E0E"/>
-          </a:solidFill>
-          <a:ln w="12700">
-            <a:solidFill>
-              <a:srgbClr val="3A3A3A"/>
-            </a:solidFill>
-            <a:prstDash val="solid"/>
-          </a:ln>
-        </p:spPr>
-        <p:txBody>
-          <a:bodyPr/>
-          <a:lstStyle/>
-          <a:p>
-            <a:r>
-              <a:rPr>
-                <a:solidFill>
-                  <a:srgbClr val="D9D9D9"/>
-                </a:solidFill>
-              </a:rPr>
-              <a:t/>
-            </a:r>
-          </a:p>
-        </p:txBody>
-      </p:sp>
-      <p:sp>
-        <p:nvSpPr>
-          <p:cNvPr id="21" name="Shape 18"/>
-          <p:cNvSpPr/>
-          <p:nvPr/>
-        </p:nvSpPr>
-        <p:spPr>
-          <a:xfrm>
-            <a:off x="7754112" y="4864608"/>
-            <a:ext cx="3246120" cy="36576"/>
-          </a:xfrm>
-          <a:prstGeom prst="rect">
-            <a:avLst/>
-          </a:prstGeom>
-          <a:solidFill>
-            <a:srgbClr val="FF785A"/>
-          </a:solidFill>
-          <a:ln w="12700">
-            <a:solidFill>
-              <a:srgbClr val="FF785A">
-                <a:alpha val="0"/>
-              </a:srgbClr>
-            </a:solidFill>
-            <a:prstDash val="solid"/>
-          </a:ln>
-        </p:spPr>
-        <p:txBody>
-          <a:bodyPr/>
-          <a:lstStyle/>
-          <a:p>
-            <a:endParaRPr lang="en-US"/>
-          </a:p>
-        </p:txBody>
-      </p:sp>
-      <p:sp>
-        <p:nvSpPr>
-          <p:cNvPr id="22" name="Text 19"/>
-          <p:cNvSpPr/>
-          <p:nvPr/>
-        </p:nvSpPr>
-        <p:spPr>
-          <a:xfrm>
-            <a:off x="7918704" y="5029200"/>
-            <a:ext cx="2916936" cy="256032"/>
-          </a:xfrm>
-          <a:prstGeom prst="rect">
-            <a:avLst/>
-          </a:prstGeom>
-          <a:noFill/>
-          <a:ln/>
-        </p:spPr>
-        <p:txBody>
-          <a:bodyPr wrap="square" lIns="0" tIns="0" rIns="0" bIns="0" rtlCol="0" anchor="ctr">
-            <a:normAutofit/>
-          </a:bodyPr>
-          <a:lstStyle/>
-          <a:p>
-            <a:pPr marL="0" indent="0">
-              <a:buNone/>
-            </a:pPr>
-            <a:r>
-              <a:rPr lang="en-US" sz="1400" b="1" dirty="0">
-                <a:solidFill>
-                  <a:srgbClr val="F3F4F6"/>
-                </a:solidFill>
-                <a:latin typeface="Arial" pitchFamily="34" charset="0"/>
-                <a:ea typeface="Arial" pitchFamily="34" charset="-122"/>
-                <a:cs typeface="Arial" pitchFamily="34" charset="-120"/>
-              </a:rPr>
-              <a:t>Trust</a:t>
-            </a:r>
-            <a:endParaRPr lang="en-US" sz="1400" dirty="0"/>
-          </a:p>
-        </p:txBody>
-      </p:sp>
-      <p:sp>
-        <p:nvSpPr>
-          <p:cNvPr id="23" name="Text 20"/>
-          <p:cNvSpPr/>
-          <p:nvPr/>
-        </p:nvSpPr>
-        <p:spPr>
-          <a:xfrm>
-            <a:off x="7918704" y="5358384"/>
-            <a:ext cx="2916936" cy="283464"/>
-          </a:xfrm>
-          <a:prstGeom prst="rect">
-            <a:avLst/>
-          </a:prstGeom>
-          <a:noFill/>
-          <a:ln/>
-        </p:spPr>
-        <p:txBody>
-          <a:bodyPr wrap="square" lIns="0" tIns="0" rIns="0" bIns="0" rtlCol="0" anchor="t">
-            <a:normAutofit fontScale="92500" lnSpcReduction="20000"/>
-          </a:bodyPr>
-          <a:lstStyle/>
-          <a:p>
-            <a:pPr marL="0" indent="0">
-              <a:buNone/>
-            </a:pPr>
-            <a:r>
-              <a:rPr lang="en-US" sz="1150" dirty="0">
-                <a:solidFill>
-                  <a:srgbClr val="D9D9D9"/>
-                </a:solidFill>
-                <a:latin typeface="Arial" pitchFamily="34" charset="0"/>
-                <a:ea typeface="Arial" pitchFamily="34" charset="-122"/>
-                <a:cs typeface="Arial" pitchFamily="34" charset="-120"/>
-              </a:rPr>
-              <a:t>Monitor opt-outs and complaint rate.</a:t>
-            </a:r>
-            <a:endParaRPr lang="en-US" sz="1150" dirty="0"/>
-          </a:p>
-        </p:txBody>
-      </p:sp>
     </p:spTree>
   </p:cSld>
   <p:clrMapOvr>

--- a/deliverables/smb_bundles/smb_bundles_4_scale.pptx
+++ b/deliverables/smb_bundles/smb_bundles_4_scale.pptx
@@ -116,6 +116,169 @@
     </p:ext>
   </p:extLst>
 </p:presentation>
+</file>
+
+<file path=ppt/authors.xml><?xml version="1.0" encoding="utf-8"?>
+<p188:authorLst xmlns:a="http://schemas.openxmlformats.org/drawingml/2006/main" xmlns:r="http://schemas.openxmlformats.org/officeDocument/2006/relationships" xmlns:p188="http://schemas.microsoft.com/office/powerpoint/2018/8/main">
+  <p188:author id="{415BEED1-CB72-B48E-F02F-A910FFABA975}" name="Omer Tal" initials="OT" userId="4873ff6cd3b5db54" providerId="Windows Live"/>
+</p188:authorLst>
+</file>
+
+<file path=ppt/comments/modernComment_100_0.xml><?xml version="1.0" encoding="utf-8"?>
+<p188:cmLst xmlns:a="http://schemas.openxmlformats.org/drawingml/2006/main" xmlns:r="http://schemas.openxmlformats.org/officeDocument/2006/relationships" xmlns:p188="http://schemas.microsoft.com/office/powerpoint/2018/8/main">
+  <p188:cm id="{E781551D-2049-824D-A2A5-59F8CB8CAE0E}" authorId="{415BEED1-CB72-B48E-F02F-A910FFABA975}" created="2026-06-15T20:01:35.470">
+    <ac:txMkLst xmlns:ac="http://schemas.microsoft.com/office/drawing/2013/main/command">
+      <pc:docMk xmlns:pc="http://schemas.microsoft.com/office/powerpoint/2013/main/command"/>
+      <pc:sldMk xmlns:pc="http://schemas.microsoft.com/office/powerpoint/2013/main/command" cId="0" sldId="256"/>
+      <ac:spMk id="8" creationId="{00000000-0000-0000-0000-000000000000}"/>
+      <ac:txMk cp="86" len="8">
+        <ac:context len="171" hash="1001647102"/>
+      </ac:txMk>
+    </ac:txMkLst>
+    <p188:pos x="8273555" y="291164"/>
+    <p188:replyLst>
+      <p188:reply id="{80BBFAAB-B82B-3943-B17D-6B5FFD7525CF}" authorId="{415BEED1-CB72-B48E-F02F-A910FFABA975}" created="2026-06-15T20:02:40.039">
+        <p188:txBody>
+          <a:bodyPr/>
+          <a:lstStyle/>
+          <a:p>
+            <a:r>
+              <a:rPr lang="en-US"/>
+              <a:t>repetitive</a:t>
+            </a:r>
+          </a:p>
+        </p188:txBody>
+      </p188:reply>
+    </p188:replyLst>
+    <p188:txBody>
+      <a:bodyPr/>
+      <a:lstStyle/>
+      <a:p>
+        <a:r>
+          <a:rPr lang="en-US"/>
+          <a:t>change phrasing</a:t>
+        </a:r>
+      </a:p>
+    </p188:txBody>
+  </p188:cm>
+  <p188:cm id="{4621D3D1-8D56-824E-83F2-1E10370050AA}" authorId="{415BEED1-CB72-B48E-F02F-A910FFABA975}" created="2026-06-15T20:01:53.742">
+    <ac:deMkLst xmlns:ac="http://schemas.microsoft.com/office/drawing/2013/main/command">
+      <pc:docMk xmlns:pc="http://schemas.microsoft.com/office/powerpoint/2013/main/command"/>
+      <pc:sldMk xmlns:pc="http://schemas.microsoft.com/office/powerpoint/2013/main/command" cId="0" sldId="256"/>
+      <ac:spMk id="10" creationId="{00000000-0000-0000-0000-000000000000}"/>
+    </ac:deMkLst>
+    <p188:txBody>
+      <a:bodyPr/>
+      <a:lstStyle/>
+      <a:p>
+        <a:r>
+          <a:rPr lang="en-US"/>
+          <a:t>increase size</a:t>
+        </a:r>
+      </a:p>
+    </p188:txBody>
+  </p188:cm>
+</p188:cmLst>
+</file>
+
+<file path=ppt/comments/modernComment_103_0.xml><?xml version="1.0" encoding="utf-8"?>
+<p188:cmLst xmlns:a="http://schemas.openxmlformats.org/drawingml/2006/main" xmlns:r="http://schemas.openxmlformats.org/officeDocument/2006/relationships" xmlns:p188="http://schemas.microsoft.com/office/powerpoint/2018/8/main">
+  <p188:cm id="{7E894092-4E94-5C46-9A2E-8705F2F1AE62}" authorId="{415BEED1-CB72-B48E-F02F-A910FFABA975}" created="2026-06-15T20:07:21.574">
+    <ac:deMkLst xmlns:ac="http://schemas.microsoft.com/office/drawing/2013/main/command">
+      <pc:docMk xmlns:pc="http://schemas.microsoft.com/office/powerpoint/2013/main/command"/>
+      <pc:sldMk xmlns:pc="http://schemas.microsoft.com/office/powerpoint/2013/main/command" cId="0" sldId="259"/>
+      <ac:spMk id="27" creationId="{00000000-0000-0000-0000-000000000000}"/>
+    </ac:deMkLst>
+    <p188:txBody>
+      <a:bodyPr/>
+      <a:lstStyle/>
+      <a:p>
+        <a:r>
+          <a:rPr lang="en-US"/>
+          <a:t>rephrase</a:t>
+        </a:r>
+      </a:p>
+    </p188:txBody>
+  </p188:cm>
+  <p188:cm id="{8A48312C-DB11-0342-9988-3F272BF9A2C8}" authorId="{415BEED1-CB72-B48E-F02F-A910FFABA975}" created="2026-06-15T20:07:42.653">
+    <ac:deMkLst xmlns:ac="http://schemas.microsoft.com/office/drawing/2013/main/command">
+      <pc:docMk xmlns:pc="http://schemas.microsoft.com/office/powerpoint/2013/main/command"/>
+      <pc:sldMk xmlns:pc="http://schemas.microsoft.com/office/powerpoint/2013/main/command" cId="0" sldId="259"/>
+      <ac:spMk id="33" creationId="{00000000-0000-0000-0000-000000000000}"/>
+    </ac:deMkLst>
+    <p188:txBody>
+      <a:bodyPr/>
+      <a:lstStyle/>
+      <a:p>
+        <a:r>
+          <a:rPr lang="en-US"/>
+          <a:t>rephrase</a:t>
+        </a:r>
+      </a:p>
+    </p188:txBody>
+  </p188:cm>
+</p188:cmLst>
+</file>
+
+<file path=ppt/comments/modernComment_104_0.xml><?xml version="1.0" encoding="utf-8"?>
+<p188:cmLst xmlns:a="http://schemas.openxmlformats.org/drawingml/2006/main" xmlns:r="http://schemas.openxmlformats.org/officeDocument/2006/relationships" xmlns:p188="http://schemas.microsoft.com/office/powerpoint/2018/8/main">
+  <p188:cm id="{BE4E2295-FF4C-E64E-8DF0-BCAB05440C20}" authorId="{415BEED1-CB72-B48E-F02F-A910FFABA975}" created="2026-06-15T20:08:20.866">
+    <ac:deMkLst xmlns:ac="http://schemas.microsoft.com/office/drawing/2013/main/command">
+      <pc:docMk xmlns:pc="http://schemas.microsoft.com/office/powerpoint/2013/main/command"/>
+      <pc:sldMk xmlns:pc="http://schemas.microsoft.com/office/powerpoint/2013/main/command" cId="0" sldId="260"/>
+      <ac:spMk id="19" creationId="{00000000-0000-0000-0000-000000000000}"/>
+    </ac:deMkLst>
+    <p188:txBody>
+      <a:bodyPr/>
+      <a:lstStyle/>
+      <a:p>
+        <a:r>
+          <a:rPr lang="en-US"/>
+          <a:t>increase size</a:t>
+        </a:r>
+      </a:p>
+    </p188:txBody>
+  </p188:cm>
+  <p188:cm id="{2D7510F2-75F2-3640-B288-1A78C48EA7CE}" authorId="{415BEED1-CB72-B48E-F02F-A910FFABA975}" created="2026-06-15T20:09:13.855">
+    <ac:deMkLst xmlns:ac="http://schemas.microsoft.com/office/drawing/2013/main/command">
+      <pc:docMk xmlns:pc="http://schemas.microsoft.com/office/powerpoint/2013/main/command"/>
+      <pc:sldMk xmlns:pc="http://schemas.microsoft.com/office/powerpoint/2013/main/command" cId="0" sldId="260"/>
+      <ac:spMk id="32" creationId="{00000000-0000-0000-0000-000000000000}"/>
+    </ac:deMkLst>
+    <p188:txBody>
+      <a:bodyPr/>
+      <a:lstStyle/>
+      <a:p>
+        <a:r>
+          <a:rPr lang="en-US"/>
+          <a:t>rephrase</a:t>
+        </a:r>
+      </a:p>
+    </p188:txBody>
+  </p188:cm>
+</p188:cmLst>
+</file>
+
+<file path=ppt/comments/modernComment_107_0.xml><?xml version="1.0" encoding="utf-8"?>
+<p188:cmLst xmlns:a="http://schemas.openxmlformats.org/drawingml/2006/main" xmlns:r="http://schemas.openxmlformats.org/officeDocument/2006/relationships" xmlns:p188="http://schemas.microsoft.com/office/powerpoint/2018/8/main">
+  <p188:cm id="{7A9F5FE1-42C7-E845-8568-2B426FD2D456}" authorId="{415BEED1-CB72-B48E-F02F-A910FFABA975}" created="2026-06-15T20:05:46.588">
+    <ac:deMkLst xmlns:ac="http://schemas.microsoft.com/office/drawing/2013/main/command">
+      <pc:docMk xmlns:pc="http://schemas.microsoft.com/office/powerpoint/2013/main/command"/>
+      <pc:sldMk xmlns:pc="http://schemas.microsoft.com/office/powerpoint/2013/main/command" cId="0" sldId="263"/>
+      <ac:spMk id="21" creationId="{00000000-0000-0000-0000-000000000000}"/>
+    </ac:deMkLst>
+    <p188:txBody>
+      <a:bodyPr/>
+      <a:lstStyle/>
+      <a:p>
+        <a:r>
+          <a:rPr lang="en-US"/>
+          <a:t>Move into cards</a:t>
+        </a:r>
+      </a:p>
+    </p188:txBody>
+  </p188:cm>
+</p188:cmLst>
 </file>
 
 <file path=ppt/notesMasters/notesMaster1.xml><?xml version="1.0" encoding="utf-8"?>
@@ -976,7 +1139,7 @@
 </file>
 
 <file path=ppt/slides/slide1.xml><?xml version="1.0" encoding="utf-8"?>
-<p:sld xmlns:a="http://schemas.openxmlformats.org/drawingml/2006/main" xmlns:ns2="http://schemas.microsoft.com/office/drawing/2014/main" xmlns:ns3="http://schemas.microsoft.com/office/powerpoint/2010/main" xmlns:p="http://schemas.openxmlformats.org/presentationml/2006/main">
+<p:sld xmlns:a="http://schemas.openxmlformats.org/drawingml/2006/main" xmlns:r="http://schemas.openxmlformats.org/officeDocument/2006/relationships" xmlns:p="http://schemas.openxmlformats.org/presentationml/2006/main">
   <p:cSld>
     <p:bg>
       <p:bgPr>
@@ -1211,7 +1374,7 @@
           <p:cNvPr id="10" name="Q4 preview page marker">
             <a:extLst>
               <a:ext uri="{FF2B5EF4-FFF2-40B4-BE49-F238E27FC236}">
-                <ns2:creationId id="{639743E6-45F5-5FCD-A928-9E2EA9A5B01C}"/>
+                <a16:creationId xmlns:a16="http://schemas.microsoft.com/office/drawing/2014/main" id="{639743E6-45F5-5FCD-A928-9E2EA9A5B01C}"/>
               </a:ext>
             </a:extLst>
           </p:cNvPr>
@@ -1262,24 +1425,13 @@
               </a:rPr>
               <a:t>01 / 07</a:t>
             </a:r>
-            <a:r>
-              <a:rPr sz="900" b="0" dirty="0">
-                <a:solidFill>
-                  <a:srgbClr val="A5A5A5"/>
-                </a:solidFill>
-                <a:latin typeface="Arial"/>
-                <a:ea typeface="Arial"/>
-                <a:cs typeface="Arial"/>
-              </a:rPr>
-              <a:t/>
-            </a:r>
           </a:p>
         </p:txBody>
       </p:sp>
     </p:spTree>
     <p:extLst>
       <p:ext uri="{BB962C8B-B14F-4D97-AF65-F5344CB8AC3E}">
-        <ns3:creationId val="1264683463"/>
+        <p14:creationId xmlns:p14="http://schemas.microsoft.com/office/powerpoint/2010/main" val="1264683463"/>
       </p:ext>
     </p:extLst>
   </p:cSld>
@@ -1290,7 +1442,7 @@
 </file>
 
 <file path=ppt/slides/slide2.xml><?xml version="1.0" encoding="utf-8"?>
-<p:sld xmlns:a="http://schemas.openxmlformats.org/drawingml/2006/main" xmlns:ns2="http://schemas.microsoft.com/office/drawing/2014/main" xmlns:p="http://schemas.openxmlformats.org/presentationml/2006/main">
+<p:sld xmlns:a="http://schemas.openxmlformats.org/drawingml/2006/main" xmlns:r="http://schemas.openxmlformats.org/officeDocument/2006/relationships" xmlns:p="http://schemas.openxmlformats.org/presentationml/2006/main">
   <p:cSld name="Slide 1">
     <p:bg>
       <p:bgPr>
@@ -1491,7 +1643,7 @@
                 <a:ea typeface="Arial" pitchFamily="34" charset="-122"/>
                 <a:cs typeface="Arial" pitchFamily="34" charset="-120"/>
               </a:rPr>
-              <a:t>SMB Scale</a:t>
+              <a:t>Marketing Campaign Proposal</a:t>
             </a:r>
             <a:endParaRPr lang="en-US" sz="750" dirty="0"/>
           </a:p>
@@ -1502,7 +1654,7 @@
           <p:cNvPr id="7" name="Text 5">
             <a:extLst>
               <a:ext uri="{FF2B5EF4-FFF2-40B4-BE49-F238E27FC236}">
-                <ns2:creationId id="{639743E6-45F5-5FCD-A928-9E2EA9A5B01C}"/>
+                <a16:creationId xmlns:a16="http://schemas.microsoft.com/office/drawing/2014/main" id="{639743E6-45F5-5FCD-A928-9E2EA9A5B01C}"/>
               </a:ext>
             </a:extLst>
           </p:cNvPr>
@@ -1553,17 +1705,6 @@
               </a:rPr>
               <a:t>02 / 07</a:t>
             </a:r>
-            <a:r>
-              <a:rPr sz="900" b="0" dirty="0">
-                <a:solidFill>
-                  <a:srgbClr val="A5A5A5"/>
-                </a:solidFill>
-                <a:latin typeface="Arial"/>
-                <a:ea typeface="Arial"/>
-                <a:cs typeface="Arial"/>
-              </a:rPr>
-              <a:t/>
-            </a:r>
           </a:p>
         </p:txBody>
       </p:sp>
@@ -1668,7 +1809,7 @@
         </p:spPr>
         <p:txBody>
           <a:bodyPr wrap="square" lIns="0" tIns="0" rIns="0" bIns="0" rtlCol="0" anchor="t">
-            <a:normAutofit/>
+            <a:normAutofit fontScale="70000" lnSpcReduction="20000"/>
           </a:bodyPr>
           <a:lstStyle/>
           <a:p>
@@ -1681,7 +1822,7 @@
               <a:buChar char="§"/>
             </a:pPr>
             <a:r>
-              <a:rPr sz="1350">
+              <a:rPr sz="1350" dirty="0">
                 <a:solidFill>
                   <a:srgbClr val="D9D9D9"/>
                 </a:solidFill>
@@ -1699,7 +1840,7 @@
               <a:buChar char="§"/>
             </a:pPr>
             <a:r>
-              <a:rPr sz="1350">
+              <a:rPr sz="1350" dirty="0">
                 <a:solidFill>
                   <a:srgbClr val="D9D9D9"/>
                 </a:solidFill>
@@ -2422,11 +2563,16 @@
   <p:clrMapOvr>
     <a:masterClrMapping/>
   </p:clrMapOvr>
+  <p:extLst>
+    <p:ext uri="{6950BFC3-D8DA-4A85-94F7-54DA5524770B}">
+      <p188:commentRel xmlns:p188="http://schemas.microsoft.com/office/powerpoint/2018/8/main" r:id="rId3"/>
+    </p:ext>
+  </p:extLst>
 </p:sld>
 </file>
 
 <file path=ppt/slides/slide3.xml><?xml version="1.0" encoding="utf-8"?>
-<p:sld xmlns:a="http://schemas.openxmlformats.org/drawingml/2006/main" xmlns:ns2="http://schemas.microsoft.com/office/drawing/2014/main" xmlns:ns3="http://schemas.microsoft.com/office/powerpoint/2010/main" xmlns:p="http://schemas.openxmlformats.org/presentationml/2006/main">
+<p:sld xmlns:a="http://schemas.openxmlformats.org/drawingml/2006/main" xmlns:r="http://schemas.openxmlformats.org/officeDocument/2006/relationships" xmlns:p="http://schemas.openxmlformats.org/presentationml/2006/main">
   <p:cSld name="Slide 2">
     <p:bg>
       <p:bgPr>
@@ -2627,7 +2773,7 @@
                 <a:ea typeface="Arial" pitchFamily="34" charset="-122"/>
                 <a:cs typeface="Arial" pitchFamily="34" charset="-120"/>
               </a:rPr>
-              <a:t>SMB Scale</a:t>
+              <a:t>Marketing Campaign Proposal</a:t>
             </a:r>
             <a:endParaRPr lang="en-US" sz="750" dirty="0"/>
           </a:p>
@@ -2638,7 +2784,7 @@
           <p:cNvPr id="7" name="Text 5">
             <a:extLst>
               <a:ext uri="{FF2B5EF4-FFF2-40B4-BE49-F238E27FC236}">
-                <ns2:creationId id="{639743E6-45F5-5FCD-A928-9E2EA9A5B01C}"/>
+                <a16:creationId xmlns:a16="http://schemas.microsoft.com/office/drawing/2014/main" id="{639743E6-45F5-5FCD-A928-9E2EA9A5B01C}"/>
               </a:ext>
             </a:extLst>
           </p:cNvPr>
@@ -2689,17 +2835,6 @@
               </a:rPr>
               <a:t>03 / 07</a:t>
             </a:r>
-            <a:r>
-              <a:rPr sz="900" b="0" dirty="0">
-                <a:solidFill>
-                  <a:srgbClr val="A5A5A5"/>
-                </a:solidFill>
-                <a:latin typeface="Arial"/>
-                <a:ea typeface="Arial"/>
-                <a:cs typeface="Arial"/>
-              </a:rPr>
-              <a:t/>
-            </a:r>
           </a:p>
         </p:txBody>
       </p:sp>
@@ -2711,8 +2846,8 @@
         </p:nvSpPr>
         <p:spPr>
           <a:xfrm>
-            <a:off x="621792" y="1371600"/>
-            <a:ext cx="10561320" cy="438912"/>
+            <a:off x="621792" y="1371599"/>
+            <a:ext cx="10561320" cy="1117599"/>
           </a:xfrm>
           <a:prstGeom prst="rect">
             <a:avLst/>
@@ -2738,7 +2873,69 @@
                 <a:ea typeface="Arial" pitchFamily="34" charset="-122"/>
                 <a:cs typeface="Arial" pitchFamily="34" charset="-120"/>
               </a:rPr>
-              <a:t>Base audience: active sellers without an SMB bundle. Use SMB-likelihood and readiness scores to set message intensity by segment.</a:t>
+              <a:t>Base audience: </a:t>
+            </a:r>
+            <a:r>
+              <a:rPr lang="en-US" sz="1420" b="1" dirty="0">
+                <a:solidFill>
+                  <a:srgbClr val="F3F4F6"/>
+                </a:solidFill>
+                <a:latin typeface="Arial" pitchFamily="34" charset="0"/>
+                <a:ea typeface="Arial" pitchFamily="34" charset="-122"/>
+                <a:cs typeface="Arial" pitchFamily="34" charset="-120"/>
+              </a:rPr>
+              <a:t>active sellers without a bundle.</a:t>
+            </a:r>
+            <a:endParaRPr lang="en-US" sz="1420" dirty="0">
+              <a:solidFill>
+                <a:srgbClr val="F3F4F6"/>
+              </a:solidFill>
+              <a:latin typeface="Arial" pitchFamily="34" charset="0"/>
+              <a:ea typeface="Arial" pitchFamily="34" charset="-122"/>
+              <a:cs typeface="Arial" pitchFamily="34" charset="-120"/>
+            </a:endParaRPr>
+          </a:p>
+          <a:p>
+            <a:pPr marL="0" indent="0">
+              <a:buNone/>
+            </a:pPr>
+            <a:r>
+              <a:rPr lang="en-US" sz="1420" dirty="0">
+                <a:solidFill>
+                  <a:srgbClr val="F3F4F6"/>
+                </a:solidFill>
+                <a:latin typeface="Arial" pitchFamily="34" charset="0"/>
+                <a:ea typeface="Arial" pitchFamily="34" charset="-122"/>
+                <a:cs typeface="Arial" pitchFamily="34" charset="-120"/>
+              </a:rPr>
+              <a:t>Use SMB-likelihood and Outreach-Readiness scores to narrow the audience focus.</a:t>
+            </a:r>
+          </a:p>
+          <a:p>
+            <a:pPr marL="0" indent="0">
+              <a:buNone/>
+            </a:pPr>
+            <a:endParaRPr lang="en-US" sz="1420" dirty="0">
+              <a:solidFill>
+                <a:srgbClr val="F3F4F6"/>
+              </a:solidFill>
+              <a:latin typeface="Arial" pitchFamily="34" charset="0"/>
+              <a:cs typeface="Arial" pitchFamily="34" charset="-120"/>
+            </a:endParaRPr>
+          </a:p>
+          <a:p>
+            <a:pPr marL="0" indent="0">
+              <a:buNone/>
+            </a:pPr>
+            <a:r>
+              <a:rPr lang="en-US" sz="1420" dirty="0">
+                <a:solidFill>
+                  <a:srgbClr val="F3F4F6"/>
+                </a:solidFill>
+                <a:latin typeface="Arial" pitchFamily="34" charset="0"/>
+                <a:cs typeface="Arial" pitchFamily="34" charset="-120"/>
+              </a:rPr>
+              <a:t>Start with Tier 1; scale to other tiers if successful.</a:t>
             </a:r>
             <a:endParaRPr lang="en-US" sz="1420" dirty="0"/>
           </a:p>
@@ -2752,7 +2949,7 @@
         </p:nvSpPr>
         <p:spPr>
           <a:xfrm>
-            <a:off x="621792" y="2040000"/>
+            <a:off x="621792" y="2713598"/>
             <a:ext cx="2743200" cy="300000"/>
           </a:xfrm>
           <a:prstGeom prst="rect">
@@ -2763,7 +2960,7 @@
         </p:spPr>
         <p:txBody>
           <a:bodyPr wrap="square" lIns="0" tIns="0" rIns="0" bIns="0" rtlCol="0" anchor="ctr">
-            <a:normAutofit lnSpcReduction="10000"/>
+            <a:normAutofit/>
           </a:bodyPr>
           <a:lstStyle/>
           <a:p>
@@ -2794,43 +2991,43 @@
           <p:nvPr>
             <p:extLst>
               <p:ext uri="{D42A27DB-BD31-4B8C-83A1-F6EECF244321}">
-                <ns3:modId val="1579011935"/>
+                <p14:modId xmlns:p14="http://schemas.microsoft.com/office/powerpoint/2010/main" val="3345746758"/>
               </p:ext>
             </p:extLst>
           </p:nvPr>
         </p:nvGraphicFramePr>
         <p:xfrm>
-          <a:off x="760000" y="2440000"/>
-          <a:ext cx="9480000" cy="2530000"/>
+          <a:off x="621792" y="3120502"/>
+          <a:ext cx="8626711" cy="1891788"/>
         </p:xfrm>
         <a:graphic>
           <a:graphicData uri="http://schemas.openxmlformats.org/drawingml/2006/table">
             <a:tbl>
               <a:tblPr/>
               <a:tblGrid>
-                <a:gridCol w="1260000">
+                <a:gridCol w="1146588">
                   <a:extLst>
                     <a:ext uri="{9D8B030D-6E8A-4147-A177-3AD203B41FA5}">
-                      <ns2:colId val="20000"/>
+                      <a16:colId xmlns:a16="http://schemas.microsoft.com/office/drawing/2014/main" val="20000"/>
                     </a:ext>
                   </a:extLst>
                 </a:gridCol>
-                <a:gridCol w="3740000">
+                <a:gridCol w="3403365">
                   <a:extLst>
                     <a:ext uri="{9D8B030D-6E8A-4147-A177-3AD203B41FA5}">
-                      <ns2:colId val="20001"/>
+                      <a16:colId xmlns:a16="http://schemas.microsoft.com/office/drawing/2014/main" val="20001"/>
                     </a:ext>
                   </a:extLst>
                 </a:gridCol>
-                <a:gridCol w="4480000">
+                <a:gridCol w="4076758">
                   <a:extLst>
                     <a:ext uri="{9D8B030D-6E8A-4147-A177-3AD203B41FA5}">
-                      <ns2:colId val="20002"/>
+                      <a16:colId xmlns:a16="http://schemas.microsoft.com/office/drawing/2014/main" val="20002"/>
                     </a:ext>
                   </a:extLst>
                 </a:gridCol>
               </a:tblGrid>
-              <a:tr h="470000">
+              <a:tr h="337731">
                 <a:tc>
                   <a:txBody>
                     <a:bodyPr/>
@@ -2840,7 +3037,7 @@
                         <a:buNone/>
                       </a:pPr>
                       <a:r>
-                        <a:rPr sz="1260" b="1">
+                        <a:rPr sz="1260" b="1" dirty="0">
                           <a:solidFill>
                             <a:srgbClr val="F2F2F2"/>
                           </a:solidFill>
@@ -2900,7 +3097,7 @@
                         <a:buNone/>
                       </a:pPr>
                       <a:r>
-                        <a:rPr sz="1260" b="1">
+                        <a:rPr sz="1260" b="1" dirty="0">
                           <a:solidFill>
                             <a:srgbClr val="F2F2F2"/>
                           </a:solidFill>
@@ -3013,11 +3210,11 @@
                 </a:tc>
                 <a:extLst>
                   <a:ext uri="{0D108BD9-81ED-4DB2-BD59-A6C34878D82A}">
-                    <ns2:rowId val="10000"/>
+                    <a16:rowId xmlns:a16="http://schemas.microsoft.com/office/drawing/2014/main" val="10000"/>
                   </a:ext>
                 </a:extLst>
               </a:tr>
-              <a:tr h="515000">
+              <a:tr h="370067">
                 <a:tc>
                   <a:txBody>
                     <a:bodyPr/>
@@ -3087,7 +3284,7 @@
                         <a:buNone/>
                       </a:pPr>
                       <a:r>
-                        <a:rPr sz="1220" b="0">
+                        <a:rPr sz="1220" b="0" dirty="0">
                           <a:solidFill>
                             <a:srgbClr val="D9D9D9"/>
                           </a:solidFill>
@@ -3200,11 +3397,11 @@
                 </a:tc>
                 <a:extLst>
                   <a:ext uri="{0D108BD9-81ED-4DB2-BD59-A6C34878D82A}">
-                    <ns2:rowId val="10001"/>
+                    <a16:rowId xmlns:a16="http://schemas.microsoft.com/office/drawing/2014/main" val="10001"/>
                   </a:ext>
                 </a:extLst>
               </a:tr>
-              <a:tr h="515000">
+              <a:tr h="370067">
                 <a:tc>
                   <a:txBody>
                     <a:bodyPr/>
@@ -3387,11 +3584,11 @@
                 </a:tc>
                 <a:extLst>
                   <a:ext uri="{0D108BD9-81ED-4DB2-BD59-A6C34878D82A}">
-                    <ns2:rowId val="4021254877"/>
+                    <a16:rowId xmlns:a16="http://schemas.microsoft.com/office/drawing/2014/main" val="4021254877"/>
                   </a:ext>
                 </a:extLst>
               </a:tr>
-              <a:tr h="515000">
+              <a:tr h="370067">
                 <a:tc>
                   <a:txBody>
                     <a:bodyPr/>
@@ -3574,11 +3771,11 @@
                 </a:tc>
                 <a:extLst>
                   <a:ext uri="{0D108BD9-81ED-4DB2-BD59-A6C34878D82A}">
-                    <ns2:rowId val="2169815287"/>
+                    <a16:rowId xmlns:a16="http://schemas.microsoft.com/office/drawing/2014/main" val="2169815287"/>
                   </a:ext>
                 </a:extLst>
               </a:tr>
-              <a:tr h="515000">
+              <a:tr h="370067">
                 <a:tc>
                   <a:txBody>
                     <a:bodyPr/>
@@ -3648,7 +3845,7 @@
                         <a:buNone/>
                       </a:pPr>
                       <a:r>
-                        <a:rPr sz="1220" b="0">
+                        <a:rPr sz="1220" b="0" dirty="0">
                           <a:solidFill>
                             <a:srgbClr val="D9D9D9"/>
                           </a:solidFill>
@@ -3708,7 +3905,7 @@
                         <a:buNone/>
                       </a:pPr>
                       <a:r>
-                        <a:rPr sz="1220" b="0">
+                        <a:rPr sz="1220" b="0" dirty="0">
                           <a:solidFill>
                             <a:srgbClr val="D9D9D9"/>
                           </a:solidFill>
@@ -3761,7 +3958,7 @@
                 </a:tc>
                 <a:extLst>
                   <a:ext uri="{0D108BD9-81ED-4DB2-BD59-A6C34878D82A}">
-                    <ns2:rowId val="1406103413"/>
+                    <a16:rowId xmlns:a16="http://schemas.microsoft.com/office/drawing/2014/main" val="1406103413"/>
                   </a:ext>
                 </a:extLst>
               </a:tr>
@@ -3769,43 +3966,6 @@
           </a:graphicData>
         </a:graphic>
       </p:graphicFrame>
-      <p:sp>
-        <p:nvSpPr>
-          <p:cNvPr id="28" name="Target audience closing"/>
-          <p:cNvSpPr/>
-          <p:nvPr/>
-        </p:nvSpPr>
-        <p:spPr>
-          <a:xfrm>
-            <a:off x="760000" y="5230000"/>
-            <a:ext cx="9480000" cy="360000"/>
-          </a:xfrm>
-          <a:prstGeom prst="rect">
-            <a:avLst/>
-          </a:prstGeom>
-          <a:noFill/>
-          <a:ln/>
-        </p:spPr>
-        <p:txBody>
-          <a:bodyPr wrap="square" lIns="0" tIns="0" rIns="0" bIns="0" rtlCol="0" anchor="t">
-            <a:normAutofit/>
-          </a:bodyPr>
-          <a:lstStyle/>
-          <a:p>
-            <a:pPr marL="0" indent="0">
-              <a:buNone/>
-            </a:pPr>
-            <a:r>
-              <a:rPr sz="1250">
-                <a:solidFill>
-                  <a:srgbClr val="D9D9D9"/>
-                </a:solidFill>
-              </a:rPr>
-              <a:t>Start with Tier 1 for the strongest adoption impact, then broaden to Tier 2 and Tier 3 through scalable CRM and in-platform prompts.</a:t>
-            </a:r>
-          </a:p>
-        </p:txBody>
-      </p:sp>
     </p:spTree>
   </p:cSld>
   <p:clrMapOvr>
@@ -3815,7 +3975,7 @@
 </file>
 
 <file path=ppt/slides/slide4.xml><?xml version="1.0" encoding="utf-8"?>
-<p:sld xmlns:a="http://schemas.openxmlformats.org/drawingml/2006/main" xmlns:ns2="http://schemas.microsoft.com/office/drawing/2014/main" xmlns:p="http://schemas.openxmlformats.org/presentationml/2006/main">
+<p:sld xmlns:a="http://schemas.openxmlformats.org/drawingml/2006/main" xmlns:r="http://schemas.openxmlformats.org/officeDocument/2006/relationships" xmlns:p="http://schemas.openxmlformats.org/presentationml/2006/main">
   <p:cSld name="Slide 2">
     <p:bg>
       <p:bgPr>
@@ -4027,7 +4187,7 @@
           <p:cNvPr id="7" name="Text 5">
             <a:extLst>
               <a:ext uri="{FF2B5EF4-FFF2-40B4-BE49-F238E27FC236}">
-                <ns2:creationId id="{639743E6-45F5-5FCD-A928-9E2EA9A5B01C}"/>
+                <a16:creationId xmlns:a16="http://schemas.microsoft.com/office/drawing/2014/main" id="{639743E6-45F5-5FCD-A928-9E2EA9A5B01C}"/>
               </a:ext>
             </a:extLst>
           </p:cNvPr>
@@ -4077,17 +4237,6 @@
                 <a:cs typeface="Arial"/>
               </a:rPr>
               <a:t>04 / 07</a:t>
-            </a:r>
-            <a:r>
-              <a:rPr sz="900" b="0" dirty="0">
-                <a:solidFill>
-                  <a:srgbClr val="A5A5A5"/>
-                </a:solidFill>
-                <a:latin typeface="Arial"/>
-                <a:ea typeface="Arial"/>
-                <a:cs typeface="Arial"/>
-              </a:rPr>
-              <a:t/>
             </a:r>
           </a:p>
         </p:txBody>
@@ -4340,48 +4489,9 @@
                 <a:ea typeface="Arial" pitchFamily="34" charset="-122"/>
                 <a:cs typeface="Arial" pitchFamily="34" charset="-120"/>
               </a:rPr>
-              <a:t>Email / CRM journeys triggered by seller behavior, such as repeated listing, paid-feature use, competitive-category activity, or buyer interest without a bundle.</a:t>
+              <a:t>Email / CRM journeys triggered by seller behavior, such as repeated listing, paid-feature use, competitive-category activity.</a:t>
             </a:r>
             <a:endParaRPr lang="en-US" sz="1250" dirty="0"/>
-          </a:p>
-        </p:txBody>
-      </p:sp>
-      <p:sp>
-        <p:nvSpPr>
-          <p:cNvPr id="14" name="Lifecycle CRM role"/>
-          <p:cNvSpPr/>
-          <p:nvPr/>
-        </p:nvSpPr>
-        <p:spPr>
-          <a:xfrm>
-            <a:off x="804672" y="3977640"/>
-            <a:ext cx="4206240" cy="274320"/>
-          </a:xfrm>
-          <a:prstGeom prst="rect">
-            <a:avLst/>
-          </a:prstGeom>
-          <a:noFill/>
-          <a:ln/>
-        </p:spPr>
-        <p:txBody>
-          <a:bodyPr wrap="square" lIns="0" tIns="0" rIns="0" bIns="0" rtlCol="0" anchor="t"/>
-          <a:lstStyle/>
-          <a:p>
-            <a:pPr marL="0" indent="0">
-              <a:buNone/>
-            </a:pPr>
-            <a:r>
-              <a:rPr lang="en-US" sz="1100" dirty="0">
-                <a:solidFill>
-                  <a:srgbClr val="A5A5A5"/>
-                </a:solidFill>
-                <a:latin typeface="Arial" pitchFamily="34" charset="0"/>
-                <a:ea typeface="Arial" pitchFamily="34" charset="-122"/>
-                <a:cs typeface="Arial" pitchFamily="34" charset="-120"/>
-              </a:rPr>
-              <a:t>Tier role: strongest for proactive journeys when readiness and seller behavior both signal intent.</a:t>
-            </a:r>
-            <a:endParaRPr lang="en-US" sz="1100" dirty="0"/>
           </a:p>
         </p:txBody>
       </p:sp>
@@ -4563,45 +4673,6 @@
       </p:sp>
       <p:sp>
         <p:nvSpPr>
-          <p:cNvPr id="19" name="In-platform Prompts role"/>
-          <p:cNvSpPr/>
-          <p:nvPr/>
-        </p:nvSpPr>
-        <p:spPr>
-          <a:xfrm>
-            <a:off x="6473952" y="3977640"/>
-            <a:ext cx="4206240" cy="274320"/>
-          </a:xfrm>
-          <a:prstGeom prst="rect">
-            <a:avLst/>
-          </a:prstGeom>
-          <a:noFill/>
-          <a:ln/>
-        </p:spPr>
-        <p:txBody>
-          <a:bodyPr wrap="square" lIns="0" tIns="0" rIns="0" bIns="0" rtlCol="0" anchor="t"/>
-          <a:lstStyle/>
-          <a:p>
-            <a:pPr marL="0" indent="0">
-              <a:buNone/>
-            </a:pPr>
-            <a:r>
-              <a:rPr lang="en-US" sz="1100" dirty="0">
-                <a:solidFill>
-                  <a:srgbClr val="A5A5A5"/>
-                </a:solidFill>
-                <a:latin typeface="Arial" pitchFamily="34" charset="0"/>
-                <a:ea typeface="Arial" pitchFamily="34" charset="-122"/>
-                <a:cs typeface="Arial" pitchFamily="34" charset="-120"/>
-              </a:rPr>
-              <a:t>Tier role: reinforces the CRM message at the moment sellers manage supply or visibility spend.</a:t>
-            </a:r>
-            <a:endParaRPr lang="en-US" sz="1100" dirty="0"/>
-          </a:p>
-        </p:txBody>
-      </p:sp>
-      <p:sp>
-        <p:nvSpPr>
           <p:cNvPr id="20" name="How channels work label"/>
           <p:cNvSpPr/>
           <p:nvPr/>
@@ -4683,11 +4754,16 @@
   <p:clrMapOvr>
     <a:masterClrMapping/>
   </p:clrMapOvr>
+  <p:extLst>
+    <p:ext uri="{6950BFC3-D8DA-4A85-94F7-54DA5524770B}">
+      <p188:commentRel xmlns:p188="http://schemas.microsoft.com/office/powerpoint/2018/8/main" r:id="rId2"/>
+    </p:ext>
+  </p:extLst>
 </p:sld>
 </file>
 
 <file path=ppt/slides/slide5.xml><?xml version="1.0" encoding="utf-8"?>
-<p:sld xmlns:a="http://schemas.openxmlformats.org/drawingml/2006/main" xmlns:ns2="http://schemas.microsoft.com/office/drawing/2014/main" xmlns:ns3="http://schemas.microsoft.com/office/powerpoint/2010/main" xmlns:p="http://schemas.openxmlformats.org/presentationml/2006/main">
+<p:sld xmlns:a="http://schemas.openxmlformats.org/drawingml/2006/main" xmlns:r="http://schemas.openxmlformats.org/officeDocument/2006/relationships" xmlns:p="http://schemas.openxmlformats.org/presentationml/2006/main">
   <p:cSld name="Slide 3">
     <p:bg>
       <p:bgPr>
@@ -4888,7 +4964,7 @@
                 <a:ea typeface="Arial" pitchFamily="34" charset="-122"/>
                 <a:cs typeface="Arial" pitchFamily="34" charset="-120"/>
               </a:rPr>
-              <a:t>SMB Scale</a:t>
+              <a:t>Marketing Campaign Proposal</a:t>
             </a:r>
             <a:endParaRPr lang="en-US" sz="750" dirty="0"/>
           </a:p>
@@ -4899,7 +4975,7 @@
           <p:cNvPr id="7" name="Text 5">
             <a:extLst>
               <a:ext uri="{FF2B5EF4-FFF2-40B4-BE49-F238E27FC236}">
-                <ns2:creationId id="{639743E6-45F5-5FCD-A928-9E2EA9A5B01C}"/>
+                <a16:creationId xmlns:a16="http://schemas.microsoft.com/office/drawing/2014/main" id="{639743E6-45F5-5FCD-A928-9E2EA9A5B01C}"/>
               </a:ext>
             </a:extLst>
           </p:cNvPr>
@@ -4950,1453 +5026,1075 @@
               </a:rPr>
               <a:t>05 / 07</a:t>
             </a:r>
-            <a:r>
-              <a:rPr sz="900" b="0" dirty="0">
-                <a:solidFill>
-                  <a:srgbClr val="A5A5A5"/>
+          </a:p>
+        </p:txBody>
+      </p:sp>
+      <p:sp>
+        <p:nvSpPr>
+          <p:cNvPr id="8" name="Text 6"/>
+          <p:cNvSpPr/>
+          <p:nvPr/>
+        </p:nvSpPr>
+        <p:spPr>
+          <a:xfrm>
+            <a:off x="621792" y="1371600"/>
+            <a:ext cx="10149840" cy="292608"/>
+          </a:xfrm>
+          <a:prstGeom prst="rect">
+            <a:avLst/>
+          </a:prstGeom>
+          <a:noFill/>
+          <a:ln/>
+        </p:spPr>
+        <p:txBody>
+          <a:bodyPr wrap="square" lIns="0" tIns="0" rIns="0" bIns="0" rtlCol="0" anchor="t">
+            <a:normAutofit/>
+          </a:bodyPr>
+          <a:lstStyle/>
+          <a:p>
+            <a:pPr marL="0" indent="0">
+              <a:buNone/>
+            </a:pPr>
+            <a:r>
+              <a:rPr lang="en-US" sz="1500" dirty="0">
+                <a:solidFill>
+                  <a:srgbClr val="F3F4F6"/>
+                </a:solidFill>
+                <a:latin typeface="Arial" pitchFamily="34" charset="0"/>
+                <a:ea typeface="Arial" pitchFamily="34" charset="-122"/>
+                <a:cs typeface="Arial" pitchFamily="34" charset="-120"/>
+              </a:rPr>
+              <a:t>Use email / CRM journeys triggered by seller behavior.</a:t>
+            </a:r>
+            <a:endParaRPr lang="en-US" sz="1500" dirty="0"/>
+          </a:p>
+        </p:txBody>
+      </p:sp>
+      <p:sp>
+        <p:nvSpPr>
+          <p:cNvPr id="9" name="Text 7"/>
+          <p:cNvSpPr/>
+          <p:nvPr/>
+        </p:nvSpPr>
+        <p:spPr>
+          <a:xfrm>
+            <a:off x="621792" y="1840000"/>
+            <a:ext cx="2743200" cy="256032"/>
+          </a:xfrm>
+          <a:prstGeom prst="rect">
+            <a:avLst/>
+          </a:prstGeom>
+          <a:noFill/>
+          <a:ln/>
+        </p:spPr>
+        <p:txBody>
+          <a:bodyPr wrap="square" lIns="0" tIns="0" rIns="0" bIns="0" rtlCol="0" anchor="ctr">
+            <a:normAutofit/>
+          </a:bodyPr>
+          <a:lstStyle/>
+          <a:p>
+            <a:pPr marL="0" indent="0">
+              <a:buNone/>
+            </a:pPr>
+            <a:r>
+              <a:rPr lang="en-US" sz="1600" b="1" dirty="0">
+                <a:solidFill>
+                  <a:srgbClr val="FF735B"/>
+                </a:solidFill>
+                <a:latin typeface="Arial" pitchFamily="34" charset="0"/>
+                <a:ea typeface="Arial" pitchFamily="34" charset="-122"/>
+                <a:cs typeface="Arial" pitchFamily="34" charset="-120"/>
+              </a:rPr>
+              <a:t>Examples of Triggers</a:t>
+            </a:r>
+            <a:endParaRPr lang="en-US" sz="1800" dirty="0"/>
+          </a:p>
+        </p:txBody>
+      </p:sp>
+      <p:sp>
+        <p:nvSpPr>
+          <p:cNvPr id="10" name="2x2 card 1"/>
+          <p:cNvSpPr/>
+          <p:nvPr/>
+        </p:nvSpPr>
+        <p:spPr>
+          <a:xfrm>
+            <a:off x="628650" y="2247900"/>
+            <a:ext cx="4953000" cy="1543050"/>
+          </a:xfrm>
+          <a:custGeom>
+            <a:avLst/>
+            <a:gdLst/>
+            <a:ahLst/>
+            <a:cxnLst/>
+            <a:rect l="0" t="0" r="0" b="0"/>
+            <a:pathLst>
+              <a:path w="4953000" h="1543050">
+                <a:moveTo>
+                  <a:pt x="0" y="0"/>
+                </a:moveTo>
+                <a:lnTo>
+                  <a:pt x="4953000" y="0"/>
+                </a:lnTo>
+                <a:lnTo>
+                  <a:pt x="4953000" y="1473050"/>
+                </a:lnTo>
+                <a:cubicBezTo>
+                  <a:pt x="4953000" y="1511711"/>
+                  <a:pt x="4921661" y="1543050"/>
+                  <a:pt x="4883000" y="1543050"/>
+                </a:cubicBezTo>
+                <a:lnTo>
+                  <a:pt x="70000" y="1543050"/>
+                </a:lnTo>
+                <a:cubicBezTo>
+                  <a:pt x="31339" y="1543050"/>
+                  <a:pt x="0" y="1511711"/>
+                  <a:pt x="0" y="1473050"/>
+                </a:cubicBezTo>
+                <a:lnTo>
+                  <a:pt x="0" y="0"/>
+                </a:lnTo>
+                <a:close/>
+              </a:path>
+            </a:pathLst>
+          </a:custGeom>
+          <a:solidFill>
+            <a:srgbClr val="0D0D0D"/>
+          </a:solidFill>
+          <a:ln>
+            <a:solidFill>
+              <a:srgbClr val="303030"/>
+            </a:solidFill>
+          </a:ln>
+        </p:spPr>
+        <p:txBody>
+          <a:bodyPr/>
+          <a:lstStyle/>
+          <a:p>
+            <a:endParaRPr lang="en-US"/>
+          </a:p>
+        </p:txBody>
+      </p:sp>
+      <p:sp>
+        <p:nvSpPr>
+          <p:cNvPr id="11" name="2x2 card accent 1"/>
+          <p:cNvSpPr/>
+          <p:nvPr/>
+        </p:nvSpPr>
+        <p:spPr>
+          <a:xfrm>
+            <a:off x="628650" y="2247900"/>
+            <a:ext cx="4953000" cy="38100"/>
+          </a:xfrm>
+          <a:prstGeom prst="rect">
+            <a:avLst/>
+          </a:prstGeom>
+          <a:solidFill>
+            <a:srgbClr val="FF735B"/>
+          </a:solidFill>
+          <a:ln>
+            <a:noFill/>
+          </a:ln>
+        </p:spPr>
+        <p:txBody>
+          <a:bodyPr/>
+          <a:lstStyle/>
+          <a:p>
+            <a:endParaRPr lang="en-US"/>
+          </a:p>
+        </p:txBody>
+      </p:sp>
+      <p:sp>
+        <p:nvSpPr>
+          <p:cNvPr id="12" name="2x2 card label 1"/>
+          <p:cNvSpPr/>
+          <p:nvPr/>
+        </p:nvSpPr>
+        <p:spPr>
+          <a:xfrm>
+            <a:off x="858650" y="2492900"/>
+            <a:ext cx="4493000" cy="140000"/>
+          </a:xfrm>
+          <a:prstGeom prst="rect">
+            <a:avLst/>
+          </a:prstGeom>
+          <a:noFill/>
+          <a:ln>
+            <a:noFill/>
+          </a:ln>
+        </p:spPr>
+        <p:txBody>
+          <a:bodyPr lIns="0" tIns="0" rIns="0" bIns="0" anchor="t"/>
+          <a:lstStyle/>
+          <a:p>
+            <a:pPr fontAlgn="base"/>
+            <a:r>
+              <a:rPr sz="850" b="1">
+                <a:solidFill>
+                  <a:srgbClr val="A7A7A7"/>
                 </a:solidFill>
                 <a:latin typeface="Arial"/>
                 <a:ea typeface="Arial"/>
                 <a:cs typeface="Arial"/>
               </a:rPr>
-              <a:t/>
-            </a:r>
-          </a:p>
-        </p:txBody>
-      </p:sp>
-      <p:sp>
-        <p:nvSpPr>
-          <p:cNvPr id="8" name="Text 6"/>
-          <p:cNvSpPr/>
-          <p:nvPr/>
-        </p:nvSpPr>
-        <p:spPr>
-          <a:xfrm>
-            <a:off x="621792" y="1371600"/>
-            <a:ext cx="10149840" cy="292608"/>
-          </a:xfrm>
-          <a:prstGeom prst="rect">
-            <a:avLst/>
-          </a:prstGeom>
-          <a:noFill/>
-          <a:ln/>
-        </p:spPr>
-        <p:txBody>
-          <a:bodyPr wrap="square" lIns="0" tIns="0" rIns="0" bIns="0" rtlCol="0" anchor="t">
-            <a:normAutofit/>
-          </a:bodyPr>
-          <a:lstStyle/>
-          <a:p>
-            <a:pPr marL="0" indent="0">
-              <a:buNone/>
-            </a:pPr>
-            <a:r>
-              <a:rPr lang="en-US" sz="1500" dirty="0">
-                <a:solidFill>
-                  <a:srgbClr val="F3F4F6"/>
-                </a:solidFill>
-                <a:latin typeface="Arial" pitchFamily="34" charset="0"/>
-                <a:ea typeface="Arial" pitchFamily="34" charset="-122"/>
-                <a:cs typeface="Arial" pitchFamily="34" charset="-120"/>
-              </a:rPr>
-              <a:t>Use email / CRM journeys triggered by seller behavior.</a:t>
-            </a:r>
-            <a:endParaRPr lang="en-US" sz="1500" dirty="0"/>
-          </a:p>
-        </p:txBody>
-      </p:sp>
-      <p:sp>
-        <p:nvSpPr>
-          <p:cNvPr id="9" name="Text 7"/>
-          <p:cNvSpPr/>
-          <p:nvPr/>
-        </p:nvSpPr>
-        <p:spPr>
-          <a:xfrm>
-            <a:off x="621792" y="1840000"/>
-            <a:ext cx="2743200" cy="256032"/>
-          </a:xfrm>
-          <a:prstGeom prst="rect">
-            <a:avLst/>
-          </a:prstGeom>
-          <a:noFill/>
-          <a:ln/>
-        </p:spPr>
-        <p:txBody>
-          <a:bodyPr wrap="square" lIns="0" tIns="0" rIns="0" bIns="0" rtlCol="0" anchor="ctr">
-            <a:normAutofit lnSpcReduction="10000"/>
-          </a:bodyPr>
-          <a:lstStyle/>
-          <a:p>
-            <a:pPr marL="0" indent="0">
-              <a:buNone/>
-            </a:pPr>
-            <a:r>
-              <a:rPr lang="en-US" sz="1600" b="1" dirty="0">
-                <a:solidFill>
-                  <a:srgbClr val="FF735B"/>
-                </a:solidFill>
-                <a:latin typeface="Arial" pitchFamily="34" charset="0"/>
-                <a:ea typeface="Arial" pitchFamily="34" charset="-122"/>
-                <a:cs typeface="Arial" pitchFamily="34" charset="-120"/>
-              </a:rPr>
-              <a:t>Examples of Triggers</a:t>
-            </a:r>
-            <a:endParaRPr lang="en-US" sz="1800" dirty="0"/>
-          </a:p>
-        </p:txBody>
-      </p:sp>
-      <p:graphicFrame>
-        <p:nvGraphicFramePr>
-          <p:cNvPr id="10" name="Table 0"/>
-          <p:cNvGraphicFramePr>
-            <a:graphicFrameLocks noGrp="1"/>
-          </p:cNvGraphicFramePr>
-          <p:nvPr>
-            <p:extLst>
-              <p:ext uri="{D42A27DB-BD31-4B8C-83A1-F6EECF244321}">
-                <ns3:modId val="1579011935"/>
-              </p:ext>
-            </p:extLst>
-          </p:nvPr>
-        </p:nvGraphicFramePr>
-        <p:xfrm>
-          <a:off x="650000" y="2240000"/>
-          <a:ext cx="10040000" cy="2260000"/>
-        </p:xfrm>
-        <a:graphic>
-          <a:graphicData uri="http://schemas.openxmlformats.org/drawingml/2006/table">
-            <a:tbl>
-              <a:tblPr/>
-              <a:tblGrid>
-                <a:gridCol w="3400000">
-                  <a:extLst>
-                    <a:ext uri="{9D8B030D-6E8A-4147-A177-3AD203B41FA5}">
-                      <ns2:colId val="20000"/>
-                    </a:ext>
-                  </a:extLst>
-                </a:gridCol>
-                <a:gridCol w="6640000">
-                  <a:extLst>
-                    <a:ext uri="{9D8B030D-6E8A-4147-A177-3AD203B41FA5}">
-                      <ns2:colId val="20001"/>
-                    </a:ext>
-                  </a:extLst>
-                </a:gridCol>
-              </a:tblGrid>
-              <a:tr h="452000">
-                <a:tc>
-                  <a:txBody>
-                    <a:bodyPr/>
-                    <a:lstStyle/>
-                    <a:p>
-                      <a:pPr marL="0" indent="0">
-                        <a:buNone/>
-                      </a:pPr>
-                      <a:r>
-                        <a:rPr sz="1140" b="1">
-                          <a:solidFill>
-                            <a:srgbClr val="F2F2F2"/>
-                          </a:solidFill>
-                        </a:rPr>
-                        <a:t>Trigger</a:t>
-                      </a:r>
-                    </a:p>
-                  </a:txBody>
-                  <a:tcPr marL="32000" marR="32000" marT="26000" marB="26000" anchor="ctr">
-                    <a:lnL w="12700" cap="flat" cmpd="sng" algn="ctr">
-                      <a:solidFill>
-                        <a:srgbClr val="2D2D2D"/>
-                      </a:solidFill>
-                      <a:prstDash val="solid"/>
-                      <a:round/>
-                      <a:headEnd type="none" w="med" len="med"/>
-                      <a:tailEnd type="none" w="med" len="med"/>
-                    </a:lnL>
-                    <a:lnR w="12700" cap="flat" cmpd="sng" algn="ctr">
-                      <a:solidFill>
-                        <a:srgbClr val="2D2D2D"/>
-                      </a:solidFill>
-                      <a:prstDash val="solid"/>
-                      <a:round/>
-                      <a:headEnd type="none" w="med" len="med"/>
-                      <a:tailEnd type="none" w="med" len="med"/>
-                    </a:lnR>
-                    <a:lnT w="12700" cap="flat" cmpd="sng" algn="ctr">
-                      <a:solidFill>
-                        <a:srgbClr val="2D2D2D"/>
-                      </a:solidFill>
-                      <a:prstDash val="solid"/>
-                      <a:round/>
-                      <a:headEnd type="none" w="med" len="med"/>
-                      <a:tailEnd type="none" w="med" len="med"/>
-                    </a:lnT>
-                    <a:lnB w="12700" cap="flat" cmpd="sng" algn="ctr">
-                      <a:solidFill>
-                        <a:srgbClr val="2D2D2D"/>
-                      </a:solidFill>
-                      <a:prstDash val="solid"/>
-                      <a:round/>
-                      <a:headEnd type="none" w="med" len="med"/>
-                      <a:tailEnd type="none" w="med" len="med"/>
-                    </a:lnB>
-                    <a:solidFill>
-                      <a:srgbClr val="161616"/>
-                    </a:solidFill>
-                  </a:tcPr>
-                </a:tc>
-                <a:tc>
-                  <a:txBody>
-                    <a:bodyPr/>
-                    <a:lstStyle/>
-                    <a:p>
-                      <a:pPr marL="0" indent="0">
-                        <a:buNone/>
-                      </a:pPr>
-                      <a:r>
-                        <a:rPr sz="1140" b="1">
-                          <a:solidFill>
-                            <a:srgbClr val="F2F2F2"/>
-                          </a:solidFill>
-                        </a:rPr>
-                        <a:t>Purpose</a:t>
-                      </a:r>
-                    </a:p>
-                  </a:txBody>
-                  <a:tcPr marL="32000" marR="32000" marT="26000" marB="26000" anchor="ctr">
-                    <a:lnL w="12700" cap="flat" cmpd="sng" algn="ctr">
-                      <a:solidFill>
-                        <a:srgbClr val="2D2D2D"/>
-                      </a:solidFill>
-                      <a:prstDash val="solid"/>
-                      <a:round/>
-                      <a:headEnd type="none" w="med" len="med"/>
-                      <a:tailEnd type="none" w="med" len="med"/>
-                    </a:lnL>
-                    <a:lnR w="12700" cap="flat" cmpd="sng" algn="ctr">
-                      <a:solidFill>
-                        <a:srgbClr val="2D2D2D"/>
-                      </a:solidFill>
-                      <a:prstDash val="solid"/>
-                      <a:round/>
-                      <a:headEnd type="none" w="med" len="med"/>
-                      <a:tailEnd type="none" w="med" len="med"/>
-                    </a:lnR>
-                    <a:lnT w="12700" cap="flat" cmpd="sng" algn="ctr">
-                      <a:solidFill>
-                        <a:srgbClr val="2D2D2D"/>
-                      </a:solidFill>
-                      <a:prstDash val="solid"/>
-                      <a:round/>
-                      <a:headEnd type="none" w="med" len="med"/>
-                      <a:tailEnd type="none" w="med" len="med"/>
-                    </a:lnT>
-                    <a:lnB w="12700" cap="flat" cmpd="sng" algn="ctr">
-                      <a:solidFill>
-                        <a:srgbClr val="2D2D2D"/>
-                      </a:solidFill>
-                      <a:prstDash val="solid"/>
-                      <a:round/>
-                      <a:headEnd type="none" w="med" len="med"/>
-                      <a:tailEnd type="none" w="med" len="med"/>
-                    </a:lnB>
-                    <a:solidFill>
-                      <a:srgbClr val="161616"/>
-                    </a:solidFill>
-                  </a:tcPr>
-                </a:tc>
-                <a:extLst>
-                  <a:ext uri="{0D108BD9-81ED-4DB2-BD59-A6C34878D82A}">
-                    <ns2:rowId val="10000"/>
-                  </a:ext>
-                </a:extLst>
-              </a:tr>
-              <a:tr h="452000">
-                <a:tc>
-                  <a:txBody>
-                    <a:bodyPr/>
-                    <a:lstStyle/>
-                    <a:p>
-                      <a:pPr marL="0" indent="0">
-                        <a:buNone/>
-                      </a:pPr>
-                      <a:r>
-                        <a:rPr sz="1060" b="0">
-                          <a:solidFill>
-                            <a:srgbClr val="D9D9D9"/>
-                          </a:solidFill>
-                        </a:rPr>
-                        <a:t>Seller lists repeatedly</a:t>
-                      </a:r>
-                    </a:p>
-                  </a:txBody>
-                  <a:tcPr marL="32000" marR="32000" marT="26000" marB="26000" anchor="ctr">
-                    <a:lnL w="12700" cap="flat" cmpd="sng" algn="ctr">
-                      <a:solidFill>
-                        <a:srgbClr val="2D2D2D"/>
-                      </a:solidFill>
-                      <a:prstDash val="solid"/>
-                      <a:round/>
-                      <a:headEnd type="none" w="med" len="med"/>
-                      <a:tailEnd type="none" w="med" len="med"/>
-                    </a:lnL>
-                    <a:lnR w="12700" cap="flat" cmpd="sng" algn="ctr">
-                      <a:solidFill>
-                        <a:srgbClr val="2D2D2D"/>
-                      </a:solidFill>
-                      <a:prstDash val="solid"/>
-                      <a:round/>
-                      <a:headEnd type="none" w="med" len="med"/>
-                      <a:tailEnd type="none" w="med" len="med"/>
-                    </a:lnR>
-                    <a:lnT w="12700" cap="flat" cmpd="sng" algn="ctr">
-                      <a:solidFill>
-                        <a:srgbClr val="2D2D2D"/>
-                      </a:solidFill>
-                      <a:prstDash val="solid"/>
-                      <a:round/>
-                      <a:headEnd type="none" w="med" len="med"/>
-                      <a:tailEnd type="none" w="med" len="med"/>
-                    </a:lnT>
-                    <a:lnB w="12700" cap="flat" cmpd="sng" algn="ctr">
-                      <a:solidFill>
-                        <a:srgbClr val="2D2D2D"/>
-                      </a:solidFill>
-                      <a:prstDash val="solid"/>
-                      <a:round/>
-                      <a:headEnd type="none" w="med" len="med"/>
-                      <a:tailEnd type="none" w="med" len="med"/>
-                    </a:lnB>
-                    <a:solidFill>
-                      <a:srgbClr val="101010"/>
-                    </a:solidFill>
-                  </a:tcPr>
-                </a:tc>
-                <a:tc>
-                  <a:txBody>
-                    <a:bodyPr/>
-                    <a:lstStyle/>
-                    <a:p>
-                      <a:pPr marL="0" indent="0">
-                        <a:buNone/>
-                      </a:pPr>
-                      <a:r>
-                        <a:rPr sz="1060" b="0">
-                          <a:solidFill>
-                            <a:srgbClr val="D9D9D9"/>
-                          </a:solidFill>
-                        </a:rPr>
-                        <a:t>Promote bundle when commercial intent is high</a:t>
-                      </a:r>
-                    </a:p>
-                  </a:txBody>
-                  <a:tcPr marL="32000" marR="32000" marT="26000" marB="26000" anchor="ctr">
-                    <a:lnL w="12700" cap="flat" cmpd="sng" algn="ctr">
-                      <a:solidFill>
-                        <a:srgbClr val="2D2D2D"/>
-                      </a:solidFill>
-                      <a:prstDash val="solid"/>
-                      <a:round/>
-                      <a:headEnd type="none" w="med" len="med"/>
-                      <a:tailEnd type="none" w="med" len="med"/>
-                    </a:lnL>
-                    <a:lnR w="12700" cap="flat" cmpd="sng" algn="ctr">
-                      <a:solidFill>
-                        <a:srgbClr val="2D2D2D"/>
-                      </a:solidFill>
-                      <a:prstDash val="solid"/>
-                      <a:round/>
-                      <a:headEnd type="none" w="med" len="med"/>
-                      <a:tailEnd type="none" w="med" len="med"/>
-                    </a:lnR>
-                    <a:lnT w="12700" cap="flat" cmpd="sng" algn="ctr">
-                      <a:solidFill>
-                        <a:srgbClr val="2D2D2D"/>
-                      </a:solidFill>
-                      <a:prstDash val="solid"/>
-                      <a:round/>
-                      <a:headEnd type="none" w="med" len="med"/>
-                      <a:tailEnd type="none" w="med" len="med"/>
-                    </a:lnT>
-                    <a:lnB w="12700" cap="flat" cmpd="sng" algn="ctr">
-                      <a:solidFill>
-                        <a:srgbClr val="2D2D2D"/>
-                      </a:solidFill>
-                      <a:prstDash val="solid"/>
-                      <a:round/>
-                      <a:headEnd type="none" w="med" len="med"/>
-                      <a:tailEnd type="none" w="med" len="med"/>
-                    </a:lnB>
-                    <a:solidFill>
-                      <a:srgbClr val="101010"/>
-                    </a:solidFill>
-                  </a:tcPr>
-                </a:tc>
-                <a:extLst>
-                  <a:ext uri="{0D108BD9-81ED-4DB2-BD59-A6C34878D82A}">
-                    <ns2:rowId val="10001"/>
-                  </a:ext>
-                </a:extLst>
-              </a:tr>
-              <a:tr h="452000">
-                <a:tc>
-                  <a:txBody>
-                    <a:bodyPr/>
-                    <a:lstStyle/>
-                    <a:p>
-                      <a:pPr marL="0" indent="0">
-                        <a:buNone/>
-                      </a:pPr>
-                      <a:r>
-                        <a:rPr sz="1060" b="0">
-                          <a:solidFill>
-                            <a:srgbClr val="D9D9D9"/>
-                          </a:solidFill>
-                        </a:rPr>
-                        <a:t>Seller uses paid features</a:t>
-                      </a:r>
-                    </a:p>
-                  </a:txBody>
-                  <a:tcPr marL="32000" marR="32000" marT="26000" marB="26000" anchor="ctr">
-                    <a:lnL w="12700" cap="flat" cmpd="sng" algn="ctr">
-                      <a:solidFill>
-                        <a:srgbClr val="2D2D2D"/>
-                      </a:solidFill>
-                      <a:prstDash val="solid"/>
-                      <a:round/>
-                      <a:headEnd type="none" w="med" len="med"/>
-                      <a:tailEnd type="none" w="med" len="med"/>
-                    </a:lnL>
-                    <a:lnR w="12700" cap="flat" cmpd="sng" algn="ctr">
-                      <a:solidFill>
-                        <a:srgbClr val="2D2D2D"/>
-                      </a:solidFill>
-                      <a:prstDash val="solid"/>
-                      <a:round/>
-                      <a:headEnd type="none" w="med" len="med"/>
-                      <a:tailEnd type="none" w="med" len="med"/>
-                    </a:lnR>
-                    <a:lnT w="12700" cap="flat" cmpd="sng" algn="ctr">
-                      <a:solidFill>
-                        <a:srgbClr val="2D2D2D"/>
-                      </a:solidFill>
-                      <a:prstDash val="solid"/>
-                      <a:round/>
-                      <a:headEnd type="none" w="med" len="med"/>
-                      <a:tailEnd type="none" w="med" len="med"/>
-                    </a:lnT>
-                    <a:lnB w="12700" cap="flat" cmpd="sng" algn="ctr">
-                      <a:solidFill>
-                        <a:srgbClr val="2D2D2D"/>
-                      </a:solidFill>
-                      <a:prstDash val="solid"/>
-                      <a:round/>
-                      <a:headEnd type="none" w="med" len="med"/>
-                      <a:tailEnd type="none" w="med" len="med"/>
-                    </a:lnB>
-                    <a:solidFill>
-                      <a:srgbClr val="101010"/>
-                    </a:solidFill>
-                  </a:tcPr>
-                </a:tc>
-                <a:tc>
-                  <a:txBody>
-                    <a:bodyPr/>
-                    <a:lstStyle/>
-                    <a:p>
-                      <a:pPr marL="0" indent="0">
-                        <a:buNone/>
-                      </a:pPr>
-                      <a:r>
-                        <a:rPr sz="1060" b="0">
-                          <a:solidFill>
-                            <a:srgbClr val="D9D9D9"/>
-                          </a:solidFill>
-                        </a:rPr>
-                        <a:t>Position bundle as a structured visibility product</a:t>
-                      </a:r>
-                    </a:p>
-                  </a:txBody>
-                  <a:tcPr marL="32000" marR="32000" marT="26000" marB="26000" anchor="ctr">
-                    <a:lnL w="12700" cap="flat" cmpd="sng" algn="ctr">
-                      <a:solidFill>
-                        <a:srgbClr val="2D2D2D"/>
-                      </a:solidFill>
-                      <a:prstDash val="solid"/>
-                      <a:round/>
-                      <a:headEnd type="none" w="med" len="med"/>
-                      <a:tailEnd type="none" w="med" len="med"/>
-                    </a:lnL>
-                    <a:lnR w="12700" cap="flat" cmpd="sng" algn="ctr">
-                      <a:solidFill>
-                        <a:srgbClr val="2D2D2D"/>
-                      </a:solidFill>
-                      <a:prstDash val="solid"/>
-                      <a:round/>
-                      <a:headEnd type="none" w="med" len="med"/>
-                      <a:tailEnd type="none" w="med" len="med"/>
-                    </a:lnR>
-                    <a:lnT w="12700" cap="flat" cmpd="sng" algn="ctr">
-                      <a:solidFill>
-                        <a:srgbClr val="2D2D2D"/>
-                      </a:solidFill>
-                      <a:prstDash val="solid"/>
-                      <a:round/>
-                      <a:headEnd type="none" w="med" len="med"/>
-                      <a:tailEnd type="none" w="med" len="med"/>
-                    </a:lnT>
-                    <a:lnB w="12700" cap="flat" cmpd="sng" algn="ctr">
-                      <a:solidFill>
-                        <a:srgbClr val="2D2D2D"/>
-                      </a:solidFill>
-                      <a:prstDash val="solid"/>
-                      <a:round/>
-                      <a:headEnd type="none" w="med" len="med"/>
-                      <a:tailEnd type="none" w="med" len="med"/>
-                    </a:lnB>
-                    <a:solidFill>
-                      <a:srgbClr val="101010"/>
-                    </a:solidFill>
-                  </a:tcPr>
-                </a:tc>
-                <a:extLst>
-                  <a:ext uri="{0D108BD9-81ED-4DB2-BD59-A6C34878D82A}">
-                    <ns2:rowId val="373867942"/>
-                  </a:ext>
-                </a:extLst>
-              </a:tr>
-              <a:tr h="452000">
-                <a:tc>
-                  <a:txBody>
-                    <a:bodyPr/>
-                    <a:lstStyle/>
-                    <a:p>
-                      <a:pPr marL="0" indent="0">
-                        <a:buNone/>
-                      </a:pPr>
-                      <a:r>
-                        <a:rPr sz="1060" b="0">
-                          <a:solidFill>
-                            <a:srgbClr val="D9D9D9"/>
-                          </a:solidFill>
-                        </a:rPr>
-                        <a:t>Seller operates in competitive category</a:t>
-                      </a:r>
-                    </a:p>
-                  </a:txBody>
-                  <a:tcPr marL="32000" marR="32000" marT="26000" marB="26000" anchor="ctr">
-                    <a:lnL w="12700" cap="flat" cmpd="sng" algn="ctr">
-                      <a:solidFill>
-                        <a:srgbClr val="2D2D2D"/>
-                      </a:solidFill>
-                      <a:prstDash val="solid"/>
-                      <a:round/>
-                      <a:headEnd type="none" w="med" len="med"/>
-                      <a:tailEnd type="none" w="med" len="med"/>
-                    </a:lnL>
-                    <a:lnR w="12700" cap="flat" cmpd="sng" algn="ctr">
-                      <a:solidFill>
-                        <a:srgbClr val="2D2D2D"/>
-                      </a:solidFill>
-                      <a:prstDash val="solid"/>
-                      <a:round/>
-                      <a:headEnd type="none" w="med" len="med"/>
-                      <a:tailEnd type="none" w="med" len="med"/>
-                    </a:lnR>
-                    <a:lnT w="12700" cap="flat" cmpd="sng" algn="ctr">
-                      <a:solidFill>
-                        <a:srgbClr val="2D2D2D"/>
-                      </a:solidFill>
-                      <a:prstDash val="solid"/>
-                      <a:round/>
-                      <a:headEnd type="none" w="med" len="med"/>
-                      <a:tailEnd type="none" w="med" len="med"/>
-                    </a:lnT>
-                    <a:lnB w="12700" cap="flat" cmpd="sng" algn="ctr">
-                      <a:solidFill>
-                        <a:srgbClr val="2D2D2D"/>
-                      </a:solidFill>
-                      <a:prstDash val="solid"/>
-                      <a:round/>
-                      <a:headEnd type="none" w="med" len="med"/>
-                      <a:tailEnd type="none" w="med" len="med"/>
-                    </a:lnB>
-                    <a:solidFill>
-                      <a:srgbClr val="101010"/>
-                    </a:solidFill>
-                  </a:tcPr>
-                </a:tc>
-                <a:tc>
-                  <a:txBody>
-                    <a:bodyPr/>
-                    <a:lstStyle/>
-                    <a:p>
-                      <a:pPr marL="0" indent="0">
-                        <a:buNone/>
-                      </a:pPr>
-                      <a:r>
-                        <a:rPr sz="1060" b="0">
-                          <a:solidFill>
-                            <a:srgbClr val="D9D9D9"/>
-                          </a:solidFill>
-                        </a:rPr>
-                        <a:t>Promote differentiation benefit</a:t>
-                      </a:r>
-                    </a:p>
-                  </a:txBody>
-                  <a:tcPr marL="32000" marR="32000" marT="26000" marB="26000" anchor="ctr">
-                    <a:lnL w="12700" cap="flat" cmpd="sng" algn="ctr">
-                      <a:solidFill>
-                        <a:srgbClr val="2D2D2D"/>
-                      </a:solidFill>
-                      <a:prstDash val="solid"/>
-                      <a:round/>
-                      <a:headEnd type="none" w="med" len="med"/>
-                      <a:tailEnd type="none" w="med" len="med"/>
-                    </a:lnL>
-                    <a:lnR w="12700" cap="flat" cmpd="sng" algn="ctr">
-                      <a:solidFill>
-                        <a:srgbClr val="2D2D2D"/>
-                      </a:solidFill>
-                      <a:prstDash val="solid"/>
-                      <a:round/>
-                      <a:headEnd type="none" w="med" len="med"/>
-                      <a:tailEnd type="none" w="med" len="med"/>
-                    </a:lnR>
-                    <a:lnT w="12700" cap="flat" cmpd="sng" algn="ctr">
-                      <a:solidFill>
-                        <a:srgbClr val="2D2D2D"/>
-                      </a:solidFill>
-                      <a:prstDash val="solid"/>
-                      <a:round/>
-                      <a:headEnd type="none" w="med" len="med"/>
-                      <a:tailEnd type="none" w="med" len="med"/>
-                    </a:lnT>
-                    <a:lnB w="12700" cap="flat" cmpd="sng" algn="ctr">
-                      <a:solidFill>
-                        <a:srgbClr val="2D2D2D"/>
-                      </a:solidFill>
-                      <a:prstDash val="solid"/>
-                      <a:round/>
-                      <a:headEnd type="none" w="med" len="med"/>
-                      <a:tailEnd type="none" w="med" len="med"/>
-                    </a:lnB>
-                    <a:solidFill>
-                      <a:srgbClr val="101010"/>
-                    </a:solidFill>
-                  </a:tcPr>
-                </a:tc>
-                <a:extLst>
-                  <a:ext uri="{0D108BD9-81ED-4DB2-BD59-A6C34878D82A}">
-                    <ns2:rowId val="232773239"/>
-                  </a:ext>
-                </a:extLst>
-              </a:tr>
-              <a:tr h="452000">
-                <a:tc>
-                  <a:txBody>
-                    <a:bodyPr/>
-                    <a:lstStyle/>
-                    <a:p>
-                      <a:pPr marL="0" indent="0">
-                        <a:buNone/>
-                      </a:pPr>
-                      <a:r>
-                        <a:rPr sz="1060" b="0">
-                          <a:solidFill>
-                            <a:srgbClr val="D9D9D9"/>
-                          </a:solidFill>
-                        </a:rPr>
-                        <a:t>Seller receives buyer interest but has no bundle</a:t>
-                      </a:r>
-                    </a:p>
-                  </a:txBody>
-                  <a:tcPr marL="32000" marR="32000" marT="26000" marB="26000" anchor="ctr">
-                    <a:lnL w="12700" cap="flat" cmpd="sng" algn="ctr">
-                      <a:solidFill>
-                        <a:srgbClr val="2D2D2D"/>
-                      </a:solidFill>
-                      <a:prstDash val="solid"/>
-                      <a:round/>
-                      <a:headEnd type="none" w="med" len="med"/>
-                      <a:tailEnd type="none" w="med" len="med"/>
-                    </a:lnL>
-                    <a:lnR w="12700" cap="flat" cmpd="sng" algn="ctr">
-                      <a:solidFill>
-                        <a:srgbClr val="2D2D2D"/>
-                      </a:solidFill>
-                      <a:prstDash val="solid"/>
-                      <a:round/>
-                      <a:headEnd type="none" w="med" len="med"/>
-                      <a:tailEnd type="none" w="med" len="med"/>
-                    </a:lnR>
-                    <a:lnT w="12700" cap="flat" cmpd="sng" algn="ctr">
-                      <a:solidFill>
-                        <a:srgbClr val="2D2D2D"/>
-                      </a:solidFill>
-                      <a:prstDash val="solid"/>
-                      <a:round/>
-                      <a:headEnd type="none" w="med" len="med"/>
-                      <a:tailEnd type="none" w="med" len="med"/>
-                    </a:lnT>
-                    <a:lnB w="12700" cap="flat" cmpd="sng" algn="ctr">
-                      <a:solidFill>
-                        <a:srgbClr val="2D2D2D"/>
-                      </a:solidFill>
-                      <a:prstDash val="solid"/>
-                      <a:round/>
-                      <a:headEnd type="none" w="med" len="med"/>
-                      <a:tailEnd type="none" w="med" len="med"/>
-                    </a:lnB>
-                    <a:solidFill>
-                      <a:srgbClr val="101010"/>
-                    </a:solidFill>
-                  </a:tcPr>
-                </a:tc>
-                <a:tc>
-                  <a:txBody>
-                    <a:bodyPr/>
-                    <a:lstStyle/>
-                    <a:p>
-                      <a:pPr marL="0" indent="0">
-                        <a:buNone/>
-                      </a:pPr>
-                      <a:r>
-                        <a:rPr sz="1060" b="0">
-                          <a:solidFill>
-                            <a:srgbClr val="D9D9D9"/>
-                          </a:solidFill>
-                        </a:rPr>
-                        <a:t>Promote visibility/professionalization as next step</a:t>
-                      </a:r>
-                    </a:p>
-                  </a:txBody>
-                  <a:tcPr marL="32000" marR="32000" marT="26000" marB="26000" anchor="ctr">
-                    <a:lnL w="12700" cap="flat" cmpd="sng" algn="ctr">
-                      <a:solidFill>
-                        <a:srgbClr val="2D2D2D"/>
-                      </a:solidFill>
-                      <a:prstDash val="solid"/>
-                      <a:round/>
-                      <a:headEnd type="none" w="med" len="med"/>
-                      <a:tailEnd type="none" w="med" len="med"/>
-                    </a:lnL>
-                    <a:lnR w="12700" cap="flat" cmpd="sng" algn="ctr">
-                      <a:solidFill>
-                        <a:srgbClr val="2D2D2D"/>
-                      </a:solidFill>
-                      <a:prstDash val="solid"/>
-                      <a:round/>
-                      <a:headEnd type="none" w="med" len="med"/>
-                      <a:tailEnd type="none" w="med" len="med"/>
-                    </a:lnR>
-                    <a:lnT w="12700" cap="flat" cmpd="sng" algn="ctr">
-                      <a:solidFill>
-                        <a:srgbClr val="2D2D2D"/>
-                      </a:solidFill>
-                      <a:prstDash val="solid"/>
-                      <a:round/>
-                      <a:headEnd type="none" w="med" len="med"/>
-                      <a:tailEnd type="none" w="med" len="med"/>
-                    </a:lnT>
-                    <a:lnB w="12700" cap="flat" cmpd="sng" algn="ctr">
-                      <a:solidFill>
-                        <a:srgbClr val="2D2D2D"/>
-                      </a:solidFill>
-                      <a:prstDash val="solid"/>
-                      <a:round/>
-                      <a:headEnd type="none" w="med" len="med"/>
-                      <a:tailEnd type="none" w="med" len="med"/>
-                    </a:lnB>
-                    <a:solidFill>
-                      <a:srgbClr val="101010"/>
-                    </a:solidFill>
-                  </a:tcPr>
-                </a:tc>
-                <a:extLst>
-                  <a:ext uri="{0D108BD9-81ED-4DB2-BD59-A6C34878D82A}">
-                    <ns2:rowId val="3708948510"/>
-                  </a:ext>
-                </a:extLst>
-              </a:tr>
-            </a:tbl>
-          </a:graphicData>
-        </a:graphic>
-      </p:graphicFrame>
-      <p:sp>
-        <p:nvSpPr>
-          <p:cNvPr id="11" name="Apply by tier label"/>
-          <p:cNvSpPr/>
-          <p:nvPr/>
-        </p:nvSpPr>
-        <p:spPr>
-          <a:xfrm>
-            <a:off x="621792" y="4630000"/>
-            <a:ext cx="2743200" cy="256032"/>
-          </a:xfrm>
-          <a:prstGeom prst="rect">
-            <a:avLst/>
-          </a:prstGeom>
-          <a:noFill/>
-          <a:ln/>
-        </p:spPr>
-        <p:txBody>
-          <a:bodyPr wrap="square" lIns="0" tIns="0" rIns="0" bIns="0" rtlCol="0" anchor="ctr">
-            <a:normAutofit lnSpcReduction="10000"/>
-          </a:bodyPr>
-          <a:lstStyle/>
-          <a:p>
-            <a:pPr marL="0" indent="0">
-              <a:buNone/>
-            </a:pPr>
+              <a:t>Trigger</a:t>
+            </a:r>
+          </a:p>
+        </p:txBody>
+      </p:sp>
+      <p:sp>
+        <p:nvSpPr>
+          <p:cNvPr id="13" name="2x2 card title 1"/>
+          <p:cNvSpPr/>
+          <p:nvPr/>
+        </p:nvSpPr>
+        <p:spPr>
+          <a:xfrm>
+            <a:off x="858650" y="2712900"/>
+            <a:ext cx="4493000" cy="400000"/>
+          </a:xfrm>
+          <a:prstGeom prst="rect">
+            <a:avLst/>
+          </a:prstGeom>
+          <a:noFill/>
+          <a:ln>
+            <a:noFill/>
+          </a:ln>
+        </p:spPr>
+        <p:txBody>
+          <a:bodyPr lIns="0" tIns="0" rIns="0" bIns="0" anchor="t"/>
+          <a:lstStyle/>
+          <a:p>
+            <a:pPr fontAlgn="base"/>
             <a:r>
               <a:rPr sz="1450" b="1">
                 <a:solidFill>
-                  <a:srgbClr val="FF735B"/>
-                </a:solidFill>
-              </a:rPr>
-              <a:t>Apply by Tier</a:t>
-            </a:r>
-          </a:p>
-        </p:txBody>
-      </p:sp>
-      <p:graphicFrame>
-        <p:nvGraphicFramePr>
-          <p:cNvPr id="12" name="Lifecycle apply by tier table"/>
-          <p:cNvGraphicFramePr>
-            <a:graphicFrameLocks noGrp="1"/>
-          </p:cNvGraphicFramePr>
-          <p:nvPr>
-            <p:extLst>
-              <p:ext uri="{D42A27DB-BD31-4B8C-83A1-F6EECF244321}">
-                <ns3:modId val="1579011935"/>
-              </p:ext>
-            </p:extLst>
-          </p:nvPr>
-        </p:nvGraphicFramePr>
-        <p:xfrm>
-          <a:off x="650000" y="4980000"/>
-          <a:ext cx="10040000" cy="1463040"/>
-        </p:xfrm>
-        <a:graphic>
-          <a:graphicData uri="http://schemas.openxmlformats.org/drawingml/2006/table">
-            <a:tbl>
-              <a:tblPr/>
-              <a:tblGrid>
-                <a:gridCol w="1000000">
-                  <a:extLst>
-                    <a:ext uri="{9D8B030D-6E8A-4147-A177-3AD203B41FA5}">
-                      <ns2:colId val="20000"/>
-                    </a:ext>
-                  </a:extLst>
-                </a:gridCol>
-                <a:gridCol w="4300000">
-                  <a:extLst>
-                    <a:ext uri="{9D8B030D-6E8A-4147-A177-3AD203B41FA5}">
-                      <ns2:colId val="20001"/>
-                    </a:ext>
-                  </a:extLst>
-                </a:gridCol>
-                <a:gridCol w="4740000">
-                  <a:extLst>
-                    <a:ext uri="{9D8B030D-6E8A-4147-A177-3AD203B41FA5}">
-                      <ns2:colId val="20002"/>
-                    </a:ext>
-                  </a:extLst>
-                </a:gridCol>
-              </a:tblGrid>
-              <a:tr h="255000">
-                <a:tc>
-                  <a:txBody>
-                    <a:bodyPr/>
-                    <a:lstStyle/>
-                    <a:p>
-                      <a:pPr marL="0" indent="0">
-                        <a:buNone/>
-                      </a:pPr>
-                      <a:r>
-                        <a:rPr sz="1000" b="1">
-                          <a:solidFill>
-                            <a:srgbClr val="F2F2F2"/>
-                          </a:solidFill>
-                        </a:rPr>
-                        <a:t>Tier</a:t>
-                      </a:r>
-                    </a:p>
-                  </a:txBody>
-                  <a:tcPr marL="26000" marR="26000" marT="18000" marB="18000" anchor="ctr">
-                    <a:lnL w="12700" cap="flat" cmpd="sng" algn="ctr">
-                      <a:solidFill>
-                        <a:srgbClr val="2D2D2D"/>
-                      </a:solidFill>
-                      <a:prstDash val="solid"/>
-                      <a:round/>
-                      <a:headEnd type="none" w="med" len="med"/>
-                      <a:tailEnd type="none" w="med" len="med"/>
-                    </a:lnL>
-                    <a:lnR w="12700" cap="flat" cmpd="sng" algn="ctr">
-                      <a:solidFill>
-                        <a:srgbClr val="2D2D2D"/>
-                      </a:solidFill>
-                      <a:prstDash val="solid"/>
-                      <a:round/>
-                      <a:headEnd type="none" w="med" len="med"/>
-                      <a:tailEnd type="none" w="med" len="med"/>
-                    </a:lnR>
-                    <a:lnT w="12700" cap="flat" cmpd="sng" algn="ctr">
-                      <a:solidFill>
-                        <a:srgbClr val="2D2D2D"/>
-                      </a:solidFill>
-                      <a:prstDash val="solid"/>
-                      <a:round/>
-                      <a:headEnd type="none" w="med" len="med"/>
-                      <a:tailEnd type="none" w="med" len="med"/>
-                    </a:lnT>
-                    <a:lnB w="12700" cap="flat" cmpd="sng" algn="ctr">
-                      <a:solidFill>
-                        <a:srgbClr val="2D2D2D"/>
-                      </a:solidFill>
-                      <a:prstDash val="solid"/>
-                      <a:round/>
-                      <a:headEnd type="none" w="med" len="med"/>
-                      <a:tailEnd type="none" w="med" len="med"/>
-                    </a:lnB>
-                    <a:solidFill>
-                      <a:srgbClr val="161616"/>
-                    </a:solidFill>
-                  </a:tcPr>
-                </a:tc>
-                <a:tc>
-                  <a:txBody>
-                    <a:bodyPr/>
-                    <a:lstStyle/>
-                    <a:p>
-                      <a:pPr marL="0" indent="0">
-                        <a:buNone/>
-                      </a:pPr>
-                      <a:r>
-                        <a:rPr sz="1000" b="1">
-                          <a:solidFill>
-                            <a:srgbClr val="F2F2F2"/>
-                          </a:solidFill>
-                        </a:rPr>
-                        <a:t>When</a:t>
-                      </a:r>
-                    </a:p>
-                  </a:txBody>
-                  <a:tcPr marL="26000" marR="26000" marT="18000" marB="18000" anchor="ctr">
-                    <a:lnL w="12700" cap="flat" cmpd="sng" algn="ctr">
-                      <a:solidFill>
-                        <a:srgbClr val="2D2D2D"/>
-                      </a:solidFill>
-                      <a:prstDash val="solid"/>
-                      <a:round/>
-                      <a:headEnd type="none" w="med" len="med"/>
-                      <a:tailEnd type="none" w="med" len="med"/>
-                    </a:lnL>
-                    <a:lnR w="12700" cap="flat" cmpd="sng" algn="ctr">
-                      <a:solidFill>
-                        <a:srgbClr val="2D2D2D"/>
-                      </a:solidFill>
-                      <a:prstDash val="solid"/>
-                      <a:round/>
-                      <a:headEnd type="none" w="med" len="med"/>
-                      <a:tailEnd type="none" w="med" len="med"/>
-                    </a:lnR>
-                    <a:lnT w="12700" cap="flat" cmpd="sng" algn="ctr">
-                      <a:solidFill>
-                        <a:srgbClr val="2D2D2D"/>
-                      </a:solidFill>
-                      <a:prstDash val="solid"/>
-                      <a:round/>
-                      <a:headEnd type="none" w="med" len="med"/>
-                      <a:tailEnd type="none" w="med" len="med"/>
-                    </a:lnT>
-                    <a:lnB w="12700" cap="flat" cmpd="sng" algn="ctr">
-                      <a:solidFill>
-                        <a:srgbClr val="2D2D2D"/>
-                      </a:solidFill>
-                      <a:prstDash val="solid"/>
-                      <a:round/>
-                      <a:headEnd type="none" w="med" len="med"/>
-                      <a:tailEnd type="none" w="med" len="med"/>
-                    </a:lnB>
-                    <a:solidFill>
-                      <a:srgbClr val="161616"/>
-                    </a:solidFill>
-                  </a:tcPr>
-                </a:tc>
-                <a:tc>
-                  <a:txBody>
-                    <a:bodyPr/>
-                    <a:lstStyle/>
-                    <a:p>
-                      <a:endParaRPr lang="en-US"/>
-                    </a:p>
-                  </a:txBody>
-                  <a:tcPr>
-                    <a:lnL w="12700" cap="flat" cmpd="sng" algn="ctr">
-                      <a:solidFill>
-                        <a:srgbClr val="2D2D2D"/>
-                      </a:solidFill>
-                      <a:prstDash val="solid"/>
-                      <a:round/>
-                      <a:headEnd type="none" w="med" len="med"/>
-                      <a:tailEnd type="none" w="med" len="med"/>
-                    </a:lnL>
-                  </a:tcPr>
-                </a:tc>
-                <a:extLst>
-                  <a:ext uri="{0D108BD9-81ED-4DB2-BD59-A6C34878D82A}">
-                    <ns2:rowId val="10000"/>
-                  </a:ext>
-                </a:extLst>
-              </a:tr>
-              <a:tr h="255000">
-                <a:tc>
-                  <a:txBody>
-                    <a:bodyPr/>
-                    <a:lstStyle/>
-                    <a:p>
-                      <a:pPr marL="0" indent="0">
-                        <a:buNone/>
-                      </a:pPr>
-                      <a:r>
-                        <a:rPr sz="930" b="0">
-                          <a:solidFill>
-                            <a:srgbClr val="D9D9D9"/>
-                          </a:solidFill>
-                        </a:rPr>
-                        <a:t>1</a:t>
-                      </a:r>
-                    </a:p>
-                  </a:txBody>
-                  <a:tcPr marL="26000" marR="26000" marT="18000" marB="18000" anchor="ctr">
-                    <a:lnL w="12700" cap="flat" cmpd="sng" algn="ctr">
-                      <a:solidFill>
-                        <a:srgbClr val="2D2D2D"/>
-                      </a:solidFill>
-                      <a:prstDash val="solid"/>
-                      <a:round/>
-                      <a:headEnd type="none" w="med" len="med"/>
-                      <a:tailEnd type="none" w="med" len="med"/>
-                    </a:lnL>
-                    <a:lnR w="12700" cap="flat" cmpd="sng" algn="ctr">
-                      <a:solidFill>
-                        <a:srgbClr val="2D2D2D"/>
-                      </a:solidFill>
-                      <a:prstDash val="solid"/>
-                      <a:round/>
-                      <a:headEnd type="none" w="med" len="med"/>
-                      <a:tailEnd type="none" w="med" len="med"/>
-                    </a:lnR>
-                    <a:lnT w="12700" cap="flat" cmpd="sng" algn="ctr">
-                      <a:solidFill>
-                        <a:srgbClr val="2D2D2D"/>
-                      </a:solidFill>
-                      <a:prstDash val="solid"/>
-                      <a:round/>
-                      <a:headEnd type="none" w="med" len="med"/>
-                      <a:tailEnd type="none" w="med" len="med"/>
-                    </a:lnT>
-                    <a:lnB w="12700" cap="flat" cmpd="sng" algn="ctr">
-                      <a:solidFill>
-                        <a:srgbClr val="2D2D2D"/>
-                      </a:solidFill>
-                      <a:prstDash val="solid"/>
-                      <a:round/>
-                      <a:headEnd type="none" w="med" len="med"/>
-                      <a:tailEnd type="none" w="med" len="med"/>
-                    </a:lnB>
-                    <a:solidFill>
-                      <a:srgbClr val="101010"/>
-                    </a:solidFill>
-                  </a:tcPr>
-                </a:tc>
-                <a:tc>
-                  <a:txBody>
-                    <a:bodyPr/>
-                    <a:lstStyle/>
-                    <a:p>
-                      <a:pPr marL="0" indent="0">
-                        <a:buNone/>
-                      </a:pPr>
-                      <a:r>
-                        <a:rPr sz="930" b="0">
-                          <a:solidFill>
-                            <a:srgbClr val="D9D9D9"/>
-                          </a:solidFill>
-                        </a:rPr>
-                        <a:t>Any strong trigger</a:t>
-                      </a:r>
-                    </a:p>
-                  </a:txBody>
-                  <a:tcPr marL="26000" marR="26000" marT="18000" marB="18000" anchor="ctr">
-                    <a:lnL w="12700" cap="flat" cmpd="sng" algn="ctr">
-                      <a:solidFill>
-                        <a:srgbClr val="2D2D2D"/>
-                      </a:solidFill>
-                      <a:prstDash val="solid"/>
-                      <a:round/>
-                      <a:headEnd type="none" w="med" len="med"/>
-                      <a:tailEnd type="none" w="med" len="med"/>
-                    </a:lnL>
-                    <a:lnR w="12700" cap="flat" cmpd="sng" algn="ctr">
-                      <a:solidFill>
-                        <a:srgbClr val="2D2D2D"/>
-                      </a:solidFill>
-                      <a:prstDash val="solid"/>
-                      <a:round/>
-                      <a:headEnd type="none" w="med" len="med"/>
-                      <a:tailEnd type="none" w="med" len="med"/>
-                    </a:lnR>
-                    <a:lnT w="12700" cap="flat" cmpd="sng" algn="ctr">
-                      <a:solidFill>
-                        <a:srgbClr val="2D2D2D"/>
-                      </a:solidFill>
-                      <a:prstDash val="solid"/>
-                      <a:round/>
-                      <a:headEnd type="none" w="med" len="med"/>
-                      <a:tailEnd type="none" w="med" len="med"/>
-                    </a:lnT>
-                    <a:lnB w="12700" cap="flat" cmpd="sng" algn="ctr">
-                      <a:solidFill>
-                        <a:srgbClr val="2D2D2D"/>
-                      </a:solidFill>
-                      <a:prstDash val="solid"/>
-                      <a:round/>
-                      <a:headEnd type="none" w="med" len="med"/>
-                      <a:tailEnd type="none" w="med" len="med"/>
-                    </a:lnB>
-                    <a:solidFill>
-                      <a:srgbClr val="101010"/>
-                    </a:solidFill>
-                  </a:tcPr>
-                </a:tc>
-                <a:tc>
-                  <a:txBody>
-                    <a:bodyPr/>
-                    <a:lstStyle/>
-                    <a:p>
-                      <a:endParaRPr lang="en-US"/>
-                    </a:p>
-                  </a:txBody>
-                  <a:tcPr>
-                    <a:lnL w="12700" cap="flat" cmpd="sng" algn="ctr">
-                      <a:solidFill>
-                        <a:srgbClr val="2D2D2D"/>
-                      </a:solidFill>
-                      <a:prstDash val="solid"/>
-                      <a:round/>
-                      <a:headEnd type="none" w="med" len="med"/>
-                      <a:tailEnd type="none" w="med" len="med"/>
-                    </a:lnL>
-                  </a:tcPr>
-                </a:tc>
-                <a:extLst>
-                  <a:ext uri="{0D108BD9-81ED-4DB2-BD59-A6C34878D82A}">
-                    <ns2:rowId val="10001"/>
-                  </a:ext>
-                </a:extLst>
-              </a:tr>
-              <a:tr h="255000">
-                <a:tc>
-                  <a:txBody>
-                    <a:bodyPr/>
-                    <a:lstStyle/>
-                    <a:p>
-                      <a:pPr marL="0" indent="0">
-                        <a:buNone/>
-                      </a:pPr>
-                      <a:r>
-                        <a:rPr sz="930" b="0">
-                          <a:solidFill>
-                            <a:srgbClr val="D9D9D9"/>
-                          </a:solidFill>
-                        </a:rPr>
-                        <a:t>2</a:t>
-                      </a:r>
-                    </a:p>
-                  </a:txBody>
-                  <a:tcPr marL="26000" marR="26000" marT="18000" marB="18000" anchor="ctr">
-                    <a:lnL w="12700" cap="flat" cmpd="sng" algn="ctr">
-                      <a:solidFill>
-                        <a:srgbClr val="2D2D2D"/>
-                      </a:solidFill>
-                      <a:prstDash val="solid"/>
-                      <a:round/>
-                      <a:headEnd type="none" w="med" len="med"/>
-                      <a:tailEnd type="none" w="med" len="med"/>
-                    </a:lnL>
-                    <a:lnR w="12700" cap="flat" cmpd="sng" algn="ctr">
-                      <a:solidFill>
-                        <a:srgbClr val="2D2D2D"/>
-                      </a:solidFill>
-                      <a:prstDash val="solid"/>
-                      <a:round/>
-                      <a:headEnd type="none" w="med" len="med"/>
-                      <a:tailEnd type="none" w="med" len="med"/>
-                    </a:lnR>
-                    <a:lnT w="12700" cap="flat" cmpd="sng" algn="ctr">
-                      <a:solidFill>
-                        <a:srgbClr val="2D2D2D"/>
-                      </a:solidFill>
-                      <a:prstDash val="solid"/>
-                      <a:round/>
-                      <a:headEnd type="none" w="med" len="med"/>
-                      <a:tailEnd type="none" w="med" len="med"/>
-                    </a:lnT>
-                    <a:lnB w="12700" cap="flat" cmpd="sng" algn="ctr">
-                      <a:solidFill>
-                        <a:srgbClr val="2D2D2D"/>
-                      </a:solidFill>
-                      <a:prstDash val="solid"/>
-                      <a:round/>
-                      <a:headEnd type="none" w="med" len="med"/>
-                      <a:tailEnd type="none" w="med" len="med"/>
-                    </a:lnB>
-                    <a:solidFill>
-                      <a:srgbClr val="101010"/>
-                    </a:solidFill>
-                  </a:tcPr>
-                </a:tc>
-                <a:tc>
-                  <a:txBody>
-                    <a:bodyPr/>
-                    <a:lstStyle/>
-                    <a:p>
-                      <a:pPr marL="0" indent="0">
-                        <a:buNone/>
-                      </a:pPr>
-                      <a:r>
-                        <a:rPr sz="930" b="0">
-                          <a:solidFill>
-                            <a:srgbClr val="D9D9D9"/>
-                          </a:solidFill>
-                        </a:rPr>
-                        <a:t>Repeated or high-value trigger</a:t>
-                      </a:r>
-                    </a:p>
-                  </a:txBody>
-                  <a:tcPr marL="26000" marR="26000" marT="18000" marB="18000" anchor="ctr">
-                    <a:lnL w="12700" cap="flat" cmpd="sng" algn="ctr">
-                      <a:solidFill>
-                        <a:srgbClr val="2D2D2D"/>
-                      </a:solidFill>
-                      <a:prstDash val="solid"/>
-                      <a:round/>
-                      <a:headEnd type="none" w="med" len="med"/>
-                      <a:tailEnd type="none" w="med" len="med"/>
-                    </a:lnL>
-                    <a:lnR w="12700" cap="flat" cmpd="sng" algn="ctr">
-                      <a:solidFill>
-                        <a:srgbClr val="2D2D2D"/>
-                      </a:solidFill>
-                      <a:prstDash val="solid"/>
-                      <a:round/>
-                      <a:headEnd type="none" w="med" len="med"/>
-                      <a:tailEnd type="none" w="med" len="med"/>
-                    </a:lnR>
-                    <a:lnT w="12700" cap="flat" cmpd="sng" algn="ctr">
-                      <a:solidFill>
-                        <a:srgbClr val="2D2D2D"/>
-                      </a:solidFill>
-                      <a:prstDash val="solid"/>
-                      <a:round/>
-                      <a:headEnd type="none" w="med" len="med"/>
-                      <a:tailEnd type="none" w="med" len="med"/>
-                    </a:lnT>
-                    <a:lnB w="12700" cap="flat" cmpd="sng" algn="ctr">
-                      <a:solidFill>
-                        <a:srgbClr val="2D2D2D"/>
-                      </a:solidFill>
-                      <a:prstDash val="solid"/>
-                      <a:round/>
-                      <a:headEnd type="none" w="med" len="med"/>
-                      <a:tailEnd type="none" w="med" len="med"/>
-                    </a:lnB>
-                    <a:solidFill>
-                      <a:srgbClr val="101010"/>
-                    </a:solidFill>
-                  </a:tcPr>
-                </a:tc>
-                <a:tc>
-                  <a:txBody>
-                    <a:bodyPr/>
-                    <a:lstStyle/>
-                    <a:p>
-                      <a:endParaRPr lang="en-US"/>
-                    </a:p>
-                  </a:txBody>
-                  <a:tcPr>
-                    <a:lnL w="12700" cap="flat" cmpd="sng" algn="ctr">
-                      <a:solidFill>
-                        <a:srgbClr val="2D2D2D"/>
-                      </a:solidFill>
-                      <a:prstDash val="solid"/>
-                      <a:round/>
-                      <a:headEnd type="none" w="med" len="med"/>
-                      <a:tailEnd type="none" w="med" len="med"/>
-                    </a:lnL>
-                  </a:tcPr>
-                </a:tc>
-                <a:extLst>
-                  <a:ext uri="{0D108BD9-81ED-4DB2-BD59-A6C34878D82A}">
-                    <ns2:rowId val="408783487"/>
-                  </a:ext>
-                </a:extLst>
-              </a:tr>
-              <a:tr h="255000">
-                <a:tc>
-                  <a:txBody>
-                    <a:bodyPr/>
-                    <a:lstStyle/>
-                    <a:p>
-                      <a:pPr marL="0" indent="0">
-                        <a:buNone/>
-                      </a:pPr>
-                      <a:r>
-                        <a:rPr sz="930" b="0">
-                          <a:solidFill>
-                            <a:srgbClr val="D9D9D9"/>
-                          </a:solidFill>
-                        </a:rPr>
-                        <a:t>3</a:t>
-                      </a:r>
-                    </a:p>
-                  </a:txBody>
-                  <a:tcPr marL="26000" marR="26000" marT="18000" marB="18000" anchor="ctr">
-                    <a:lnL w="12700" cap="flat" cmpd="sng" algn="ctr">
-                      <a:solidFill>
-                        <a:srgbClr val="2D2D2D"/>
-                      </a:solidFill>
-                      <a:prstDash val="solid"/>
-                      <a:round/>
-                      <a:headEnd type="none" w="med" len="med"/>
-                      <a:tailEnd type="none" w="med" len="med"/>
-                    </a:lnL>
-                    <a:lnR w="12700" cap="flat" cmpd="sng" algn="ctr">
-                      <a:solidFill>
-                        <a:srgbClr val="2D2D2D"/>
-                      </a:solidFill>
-                      <a:prstDash val="solid"/>
-                      <a:round/>
-                      <a:headEnd type="none" w="med" len="med"/>
-                      <a:tailEnd type="none" w="med" len="med"/>
-                    </a:lnR>
-                    <a:lnT w="12700" cap="flat" cmpd="sng" algn="ctr">
-                      <a:solidFill>
-                        <a:srgbClr val="2D2D2D"/>
-                      </a:solidFill>
-                      <a:prstDash val="solid"/>
-                      <a:round/>
-                      <a:headEnd type="none" w="med" len="med"/>
-                      <a:tailEnd type="none" w="med" len="med"/>
-                    </a:lnT>
-                    <a:lnB w="12700" cap="flat" cmpd="sng" algn="ctr">
-                      <a:solidFill>
-                        <a:srgbClr val="2D2D2D"/>
-                      </a:solidFill>
-                      <a:prstDash val="solid"/>
-                      <a:round/>
-                      <a:headEnd type="none" w="med" len="med"/>
-                      <a:tailEnd type="none" w="med" len="med"/>
-                    </a:lnB>
-                    <a:solidFill>
-                      <a:srgbClr val="101010"/>
-                    </a:solidFill>
-                  </a:tcPr>
-                </a:tc>
-                <a:tc>
-                  <a:txBody>
-                    <a:bodyPr/>
-                    <a:lstStyle/>
-                    <a:p>
-                      <a:pPr marL="0" indent="0">
-                        <a:buNone/>
-                      </a:pPr>
-                      <a:r>
-                        <a:rPr sz="930" b="0">
-                          <a:solidFill>
-                            <a:srgbClr val="D9D9D9"/>
-                          </a:solidFill>
-                        </a:rPr>
-                        <a:t>Test cell only</a:t>
-                      </a:r>
-                    </a:p>
-                  </a:txBody>
-                  <a:tcPr marL="26000" marR="26000" marT="18000" marB="18000" anchor="ctr">
-                    <a:lnL w="12700" cap="flat" cmpd="sng" algn="ctr">
-                      <a:solidFill>
-                        <a:srgbClr val="2D2D2D"/>
-                      </a:solidFill>
-                      <a:prstDash val="solid"/>
-                      <a:round/>
-                      <a:headEnd type="none" w="med" len="med"/>
-                      <a:tailEnd type="none" w="med" len="med"/>
-                    </a:lnL>
-                    <a:lnR w="12700" cap="flat" cmpd="sng" algn="ctr">
-                      <a:solidFill>
-                        <a:srgbClr val="2D2D2D"/>
-                      </a:solidFill>
-                      <a:prstDash val="solid"/>
-                      <a:round/>
-                      <a:headEnd type="none" w="med" len="med"/>
-                      <a:tailEnd type="none" w="med" len="med"/>
-                    </a:lnR>
-                    <a:lnT w="12700" cap="flat" cmpd="sng" algn="ctr">
-                      <a:solidFill>
-                        <a:srgbClr val="2D2D2D"/>
-                      </a:solidFill>
-                      <a:prstDash val="solid"/>
-                      <a:round/>
-                      <a:headEnd type="none" w="med" len="med"/>
-                      <a:tailEnd type="none" w="med" len="med"/>
-                    </a:lnT>
-                    <a:lnB w="12700" cap="flat" cmpd="sng" algn="ctr">
-                      <a:solidFill>
-                        <a:srgbClr val="2D2D2D"/>
-                      </a:solidFill>
-                      <a:prstDash val="solid"/>
-                      <a:round/>
-                      <a:headEnd type="none" w="med" len="med"/>
-                      <a:tailEnd type="none" w="med" len="med"/>
-                    </a:lnB>
-                    <a:solidFill>
-                      <a:srgbClr val="101010"/>
-                    </a:solidFill>
-                  </a:tcPr>
-                </a:tc>
-                <a:tc>
-                  <a:txBody>
-                    <a:bodyPr/>
-                    <a:lstStyle/>
-                    <a:p>
-                      <a:endParaRPr lang="en-US"/>
-                    </a:p>
-                  </a:txBody>
-                  <a:tcPr>
-                    <a:lnL w="12700" cap="flat" cmpd="sng" algn="ctr">
-                      <a:solidFill>
-                        <a:srgbClr val="2D2D2D"/>
-                      </a:solidFill>
-                      <a:prstDash val="solid"/>
-                      <a:round/>
-                      <a:headEnd type="none" w="med" len="med"/>
-                      <a:tailEnd type="none" w="med" len="med"/>
-                    </a:lnL>
-                  </a:tcPr>
-                </a:tc>
-                <a:extLst>
-                  <a:ext uri="{0D108BD9-81ED-4DB2-BD59-A6C34878D82A}">
-                    <ns2:rowId val="528063812"/>
-                  </a:ext>
-                </a:extLst>
-              </a:tr>
-            </a:tbl>
-          </a:graphicData>
-        </a:graphic>
-      </p:graphicFrame>
+                  <a:srgbClr val="F2F2F2"/>
+                </a:solidFill>
+                <a:latin typeface="Arial"/>
+                <a:ea typeface="Arial"/>
+                <a:cs typeface="Arial"/>
+              </a:rPr>
+              <a:t>Seller lists repeatedly</a:t>
+            </a:r>
+          </a:p>
+        </p:txBody>
+      </p:sp>
+      <p:sp>
+        <p:nvSpPr>
+          <p:cNvPr id="14" name="2x2 card body label 1"/>
+          <p:cNvSpPr/>
+          <p:nvPr/>
+        </p:nvSpPr>
+        <p:spPr>
+          <a:xfrm>
+            <a:off x="858650" y="3177900"/>
+            <a:ext cx="4493000" cy="140000"/>
+          </a:xfrm>
+          <a:prstGeom prst="rect">
+            <a:avLst/>
+          </a:prstGeom>
+          <a:noFill/>
+          <a:ln>
+            <a:noFill/>
+          </a:ln>
+        </p:spPr>
+        <p:txBody>
+          <a:bodyPr lIns="0" tIns="0" rIns="0" bIns="0" anchor="t"/>
+          <a:lstStyle/>
+          <a:p>
+            <a:pPr fontAlgn="base"/>
+            <a:r>
+              <a:rPr sz="850" b="1">
+                <a:solidFill>
+                  <a:srgbClr val="A7A7A7"/>
+                </a:solidFill>
+                <a:latin typeface="Arial"/>
+                <a:ea typeface="Arial"/>
+                <a:cs typeface="Arial"/>
+              </a:rPr>
+              <a:t>Purpose</a:t>
+            </a:r>
+          </a:p>
+        </p:txBody>
+      </p:sp>
+      <p:sp>
+        <p:nvSpPr>
+          <p:cNvPr id="15" name="2x2 card body 1"/>
+          <p:cNvSpPr/>
+          <p:nvPr/>
+        </p:nvSpPr>
+        <p:spPr>
+          <a:xfrm>
+            <a:off x="858650" y="3387900"/>
+            <a:ext cx="4493000" cy="340000"/>
+          </a:xfrm>
+          <a:prstGeom prst="rect">
+            <a:avLst/>
+          </a:prstGeom>
+          <a:noFill/>
+          <a:ln>
+            <a:noFill/>
+          </a:ln>
+        </p:spPr>
+        <p:txBody>
+          <a:bodyPr lIns="0" tIns="0" rIns="0" bIns="0" anchor="t"/>
+          <a:lstStyle/>
+          <a:p>
+            <a:pPr fontAlgn="base"/>
+            <a:r>
+              <a:rPr sz="1250" b="0">
+                <a:solidFill>
+                  <a:srgbClr val="D9D9D9"/>
+                </a:solidFill>
+                <a:latin typeface="Arial"/>
+                <a:ea typeface="Arial"/>
+                <a:cs typeface="Arial"/>
+              </a:rPr>
+              <a:t>Promote bundle when commercial intent is high</a:t>
+            </a:r>
+          </a:p>
+        </p:txBody>
+      </p:sp>
+      <p:sp>
+        <p:nvSpPr>
+          <p:cNvPr id="16" name="2x2 card 2"/>
+          <p:cNvSpPr/>
+          <p:nvPr/>
+        </p:nvSpPr>
+        <p:spPr>
+          <a:xfrm>
+            <a:off x="6210300" y="2247900"/>
+            <a:ext cx="4953000" cy="1543050"/>
+          </a:xfrm>
+          <a:custGeom>
+            <a:avLst/>
+            <a:gdLst/>
+            <a:ahLst/>
+            <a:cxnLst/>
+            <a:rect l="0" t="0" r="0" b="0"/>
+            <a:pathLst>
+              <a:path w="4953000" h="1543050">
+                <a:moveTo>
+                  <a:pt x="0" y="0"/>
+                </a:moveTo>
+                <a:lnTo>
+                  <a:pt x="4953000" y="0"/>
+                </a:lnTo>
+                <a:lnTo>
+                  <a:pt x="4953000" y="1473050"/>
+                </a:lnTo>
+                <a:cubicBezTo>
+                  <a:pt x="4953000" y="1511711"/>
+                  <a:pt x="4921661" y="1543050"/>
+                  <a:pt x="4883000" y="1543050"/>
+                </a:cubicBezTo>
+                <a:lnTo>
+                  <a:pt x="70000" y="1543050"/>
+                </a:lnTo>
+                <a:cubicBezTo>
+                  <a:pt x="31339" y="1543050"/>
+                  <a:pt x="0" y="1511711"/>
+                  <a:pt x="0" y="1473050"/>
+                </a:cubicBezTo>
+                <a:lnTo>
+                  <a:pt x="0" y="0"/>
+                </a:lnTo>
+                <a:close/>
+              </a:path>
+            </a:pathLst>
+          </a:custGeom>
+          <a:solidFill>
+            <a:srgbClr val="0D0D0D"/>
+          </a:solidFill>
+          <a:ln>
+            <a:solidFill>
+              <a:srgbClr val="303030"/>
+            </a:solidFill>
+          </a:ln>
+        </p:spPr>
+        <p:txBody>
+          <a:bodyPr/>
+          <a:lstStyle/>
+          <a:p>
+            <a:endParaRPr lang="en-US"/>
+          </a:p>
+        </p:txBody>
+      </p:sp>
+      <p:sp>
+        <p:nvSpPr>
+          <p:cNvPr id="17" name="2x2 card accent 2"/>
+          <p:cNvSpPr/>
+          <p:nvPr/>
+        </p:nvSpPr>
+        <p:spPr>
+          <a:xfrm>
+            <a:off x="6210300" y="2247900"/>
+            <a:ext cx="4953000" cy="38100"/>
+          </a:xfrm>
+          <a:prstGeom prst="rect">
+            <a:avLst/>
+          </a:prstGeom>
+          <a:solidFill>
+            <a:srgbClr val="FF735B"/>
+          </a:solidFill>
+          <a:ln>
+            <a:noFill/>
+          </a:ln>
+        </p:spPr>
+        <p:txBody>
+          <a:bodyPr/>
+          <a:lstStyle/>
+          <a:p>
+            <a:endParaRPr lang="en-US"/>
+          </a:p>
+        </p:txBody>
+      </p:sp>
+      <p:sp>
+        <p:nvSpPr>
+          <p:cNvPr id="18" name="2x2 card label 2"/>
+          <p:cNvSpPr/>
+          <p:nvPr/>
+        </p:nvSpPr>
+        <p:spPr>
+          <a:xfrm>
+            <a:off x="6440300" y="2492900"/>
+            <a:ext cx="4493000" cy="140000"/>
+          </a:xfrm>
+          <a:prstGeom prst="rect">
+            <a:avLst/>
+          </a:prstGeom>
+          <a:noFill/>
+          <a:ln>
+            <a:noFill/>
+          </a:ln>
+        </p:spPr>
+        <p:txBody>
+          <a:bodyPr lIns="0" tIns="0" rIns="0" bIns="0" anchor="t"/>
+          <a:lstStyle/>
+          <a:p>
+            <a:pPr fontAlgn="base"/>
+            <a:r>
+              <a:rPr sz="850" b="1">
+                <a:solidFill>
+                  <a:srgbClr val="A7A7A7"/>
+                </a:solidFill>
+                <a:latin typeface="Arial"/>
+                <a:ea typeface="Arial"/>
+                <a:cs typeface="Arial"/>
+              </a:rPr>
+              <a:t>Trigger</a:t>
+            </a:r>
+          </a:p>
+        </p:txBody>
+      </p:sp>
+      <p:sp>
+        <p:nvSpPr>
+          <p:cNvPr id="19" name="2x2 card title 2"/>
+          <p:cNvSpPr/>
+          <p:nvPr/>
+        </p:nvSpPr>
+        <p:spPr>
+          <a:xfrm>
+            <a:off x="6440300" y="2712900"/>
+            <a:ext cx="4493000" cy="400000"/>
+          </a:xfrm>
+          <a:prstGeom prst="rect">
+            <a:avLst/>
+          </a:prstGeom>
+          <a:noFill/>
+          <a:ln>
+            <a:noFill/>
+          </a:ln>
+        </p:spPr>
+        <p:txBody>
+          <a:bodyPr lIns="0" tIns="0" rIns="0" bIns="0" anchor="t"/>
+          <a:lstStyle/>
+          <a:p>
+            <a:pPr fontAlgn="base"/>
+            <a:r>
+              <a:rPr sz="1450" b="1">
+                <a:solidFill>
+                  <a:srgbClr val="F2F2F2"/>
+                </a:solidFill>
+                <a:latin typeface="Arial"/>
+                <a:ea typeface="Arial"/>
+                <a:cs typeface="Arial"/>
+              </a:rPr>
+              <a:t>Seller uses paid features</a:t>
+            </a:r>
+          </a:p>
+        </p:txBody>
+      </p:sp>
+      <p:sp>
+        <p:nvSpPr>
+          <p:cNvPr id="20" name="2x2 card body label 2"/>
+          <p:cNvSpPr/>
+          <p:nvPr/>
+        </p:nvSpPr>
+        <p:spPr>
+          <a:xfrm>
+            <a:off x="6440300" y="3177900"/>
+            <a:ext cx="4493000" cy="140000"/>
+          </a:xfrm>
+          <a:prstGeom prst="rect">
+            <a:avLst/>
+          </a:prstGeom>
+          <a:noFill/>
+          <a:ln>
+            <a:noFill/>
+          </a:ln>
+        </p:spPr>
+        <p:txBody>
+          <a:bodyPr lIns="0" tIns="0" rIns="0" bIns="0" anchor="t"/>
+          <a:lstStyle/>
+          <a:p>
+            <a:pPr fontAlgn="base"/>
+            <a:r>
+              <a:rPr sz="850" b="1">
+                <a:solidFill>
+                  <a:srgbClr val="A7A7A7"/>
+                </a:solidFill>
+                <a:latin typeface="Arial"/>
+                <a:ea typeface="Arial"/>
+                <a:cs typeface="Arial"/>
+              </a:rPr>
+              <a:t>Purpose</a:t>
+            </a:r>
+          </a:p>
+        </p:txBody>
+      </p:sp>
+      <p:sp>
+        <p:nvSpPr>
+          <p:cNvPr id="21" name="2x2 card body 2"/>
+          <p:cNvSpPr/>
+          <p:nvPr/>
+        </p:nvSpPr>
+        <p:spPr>
+          <a:xfrm>
+            <a:off x="6440300" y="3387900"/>
+            <a:ext cx="4493000" cy="340000"/>
+          </a:xfrm>
+          <a:prstGeom prst="rect">
+            <a:avLst/>
+          </a:prstGeom>
+          <a:noFill/>
+          <a:ln>
+            <a:noFill/>
+          </a:ln>
+        </p:spPr>
+        <p:txBody>
+          <a:bodyPr lIns="0" tIns="0" rIns="0" bIns="0" anchor="t"/>
+          <a:lstStyle/>
+          <a:p>
+            <a:pPr fontAlgn="base"/>
+            <a:r>
+              <a:rPr sz="1250" b="0">
+                <a:solidFill>
+                  <a:srgbClr val="D9D9D9"/>
+                </a:solidFill>
+                <a:latin typeface="Arial"/>
+                <a:ea typeface="Arial"/>
+                <a:cs typeface="Arial"/>
+              </a:rPr>
+              <a:t>Position bundle as a structured visibility product</a:t>
+            </a:r>
+          </a:p>
+        </p:txBody>
+      </p:sp>
+      <p:sp>
+        <p:nvSpPr>
+          <p:cNvPr id="22" name="2x2 card 3"/>
+          <p:cNvSpPr/>
+          <p:nvPr/>
+        </p:nvSpPr>
+        <p:spPr>
+          <a:xfrm>
+            <a:off x="628650" y="4114800"/>
+            <a:ext cx="4953000" cy="1543050"/>
+          </a:xfrm>
+          <a:custGeom>
+            <a:avLst/>
+            <a:gdLst/>
+            <a:ahLst/>
+            <a:cxnLst/>
+            <a:rect l="0" t="0" r="0" b="0"/>
+            <a:pathLst>
+              <a:path w="4953000" h="1543050">
+                <a:moveTo>
+                  <a:pt x="0" y="0"/>
+                </a:moveTo>
+                <a:lnTo>
+                  <a:pt x="4953000" y="0"/>
+                </a:lnTo>
+                <a:lnTo>
+                  <a:pt x="4953000" y="1473050"/>
+                </a:lnTo>
+                <a:cubicBezTo>
+                  <a:pt x="4953000" y="1511711"/>
+                  <a:pt x="4921661" y="1543050"/>
+                  <a:pt x="4883000" y="1543050"/>
+                </a:cubicBezTo>
+                <a:lnTo>
+                  <a:pt x="70000" y="1543050"/>
+                </a:lnTo>
+                <a:cubicBezTo>
+                  <a:pt x="31339" y="1543050"/>
+                  <a:pt x="0" y="1511711"/>
+                  <a:pt x="0" y="1473050"/>
+                </a:cubicBezTo>
+                <a:lnTo>
+                  <a:pt x="0" y="0"/>
+                </a:lnTo>
+                <a:close/>
+              </a:path>
+            </a:pathLst>
+          </a:custGeom>
+          <a:solidFill>
+            <a:srgbClr val="0D0D0D"/>
+          </a:solidFill>
+          <a:ln>
+            <a:solidFill>
+              <a:srgbClr val="303030"/>
+            </a:solidFill>
+          </a:ln>
+        </p:spPr>
+        <p:txBody>
+          <a:bodyPr/>
+          <a:lstStyle/>
+          <a:p>
+            <a:endParaRPr lang="en-US"/>
+          </a:p>
+        </p:txBody>
+      </p:sp>
+      <p:sp>
+        <p:nvSpPr>
+          <p:cNvPr id="23" name="2x2 card accent 3"/>
+          <p:cNvSpPr/>
+          <p:nvPr/>
+        </p:nvSpPr>
+        <p:spPr>
+          <a:xfrm>
+            <a:off x="628650" y="4114800"/>
+            <a:ext cx="4953000" cy="38100"/>
+          </a:xfrm>
+          <a:prstGeom prst="rect">
+            <a:avLst/>
+          </a:prstGeom>
+          <a:solidFill>
+            <a:srgbClr val="FF735B"/>
+          </a:solidFill>
+          <a:ln>
+            <a:noFill/>
+          </a:ln>
+        </p:spPr>
+        <p:txBody>
+          <a:bodyPr/>
+          <a:lstStyle/>
+          <a:p>
+            <a:endParaRPr lang="en-US"/>
+          </a:p>
+        </p:txBody>
+      </p:sp>
+      <p:sp>
+        <p:nvSpPr>
+          <p:cNvPr id="24" name="2x2 card label 3"/>
+          <p:cNvSpPr/>
+          <p:nvPr/>
+        </p:nvSpPr>
+        <p:spPr>
+          <a:xfrm>
+            <a:off x="858650" y="4359800"/>
+            <a:ext cx="4493000" cy="140000"/>
+          </a:xfrm>
+          <a:prstGeom prst="rect">
+            <a:avLst/>
+          </a:prstGeom>
+          <a:noFill/>
+          <a:ln>
+            <a:noFill/>
+          </a:ln>
+        </p:spPr>
+        <p:txBody>
+          <a:bodyPr lIns="0" tIns="0" rIns="0" bIns="0" anchor="t"/>
+          <a:lstStyle/>
+          <a:p>
+            <a:pPr fontAlgn="base"/>
+            <a:r>
+              <a:rPr sz="850" b="1">
+                <a:solidFill>
+                  <a:srgbClr val="A7A7A7"/>
+                </a:solidFill>
+                <a:latin typeface="Arial"/>
+                <a:ea typeface="Arial"/>
+                <a:cs typeface="Arial"/>
+              </a:rPr>
+              <a:t>Trigger</a:t>
+            </a:r>
+          </a:p>
+        </p:txBody>
+      </p:sp>
+      <p:sp>
+        <p:nvSpPr>
+          <p:cNvPr id="25" name="2x2 card title 3"/>
+          <p:cNvSpPr/>
+          <p:nvPr/>
+        </p:nvSpPr>
+        <p:spPr>
+          <a:xfrm>
+            <a:off x="858650" y="4579800"/>
+            <a:ext cx="4493000" cy="400000"/>
+          </a:xfrm>
+          <a:prstGeom prst="rect">
+            <a:avLst/>
+          </a:prstGeom>
+          <a:noFill/>
+          <a:ln>
+            <a:noFill/>
+          </a:ln>
+        </p:spPr>
+        <p:txBody>
+          <a:bodyPr lIns="0" tIns="0" rIns="0" bIns="0" anchor="t"/>
+          <a:lstStyle/>
+          <a:p>
+            <a:pPr fontAlgn="base"/>
+            <a:r>
+              <a:rPr sz="1450" b="1">
+                <a:solidFill>
+                  <a:srgbClr val="F2F2F2"/>
+                </a:solidFill>
+                <a:latin typeface="Arial"/>
+                <a:ea typeface="Arial"/>
+                <a:cs typeface="Arial"/>
+              </a:rPr>
+              <a:t>Seller operates in competitive category</a:t>
+            </a:r>
+          </a:p>
+        </p:txBody>
+      </p:sp>
+      <p:sp>
+        <p:nvSpPr>
+          <p:cNvPr id="26" name="2x2 card body label 3"/>
+          <p:cNvSpPr/>
+          <p:nvPr/>
+        </p:nvSpPr>
+        <p:spPr>
+          <a:xfrm>
+            <a:off x="858650" y="5044800"/>
+            <a:ext cx="4493000" cy="140000"/>
+          </a:xfrm>
+          <a:prstGeom prst="rect">
+            <a:avLst/>
+          </a:prstGeom>
+          <a:noFill/>
+          <a:ln>
+            <a:noFill/>
+          </a:ln>
+        </p:spPr>
+        <p:txBody>
+          <a:bodyPr lIns="0" tIns="0" rIns="0" bIns="0" anchor="t"/>
+          <a:lstStyle/>
+          <a:p>
+            <a:pPr fontAlgn="base"/>
+            <a:r>
+              <a:rPr sz="850" b="1">
+                <a:solidFill>
+                  <a:srgbClr val="A7A7A7"/>
+                </a:solidFill>
+                <a:latin typeface="Arial"/>
+                <a:ea typeface="Arial"/>
+                <a:cs typeface="Arial"/>
+              </a:rPr>
+              <a:t>Purpose</a:t>
+            </a:r>
+          </a:p>
+        </p:txBody>
+      </p:sp>
+      <p:sp>
+        <p:nvSpPr>
+          <p:cNvPr id="27" name="2x2 card body 3"/>
+          <p:cNvSpPr/>
+          <p:nvPr/>
+        </p:nvSpPr>
+        <p:spPr>
+          <a:xfrm>
+            <a:off x="858650" y="5254800"/>
+            <a:ext cx="4493000" cy="340000"/>
+          </a:xfrm>
+          <a:prstGeom prst="rect">
+            <a:avLst/>
+          </a:prstGeom>
+          <a:noFill/>
+          <a:ln>
+            <a:noFill/>
+          </a:ln>
+        </p:spPr>
+        <p:txBody>
+          <a:bodyPr lIns="0" tIns="0" rIns="0" bIns="0" anchor="t"/>
+          <a:lstStyle/>
+          <a:p>
+            <a:pPr fontAlgn="base"/>
+            <a:r>
+              <a:rPr sz="1250" b="0">
+                <a:solidFill>
+                  <a:srgbClr val="D9D9D9"/>
+                </a:solidFill>
+                <a:latin typeface="Arial"/>
+                <a:ea typeface="Arial"/>
+                <a:cs typeface="Arial"/>
+              </a:rPr>
+              <a:t>Promote differentiation benefit</a:t>
+            </a:r>
+          </a:p>
+        </p:txBody>
+      </p:sp>
+      <p:sp>
+        <p:nvSpPr>
+          <p:cNvPr id="28" name="2x2 card 4"/>
+          <p:cNvSpPr/>
+          <p:nvPr/>
+        </p:nvSpPr>
+        <p:spPr>
+          <a:xfrm>
+            <a:off x="6210300" y="4114800"/>
+            <a:ext cx="4953000" cy="1543050"/>
+          </a:xfrm>
+          <a:custGeom>
+            <a:avLst/>
+            <a:gdLst/>
+            <a:ahLst/>
+            <a:cxnLst/>
+            <a:rect l="0" t="0" r="0" b="0"/>
+            <a:pathLst>
+              <a:path w="4953000" h="1543050">
+                <a:moveTo>
+                  <a:pt x="0" y="0"/>
+                </a:moveTo>
+                <a:lnTo>
+                  <a:pt x="4953000" y="0"/>
+                </a:lnTo>
+                <a:lnTo>
+                  <a:pt x="4953000" y="1473050"/>
+                </a:lnTo>
+                <a:cubicBezTo>
+                  <a:pt x="4953000" y="1511711"/>
+                  <a:pt x="4921661" y="1543050"/>
+                  <a:pt x="4883000" y="1543050"/>
+                </a:cubicBezTo>
+                <a:lnTo>
+                  <a:pt x="70000" y="1543050"/>
+                </a:lnTo>
+                <a:cubicBezTo>
+                  <a:pt x="31339" y="1543050"/>
+                  <a:pt x="0" y="1511711"/>
+                  <a:pt x="0" y="1473050"/>
+                </a:cubicBezTo>
+                <a:lnTo>
+                  <a:pt x="0" y="0"/>
+                </a:lnTo>
+                <a:close/>
+              </a:path>
+            </a:pathLst>
+          </a:custGeom>
+          <a:solidFill>
+            <a:srgbClr val="0D0D0D"/>
+          </a:solidFill>
+          <a:ln>
+            <a:solidFill>
+              <a:srgbClr val="303030"/>
+            </a:solidFill>
+          </a:ln>
+        </p:spPr>
+        <p:txBody>
+          <a:bodyPr/>
+          <a:lstStyle/>
+          <a:p>
+            <a:endParaRPr lang="en-US"/>
+          </a:p>
+        </p:txBody>
+      </p:sp>
+      <p:sp>
+        <p:nvSpPr>
+          <p:cNvPr id="29" name="2x2 card accent 4"/>
+          <p:cNvSpPr/>
+          <p:nvPr/>
+        </p:nvSpPr>
+        <p:spPr>
+          <a:xfrm>
+            <a:off x="6210300" y="4114800"/>
+            <a:ext cx="4953000" cy="38100"/>
+          </a:xfrm>
+          <a:prstGeom prst="rect">
+            <a:avLst/>
+          </a:prstGeom>
+          <a:solidFill>
+            <a:srgbClr val="FF735B"/>
+          </a:solidFill>
+          <a:ln>
+            <a:noFill/>
+          </a:ln>
+        </p:spPr>
+        <p:txBody>
+          <a:bodyPr/>
+          <a:lstStyle/>
+          <a:p>
+            <a:endParaRPr lang="en-US"/>
+          </a:p>
+        </p:txBody>
+      </p:sp>
+      <p:sp>
+        <p:nvSpPr>
+          <p:cNvPr id="30" name="2x2 card label 4"/>
+          <p:cNvSpPr/>
+          <p:nvPr/>
+        </p:nvSpPr>
+        <p:spPr>
+          <a:xfrm>
+            <a:off x="6440300" y="4359800"/>
+            <a:ext cx="4493000" cy="140000"/>
+          </a:xfrm>
+          <a:prstGeom prst="rect">
+            <a:avLst/>
+          </a:prstGeom>
+          <a:noFill/>
+          <a:ln>
+            <a:noFill/>
+          </a:ln>
+        </p:spPr>
+        <p:txBody>
+          <a:bodyPr lIns="0" tIns="0" rIns="0" bIns="0" anchor="t"/>
+          <a:lstStyle/>
+          <a:p>
+            <a:pPr fontAlgn="base"/>
+            <a:r>
+              <a:rPr sz="850" b="1">
+                <a:solidFill>
+                  <a:srgbClr val="A7A7A7"/>
+                </a:solidFill>
+                <a:latin typeface="Arial"/>
+                <a:ea typeface="Arial"/>
+                <a:cs typeface="Arial"/>
+              </a:rPr>
+              <a:t>Trigger</a:t>
+            </a:r>
+          </a:p>
+        </p:txBody>
+      </p:sp>
+      <p:sp>
+        <p:nvSpPr>
+          <p:cNvPr id="31" name="2x2 card title 4"/>
+          <p:cNvSpPr/>
+          <p:nvPr/>
+        </p:nvSpPr>
+        <p:spPr>
+          <a:xfrm>
+            <a:off x="6440300" y="4579800"/>
+            <a:ext cx="4493000" cy="400000"/>
+          </a:xfrm>
+          <a:prstGeom prst="rect">
+            <a:avLst/>
+          </a:prstGeom>
+          <a:noFill/>
+          <a:ln>
+            <a:noFill/>
+          </a:ln>
+        </p:spPr>
+        <p:txBody>
+          <a:bodyPr lIns="0" tIns="0" rIns="0" bIns="0" anchor="t"/>
+          <a:lstStyle/>
+          <a:p>
+            <a:pPr fontAlgn="base"/>
+            <a:r>
+              <a:rPr sz="1450" b="1" dirty="0">
+                <a:solidFill>
+                  <a:srgbClr val="F2F2F2"/>
+                </a:solidFill>
+                <a:latin typeface="Arial"/>
+                <a:ea typeface="Arial"/>
+                <a:cs typeface="Arial"/>
+              </a:rPr>
+              <a:t>Seller receives buyer interest but has no bundle</a:t>
+            </a:r>
+          </a:p>
+        </p:txBody>
+      </p:sp>
+      <p:sp>
+        <p:nvSpPr>
+          <p:cNvPr id="32" name="2x2 card body label 4"/>
+          <p:cNvSpPr/>
+          <p:nvPr/>
+        </p:nvSpPr>
+        <p:spPr>
+          <a:xfrm>
+            <a:off x="6440300" y="5044800"/>
+            <a:ext cx="4493000" cy="140000"/>
+          </a:xfrm>
+          <a:prstGeom prst="rect">
+            <a:avLst/>
+          </a:prstGeom>
+          <a:noFill/>
+          <a:ln>
+            <a:noFill/>
+          </a:ln>
+        </p:spPr>
+        <p:txBody>
+          <a:bodyPr lIns="0" tIns="0" rIns="0" bIns="0" anchor="t"/>
+          <a:lstStyle/>
+          <a:p>
+            <a:pPr fontAlgn="base"/>
+            <a:r>
+              <a:rPr sz="850" b="1">
+                <a:solidFill>
+                  <a:srgbClr val="A7A7A7"/>
+                </a:solidFill>
+                <a:latin typeface="Arial"/>
+                <a:ea typeface="Arial"/>
+                <a:cs typeface="Arial"/>
+              </a:rPr>
+              <a:t>Purpose</a:t>
+            </a:r>
+          </a:p>
+        </p:txBody>
+      </p:sp>
+      <p:sp>
+        <p:nvSpPr>
+          <p:cNvPr id="33" name="2x2 card body 4"/>
+          <p:cNvSpPr/>
+          <p:nvPr/>
+        </p:nvSpPr>
+        <p:spPr>
+          <a:xfrm>
+            <a:off x="6440300" y="5254800"/>
+            <a:ext cx="4493000" cy="340000"/>
+          </a:xfrm>
+          <a:prstGeom prst="rect">
+            <a:avLst/>
+          </a:prstGeom>
+          <a:noFill/>
+          <a:ln>
+            <a:noFill/>
+          </a:ln>
+        </p:spPr>
+        <p:txBody>
+          <a:bodyPr lIns="0" tIns="0" rIns="0" bIns="0" anchor="t"/>
+          <a:lstStyle/>
+          <a:p>
+            <a:pPr fontAlgn="base"/>
+            <a:r>
+              <a:rPr sz="1250" b="0">
+                <a:solidFill>
+                  <a:srgbClr val="D9D9D9"/>
+                </a:solidFill>
+                <a:latin typeface="Arial"/>
+                <a:ea typeface="Arial"/>
+                <a:cs typeface="Arial"/>
+              </a:rPr>
+              <a:t>Promote visibility/professionalization as next step</a:t>
+            </a:r>
+          </a:p>
+        </p:txBody>
+      </p:sp>
     </p:spTree>
   </p:cSld>
   <p:clrMapOvr>
@@ -6406,7 +6104,7 @@
 </file>
 
 <file path=ppt/slides/slide6.xml><?xml version="1.0" encoding="utf-8"?>
-<p:sld xmlns:a="http://schemas.openxmlformats.org/drawingml/2006/main" xmlns:ns2="http://schemas.microsoft.com/office/drawing/2014/main" xmlns:ns3="http://schemas.microsoft.com/office/powerpoint/2010/main" xmlns:p="http://schemas.openxmlformats.org/presentationml/2006/main">
+<p:sld xmlns:a="http://schemas.openxmlformats.org/drawingml/2006/main" xmlns:r="http://schemas.openxmlformats.org/officeDocument/2006/relationships" xmlns:p="http://schemas.openxmlformats.org/presentationml/2006/main">
   <p:cSld name="Slide 4">
     <p:bg>
       <p:bgPr>
@@ -6607,7 +6305,7 @@
                 <a:ea typeface="Arial" pitchFamily="34" charset="-122"/>
                 <a:cs typeface="Arial" pitchFamily="34" charset="-120"/>
               </a:rPr>
-              <a:t>SMB Scale</a:t>
+              <a:t>Marketing Campaign Proposal</a:t>
             </a:r>
             <a:endParaRPr lang="en-US" sz="750" dirty="0"/>
           </a:p>
@@ -6618,7 +6316,7 @@
           <p:cNvPr id="7" name="Text 5">
             <a:extLst>
               <a:ext uri="{FF2B5EF4-FFF2-40B4-BE49-F238E27FC236}">
-                <ns2:creationId id="{639743E6-45F5-5FCD-A928-9E2EA9A5B01C}"/>
+                <a16:creationId xmlns:a16="http://schemas.microsoft.com/office/drawing/2014/main" id="{639743E6-45F5-5FCD-A928-9E2EA9A5B01C}"/>
               </a:ext>
             </a:extLst>
           </p:cNvPr>
@@ -6669,1463 +6367,1090 @@
               </a:rPr>
               <a:t>06 / 07</a:t>
             </a:r>
-            <a:r>
-              <a:rPr sz="900" b="0" dirty="0">
-                <a:solidFill>
-                  <a:srgbClr val="A5A5A5"/>
+          </a:p>
+        </p:txBody>
+      </p:sp>
+      <p:sp>
+        <p:nvSpPr>
+          <p:cNvPr id="8" name="Text 6"/>
+          <p:cNvSpPr/>
+          <p:nvPr/>
+        </p:nvSpPr>
+        <p:spPr>
+          <a:xfrm>
+            <a:off x="621792" y="1371600"/>
+            <a:ext cx="10149840" cy="292608"/>
+          </a:xfrm>
+          <a:prstGeom prst="rect">
+            <a:avLst/>
+          </a:prstGeom>
+          <a:noFill/>
+          <a:ln/>
+        </p:spPr>
+        <p:txBody>
+          <a:bodyPr wrap="square" lIns="0" tIns="0" rIns="0" bIns="0" rtlCol="0" anchor="t">
+            <a:normAutofit/>
+          </a:bodyPr>
+          <a:lstStyle/>
+          <a:p>
+            <a:pPr marL="0" indent="0">
+              <a:buNone/>
+            </a:pPr>
+            <a:r>
+              <a:rPr lang="en-US" sz="1500" dirty="0">
+                <a:solidFill>
+                  <a:srgbClr val="F3F4F6"/>
+                </a:solidFill>
+                <a:latin typeface="Arial" pitchFamily="34" charset="0"/>
+                <a:ea typeface="Arial" pitchFamily="34" charset="-122"/>
+                <a:cs typeface="Arial" pitchFamily="34" charset="-120"/>
+              </a:rPr>
+              <a:t>Use prompts in high-intent seller surfaces.</a:t>
+            </a:r>
+            <a:endParaRPr lang="en-US" sz="1500" dirty="0"/>
+          </a:p>
+        </p:txBody>
+      </p:sp>
+      <p:sp>
+        <p:nvSpPr>
+          <p:cNvPr id="9" name="Text 7"/>
+          <p:cNvSpPr/>
+          <p:nvPr/>
+        </p:nvSpPr>
+        <p:spPr>
+          <a:xfrm>
+            <a:off x="621792" y="1840000"/>
+            <a:ext cx="2743200" cy="256032"/>
+          </a:xfrm>
+          <a:prstGeom prst="rect">
+            <a:avLst/>
+          </a:prstGeom>
+          <a:noFill/>
+          <a:ln/>
+        </p:spPr>
+        <p:txBody>
+          <a:bodyPr wrap="square" lIns="0" tIns="0" rIns="0" bIns="0" rtlCol="0" anchor="ctr">
+            <a:normAutofit/>
+          </a:bodyPr>
+          <a:lstStyle/>
+          <a:p>
+            <a:pPr marL="0" indent="0">
+              <a:buNone/>
+            </a:pPr>
+            <a:r>
+              <a:rPr lang="en-US" sz="1600" b="1" dirty="0">
+                <a:solidFill>
+                  <a:srgbClr val="FF735B"/>
+                </a:solidFill>
+                <a:latin typeface="Arial" pitchFamily="34" charset="0"/>
+                <a:ea typeface="Arial" pitchFamily="34" charset="-122"/>
+                <a:cs typeface="Arial" pitchFamily="34" charset="-120"/>
+              </a:rPr>
+              <a:t>Prompt Surfaces</a:t>
+            </a:r>
+            <a:endParaRPr lang="en-US" sz="1800" dirty="0"/>
+          </a:p>
+        </p:txBody>
+      </p:sp>
+      <p:sp>
+        <p:nvSpPr>
+          <p:cNvPr id="10" name="2x2 card 1"/>
+          <p:cNvSpPr/>
+          <p:nvPr/>
+        </p:nvSpPr>
+        <p:spPr>
+          <a:xfrm>
+            <a:off x="628650" y="2247900"/>
+            <a:ext cx="4953000" cy="1543050"/>
+          </a:xfrm>
+          <a:custGeom>
+            <a:avLst/>
+            <a:gdLst/>
+            <a:ahLst/>
+            <a:cxnLst/>
+            <a:rect l="0" t="0" r="0" b="0"/>
+            <a:pathLst>
+              <a:path w="4953000" h="1543050">
+                <a:moveTo>
+                  <a:pt x="0" y="0"/>
+                </a:moveTo>
+                <a:lnTo>
+                  <a:pt x="4953000" y="0"/>
+                </a:lnTo>
+                <a:lnTo>
+                  <a:pt x="4953000" y="1473050"/>
+                </a:lnTo>
+                <a:cubicBezTo>
+                  <a:pt x="4953000" y="1511711"/>
+                  <a:pt x="4921661" y="1543050"/>
+                  <a:pt x="4883000" y="1543050"/>
+                </a:cubicBezTo>
+                <a:lnTo>
+                  <a:pt x="70000" y="1543050"/>
+                </a:lnTo>
+                <a:cubicBezTo>
+                  <a:pt x="31339" y="1543050"/>
+                  <a:pt x="0" y="1511711"/>
+                  <a:pt x="0" y="1473050"/>
+                </a:cubicBezTo>
+                <a:lnTo>
+                  <a:pt x="0" y="0"/>
+                </a:lnTo>
+                <a:close/>
+              </a:path>
+            </a:pathLst>
+          </a:custGeom>
+          <a:solidFill>
+            <a:srgbClr val="0D0D0D"/>
+          </a:solidFill>
+          <a:ln>
+            <a:solidFill>
+              <a:srgbClr val="303030"/>
+            </a:solidFill>
+          </a:ln>
+        </p:spPr>
+        <p:txBody>
+          <a:bodyPr/>
+          <a:lstStyle/>
+          <a:p>
+            <a:endParaRPr lang="en-US"/>
+          </a:p>
+        </p:txBody>
+      </p:sp>
+      <p:sp>
+        <p:nvSpPr>
+          <p:cNvPr id="11" name="2x2 card accent 1"/>
+          <p:cNvSpPr/>
+          <p:nvPr/>
+        </p:nvSpPr>
+        <p:spPr>
+          <a:xfrm>
+            <a:off x="628650" y="2247900"/>
+            <a:ext cx="4953000" cy="38100"/>
+          </a:xfrm>
+          <a:prstGeom prst="rect">
+            <a:avLst/>
+          </a:prstGeom>
+          <a:solidFill>
+            <a:srgbClr val="FF735B"/>
+          </a:solidFill>
+          <a:ln>
+            <a:noFill/>
+          </a:ln>
+        </p:spPr>
+        <p:txBody>
+          <a:bodyPr/>
+          <a:lstStyle/>
+          <a:p>
+            <a:endParaRPr lang="en-US"/>
+          </a:p>
+        </p:txBody>
+      </p:sp>
+      <p:sp>
+        <p:nvSpPr>
+          <p:cNvPr id="12" name="2x2 card label 1"/>
+          <p:cNvSpPr/>
+          <p:nvPr/>
+        </p:nvSpPr>
+        <p:spPr>
+          <a:xfrm>
+            <a:off x="858650" y="2492900"/>
+            <a:ext cx="4493000" cy="140000"/>
+          </a:xfrm>
+          <a:prstGeom prst="rect">
+            <a:avLst/>
+          </a:prstGeom>
+          <a:noFill/>
+          <a:ln>
+            <a:noFill/>
+          </a:ln>
+        </p:spPr>
+        <p:txBody>
+          <a:bodyPr lIns="0" tIns="0" rIns="0" bIns="0" anchor="t"/>
+          <a:lstStyle/>
+          <a:p>
+            <a:pPr fontAlgn="base"/>
+            <a:r>
+              <a:rPr sz="850" b="1">
+                <a:solidFill>
+                  <a:srgbClr val="A7A7A7"/>
                 </a:solidFill>
                 <a:latin typeface="Arial"/>
                 <a:ea typeface="Arial"/>
                 <a:cs typeface="Arial"/>
               </a:rPr>
-              <a:t/>
-            </a:r>
-          </a:p>
-        </p:txBody>
-      </p:sp>
-      <p:sp>
-        <p:nvSpPr>
-          <p:cNvPr id="8" name="Text 6"/>
-          <p:cNvSpPr/>
-          <p:nvPr/>
-        </p:nvSpPr>
-        <p:spPr>
-          <a:xfrm>
-            <a:off x="621792" y="1371600"/>
-            <a:ext cx="10149840" cy="292608"/>
-          </a:xfrm>
-          <a:prstGeom prst="rect">
-            <a:avLst/>
-          </a:prstGeom>
-          <a:noFill/>
-          <a:ln/>
-        </p:spPr>
-        <p:txBody>
-          <a:bodyPr wrap="square" lIns="0" tIns="0" rIns="0" bIns="0" rtlCol="0" anchor="t">
-            <a:normAutofit/>
-          </a:bodyPr>
-          <a:lstStyle/>
-          <a:p>
-            <a:pPr marL="0" indent="0">
-              <a:buNone/>
-            </a:pPr>
-            <a:r>
-              <a:rPr lang="en-US" sz="1500" dirty="0">
-                <a:solidFill>
-                  <a:srgbClr val="F3F4F6"/>
-                </a:solidFill>
-                <a:latin typeface="Arial" pitchFamily="34" charset="0"/>
-                <a:ea typeface="Arial" pitchFamily="34" charset="-122"/>
-                <a:cs typeface="Arial" pitchFamily="34" charset="-120"/>
-              </a:rPr>
-              <a:t>Use prompts in high-intent seller surfaces.</a:t>
-            </a:r>
-            <a:endParaRPr lang="en-US" sz="1500" dirty="0"/>
-          </a:p>
-        </p:txBody>
-      </p:sp>
-      <p:sp>
-        <p:nvSpPr>
-          <p:cNvPr id="9" name="Text 7"/>
-          <p:cNvSpPr/>
-          <p:nvPr/>
-        </p:nvSpPr>
-        <p:spPr>
-          <a:xfrm>
-            <a:off x="621792" y="1840000"/>
-            <a:ext cx="2743200" cy="256032"/>
-          </a:xfrm>
-          <a:prstGeom prst="rect">
-            <a:avLst/>
-          </a:prstGeom>
-          <a:noFill/>
-          <a:ln/>
-        </p:spPr>
-        <p:txBody>
-          <a:bodyPr wrap="square" lIns="0" tIns="0" rIns="0" bIns="0" rtlCol="0" anchor="ctr">
-            <a:normAutofit lnSpcReduction="10000"/>
-          </a:bodyPr>
-          <a:lstStyle/>
-          <a:p>
-            <a:pPr marL="0" indent="0">
-              <a:buNone/>
-            </a:pPr>
-            <a:r>
-              <a:rPr lang="en-US" sz="1600" b="1" dirty="0">
-                <a:solidFill>
-                  <a:srgbClr val="FF735B"/>
-                </a:solidFill>
-                <a:latin typeface="Arial" pitchFamily="34" charset="0"/>
-                <a:ea typeface="Arial" pitchFamily="34" charset="-122"/>
-                <a:cs typeface="Arial" pitchFamily="34" charset="-120"/>
-              </a:rPr>
-              <a:t>Prompt Surfaces</a:t>
-            </a:r>
-            <a:endParaRPr lang="en-US" sz="1800" dirty="0"/>
-          </a:p>
-        </p:txBody>
-      </p:sp>
-      <p:graphicFrame>
-        <p:nvGraphicFramePr>
-          <p:cNvPr id="10" name="Table 0"/>
-          <p:cNvGraphicFramePr>
-            <a:graphicFrameLocks noGrp="1"/>
-          </p:cNvGraphicFramePr>
-          <p:nvPr>
-            <p:extLst>
-              <p:ext uri="{D42A27DB-BD31-4B8C-83A1-F6EECF244321}">
-                <ns3:modId val="1579011935"/>
-              </p:ext>
-            </p:extLst>
-          </p:nvPr>
-        </p:nvGraphicFramePr>
-        <p:xfrm>
-          <a:off x="650000" y="2240000"/>
-          <a:ext cx="10040000" cy="2260000"/>
-        </p:xfrm>
-        <a:graphic>
-          <a:graphicData uri="http://schemas.openxmlformats.org/drawingml/2006/table">
-            <a:tbl>
-              <a:tblPr/>
-              <a:tblGrid>
-                <a:gridCol w="3200000">
-                  <a:extLst>
-                    <a:ext uri="{9D8B030D-6E8A-4147-A177-3AD203B41FA5}">
-                      <ns2:colId val="20000"/>
-                    </a:ext>
-                  </a:extLst>
-                </a:gridCol>
-                <a:gridCol w="6840000">
-                  <a:extLst>
-                    <a:ext uri="{9D8B030D-6E8A-4147-A177-3AD203B41FA5}">
-                      <ns2:colId val="20001"/>
-                    </a:ext>
-                  </a:extLst>
-                </a:gridCol>
-              </a:tblGrid>
-              <a:tr h="452000">
-                <a:tc>
-                  <a:txBody>
-                    <a:bodyPr/>
-                    <a:lstStyle/>
-                    <a:p>
-                      <a:pPr marL="0" indent="0">
-                        <a:buNone/>
-                      </a:pPr>
-                      <a:r>
-                        <a:rPr sz="1140" b="1">
-                          <a:solidFill>
-                            <a:srgbClr val="F2F2F2"/>
-                          </a:solidFill>
-                        </a:rPr>
-                        <a:t>Surface</a:t>
-                      </a:r>
-                    </a:p>
-                  </a:txBody>
-                  <a:tcPr marL="32000" marR="32000" marT="26000" marB="26000" anchor="ctr">
-                    <a:lnL w="12700" cap="flat" cmpd="sng" algn="ctr">
-                      <a:solidFill>
-                        <a:srgbClr val="2D2D2D"/>
-                      </a:solidFill>
-                      <a:prstDash val="solid"/>
-                      <a:round/>
-                      <a:headEnd type="none" w="med" len="med"/>
-                      <a:tailEnd type="none" w="med" len="med"/>
-                    </a:lnL>
-                    <a:lnR w="12700" cap="flat" cmpd="sng" algn="ctr">
-                      <a:solidFill>
-                        <a:srgbClr val="2D2D2D"/>
-                      </a:solidFill>
-                      <a:prstDash val="solid"/>
-                      <a:round/>
-                      <a:headEnd type="none" w="med" len="med"/>
-                      <a:tailEnd type="none" w="med" len="med"/>
-                    </a:lnR>
-                    <a:lnT w="12700" cap="flat" cmpd="sng" algn="ctr">
-                      <a:solidFill>
-                        <a:srgbClr val="2D2D2D"/>
-                      </a:solidFill>
-                      <a:prstDash val="solid"/>
-                      <a:round/>
-                      <a:headEnd type="none" w="med" len="med"/>
-                      <a:tailEnd type="none" w="med" len="med"/>
-                    </a:lnT>
-                    <a:lnB w="12700" cap="flat" cmpd="sng" algn="ctr">
-                      <a:solidFill>
-                        <a:srgbClr val="2D2D2D"/>
-                      </a:solidFill>
-                      <a:prstDash val="solid"/>
-                      <a:round/>
-                      <a:headEnd type="none" w="med" len="med"/>
-                      <a:tailEnd type="none" w="med" len="med"/>
-                    </a:lnB>
-                    <a:solidFill>
-                      <a:srgbClr val="161616"/>
-                    </a:solidFill>
-                  </a:tcPr>
-                </a:tc>
-                <a:tc>
-                  <a:txBody>
-                    <a:bodyPr/>
-                    <a:lstStyle/>
-                    <a:p>
-                      <a:pPr marL="0" indent="0">
-                        <a:buNone/>
-                      </a:pPr>
-                      <a:r>
-                        <a:rPr sz="1140" b="1">
-                          <a:solidFill>
-                            <a:srgbClr val="F2F2F2"/>
-                          </a:solidFill>
-                        </a:rPr>
-                        <a:t>Why this moment works</a:t>
-                      </a:r>
-                    </a:p>
-                  </a:txBody>
-                  <a:tcPr marL="32000" marR="32000" marT="26000" marB="26000" anchor="ctr">
-                    <a:lnL w="12700" cap="flat" cmpd="sng" algn="ctr">
-                      <a:solidFill>
-                        <a:srgbClr val="2D2D2D"/>
-                      </a:solidFill>
-                      <a:prstDash val="solid"/>
-                      <a:round/>
-                      <a:headEnd type="none" w="med" len="med"/>
-                      <a:tailEnd type="none" w="med" len="med"/>
-                    </a:lnL>
-                    <a:lnR w="12700" cap="flat" cmpd="sng" algn="ctr">
-                      <a:solidFill>
-                        <a:srgbClr val="2D2D2D"/>
-                      </a:solidFill>
-                      <a:prstDash val="solid"/>
-                      <a:round/>
-                      <a:headEnd type="none" w="med" len="med"/>
-                      <a:tailEnd type="none" w="med" len="med"/>
-                    </a:lnR>
-                    <a:lnT w="12700" cap="flat" cmpd="sng" algn="ctr">
-                      <a:solidFill>
-                        <a:srgbClr val="2D2D2D"/>
-                      </a:solidFill>
-                      <a:prstDash val="solid"/>
-                      <a:round/>
-                      <a:headEnd type="none" w="med" len="med"/>
-                      <a:tailEnd type="none" w="med" len="med"/>
-                    </a:lnT>
-                    <a:lnB w="12700" cap="flat" cmpd="sng" algn="ctr">
-                      <a:solidFill>
-                        <a:srgbClr val="2D2D2D"/>
-                      </a:solidFill>
-                      <a:prstDash val="solid"/>
-                      <a:round/>
-                      <a:headEnd type="none" w="med" len="med"/>
-                      <a:tailEnd type="none" w="med" len="med"/>
-                    </a:lnB>
-                    <a:solidFill>
-                      <a:srgbClr val="161616"/>
-                    </a:solidFill>
-                  </a:tcPr>
-                </a:tc>
-                <a:extLst>
-                  <a:ext uri="{0D108BD9-81ED-4DB2-BD59-A6C34878D82A}">
-                    <ns2:rowId val="10000"/>
-                  </a:ext>
-                </a:extLst>
-              </a:tr>
-              <a:tr h="452000">
-                <a:tc>
-                  <a:txBody>
-                    <a:bodyPr/>
-                    <a:lstStyle/>
-                    <a:p>
-                      <a:pPr marL="0" indent="0">
-                        <a:buNone/>
-                      </a:pPr>
-                      <a:r>
-                        <a:rPr sz="1060" b="0">
-                          <a:solidFill>
-                            <a:srgbClr val="D9D9D9"/>
-                          </a:solidFill>
-                        </a:rPr>
-                        <a:t>Seller dashboard</a:t>
-                      </a:r>
-                    </a:p>
-                  </a:txBody>
-                  <a:tcPr marL="32000" marR="32000" marT="26000" marB="26000" anchor="ctr">
-                    <a:lnL w="12700" cap="flat" cmpd="sng" algn="ctr">
-                      <a:solidFill>
-                        <a:srgbClr val="2D2D2D"/>
-                      </a:solidFill>
-                      <a:prstDash val="solid"/>
-                      <a:round/>
-                      <a:headEnd type="none" w="med" len="med"/>
-                      <a:tailEnd type="none" w="med" len="med"/>
-                    </a:lnL>
-                    <a:lnR w="12700" cap="flat" cmpd="sng" algn="ctr">
-                      <a:solidFill>
-                        <a:srgbClr val="2D2D2D"/>
-                      </a:solidFill>
-                      <a:prstDash val="solid"/>
-                      <a:round/>
-                      <a:headEnd type="none" w="med" len="med"/>
-                      <a:tailEnd type="none" w="med" len="med"/>
-                    </a:lnR>
-                    <a:lnT w="12700" cap="flat" cmpd="sng" algn="ctr">
-                      <a:solidFill>
-                        <a:srgbClr val="2D2D2D"/>
-                      </a:solidFill>
-                      <a:prstDash val="solid"/>
-                      <a:round/>
-                      <a:headEnd type="none" w="med" len="med"/>
-                      <a:tailEnd type="none" w="med" len="med"/>
-                    </a:lnT>
-                    <a:lnB w="12700" cap="flat" cmpd="sng" algn="ctr">
-                      <a:solidFill>
-                        <a:srgbClr val="2D2D2D"/>
-                      </a:solidFill>
-                      <a:prstDash val="solid"/>
-                      <a:round/>
-                      <a:headEnd type="none" w="med" len="med"/>
-                      <a:tailEnd type="none" w="med" len="med"/>
-                    </a:lnB>
-                    <a:solidFill>
-                      <a:srgbClr val="101010"/>
-                    </a:solidFill>
-                  </a:tcPr>
-                </a:tc>
-                <a:tc>
-                  <a:txBody>
-                    <a:bodyPr/>
-                    <a:lstStyle/>
-                    <a:p>
-                      <a:pPr marL="0" indent="0">
-                        <a:buNone/>
-                      </a:pPr>
-                      <a:r>
-                        <a:rPr sz="1060" b="0">
-                          <a:solidFill>
-                            <a:srgbClr val="D9D9D9"/>
-                          </a:solidFill>
-                        </a:rPr>
-                        <a:t>Natural moment to link bundles to better performance</a:t>
-                      </a:r>
-                    </a:p>
-                  </a:txBody>
-                  <a:tcPr marL="32000" marR="32000" marT="26000" marB="26000" anchor="ctr">
-                    <a:lnL w="12700" cap="flat" cmpd="sng" algn="ctr">
-                      <a:solidFill>
-                        <a:srgbClr val="2D2D2D"/>
-                      </a:solidFill>
-                      <a:prstDash val="solid"/>
-                      <a:round/>
-                      <a:headEnd type="none" w="med" len="med"/>
-                      <a:tailEnd type="none" w="med" len="med"/>
-                    </a:lnL>
-                    <a:lnR w="12700" cap="flat" cmpd="sng" algn="ctr">
-                      <a:solidFill>
-                        <a:srgbClr val="2D2D2D"/>
-                      </a:solidFill>
-                      <a:prstDash val="solid"/>
-                      <a:round/>
-                      <a:headEnd type="none" w="med" len="med"/>
-                      <a:tailEnd type="none" w="med" len="med"/>
-                    </a:lnR>
-                    <a:lnT w="12700" cap="flat" cmpd="sng" algn="ctr">
-                      <a:solidFill>
-                        <a:srgbClr val="2D2D2D"/>
-                      </a:solidFill>
-                      <a:prstDash val="solid"/>
-                      <a:round/>
-                      <a:headEnd type="none" w="med" len="med"/>
-                      <a:tailEnd type="none" w="med" len="med"/>
-                    </a:lnT>
-                    <a:lnB w="12700" cap="flat" cmpd="sng" algn="ctr">
-                      <a:solidFill>
-                        <a:srgbClr val="2D2D2D"/>
-                      </a:solidFill>
-                      <a:prstDash val="solid"/>
-                      <a:round/>
-                      <a:headEnd type="none" w="med" len="med"/>
-                      <a:tailEnd type="none" w="med" len="med"/>
-                    </a:lnB>
-                    <a:solidFill>
-                      <a:srgbClr val="101010"/>
-                    </a:solidFill>
-                  </a:tcPr>
-                </a:tc>
-                <a:extLst>
-                  <a:ext uri="{0D108BD9-81ED-4DB2-BD59-A6C34878D82A}">
-                    <ns2:rowId val="10001"/>
-                  </a:ext>
-                </a:extLst>
-              </a:tr>
-              <a:tr h="452000">
-                <a:tc>
-                  <a:txBody>
-                    <a:bodyPr/>
-                    <a:lstStyle/>
-                    <a:p>
-                      <a:pPr marL="0" indent="0">
-                        <a:buNone/>
-                      </a:pPr>
-                      <a:r>
-                        <a:rPr sz="1060" b="0">
-                          <a:solidFill>
-                            <a:srgbClr val="D9D9D9"/>
-                          </a:solidFill>
-                        </a:rPr>
-                        <a:t>Listing creation flow</a:t>
-                      </a:r>
-                    </a:p>
-                  </a:txBody>
-                  <a:tcPr marL="32000" marR="32000" marT="26000" marB="26000" anchor="ctr">
-                    <a:lnL w="12700" cap="flat" cmpd="sng" algn="ctr">
-                      <a:solidFill>
-                        <a:srgbClr val="2D2D2D"/>
-                      </a:solidFill>
-                      <a:prstDash val="solid"/>
-                      <a:round/>
-                      <a:headEnd type="none" w="med" len="med"/>
-                      <a:tailEnd type="none" w="med" len="med"/>
-                    </a:lnL>
-                    <a:lnR w="12700" cap="flat" cmpd="sng" algn="ctr">
-                      <a:solidFill>
-                        <a:srgbClr val="2D2D2D"/>
-                      </a:solidFill>
-                      <a:prstDash val="solid"/>
-                      <a:round/>
-                      <a:headEnd type="none" w="med" len="med"/>
-                      <a:tailEnd type="none" w="med" len="med"/>
-                    </a:lnR>
-                    <a:lnT w="12700" cap="flat" cmpd="sng" algn="ctr">
-                      <a:solidFill>
-                        <a:srgbClr val="2D2D2D"/>
-                      </a:solidFill>
-                      <a:prstDash val="solid"/>
-                      <a:round/>
-                      <a:headEnd type="none" w="med" len="med"/>
-                      <a:tailEnd type="none" w="med" len="med"/>
-                    </a:lnT>
-                    <a:lnB w="12700" cap="flat" cmpd="sng" algn="ctr">
-                      <a:solidFill>
-                        <a:srgbClr val="2D2D2D"/>
-                      </a:solidFill>
-                      <a:prstDash val="solid"/>
-                      <a:round/>
-                      <a:headEnd type="none" w="med" len="med"/>
-                      <a:tailEnd type="none" w="med" len="med"/>
-                    </a:lnB>
-                    <a:solidFill>
-                      <a:srgbClr val="101010"/>
-                    </a:solidFill>
-                  </a:tcPr>
-                </a:tc>
-                <a:tc>
-                  <a:txBody>
-                    <a:bodyPr/>
-                    <a:lstStyle/>
-                    <a:p>
-                      <a:pPr marL="0" indent="0">
-                        <a:buNone/>
-                      </a:pPr>
-                      <a:r>
-                        <a:rPr sz="1060" b="0">
-                          <a:solidFill>
-                            <a:srgbClr val="D9D9D9"/>
-                          </a:solidFill>
-                        </a:rPr>
-                        <a:t>Bundle can improve listings from day one</a:t>
-                      </a:r>
-                    </a:p>
-                  </a:txBody>
-                  <a:tcPr marL="32000" marR="32000" marT="26000" marB="26000" anchor="ctr">
-                    <a:lnL w="12700" cap="flat" cmpd="sng" algn="ctr">
-                      <a:solidFill>
-                        <a:srgbClr val="2D2D2D"/>
-                      </a:solidFill>
-                      <a:prstDash val="solid"/>
-                      <a:round/>
-                      <a:headEnd type="none" w="med" len="med"/>
-                      <a:tailEnd type="none" w="med" len="med"/>
-                    </a:lnL>
-                    <a:lnR w="12700" cap="flat" cmpd="sng" algn="ctr">
-                      <a:solidFill>
-                        <a:srgbClr val="2D2D2D"/>
-                      </a:solidFill>
-                      <a:prstDash val="solid"/>
-                      <a:round/>
-                      <a:headEnd type="none" w="med" len="med"/>
-                      <a:tailEnd type="none" w="med" len="med"/>
-                    </a:lnR>
-                    <a:lnT w="12700" cap="flat" cmpd="sng" algn="ctr">
-                      <a:solidFill>
-                        <a:srgbClr val="2D2D2D"/>
-                      </a:solidFill>
-                      <a:prstDash val="solid"/>
-                      <a:round/>
-                      <a:headEnd type="none" w="med" len="med"/>
-                      <a:tailEnd type="none" w="med" len="med"/>
-                    </a:lnT>
-                    <a:lnB w="12700" cap="flat" cmpd="sng" algn="ctr">
-                      <a:solidFill>
-                        <a:srgbClr val="2D2D2D"/>
-                      </a:solidFill>
-                      <a:prstDash val="solid"/>
-                      <a:round/>
-                      <a:headEnd type="none" w="med" len="med"/>
-                      <a:tailEnd type="none" w="med" len="med"/>
-                    </a:lnB>
-                    <a:solidFill>
-                      <a:srgbClr val="101010"/>
-                    </a:solidFill>
-                  </a:tcPr>
-                </a:tc>
-                <a:extLst>
-                  <a:ext uri="{0D108BD9-81ED-4DB2-BD59-A6C34878D82A}">
-                    <ns2:rowId val="2764092538"/>
-                  </a:ext>
-                </a:extLst>
-              </a:tr>
-              <a:tr h="452000">
-                <a:tc>
-                  <a:txBody>
-                    <a:bodyPr/>
-                    <a:lstStyle/>
-                    <a:p>
-                      <a:pPr marL="0" indent="0">
-                        <a:buNone/>
-                      </a:pPr>
-                      <a:r>
-                        <a:rPr sz="1060" b="0">
-                          <a:solidFill>
-                            <a:srgbClr val="D9D9D9"/>
-                          </a:solidFill>
-                        </a:rPr>
-                        <a:t>Listing management page</a:t>
-                      </a:r>
-                    </a:p>
-                  </a:txBody>
-                  <a:tcPr marL="32000" marR="32000" marT="26000" marB="26000" anchor="ctr">
-                    <a:lnL w="12700" cap="flat" cmpd="sng" algn="ctr">
-                      <a:solidFill>
-                        <a:srgbClr val="2D2D2D"/>
-                      </a:solidFill>
-                      <a:prstDash val="solid"/>
-                      <a:round/>
-                      <a:headEnd type="none" w="med" len="med"/>
-                      <a:tailEnd type="none" w="med" len="med"/>
-                    </a:lnL>
-                    <a:lnR w="12700" cap="flat" cmpd="sng" algn="ctr">
-                      <a:solidFill>
-                        <a:srgbClr val="2D2D2D"/>
-                      </a:solidFill>
-                      <a:prstDash val="solid"/>
-                      <a:round/>
-                      <a:headEnd type="none" w="med" len="med"/>
-                      <a:tailEnd type="none" w="med" len="med"/>
-                    </a:lnR>
-                    <a:lnT w="12700" cap="flat" cmpd="sng" algn="ctr">
-                      <a:solidFill>
-                        <a:srgbClr val="2D2D2D"/>
-                      </a:solidFill>
-                      <a:prstDash val="solid"/>
-                      <a:round/>
-                      <a:headEnd type="none" w="med" len="med"/>
-                      <a:tailEnd type="none" w="med" len="med"/>
-                    </a:lnT>
-                    <a:lnB w="12700" cap="flat" cmpd="sng" algn="ctr">
-                      <a:solidFill>
-                        <a:srgbClr val="2D2D2D"/>
-                      </a:solidFill>
-                      <a:prstDash val="solid"/>
-                      <a:round/>
-                      <a:headEnd type="none" w="med" len="med"/>
-                      <a:tailEnd type="none" w="med" len="med"/>
-                    </a:lnB>
-                    <a:solidFill>
-                      <a:srgbClr val="101010"/>
-                    </a:solidFill>
-                  </a:tcPr>
-                </a:tc>
-                <a:tc>
-                  <a:txBody>
-                    <a:bodyPr/>
-                    <a:lstStyle/>
-                    <a:p>
-                      <a:pPr marL="0" indent="0">
-                        <a:buNone/>
-                      </a:pPr>
-                      <a:r>
-                        <a:rPr sz="1060" b="0">
-                          <a:solidFill>
-                            <a:srgbClr val="D9D9D9"/>
-                          </a:solidFill>
-                        </a:rPr>
-                        <a:t>Bundle is a broader upgrade than one-off ad fixes</a:t>
-                      </a:r>
-                    </a:p>
-                  </a:txBody>
-                  <a:tcPr marL="32000" marR="32000" marT="26000" marB="26000" anchor="ctr">
-                    <a:lnL w="12700" cap="flat" cmpd="sng" algn="ctr">
-                      <a:solidFill>
-                        <a:srgbClr val="2D2D2D"/>
-                      </a:solidFill>
-                      <a:prstDash val="solid"/>
-                      <a:round/>
-                      <a:headEnd type="none" w="med" len="med"/>
-                      <a:tailEnd type="none" w="med" len="med"/>
-                    </a:lnL>
-                    <a:lnR w="12700" cap="flat" cmpd="sng" algn="ctr">
-                      <a:solidFill>
-                        <a:srgbClr val="2D2D2D"/>
-                      </a:solidFill>
-                      <a:prstDash val="solid"/>
-                      <a:round/>
-                      <a:headEnd type="none" w="med" len="med"/>
-                      <a:tailEnd type="none" w="med" len="med"/>
-                    </a:lnR>
-                    <a:lnT w="12700" cap="flat" cmpd="sng" algn="ctr">
-                      <a:solidFill>
-                        <a:srgbClr val="2D2D2D"/>
-                      </a:solidFill>
-                      <a:prstDash val="solid"/>
-                      <a:round/>
-                      <a:headEnd type="none" w="med" len="med"/>
-                      <a:tailEnd type="none" w="med" len="med"/>
-                    </a:lnT>
-                    <a:lnB w="12700" cap="flat" cmpd="sng" algn="ctr">
-                      <a:solidFill>
-                        <a:srgbClr val="2D2D2D"/>
-                      </a:solidFill>
-                      <a:prstDash val="solid"/>
-                      <a:round/>
-                      <a:headEnd type="none" w="med" len="med"/>
-                      <a:tailEnd type="none" w="med" len="med"/>
-                    </a:lnB>
-                    <a:solidFill>
-                      <a:srgbClr val="101010"/>
-                    </a:solidFill>
-                  </a:tcPr>
-                </a:tc>
-                <a:extLst>
-                  <a:ext uri="{0D108BD9-81ED-4DB2-BD59-A6C34878D82A}">
-                    <ns2:rowId val="4212111096"/>
-                  </a:ext>
-                </a:extLst>
-              </a:tr>
-              <a:tr h="452000">
-                <a:tc>
-                  <a:txBody>
-                    <a:bodyPr/>
-                    <a:lstStyle/>
-                    <a:p>
-                      <a:pPr marL="0" indent="0">
-                        <a:buNone/>
-                      </a:pPr>
-                      <a:r>
-                        <a:rPr sz="1060" b="0">
-                          <a:solidFill>
-                            <a:srgbClr val="D9D9D9"/>
-                          </a:solidFill>
-                        </a:rPr>
-                        <a:t>Paid-feature purchase flow</a:t>
-                      </a:r>
-                    </a:p>
-                  </a:txBody>
-                  <a:tcPr marL="32000" marR="32000" marT="26000" marB="26000" anchor="ctr">
-                    <a:lnL w="12700" cap="flat" cmpd="sng" algn="ctr">
-                      <a:solidFill>
-                        <a:srgbClr val="2D2D2D"/>
-                      </a:solidFill>
-                      <a:prstDash val="solid"/>
-                      <a:round/>
-                      <a:headEnd type="none" w="med" len="med"/>
-                      <a:tailEnd type="none" w="med" len="med"/>
-                    </a:lnL>
-                    <a:lnR w="12700" cap="flat" cmpd="sng" algn="ctr">
-                      <a:solidFill>
-                        <a:srgbClr val="2D2D2D"/>
-                      </a:solidFill>
-                      <a:prstDash val="solid"/>
-                      <a:round/>
-                      <a:headEnd type="none" w="med" len="med"/>
-                      <a:tailEnd type="none" w="med" len="med"/>
-                    </a:lnR>
-                    <a:lnT w="12700" cap="flat" cmpd="sng" algn="ctr">
-                      <a:solidFill>
-                        <a:srgbClr val="2D2D2D"/>
-                      </a:solidFill>
-                      <a:prstDash val="solid"/>
-                      <a:round/>
-                      <a:headEnd type="none" w="med" len="med"/>
-                      <a:tailEnd type="none" w="med" len="med"/>
-                    </a:lnT>
-                    <a:lnB w="12700" cap="flat" cmpd="sng" algn="ctr">
-                      <a:solidFill>
-                        <a:srgbClr val="2D2D2D"/>
-                      </a:solidFill>
-                      <a:prstDash val="solid"/>
-                      <a:round/>
-                      <a:headEnd type="none" w="med" len="med"/>
-                      <a:tailEnd type="none" w="med" len="med"/>
-                    </a:lnB>
-                    <a:solidFill>
-                      <a:srgbClr val="101010"/>
-                    </a:solidFill>
-                  </a:tcPr>
-                </a:tc>
-                <a:tc>
-                  <a:txBody>
-                    <a:bodyPr/>
-                    <a:lstStyle/>
-                    <a:p>
-                      <a:pPr marL="0" indent="0">
-                        <a:buNone/>
-                      </a:pPr>
-                      <a:r>
-                        <a:rPr sz="1060" b="0">
-                          <a:solidFill>
-                            <a:srgbClr val="D9D9D9"/>
-                          </a:solidFill>
-                        </a:rPr>
-                        <a:t>Bundle is a structured alternative to single visibility purchases</a:t>
-                      </a:r>
-                    </a:p>
-                  </a:txBody>
-                  <a:tcPr marL="32000" marR="32000" marT="26000" marB="26000" anchor="ctr">
-                    <a:lnL w="12700" cap="flat" cmpd="sng" algn="ctr">
-                      <a:solidFill>
-                        <a:srgbClr val="2D2D2D"/>
-                      </a:solidFill>
-                      <a:prstDash val="solid"/>
-                      <a:round/>
-                      <a:headEnd type="none" w="med" len="med"/>
-                      <a:tailEnd type="none" w="med" len="med"/>
-                    </a:lnL>
-                    <a:lnR w="12700" cap="flat" cmpd="sng" algn="ctr">
-                      <a:solidFill>
-                        <a:srgbClr val="2D2D2D"/>
-                      </a:solidFill>
-                      <a:prstDash val="solid"/>
-                      <a:round/>
-                      <a:headEnd type="none" w="med" len="med"/>
-                      <a:tailEnd type="none" w="med" len="med"/>
-                    </a:lnR>
-                    <a:lnT w="12700" cap="flat" cmpd="sng" algn="ctr">
-                      <a:solidFill>
-                        <a:srgbClr val="2D2D2D"/>
-                      </a:solidFill>
-                      <a:prstDash val="solid"/>
-                      <a:round/>
-                      <a:headEnd type="none" w="med" len="med"/>
-                      <a:tailEnd type="none" w="med" len="med"/>
-                    </a:lnT>
-                    <a:lnB w="12700" cap="flat" cmpd="sng" algn="ctr">
-                      <a:solidFill>
-                        <a:srgbClr val="2D2D2D"/>
-                      </a:solidFill>
-                      <a:prstDash val="solid"/>
-                      <a:round/>
-                      <a:headEnd type="none" w="med" len="med"/>
-                      <a:tailEnd type="none" w="med" len="med"/>
-                    </a:lnB>
-                    <a:solidFill>
-                      <a:srgbClr val="101010"/>
-                    </a:solidFill>
-                  </a:tcPr>
-                </a:tc>
-                <a:extLst>
-                  <a:ext uri="{0D108BD9-81ED-4DB2-BD59-A6C34878D82A}">
-                    <ns2:rowId val="1013337409"/>
-                  </a:ext>
-                </a:extLst>
-              </a:tr>
-            </a:tbl>
-          </a:graphicData>
-        </a:graphic>
-      </p:graphicFrame>
-      <p:sp>
-        <p:nvSpPr>
-          <p:cNvPr id="11" name="Apply by tier label"/>
-          <p:cNvSpPr/>
-          <p:nvPr/>
-        </p:nvSpPr>
-        <p:spPr>
-          <a:xfrm>
-            <a:off x="621792" y="4630000"/>
-            <a:ext cx="2743200" cy="256032"/>
-          </a:xfrm>
-          <a:prstGeom prst="rect">
-            <a:avLst/>
-          </a:prstGeom>
-          <a:noFill/>
-          <a:ln/>
-        </p:spPr>
-        <p:txBody>
-          <a:bodyPr wrap="square" lIns="0" tIns="0" rIns="0" bIns="0" rtlCol="0" anchor="ctr">
-            <a:normAutofit lnSpcReduction="10000"/>
-          </a:bodyPr>
-          <a:lstStyle/>
-          <a:p>
-            <a:pPr marL="0" indent="0">
-              <a:buNone/>
-            </a:pPr>
+              <a:t>Surface</a:t>
+            </a:r>
+          </a:p>
+        </p:txBody>
+      </p:sp>
+      <p:sp>
+        <p:nvSpPr>
+          <p:cNvPr id="13" name="2x2 card title 1"/>
+          <p:cNvSpPr/>
+          <p:nvPr/>
+        </p:nvSpPr>
+        <p:spPr>
+          <a:xfrm>
+            <a:off x="858650" y="2712900"/>
+            <a:ext cx="4493000" cy="400000"/>
+          </a:xfrm>
+          <a:prstGeom prst="rect">
+            <a:avLst/>
+          </a:prstGeom>
+          <a:noFill/>
+          <a:ln>
+            <a:noFill/>
+          </a:ln>
+        </p:spPr>
+        <p:txBody>
+          <a:bodyPr lIns="0" tIns="0" rIns="0" bIns="0" anchor="t"/>
+          <a:lstStyle/>
+          <a:p>
+            <a:pPr fontAlgn="base"/>
             <a:r>
               <a:rPr sz="1450" b="1">
                 <a:solidFill>
-                  <a:srgbClr val="FF735B"/>
-                </a:solidFill>
-              </a:rPr>
-              <a:t>Apply by Tier</a:t>
-            </a:r>
-          </a:p>
-        </p:txBody>
-      </p:sp>
-      <p:graphicFrame>
-        <p:nvGraphicFramePr>
-          <p:cNvPr id="12" name="Prompts apply by tier table"/>
-          <p:cNvGraphicFramePr>
-            <a:graphicFrameLocks noGrp="1"/>
-          </p:cNvGraphicFramePr>
-          <p:nvPr>
-            <p:extLst>
-              <p:ext uri="{D42A27DB-BD31-4B8C-83A1-F6EECF244321}">
-                <ns3:modId val="1579011935"/>
-              </p:ext>
-            </p:extLst>
-          </p:nvPr>
-        </p:nvGraphicFramePr>
-        <p:xfrm>
-          <a:off x="650000" y="4980000"/>
-          <a:ext cx="10040000" cy="1463040"/>
-        </p:xfrm>
-        <a:graphic>
-          <a:graphicData uri="http://schemas.openxmlformats.org/drawingml/2006/table">
-            <a:tbl>
-              <a:tblPr/>
-              <a:tblGrid>
-                <a:gridCol w="1000000">
-                  <a:extLst>
-                    <a:ext uri="{9D8B030D-6E8A-4147-A177-3AD203B41FA5}">
-                      <ns2:colId val="20000"/>
-                    </a:ext>
-                  </a:extLst>
-                </a:gridCol>
-                <a:gridCol w="4300000">
-                  <a:extLst>
-                    <a:ext uri="{9D8B030D-6E8A-4147-A177-3AD203B41FA5}">
-                      <ns2:colId val="20001"/>
-                    </a:ext>
-                  </a:extLst>
-                </a:gridCol>
-                <a:gridCol w="4740000">
-                  <a:extLst>
-                    <a:ext uri="{9D8B030D-6E8A-4147-A177-3AD203B41FA5}">
-                      <ns2:colId val="20002"/>
-                    </a:ext>
-                  </a:extLst>
-                </a:gridCol>
-              </a:tblGrid>
-              <a:tr h="255000">
-                <a:tc>
-                  <a:txBody>
-                    <a:bodyPr/>
-                    <a:lstStyle/>
-                    <a:p>
-                      <a:pPr marL="0" indent="0">
-                        <a:buNone/>
-                      </a:pPr>
-                      <a:r>
-                        <a:rPr sz="1000" b="1">
-                          <a:solidFill>
-                            <a:srgbClr val="F2F2F2"/>
-                          </a:solidFill>
-                        </a:rPr>
-                        <a:t>Tier</a:t>
-                      </a:r>
-                    </a:p>
-                  </a:txBody>
-                  <a:tcPr marL="26000" marR="26000" marT="18000" marB="18000" anchor="ctr">
-                    <a:lnL w="12700" cap="flat" cmpd="sng" algn="ctr">
-                      <a:solidFill>
-                        <a:srgbClr val="2D2D2D"/>
-                      </a:solidFill>
-                      <a:prstDash val="solid"/>
-                      <a:round/>
-                      <a:headEnd type="none" w="med" len="med"/>
-                      <a:tailEnd type="none" w="med" len="med"/>
-                    </a:lnL>
-                    <a:lnR w="12700" cap="flat" cmpd="sng" algn="ctr">
-                      <a:solidFill>
-                        <a:srgbClr val="2D2D2D"/>
-                      </a:solidFill>
-                      <a:prstDash val="solid"/>
-                      <a:round/>
-                      <a:headEnd type="none" w="med" len="med"/>
-                      <a:tailEnd type="none" w="med" len="med"/>
-                    </a:lnR>
-                    <a:lnT w="12700" cap="flat" cmpd="sng" algn="ctr">
-                      <a:solidFill>
-                        <a:srgbClr val="2D2D2D"/>
-                      </a:solidFill>
-                      <a:prstDash val="solid"/>
-                      <a:round/>
-                      <a:headEnd type="none" w="med" len="med"/>
-                      <a:tailEnd type="none" w="med" len="med"/>
-                    </a:lnT>
-                    <a:lnB w="12700" cap="flat" cmpd="sng" algn="ctr">
-                      <a:solidFill>
-                        <a:srgbClr val="2D2D2D"/>
-                      </a:solidFill>
-                      <a:prstDash val="solid"/>
-                      <a:round/>
-                      <a:headEnd type="none" w="med" len="med"/>
-                      <a:tailEnd type="none" w="med" len="med"/>
-                    </a:lnB>
-                    <a:solidFill>
-                      <a:srgbClr val="161616"/>
-                    </a:solidFill>
-                  </a:tcPr>
-                </a:tc>
-                <a:tc>
-                  <a:txBody>
-                    <a:bodyPr/>
-                    <a:lstStyle/>
-                    <a:p>
-                      <a:pPr marL="0" indent="0">
-                        <a:buNone/>
-                      </a:pPr>
-                      <a:r>
-                        <a:rPr sz="1000" b="1">
-                          <a:solidFill>
-                            <a:srgbClr val="F2F2F2"/>
-                          </a:solidFill>
-                        </a:rPr>
-                        <a:t>When</a:t>
-                      </a:r>
-                    </a:p>
-                  </a:txBody>
-                  <a:tcPr marL="26000" marR="26000" marT="18000" marB="18000" anchor="ctr">
-                    <a:lnL w="12700" cap="flat" cmpd="sng" algn="ctr">
-                      <a:solidFill>
-                        <a:srgbClr val="2D2D2D"/>
-                      </a:solidFill>
-                      <a:prstDash val="solid"/>
-                      <a:round/>
-                      <a:headEnd type="none" w="med" len="med"/>
-                      <a:tailEnd type="none" w="med" len="med"/>
-                    </a:lnL>
-                    <a:lnR w="12700" cap="flat" cmpd="sng" algn="ctr">
-                      <a:solidFill>
-                        <a:srgbClr val="2D2D2D"/>
-                      </a:solidFill>
-                      <a:prstDash val="solid"/>
-                      <a:round/>
-                      <a:headEnd type="none" w="med" len="med"/>
-                      <a:tailEnd type="none" w="med" len="med"/>
-                    </a:lnR>
-                    <a:lnT w="12700" cap="flat" cmpd="sng" algn="ctr">
-                      <a:solidFill>
-                        <a:srgbClr val="2D2D2D"/>
-                      </a:solidFill>
-                      <a:prstDash val="solid"/>
-                      <a:round/>
-                      <a:headEnd type="none" w="med" len="med"/>
-                      <a:tailEnd type="none" w="med" len="med"/>
-                    </a:lnT>
-                    <a:lnB w="12700" cap="flat" cmpd="sng" algn="ctr">
-                      <a:solidFill>
-                        <a:srgbClr val="2D2D2D"/>
-                      </a:solidFill>
-                      <a:prstDash val="solid"/>
-                      <a:round/>
-                      <a:headEnd type="none" w="med" len="med"/>
-                      <a:tailEnd type="none" w="med" len="med"/>
-                    </a:lnB>
-                    <a:solidFill>
-                      <a:srgbClr val="161616"/>
-                    </a:solidFill>
-                  </a:tcPr>
-                </a:tc>
-                <a:tc>
-                  <a:txBody>
-                    <a:bodyPr/>
-                    <a:lstStyle/>
-                    <a:p>
-                      <a:endParaRPr lang="en-US"/>
-                    </a:p>
-                  </a:txBody>
-                  <a:tcPr>
-                    <a:lnL w="12700" cap="flat" cmpd="sng" algn="ctr">
-                      <a:solidFill>
-                        <a:srgbClr val="2D2D2D"/>
-                      </a:solidFill>
-                      <a:prstDash val="solid"/>
-                      <a:round/>
-                      <a:headEnd type="none" w="med" len="med"/>
-                      <a:tailEnd type="none" w="med" len="med"/>
-                    </a:lnL>
-                  </a:tcPr>
-                </a:tc>
-                <a:extLst>
-                  <a:ext uri="{0D108BD9-81ED-4DB2-BD59-A6C34878D82A}">
-                    <ns2:rowId val="10000"/>
-                  </a:ext>
-                </a:extLst>
-              </a:tr>
-              <a:tr h="255000">
-                <a:tc>
-                  <a:txBody>
-                    <a:bodyPr/>
-                    <a:lstStyle/>
-                    <a:p>
-                      <a:pPr marL="0" indent="0">
-                        <a:buNone/>
-                      </a:pPr>
-                      <a:r>
-                        <a:rPr sz="930" b="0">
-                          <a:solidFill>
-                            <a:srgbClr val="D9D9D9"/>
-                          </a:solidFill>
-                        </a:rPr>
-                        <a:t>1</a:t>
-                      </a:r>
-                    </a:p>
-                  </a:txBody>
-                  <a:tcPr marL="26000" marR="26000" marT="18000" marB="18000" anchor="ctr">
-                    <a:lnL w="12700" cap="flat" cmpd="sng" algn="ctr">
-                      <a:solidFill>
-                        <a:srgbClr val="2D2D2D"/>
-                      </a:solidFill>
-                      <a:prstDash val="solid"/>
-                      <a:round/>
-                      <a:headEnd type="none" w="med" len="med"/>
-                      <a:tailEnd type="none" w="med" len="med"/>
-                    </a:lnL>
-                    <a:lnR w="12700" cap="flat" cmpd="sng" algn="ctr">
-                      <a:solidFill>
-                        <a:srgbClr val="2D2D2D"/>
-                      </a:solidFill>
-                      <a:prstDash val="solid"/>
-                      <a:round/>
-                      <a:headEnd type="none" w="med" len="med"/>
-                      <a:tailEnd type="none" w="med" len="med"/>
-                    </a:lnR>
-                    <a:lnT w="12700" cap="flat" cmpd="sng" algn="ctr">
-                      <a:solidFill>
-                        <a:srgbClr val="2D2D2D"/>
-                      </a:solidFill>
-                      <a:prstDash val="solid"/>
-                      <a:round/>
-                      <a:headEnd type="none" w="med" len="med"/>
-                      <a:tailEnd type="none" w="med" len="med"/>
-                    </a:lnT>
-                    <a:lnB w="12700" cap="flat" cmpd="sng" algn="ctr">
-                      <a:solidFill>
-                        <a:srgbClr val="2D2D2D"/>
-                      </a:solidFill>
-                      <a:prstDash val="solid"/>
-                      <a:round/>
-                      <a:headEnd type="none" w="med" len="med"/>
-                      <a:tailEnd type="none" w="med" len="med"/>
-                    </a:lnB>
-                    <a:solidFill>
-                      <a:srgbClr val="101010"/>
-                    </a:solidFill>
-                  </a:tcPr>
-                </a:tc>
-                <a:tc>
-                  <a:txBody>
-                    <a:bodyPr/>
-                    <a:lstStyle/>
-                    <a:p>
-                      <a:pPr marL="0" indent="0">
-                        <a:buNone/>
-                      </a:pPr>
-                      <a:r>
-                        <a:rPr sz="930" b="0">
-                          <a:solidFill>
-                            <a:srgbClr val="D9D9D9"/>
-                          </a:solidFill>
-                        </a:rPr>
-                        <a:t>All high-intent surfaces</a:t>
-                      </a:r>
-                    </a:p>
-                  </a:txBody>
-                  <a:tcPr marL="26000" marR="26000" marT="18000" marB="18000" anchor="ctr">
-                    <a:lnL w="12700" cap="flat" cmpd="sng" algn="ctr">
-                      <a:solidFill>
-                        <a:srgbClr val="2D2D2D"/>
-                      </a:solidFill>
-                      <a:prstDash val="solid"/>
-                      <a:round/>
-                      <a:headEnd type="none" w="med" len="med"/>
-                      <a:tailEnd type="none" w="med" len="med"/>
-                    </a:lnL>
-                    <a:lnR w="12700" cap="flat" cmpd="sng" algn="ctr">
-                      <a:solidFill>
-                        <a:srgbClr val="2D2D2D"/>
-                      </a:solidFill>
-                      <a:prstDash val="solid"/>
-                      <a:round/>
-                      <a:headEnd type="none" w="med" len="med"/>
-                      <a:tailEnd type="none" w="med" len="med"/>
-                    </a:lnR>
-                    <a:lnT w="12700" cap="flat" cmpd="sng" algn="ctr">
-                      <a:solidFill>
-                        <a:srgbClr val="2D2D2D"/>
-                      </a:solidFill>
-                      <a:prstDash val="solid"/>
-                      <a:round/>
-                      <a:headEnd type="none" w="med" len="med"/>
-                      <a:tailEnd type="none" w="med" len="med"/>
-                    </a:lnT>
-                    <a:lnB w="12700" cap="flat" cmpd="sng" algn="ctr">
-                      <a:solidFill>
-                        <a:srgbClr val="2D2D2D"/>
-                      </a:solidFill>
-                      <a:prstDash val="solid"/>
-                      <a:round/>
-                      <a:headEnd type="none" w="med" len="med"/>
-                      <a:tailEnd type="none" w="med" len="med"/>
-                    </a:lnB>
-                    <a:solidFill>
-                      <a:srgbClr val="101010"/>
-                    </a:solidFill>
-                  </a:tcPr>
-                </a:tc>
-                <a:tc>
-                  <a:txBody>
-                    <a:bodyPr/>
-                    <a:lstStyle/>
-                    <a:p>
-                      <a:endParaRPr lang="en-US"/>
-                    </a:p>
-                  </a:txBody>
-                  <a:tcPr>
-                    <a:lnL w="12700" cap="flat" cmpd="sng" algn="ctr">
-                      <a:solidFill>
-                        <a:srgbClr val="2D2D2D"/>
-                      </a:solidFill>
-                      <a:prstDash val="solid"/>
-                      <a:round/>
-                      <a:headEnd type="none" w="med" len="med"/>
-                      <a:tailEnd type="none" w="med" len="med"/>
-                    </a:lnL>
-                  </a:tcPr>
-                </a:tc>
-                <a:extLst>
-                  <a:ext uri="{0D108BD9-81ED-4DB2-BD59-A6C34878D82A}">
-                    <ns2:rowId val="10001"/>
-                  </a:ext>
-                </a:extLst>
-              </a:tr>
-              <a:tr h="255000">
-                <a:tc>
-                  <a:txBody>
-                    <a:bodyPr/>
-                    <a:lstStyle/>
-                    <a:p>
-                      <a:pPr marL="0" indent="0">
-                        <a:buNone/>
-                      </a:pPr>
-                      <a:r>
-                        <a:rPr sz="930" b="0">
-                          <a:solidFill>
-                            <a:srgbClr val="D9D9D9"/>
-                          </a:solidFill>
-                        </a:rPr>
-                        <a:t>2</a:t>
-                      </a:r>
-                    </a:p>
-                  </a:txBody>
-                  <a:tcPr marL="26000" marR="26000" marT="18000" marB="18000" anchor="ctr">
-                    <a:lnL w="12700" cap="flat" cmpd="sng" algn="ctr">
-                      <a:solidFill>
-                        <a:srgbClr val="2D2D2D"/>
-                      </a:solidFill>
-                      <a:prstDash val="solid"/>
-                      <a:round/>
-                      <a:headEnd type="none" w="med" len="med"/>
-                      <a:tailEnd type="none" w="med" len="med"/>
-                    </a:lnL>
-                    <a:lnR w="12700" cap="flat" cmpd="sng" algn="ctr">
-                      <a:solidFill>
-                        <a:srgbClr val="2D2D2D"/>
-                      </a:solidFill>
-                      <a:prstDash val="solid"/>
-                      <a:round/>
-                      <a:headEnd type="none" w="med" len="med"/>
-                      <a:tailEnd type="none" w="med" len="med"/>
-                    </a:lnR>
-                    <a:lnT w="12700" cap="flat" cmpd="sng" algn="ctr">
-                      <a:solidFill>
-                        <a:srgbClr val="2D2D2D"/>
-                      </a:solidFill>
-                      <a:prstDash val="solid"/>
-                      <a:round/>
-                      <a:headEnd type="none" w="med" len="med"/>
-                      <a:tailEnd type="none" w="med" len="med"/>
-                    </a:lnT>
-                    <a:lnB w="12700" cap="flat" cmpd="sng" algn="ctr">
-                      <a:solidFill>
-                        <a:srgbClr val="2D2D2D"/>
-                      </a:solidFill>
-                      <a:prstDash val="solid"/>
-                      <a:round/>
-                      <a:headEnd type="none" w="med" len="med"/>
-                      <a:tailEnd type="none" w="med" len="med"/>
-                    </a:lnB>
-                    <a:solidFill>
-                      <a:srgbClr val="101010"/>
-                    </a:solidFill>
-                  </a:tcPr>
-                </a:tc>
-                <a:tc>
-                  <a:txBody>
-                    <a:bodyPr/>
-                    <a:lstStyle/>
-                    <a:p>
-                      <a:pPr marL="0" indent="0">
-                        <a:buNone/>
-                      </a:pPr>
-                      <a:r>
-                        <a:rPr sz="930" b="0">
-                          <a:solidFill>
-                            <a:srgbClr val="D9D9D9"/>
-                          </a:solidFill>
-                        </a:rPr>
-                        <a:t>Selected high-intent surfaces</a:t>
-                      </a:r>
-                    </a:p>
-                  </a:txBody>
-                  <a:tcPr marL="26000" marR="26000" marT="18000" marB="18000" anchor="ctr">
-                    <a:lnL w="12700" cap="flat" cmpd="sng" algn="ctr">
-                      <a:solidFill>
-                        <a:srgbClr val="2D2D2D"/>
-                      </a:solidFill>
-                      <a:prstDash val="solid"/>
-                      <a:round/>
-                      <a:headEnd type="none" w="med" len="med"/>
-                      <a:tailEnd type="none" w="med" len="med"/>
-                    </a:lnL>
-                    <a:lnR w="12700" cap="flat" cmpd="sng" algn="ctr">
-                      <a:solidFill>
-                        <a:srgbClr val="2D2D2D"/>
-                      </a:solidFill>
-                      <a:prstDash val="solid"/>
-                      <a:round/>
-                      <a:headEnd type="none" w="med" len="med"/>
-                      <a:tailEnd type="none" w="med" len="med"/>
-                    </a:lnR>
-                    <a:lnT w="12700" cap="flat" cmpd="sng" algn="ctr">
-                      <a:solidFill>
-                        <a:srgbClr val="2D2D2D"/>
-                      </a:solidFill>
-                      <a:prstDash val="solid"/>
-                      <a:round/>
-                      <a:headEnd type="none" w="med" len="med"/>
-                      <a:tailEnd type="none" w="med" len="med"/>
-                    </a:lnT>
-                    <a:lnB w="12700" cap="flat" cmpd="sng" algn="ctr">
-                      <a:solidFill>
-                        <a:srgbClr val="2D2D2D"/>
-                      </a:solidFill>
-                      <a:prstDash val="solid"/>
-                      <a:round/>
-                      <a:headEnd type="none" w="med" len="med"/>
-                      <a:tailEnd type="none" w="med" len="med"/>
-                    </a:lnB>
-                    <a:solidFill>
-                      <a:srgbClr val="101010"/>
-                    </a:solidFill>
-                  </a:tcPr>
-                </a:tc>
-                <a:tc>
-                  <a:txBody>
-                    <a:bodyPr/>
-                    <a:lstStyle/>
-                    <a:p>
-                      <a:endParaRPr lang="en-US"/>
-                    </a:p>
-                  </a:txBody>
-                  <a:tcPr>
-                    <a:lnL w="12700" cap="flat" cmpd="sng" algn="ctr">
-                      <a:solidFill>
-                        <a:srgbClr val="2D2D2D"/>
-                      </a:solidFill>
-                      <a:prstDash val="solid"/>
-                      <a:round/>
-                      <a:headEnd type="none" w="med" len="med"/>
-                      <a:tailEnd type="none" w="med" len="med"/>
-                    </a:lnL>
-                  </a:tcPr>
-                </a:tc>
-                <a:extLst>
-                  <a:ext uri="{0D108BD9-81ED-4DB2-BD59-A6C34878D82A}">
-                    <ns2:rowId val="3137132510"/>
-                  </a:ext>
-                </a:extLst>
-              </a:tr>
-              <a:tr h="255000">
-                <a:tc>
-                  <a:txBody>
-                    <a:bodyPr/>
-                    <a:lstStyle/>
-                    <a:p>
-                      <a:pPr marL="0" indent="0">
-                        <a:buNone/>
-                      </a:pPr>
-                      <a:r>
-                        <a:rPr sz="930" b="0">
-                          <a:solidFill>
-                            <a:srgbClr val="D9D9D9"/>
-                          </a:solidFill>
-                        </a:rPr>
-                        <a:t>3</a:t>
-                      </a:r>
-                    </a:p>
-                  </a:txBody>
-                  <a:tcPr marL="26000" marR="26000" marT="18000" marB="18000" anchor="ctr">
-                    <a:lnL w="12700" cap="flat" cmpd="sng" algn="ctr">
-                      <a:solidFill>
-                        <a:srgbClr val="2D2D2D"/>
-                      </a:solidFill>
-                      <a:prstDash val="solid"/>
-                      <a:round/>
-                      <a:headEnd type="none" w="med" len="med"/>
-                      <a:tailEnd type="none" w="med" len="med"/>
-                    </a:lnL>
-                    <a:lnR w="12700" cap="flat" cmpd="sng" algn="ctr">
-                      <a:solidFill>
-                        <a:srgbClr val="2D2D2D"/>
-                      </a:solidFill>
-                      <a:prstDash val="solid"/>
-                      <a:round/>
-                      <a:headEnd type="none" w="med" len="med"/>
-                      <a:tailEnd type="none" w="med" len="med"/>
-                    </a:lnR>
-                    <a:lnT w="12700" cap="flat" cmpd="sng" algn="ctr">
-                      <a:solidFill>
-                        <a:srgbClr val="2D2D2D"/>
-                      </a:solidFill>
-                      <a:prstDash val="solid"/>
-                      <a:round/>
-                      <a:headEnd type="none" w="med" len="med"/>
-                      <a:tailEnd type="none" w="med" len="med"/>
-                    </a:lnT>
-                    <a:lnB w="12700" cap="flat" cmpd="sng" algn="ctr">
-                      <a:solidFill>
-                        <a:srgbClr val="2D2D2D"/>
-                      </a:solidFill>
-                      <a:prstDash val="solid"/>
-                      <a:round/>
-                      <a:headEnd type="none" w="med" len="med"/>
-                      <a:tailEnd type="none" w="med" len="med"/>
-                    </a:lnB>
-                    <a:solidFill>
-                      <a:srgbClr val="101010"/>
-                    </a:solidFill>
-                  </a:tcPr>
-                </a:tc>
-                <a:tc>
-                  <a:txBody>
-                    <a:bodyPr/>
-                    <a:lstStyle/>
-                    <a:p>
-                      <a:pPr marL="0" indent="0">
-                        <a:buNone/>
-                      </a:pPr>
-                      <a:r>
-                        <a:rPr sz="930" b="0">
-                          <a:solidFill>
-                            <a:srgbClr val="D9D9D9"/>
-                          </a:solidFill>
-                        </a:rPr>
-                        <a:t>Lowest-friction surfaces only</a:t>
-                      </a:r>
-                    </a:p>
-                  </a:txBody>
-                  <a:tcPr marL="26000" marR="26000" marT="18000" marB="18000" anchor="ctr">
-                    <a:lnL w="12700" cap="flat" cmpd="sng" algn="ctr">
-                      <a:solidFill>
-                        <a:srgbClr val="2D2D2D"/>
-                      </a:solidFill>
-                      <a:prstDash val="solid"/>
-                      <a:round/>
-                      <a:headEnd type="none" w="med" len="med"/>
-                      <a:tailEnd type="none" w="med" len="med"/>
-                    </a:lnL>
-                    <a:lnR w="12700" cap="flat" cmpd="sng" algn="ctr">
-                      <a:solidFill>
-                        <a:srgbClr val="2D2D2D"/>
-                      </a:solidFill>
-                      <a:prstDash val="solid"/>
-                      <a:round/>
-                      <a:headEnd type="none" w="med" len="med"/>
-                      <a:tailEnd type="none" w="med" len="med"/>
-                    </a:lnR>
-                    <a:lnT w="12700" cap="flat" cmpd="sng" algn="ctr">
-                      <a:solidFill>
-                        <a:srgbClr val="2D2D2D"/>
-                      </a:solidFill>
-                      <a:prstDash val="solid"/>
-                      <a:round/>
-                      <a:headEnd type="none" w="med" len="med"/>
-                      <a:tailEnd type="none" w="med" len="med"/>
-                    </a:lnT>
-                    <a:lnB w="12700" cap="flat" cmpd="sng" algn="ctr">
-                      <a:solidFill>
-                        <a:srgbClr val="2D2D2D"/>
-                      </a:solidFill>
-                      <a:prstDash val="solid"/>
-                      <a:round/>
-                      <a:headEnd type="none" w="med" len="med"/>
-                      <a:tailEnd type="none" w="med" len="med"/>
-                    </a:lnB>
-                    <a:solidFill>
-                      <a:srgbClr val="101010"/>
-                    </a:solidFill>
-                  </a:tcPr>
-                </a:tc>
-                <a:tc>
-                  <a:txBody>
-                    <a:bodyPr/>
-                    <a:lstStyle/>
-                    <a:p>
-                      <a:endParaRPr lang="en-US"/>
-                    </a:p>
-                  </a:txBody>
-                  <a:tcPr>
-                    <a:lnL w="12700" cap="flat" cmpd="sng" algn="ctr">
-                      <a:solidFill>
-                        <a:srgbClr val="2D2D2D"/>
-                      </a:solidFill>
-                      <a:prstDash val="solid"/>
-                      <a:round/>
-                      <a:headEnd type="none" w="med" len="med"/>
-                      <a:tailEnd type="none" w="med" len="med"/>
-                    </a:lnL>
-                  </a:tcPr>
-                </a:tc>
-                <a:extLst>
-                  <a:ext uri="{0D108BD9-81ED-4DB2-BD59-A6C34878D82A}">
-                    <ns2:rowId val="2667059301"/>
-                  </a:ext>
-                </a:extLst>
-              </a:tr>
-            </a:tbl>
-          </a:graphicData>
-        </a:graphic>
-      </p:graphicFrame>
+                  <a:srgbClr val="F2F2F2"/>
+                </a:solidFill>
+                <a:latin typeface="Arial"/>
+                <a:ea typeface="Arial"/>
+                <a:cs typeface="Arial"/>
+              </a:rPr>
+              <a:t>Seller dashboard</a:t>
+            </a:r>
+          </a:p>
+        </p:txBody>
+      </p:sp>
+      <p:sp>
+        <p:nvSpPr>
+          <p:cNvPr id="14" name="2x2 card body label 1"/>
+          <p:cNvSpPr/>
+          <p:nvPr/>
+        </p:nvSpPr>
+        <p:spPr>
+          <a:xfrm>
+            <a:off x="858650" y="3177900"/>
+            <a:ext cx="4493000" cy="140000"/>
+          </a:xfrm>
+          <a:prstGeom prst="rect">
+            <a:avLst/>
+          </a:prstGeom>
+          <a:noFill/>
+          <a:ln>
+            <a:noFill/>
+          </a:ln>
+        </p:spPr>
+        <p:txBody>
+          <a:bodyPr lIns="0" tIns="0" rIns="0" bIns="0" anchor="t"/>
+          <a:lstStyle/>
+          <a:p>
+            <a:pPr fontAlgn="base"/>
+            <a:r>
+              <a:rPr sz="850" b="1">
+                <a:solidFill>
+                  <a:srgbClr val="A7A7A7"/>
+                </a:solidFill>
+                <a:latin typeface="Arial"/>
+                <a:ea typeface="Arial"/>
+                <a:cs typeface="Arial"/>
+              </a:rPr>
+              <a:t>Why this moment works</a:t>
+            </a:r>
+          </a:p>
+        </p:txBody>
+      </p:sp>
+      <p:sp>
+        <p:nvSpPr>
+          <p:cNvPr id="15" name="2x2 card body 1"/>
+          <p:cNvSpPr/>
+          <p:nvPr/>
+        </p:nvSpPr>
+        <p:spPr>
+          <a:xfrm>
+            <a:off x="858650" y="3387900"/>
+            <a:ext cx="4493000" cy="340000"/>
+          </a:xfrm>
+          <a:prstGeom prst="rect">
+            <a:avLst/>
+          </a:prstGeom>
+          <a:noFill/>
+          <a:ln>
+            <a:noFill/>
+          </a:ln>
+        </p:spPr>
+        <p:txBody>
+          <a:bodyPr lIns="0" tIns="0" rIns="0" bIns="0" anchor="t"/>
+          <a:lstStyle/>
+          <a:p>
+            <a:pPr fontAlgn="base"/>
+            <a:r>
+              <a:rPr sz="1250" b="0">
+                <a:solidFill>
+                  <a:srgbClr val="D9D9D9"/>
+                </a:solidFill>
+                <a:latin typeface="Arial"/>
+                <a:ea typeface="Arial"/>
+                <a:cs typeface="Arial"/>
+              </a:rPr>
+              <a:t>Natural moment to link bundles to better performance</a:t>
+            </a:r>
+          </a:p>
+        </p:txBody>
+      </p:sp>
+      <p:sp>
+        <p:nvSpPr>
+          <p:cNvPr id="16" name="2x2 card 2"/>
+          <p:cNvSpPr/>
+          <p:nvPr/>
+        </p:nvSpPr>
+        <p:spPr>
+          <a:xfrm>
+            <a:off x="6210300" y="2247900"/>
+            <a:ext cx="4953000" cy="1543050"/>
+          </a:xfrm>
+          <a:custGeom>
+            <a:avLst/>
+            <a:gdLst/>
+            <a:ahLst/>
+            <a:cxnLst/>
+            <a:rect l="0" t="0" r="0" b="0"/>
+            <a:pathLst>
+              <a:path w="4953000" h="1543050">
+                <a:moveTo>
+                  <a:pt x="0" y="0"/>
+                </a:moveTo>
+                <a:lnTo>
+                  <a:pt x="4953000" y="0"/>
+                </a:lnTo>
+                <a:lnTo>
+                  <a:pt x="4953000" y="1473050"/>
+                </a:lnTo>
+                <a:cubicBezTo>
+                  <a:pt x="4953000" y="1511711"/>
+                  <a:pt x="4921661" y="1543050"/>
+                  <a:pt x="4883000" y="1543050"/>
+                </a:cubicBezTo>
+                <a:lnTo>
+                  <a:pt x="70000" y="1543050"/>
+                </a:lnTo>
+                <a:cubicBezTo>
+                  <a:pt x="31339" y="1543050"/>
+                  <a:pt x="0" y="1511711"/>
+                  <a:pt x="0" y="1473050"/>
+                </a:cubicBezTo>
+                <a:lnTo>
+                  <a:pt x="0" y="0"/>
+                </a:lnTo>
+                <a:close/>
+              </a:path>
+            </a:pathLst>
+          </a:custGeom>
+          <a:solidFill>
+            <a:srgbClr val="0D0D0D"/>
+          </a:solidFill>
+          <a:ln>
+            <a:solidFill>
+              <a:srgbClr val="303030"/>
+            </a:solidFill>
+          </a:ln>
+        </p:spPr>
+        <p:txBody>
+          <a:bodyPr/>
+          <a:lstStyle/>
+          <a:p>
+            <a:endParaRPr lang="en-US"/>
+          </a:p>
+        </p:txBody>
+      </p:sp>
+      <p:sp>
+        <p:nvSpPr>
+          <p:cNvPr id="17" name="2x2 card accent 2"/>
+          <p:cNvSpPr/>
+          <p:nvPr/>
+        </p:nvSpPr>
+        <p:spPr>
+          <a:xfrm>
+            <a:off x="6210300" y="2247900"/>
+            <a:ext cx="4953000" cy="38100"/>
+          </a:xfrm>
+          <a:prstGeom prst="rect">
+            <a:avLst/>
+          </a:prstGeom>
+          <a:solidFill>
+            <a:srgbClr val="FF735B"/>
+          </a:solidFill>
+          <a:ln>
+            <a:noFill/>
+          </a:ln>
+        </p:spPr>
+        <p:txBody>
+          <a:bodyPr/>
+          <a:lstStyle/>
+          <a:p>
+            <a:endParaRPr lang="en-US"/>
+          </a:p>
+        </p:txBody>
+      </p:sp>
+      <p:sp>
+        <p:nvSpPr>
+          <p:cNvPr id="18" name="2x2 card label 2"/>
+          <p:cNvSpPr/>
+          <p:nvPr/>
+        </p:nvSpPr>
+        <p:spPr>
+          <a:xfrm>
+            <a:off x="6440300" y="2492900"/>
+            <a:ext cx="4493000" cy="140000"/>
+          </a:xfrm>
+          <a:prstGeom prst="rect">
+            <a:avLst/>
+          </a:prstGeom>
+          <a:noFill/>
+          <a:ln>
+            <a:noFill/>
+          </a:ln>
+        </p:spPr>
+        <p:txBody>
+          <a:bodyPr lIns="0" tIns="0" rIns="0" bIns="0" anchor="t"/>
+          <a:lstStyle/>
+          <a:p>
+            <a:pPr fontAlgn="base"/>
+            <a:r>
+              <a:rPr sz="850" b="1">
+                <a:solidFill>
+                  <a:srgbClr val="A7A7A7"/>
+                </a:solidFill>
+                <a:latin typeface="Arial"/>
+                <a:ea typeface="Arial"/>
+                <a:cs typeface="Arial"/>
+              </a:rPr>
+              <a:t>Surface</a:t>
+            </a:r>
+          </a:p>
+        </p:txBody>
+      </p:sp>
+      <p:sp>
+        <p:nvSpPr>
+          <p:cNvPr id="19" name="2x2 card title 2"/>
+          <p:cNvSpPr/>
+          <p:nvPr/>
+        </p:nvSpPr>
+        <p:spPr>
+          <a:xfrm>
+            <a:off x="6440300" y="2712900"/>
+            <a:ext cx="4493000" cy="400000"/>
+          </a:xfrm>
+          <a:prstGeom prst="rect">
+            <a:avLst/>
+          </a:prstGeom>
+          <a:noFill/>
+          <a:ln>
+            <a:noFill/>
+          </a:ln>
+        </p:spPr>
+        <p:txBody>
+          <a:bodyPr lIns="0" tIns="0" rIns="0" bIns="0" anchor="t"/>
+          <a:lstStyle/>
+          <a:p>
+            <a:pPr fontAlgn="base"/>
+            <a:r>
+              <a:rPr sz="1450" b="1">
+                <a:solidFill>
+                  <a:srgbClr val="F2F2F2"/>
+                </a:solidFill>
+                <a:latin typeface="Arial"/>
+                <a:ea typeface="Arial"/>
+                <a:cs typeface="Arial"/>
+              </a:rPr>
+              <a:t>Listing creation flow</a:t>
+            </a:r>
+          </a:p>
+        </p:txBody>
+      </p:sp>
+      <p:sp>
+        <p:nvSpPr>
+          <p:cNvPr id="20" name="2x2 card body label 2"/>
+          <p:cNvSpPr/>
+          <p:nvPr/>
+        </p:nvSpPr>
+        <p:spPr>
+          <a:xfrm>
+            <a:off x="6440300" y="3177900"/>
+            <a:ext cx="4493000" cy="140000"/>
+          </a:xfrm>
+          <a:prstGeom prst="rect">
+            <a:avLst/>
+          </a:prstGeom>
+          <a:noFill/>
+          <a:ln>
+            <a:noFill/>
+          </a:ln>
+        </p:spPr>
+        <p:txBody>
+          <a:bodyPr lIns="0" tIns="0" rIns="0" bIns="0" anchor="t"/>
+          <a:lstStyle/>
+          <a:p>
+            <a:pPr fontAlgn="base"/>
+            <a:r>
+              <a:rPr sz="850" b="1">
+                <a:solidFill>
+                  <a:srgbClr val="A7A7A7"/>
+                </a:solidFill>
+                <a:latin typeface="Arial"/>
+                <a:ea typeface="Arial"/>
+                <a:cs typeface="Arial"/>
+              </a:rPr>
+              <a:t>Why this moment works</a:t>
+            </a:r>
+          </a:p>
+        </p:txBody>
+      </p:sp>
+      <p:sp>
+        <p:nvSpPr>
+          <p:cNvPr id="21" name="2x2 card body 2"/>
+          <p:cNvSpPr/>
+          <p:nvPr/>
+        </p:nvSpPr>
+        <p:spPr>
+          <a:xfrm>
+            <a:off x="6440300" y="3387900"/>
+            <a:ext cx="4493000" cy="340000"/>
+          </a:xfrm>
+          <a:prstGeom prst="rect">
+            <a:avLst/>
+          </a:prstGeom>
+          <a:noFill/>
+          <a:ln>
+            <a:noFill/>
+          </a:ln>
+        </p:spPr>
+        <p:txBody>
+          <a:bodyPr lIns="0" tIns="0" rIns="0" bIns="0" anchor="t"/>
+          <a:lstStyle/>
+          <a:p>
+            <a:pPr fontAlgn="base"/>
+            <a:r>
+              <a:rPr sz="1250" b="0">
+                <a:solidFill>
+                  <a:srgbClr val="D9D9D9"/>
+                </a:solidFill>
+                <a:latin typeface="Arial"/>
+                <a:ea typeface="Arial"/>
+                <a:cs typeface="Arial"/>
+              </a:rPr>
+              <a:t>Bundle can improve listings from day one</a:t>
+            </a:r>
+          </a:p>
+        </p:txBody>
+      </p:sp>
+      <p:sp>
+        <p:nvSpPr>
+          <p:cNvPr id="22" name="2x2 card 3"/>
+          <p:cNvSpPr/>
+          <p:nvPr/>
+        </p:nvSpPr>
+        <p:spPr>
+          <a:xfrm>
+            <a:off x="628650" y="4114800"/>
+            <a:ext cx="4953000" cy="1543050"/>
+          </a:xfrm>
+          <a:custGeom>
+            <a:avLst/>
+            <a:gdLst/>
+            <a:ahLst/>
+            <a:cxnLst/>
+            <a:rect l="0" t="0" r="0" b="0"/>
+            <a:pathLst>
+              <a:path w="4953000" h="1543050">
+                <a:moveTo>
+                  <a:pt x="0" y="0"/>
+                </a:moveTo>
+                <a:lnTo>
+                  <a:pt x="4953000" y="0"/>
+                </a:lnTo>
+                <a:lnTo>
+                  <a:pt x="4953000" y="1473050"/>
+                </a:lnTo>
+                <a:cubicBezTo>
+                  <a:pt x="4953000" y="1511711"/>
+                  <a:pt x="4921661" y="1543050"/>
+                  <a:pt x="4883000" y="1543050"/>
+                </a:cubicBezTo>
+                <a:lnTo>
+                  <a:pt x="70000" y="1543050"/>
+                </a:lnTo>
+                <a:cubicBezTo>
+                  <a:pt x="31339" y="1543050"/>
+                  <a:pt x="0" y="1511711"/>
+                  <a:pt x="0" y="1473050"/>
+                </a:cubicBezTo>
+                <a:lnTo>
+                  <a:pt x="0" y="0"/>
+                </a:lnTo>
+                <a:close/>
+              </a:path>
+            </a:pathLst>
+          </a:custGeom>
+          <a:solidFill>
+            <a:srgbClr val="0D0D0D"/>
+          </a:solidFill>
+          <a:ln>
+            <a:solidFill>
+              <a:srgbClr val="303030"/>
+            </a:solidFill>
+          </a:ln>
+        </p:spPr>
+        <p:txBody>
+          <a:bodyPr/>
+          <a:lstStyle/>
+          <a:p>
+            <a:endParaRPr lang="en-US"/>
+          </a:p>
+        </p:txBody>
+      </p:sp>
+      <p:sp>
+        <p:nvSpPr>
+          <p:cNvPr id="23" name="2x2 card accent 3"/>
+          <p:cNvSpPr/>
+          <p:nvPr/>
+        </p:nvSpPr>
+        <p:spPr>
+          <a:xfrm>
+            <a:off x="628650" y="4114800"/>
+            <a:ext cx="4953000" cy="38100"/>
+          </a:xfrm>
+          <a:prstGeom prst="rect">
+            <a:avLst/>
+          </a:prstGeom>
+          <a:solidFill>
+            <a:srgbClr val="FF735B"/>
+          </a:solidFill>
+          <a:ln>
+            <a:noFill/>
+          </a:ln>
+        </p:spPr>
+        <p:txBody>
+          <a:bodyPr/>
+          <a:lstStyle/>
+          <a:p>
+            <a:endParaRPr lang="en-US"/>
+          </a:p>
+        </p:txBody>
+      </p:sp>
+      <p:sp>
+        <p:nvSpPr>
+          <p:cNvPr id="24" name="2x2 card label 3"/>
+          <p:cNvSpPr/>
+          <p:nvPr/>
+        </p:nvSpPr>
+        <p:spPr>
+          <a:xfrm>
+            <a:off x="858650" y="4359800"/>
+            <a:ext cx="4493000" cy="140000"/>
+          </a:xfrm>
+          <a:prstGeom prst="rect">
+            <a:avLst/>
+          </a:prstGeom>
+          <a:noFill/>
+          <a:ln>
+            <a:noFill/>
+          </a:ln>
+        </p:spPr>
+        <p:txBody>
+          <a:bodyPr lIns="0" tIns="0" rIns="0" bIns="0" anchor="t"/>
+          <a:lstStyle/>
+          <a:p>
+            <a:pPr fontAlgn="base"/>
+            <a:r>
+              <a:rPr sz="850" b="1">
+                <a:solidFill>
+                  <a:srgbClr val="A7A7A7"/>
+                </a:solidFill>
+                <a:latin typeface="Arial"/>
+                <a:ea typeface="Arial"/>
+                <a:cs typeface="Arial"/>
+              </a:rPr>
+              <a:t>Surface</a:t>
+            </a:r>
+          </a:p>
+        </p:txBody>
+      </p:sp>
+      <p:sp>
+        <p:nvSpPr>
+          <p:cNvPr id="25" name="2x2 card title 3"/>
+          <p:cNvSpPr/>
+          <p:nvPr/>
+        </p:nvSpPr>
+        <p:spPr>
+          <a:xfrm>
+            <a:off x="858650" y="4579800"/>
+            <a:ext cx="4493000" cy="400000"/>
+          </a:xfrm>
+          <a:prstGeom prst="rect">
+            <a:avLst/>
+          </a:prstGeom>
+          <a:noFill/>
+          <a:ln>
+            <a:noFill/>
+          </a:ln>
+        </p:spPr>
+        <p:txBody>
+          <a:bodyPr lIns="0" tIns="0" rIns="0" bIns="0" anchor="t"/>
+          <a:lstStyle/>
+          <a:p>
+            <a:pPr fontAlgn="base"/>
+            <a:r>
+              <a:rPr sz="1450" b="1">
+                <a:solidFill>
+                  <a:srgbClr val="F2F2F2"/>
+                </a:solidFill>
+                <a:latin typeface="Arial"/>
+                <a:ea typeface="Arial"/>
+                <a:cs typeface="Arial"/>
+              </a:rPr>
+              <a:t>Listing management page</a:t>
+            </a:r>
+          </a:p>
+        </p:txBody>
+      </p:sp>
+      <p:sp>
+        <p:nvSpPr>
+          <p:cNvPr id="26" name="2x2 card body label 3"/>
+          <p:cNvSpPr/>
+          <p:nvPr/>
+        </p:nvSpPr>
+        <p:spPr>
+          <a:xfrm>
+            <a:off x="858650" y="5044800"/>
+            <a:ext cx="4493000" cy="140000"/>
+          </a:xfrm>
+          <a:prstGeom prst="rect">
+            <a:avLst/>
+          </a:prstGeom>
+          <a:noFill/>
+          <a:ln>
+            <a:noFill/>
+          </a:ln>
+        </p:spPr>
+        <p:txBody>
+          <a:bodyPr lIns="0" tIns="0" rIns="0" bIns="0" anchor="t"/>
+          <a:lstStyle/>
+          <a:p>
+            <a:pPr fontAlgn="base"/>
+            <a:r>
+              <a:rPr sz="850" b="1">
+                <a:solidFill>
+                  <a:srgbClr val="A7A7A7"/>
+                </a:solidFill>
+                <a:latin typeface="Arial"/>
+                <a:ea typeface="Arial"/>
+                <a:cs typeface="Arial"/>
+              </a:rPr>
+              <a:t>Why this moment works</a:t>
+            </a:r>
+          </a:p>
+        </p:txBody>
+      </p:sp>
+      <p:sp>
+        <p:nvSpPr>
+          <p:cNvPr id="27" name="2x2 card body 3"/>
+          <p:cNvSpPr/>
+          <p:nvPr/>
+        </p:nvSpPr>
+        <p:spPr>
+          <a:xfrm>
+            <a:off x="858650" y="5254800"/>
+            <a:ext cx="4493000" cy="340000"/>
+          </a:xfrm>
+          <a:prstGeom prst="rect">
+            <a:avLst/>
+          </a:prstGeom>
+          <a:noFill/>
+          <a:ln>
+            <a:noFill/>
+          </a:ln>
+        </p:spPr>
+        <p:txBody>
+          <a:bodyPr lIns="0" tIns="0" rIns="0" bIns="0" anchor="t"/>
+          <a:lstStyle/>
+          <a:p>
+            <a:pPr fontAlgn="base"/>
+            <a:r>
+              <a:rPr sz="1250" b="0" dirty="0">
+                <a:solidFill>
+                  <a:srgbClr val="D9D9D9"/>
+                </a:solidFill>
+                <a:latin typeface="Arial"/>
+                <a:ea typeface="Arial"/>
+                <a:cs typeface="Arial"/>
+              </a:rPr>
+              <a:t>Bundle is a broader upgrade than one-off ad fixes</a:t>
+            </a:r>
+          </a:p>
+        </p:txBody>
+      </p:sp>
+      <p:sp>
+        <p:nvSpPr>
+          <p:cNvPr id="28" name="2x2 card 4"/>
+          <p:cNvSpPr/>
+          <p:nvPr/>
+        </p:nvSpPr>
+        <p:spPr>
+          <a:xfrm>
+            <a:off x="6210300" y="4114800"/>
+            <a:ext cx="4953000" cy="1543050"/>
+          </a:xfrm>
+          <a:custGeom>
+            <a:avLst/>
+            <a:gdLst/>
+            <a:ahLst/>
+            <a:cxnLst/>
+            <a:rect l="0" t="0" r="0" b="0"/>
+            <a:pathLst>
+              <a:path w="4953000" h="1543050">
+                <a:moveTo>
+                  <a:pt x="0" y="0"/>
+                </a:moveTo>
+                <a:lnTo>
+                  <a:pt x="4953000" y="0"/>
+                </a:lnTo>
+                <a:lnTo>
+                  <a:pt x="4953000" y="1473050"/>
+                </a:lnTo>
+                <a:cubicBezTo>
+                  <a:pt x="4953000" y="1511711"/>
+                  <a:pt x="4921661" y="1543050"/>
+                  <a:pt x="4883000" y="1543050"/>
+                </a:cubicBezTo>
+                <a:lnTo>
+                  <a:pt x="70000" y="1543050"/>
+                </a:lnTo>
+                <a:cubicBezTo>
+                  <a:pt x="31339" y="1543050"/>
+                  <a:pt x="0" y="1511711"/>
+                  <a:pt x="0" y="1473050"/>
+                </a:cubicBezTo>
+                <a:lnTo>
+                  <a:pt x="0" y="0"/>
+                </a:lnTo>
+                <a:close/>
+              </a:path>
+            </a:pathLst>
+          </a:custGeom>
+          <a:solidFill>
+            <a:srgbClr val="0D0D0D"/>
+          </a:solidFill>
+          <a:ln>
+            <a:solidFill>
+              <a:srgbClr val="303030"/>
+            </a:solidFill>
+          </a:ln>
+        </p:spPr>
+        <p:txBody>
+          <a:bodyPr/>
+          <a:lstStyle/>
+          <a:p>
+            <a:endParaRPr lang="en-US"/>
+          </a:p>
+        </p:txBody>
+      </p:sp>
+      <p:sp>
+        <p:nvSpPr>
+          <p:cNvPr id="29" name="2x2 card accent 4"/>
+          <p:cNvSpPr/>
+          <p:nvPr/>
+        </p:nvSpPr>
+        <p:spPr>
+          <a:xfrm>
+            <a:off x="6210300" y="4114800"/>
+            <a:ext cx="4953000" cy="38100"/>
+          </a:xfrm>
+          <a:prstGeom prst="rect">
+            <a:avLst/>
+          </a:prstGeom>
+          <a:solidFill>
+            <a:srgbClr val="FF735B"/>
+          </a:solidFill>
+          <a:ln>
+            <a:noFill/>
+          </a:ln>
+        </p:spPr>
+        <p:txBody>
+          <a:bodyPr/>
+          <a:lstStyle/>
+          <a:p>
+            <a:endParaRPr lang="en-US"/>
+          </a:p>
+        </p:txBody>
+      </p:sp>
+      <p:sp>
+        <p:nvSpPr>
+          <p:cNvPr id="30" name="2x2 card label 4"/>
+          <p:cNvSpPr/>
+          <p:nvPr/>
+        </p:nvSpPr>
+        <p:spPr>
+          <a:xfrm>
+            <a:off x="6440300" y="4359800"/>
+            <a:ext cx="4493000" cy="140000"/>
+          </a:xfrm>
+          <a:prstGeom prst="rect">
+            <a:avLst/>
+          </a:prstGeom>
+          <a:noFill/>
+          <a:ln>
+            <a:noFill/>
+          </a:ln>
+        </p:spPr>
+        <p:txBody>
+          <a:bodyPr lIns="0" tIns="0" rIns="0" bIns="0" anchor="t"/>
+          <a:lstStyle/>
+          <a:p>
+            <a:pPr fontAlgn="base"/>
+            <a:r>
+              <a:rPr sz="850" b="1">
+                <a:solidFill>
+                  <a:srgbClr val="A7A7A7"/>
+                </a:solidFill>
+                <a:latin typeface="Arial"/>
+                <a:ea typeface="Arial"/>
+                <a:cs typeface="Arial"/>
+              </a:rPr>
+              <a:t>Surface</a:t>
+            </a:r>
+          </a:p>
+        </p:txBody>
+      </p:sp>
+      <p:sp>
+        <p:nvSpPr>
+          <p:cNvPr id="31" name="2x2 card title 4"/>
+          <p:cNvSpPr/>
+          <p:nvPr/>
+        </p:nvSpPr>
+        <p:spPr>
+          <a:xfrm>
+            <a:off x="6440300" y="4579800"/>
+            <a:ext cx="4493000" cy="400000"/>
+          </a:xfrm>
+          <a:prstGeom prst="rect">
+            <a:avLst/>
+          </a:prstGeom>
+          <a:noFill/>
+          <a:ln>
+            <a:noFill/>
+          </a:ln>
+        </p:spPr>
+        <p:txBody>
+          <a:bodyPr lIns="0" tIns="0" rIns="0" bIns="0" anchor="t"/>
+          <a:lstStyle/>
+          <a:p>
+            <a:pPr fontAlgn="base"/>
+            <a:r>
+              <a:rPr sz="1450" b="1">
+                <a:solidFill>
+                  <a:srgbClr val="F2F2F2"/>
+                </a:solidFill>
+                <a:latin typeface="Arial"/>
+                <a:ea typeface="Arial"/>
+                <a:cs typeface="Arial"/>
+              </a:rPr>
+              <a:t>Paid-feature purchase flow</a:t>
+            </a:r>
+          </a:p>
+        </p:txBody>
+      </p:sp>
+      <p:sp>
+        <p:nvSpPr>
+          <p:cNvPr id="32" name="2x2 card body label 4"/>
+          <p:cNvSpPr/>
+          <p:nvPr/>
+        </p:nvSpPr>
+        <p:spPr>
+          <a:xfrm>
+            <a:off x="6440300" y="5044800"/>
+            <a:ext cx="4493000" cy="140000"/>
+          </a:xfrm>
+          <a:prstGeom prst="rect">
+            <a:avLst/>
+          </a:prstGeom>
+          <a:noFill/>
+          <a:ln>
+            <a:noFill/>
+          </a:ln>
+        </p:spPr>
+        <p:txBody>
+          <a:bodyPr lIns="0" tIns="0" rIns="0" bIns="0" anchor="t"/>
+          <a:lstStyle/>
+          <a:p>
+            <a:pPr fontAlgn="base"/>
+            <a:r>
+              <a:rPr sz="850" b="1">
+                <a:solidFill>
+                  <a:srgbClr val="A7A7A7"/>
+                </a:solidFill>
+                <a:latin typeface="Arial"/>
+                <a:ea typeface="Arial"/>
+                <a:cs typeface="Arial"/>
+              </a:rPr>
+              <a:t>Why this moment works</a:t>
+            </a:r>
+          </a:p>
+        </p:txBody>
+      </p:sp>
+      <p:sp>
+        <p:nvSpPr>
+          <p:cNvPr id="33" name="2x2 card body 4"/>
+          <p:cNvSpPr/>
+          <p:nvPr/>
+        </p:nvSpPr>
+        <p:spPr>
+          <a:xfrm>
+            <a:off x="6440300" y="5254800"/>
+            <a:ext cx="4493000" cy="340000"/>
+          </a:xfrm>
+          <a:prstGeom prst="rect">
+            <a:avLst/>
+          </a:prstGeom>
+          <a:noFill/>
+          <a:ln>
+            <a:noFill/>
+          </a:ln>
+        </p:spPr>
+        <p:txBody>
+          <a:bodyPr lIns="0" tIns="0" rIns="0" bIns="0" anchor="t"/>
+          <a:lstStyle/>
+          <a:p>
+            <a:pPr fontAlgn="base"/>
+            <a:r>
+              <a:rPr sz="1250" b="0" dirty="0">
+                <a:solidFill>
+                  <a:srgbClr val="D9D9D9"/>
+                </a:solidFill>
+                <a:latin typeface="Arial"/>
+                <a:ea typeface="Arial"/>
+                <a:cs typeface="Arial"/>
+              </a:rPr>
+              <a:t>Bundle is a structured alternative to single visibility purchases</a:t>
+            </a:r>
+          </a:p>
+        </p:txBody>
+      </p:sp>
     </p:spTree>
   </p:cSld>
   <p:clrMapOvr>
     <a:masterClrMapping/>
   </p:clrMapOvr>
+  <p:extLst>
+    <p:ext uri="{6950BFC3-D8DA-4A85-94F7-54DA5524770B}">
+      <p188:commentRel xmlns:p188="http://schemas.microsoft.com/office/powerpoint/2018/8/main" r:id="rId3"/>
+    </p:ext>
+  </p:extLst>
 </p:sld>
 </file>
 
 <file path=ppt/slides/slide7.xml><?xml version="1.0" encoding="utf-8"?>
-<p:sld xmlns:a="http://schemas.openxmlformats.org/drawingml/2006/main" xmlns:ns2="http://schemas.microsoft.com/office/drawing/2014/main" xmlns:ns3="http://schemas.microsoft.com/office/powerpoint/2010/main" xmlns:p="http://schemas.openxmlformats.org/presentationml/2006/main">
+<p:sld xmlns:a="http://schemas.openxmlformats.org/drawingml/2006/main" xmlns:r="http://schemas.openxmlformats.org/officeDocument/2006/relationships" xmlns:p="http://schemas.openxmlformats.org/presentationml/2006/main">
   <p:cSld name="Slide 5">
     <p:bg>
       <p:bgPr>
@@ -8164,10 +7489,12 @@
             <a:avLst/>
           </a:prstGeom>
           <a:noFill/>
-          <a:ln/>
-        </p:spPr>
-        <p:txBody>
-          <a:bodyPr lIns="57150" tIns="38100" rIns="57150" bIns="38100" anchor="t">
+          <a:ln>
+            <a:noFill/>
+          </a:ln>
+        </p:spPr>
+        <p:txBody>
+          <a:bodyPr wrap="square" lIns="57150" tIns="38100" rIns="57150" bIns="38100" anchor="t">
             <a:normAutofit/>
           </a:bodyPr>
           <a:lstStyle/>
@@ -8199,16 +7526,18 @@
         <p:spPr>
           <a:xfrm>
             <a:off x="1257300" y="323850"/>
-            <a:ext cx="9953625" cy="714375"/>
-          </a:xfrm>
-          <a:prstGeom prst="rect">
-            <a:avLst/>
-          </a:prstGeom>
-          <a:noFill/>
-          <a:ln/>
-        </p:spPr>
-        <p:txBody>
-          <a:bodyPr lIns="57150" tIns="38100" rIns="57150" bIns="38100" anchor="t">
+            <a:ext cx="9144000" cy="714375"/>
+          </a:xfrm>
+          <a:prstGeom prst="rect">
+            <a:avLst/>
+          </a:prstGeom>
+          <a:noFill/>
+          <a:ln>
+            <a:noFill/>
+          </a:ln>
+        </p:spPr>
+        <p:txBody>
+          <a:bodyPr wrap="square" lIns="57150" tIns="38100" rIns="57150" bIns="38100" anchor="t">
             <a:normAutofit/>
           </a:bodyPr>
           <a:lstStyle/>
@@ -8239,7 +7568,7 @@
         </p:nvSpPr>
         <p:spPr>
           <a:xfrm>
-            <a:off x="457200" y="1078992"/>
+            <a:off x="457200" y="1085850"/>
             <a:ext cx="10972800" cy="0"/>
           </a:xfrm>
           <a:prstGeom prst="line">
@@ -8299,17 +7628,19 @@
         </p:nvSpPr>
         <p:spPr>
           <a:xfrm>
-            <a:off x="502920" y="6236208"/>
-            <a:ext cx="6400800" cy="164592"/>
-          </a:xfrm>
-          <a:prstGeom prst="rect">
-            <a:avLst/>
-          </a:prstGeom>
-          <a:noFill/>
-          <a:ln/>
-        </p:spPr>
-        <p:txBody>
-          <a:bodyPr wrap="square" lIns="0" tIns="0" rIns="0" bIns="0" rtlCol="0" anchor="ctr">
+            <a:off x="502920" y="6231255"/>
+            <a:ext cx="6400800" cy="164782"/>
+          </a:xfrm>
+          <a:prstGeom prst="rect">
+            <a:avLst/>
+          </a:prstGeom>
+          <a:noFill/>
+          <a:ln>
+            <a:noFill/>
+          </a:ln>
+        </p:spPr>
+        <p:txBody>
+          <a:bodyPr wrap="square" lIns="0" tIns="0" rIns="0" bIns="0" anchor="ctr">
             <a:normAutofit/>
           </a:bodyPr>
           <a:lstStyle/>
@@ -8318,7 +7649,7 @@
               <a:buNone/>
             </a:pPr>
             <a:r>
-              <a:rPr lang="en-US" sz="750" dirty="0">
+              <a:rPr lang="en-US" sz="750" b="0" dirty="0">
                 <a:solidFill>
                   <a:srgbClr val="A5A5A5"/>
                 </a:solidFill>
@@ -8326,7 +7657,7 @@
                 <a:ea typeface="Arial" pitchFamily="34" charset="-122"/>
                 <a:cs typeface="Arial" pitchFamily="34" charset="-120"/>
               </a:rPr>
-              <a:t>SMB Scale</a:t>
+              <a:t>Marketing Campaign Proposal</a:t>
             </a:r>
             <a:endParaRPr lang="en-US" sz="750" dirty="0"/>
           </a:p>
@@ -8334,16 +7665,8 @@
       </p:sp>
       <p:sp>
         <p:nvSpPr>
-          <p:cNvPr id="7" name="Text 5">
-            <a:extLst>
-              <a:ext uri="{FF2B5EF4-FFF2-40B4-BE49-F238E27FC236}">
-                <ns2:creationId id="{639743E6-45F5-5FCD-A928-9E2EA9A5B01C}"/>
-              </a:ext>
-            </a:extLst>
-          </p:cNvPr>
-          <p:cNvSpPr>
-            <a:spLocks noGrp="1"/>
-          </p:cNvSpPr>
+          <p:cNvPr id="7" name="Text 5"/>
+          <p:cNvSpPr/>
           <p:nvPr/>
         </p:nvSpPr>
         <p:spPr>
@@ -8354,74 +7677,57 @@
           <a:prstGeom prst="rect">
             <a:avLst/>
           </a:prstGeom>
-          <a:ln w="0">
-            <a:solidFill>
-              <a:srgbClr val="000000">
-                <a:alpha val="0"/>
-              </a:srgbClr>
-            </a:solidFill>
-          </a:ln>
-        </p:spPr>
-        <p:txBody>
-          <a:bodyPr lIns="57150" tIns="38100" rIns="57150" bIns="38100" anchor="t"/>
-          <a:lstStyle/>
-          <a:p>
-            <a:pPr algn="r">
+          <a:noFill/>
+          <a:ln>
+            <a:noFill/>
+          </a:ln>
+        </p:spPr>
+        <p:txBody>
+          <a:bodyPr wrap="square" lIns="57150" tIns="38100" rIns="57150" bIns="38100" anchor="t">
+            <a:normAutofit/>
+          </a:bodyPr>
+          <a:lstStyle/>
+          <a:p>
+            <a:pPr marL="0" indent="0" algn="r">
               <a:buNone/>
-              <a:defRPr sz="900" b="0">
+            </a:pPr>
+            <a:r>
+              <a:rPr lang="en-US" sz="900" b="0" dirty="0">
                 <a:solidFill>
                   <a:srgbClr val="A5A5A5"/>
                 </a:solidFill>
-                <a:latin typeface="Arial"/>
-                <a:ea typeface="Arial"/>
-                <a:cs typeface="Arial"/>
-              </a:defRPr>
-            </a:pPr>
-            <a:r>
-              <a:rPr lang="en-US" sz="900" b="0" dirty="0">
-                <a:solidFill>
-                  <a:srgbClr val="A5A5A5"/>
-                </a:solidFill>
-                <a:latin typeface="Arial"/>
-                <a:ea typeface="Arial"/>
-                <a:cs typeface="Arial"/>
+                <a:latin typeface="Arial" pitchFamily="34" charset="0"/>
+                <a:ea typeface="Arial" pitchFamily="34" charset="-122"/>
+                <a:cs typeface="Arial" pitchFamily="34" charset="-120"/>
               </a:rPr>
               <a:t>07 / 07</a:t>
             </a:r>
-            <a:r>
-              <a:rPr sz="900" b="0" dirty="0">
-                <a:solidFill>
-                  <a:srgbClr val="A5A5A5"/>
-                </a:solidFill>
-                <a:latin typeface="Arial"/>
-                <a:ea typeface="Arial"/>
-                <a:cs typeface="Arial"/>
-              </a:rPr>
-              <a:t/>
-            </a:r>
-          </a:p>
-        </p:txBody>
-      </p:sp>
-      <p:sp>
-        <p:nvSpPr>
-          <p:cNvPr id="8" name="Text 6"/>
-          <p:cNvSpPr/>
-          <p:nvPr/>
-        </p:nvSpPr>
-        <p:spPr>
-          <a:xfrm>
-            <a:off x="621792" y="1900000"/>
-            <a:ext cx="2743200" cy="250000"/>
-          </a:xfrm>
-          <a:prstGeom prst="rect">
-            <a:avLst/>
-          </a:prstGeom>
-          <a:noFill/>
-          <a:ln/>
-        </p:spPr>
-        <p:txBody>
-          <a:bodyPr wrap="square" lIns="0" tIns="0" rIns="0" bIns="0" rtlCol="0" anchor="ctr">
-            <a:normAutofit lnSpcReduction="10000"/>
+            <a:endParaRPr lang="en-US" sz="900" dirty="0"/>
+          </a:p>
+        </p:txBody>
+      </p:sp>
+      <p:sp>
+        <p:nvSpPr>
+          <p:cNvPr id="8" name="Combined KPI intro"/>
+          <p:cNvSpPr/>
+          <p:nvPr/>
+        </p:nvSpPr>
+        <p:spPr>
+          <a:xfrm>
+            <a:off x="628650" y="1219200"/>
+            <a:ext cx="9810750" cy="323850"/>
+          </a:xfrm>
+          <a:prstGeom prst="rect">
+            <a:avLst/>
+          </a:prstGeom>
+          <a:noFill/>
+          <a:ln>
+            <a:noFill/>
+          </a:ln>
+        </p:spPr>
+        <p:txBody>
+          <a:bodyPr wrap="square" lIns="0" tIns="0" rIns="0" bIns="0" anchor="t">
+            <a:normAutofit/>
           </a:bodyPr>
           <a:lstStyle/>
           <a:p>
@@ -8429,463 +7735,42 @@
               <a:buNone/>
             </a:pPr>
             <a:r>
-              <a:rPr lang="en-US" sz="1450" b="1" dirty="0">
-                <a:solidFill>
-                  <a:srgbClr val="FF735B"/>
+              <a:rPr lang="en-US" sz="1500" b="1" dirty="0">
+                <a:solidFill>
+                  <a:srgbClr val="F2F2F2"/>
                 </a:solidFill>
                 <a:latin typeface="Arial" pitchFamily="34" charset="0"/>
                 <a:ea typeface="Arial" pitchFamily="34" charset="-122"/>
                 <a:cs typeface="Arial" pitchFamily="34" charset="-120"/>
               </a:rPr>
-              <a:t>4.1 Primary KPI</a:t>
-            </a:r>
-            <a:endParaRPr lang="en-US" sz="1800" dirty="0"/>
-          </a:p>
-        </p:txBody>
-      </p:sp>
-      <p:graphicFrame>
-        <p:nvGraphicFramePr>
-          <p:cNvPr id="9" name="Table 0"/>
-          <p:cNvGraphicFramePr>
-            <a:graphicFrameLocks noGrp="1"/>
-          </p:cNvGraphicFramePr>
-          <p:nvPr>
-            <p:extLst>
-              <p:ext uri="{D42A27DB-BD31-4B8C-83A1-F6EECF244321}">
-                <ns3:modId val="1579011935"/>
-              </p:ext>
-            </p:extLst>
-          </p:nvPr>
-        </p:nvGraphicFramePr>
-        <p:xfrm>
-          <a:off x="621792" y="2220000"/>
-          <a:ext cx="10424160" cy="1020000"/>
-        </p:xfrm>
-        <a:graphic>
-          <a:graphicData uri="http://schemas.openxmlformats.org/drawingml/2006/table">
-            <a:tbl>
-              <a:tblPr/>
-              <a:tblGrid>
-                <a:gridCol w="3000000">
-                  <a:extLst>
-                    <a:ext uri="{9D8B030D-6E8A-4147-A177-3AD203B41FA5}">
-                      <ns2:colId val="20000"/>
-                    </a:ext>
-                  </a:extLst>
-                </a:gridCol>
-                <a:gridCol w="4700000">
-                  <a:extLst>
-                    <a:ext uri="{9D8B030D-6E8A-4147-A177-3AD203B41FA5}">
-                      <ns2:colId val="20001"/>
-                    </a:ext>
-                  </a:extLst>
-                </a:gridCol>
-                <a:gridCol w="2724160">
-                  <a:extLst>
-                    <a:ext uri="{9D8B030D-6E8A-4147-A177-3AD203B41FA5}">
-                      <ns2:colId val="20002"/>
-                    </a:ext>
-                  </a:extLst>
-                </a:gridCol>
-              </a:tblGrid>
-              <a:tr h="510000">
-                <a:tc>
-                  <a:txBody>
-                    <a:bodyPr/>
-                    <a:lstStyle/>
-                    <a:p>
-                      <a:pPr marL="0" indent="0">
-                        <a:buNone/>
-                      </a:pPr>
-                      <a:r>
-                        <a:rPr sz="1120" b="1">
-                          <a:solidFill>
-                            <a:srgbClr val="F2F2F2"/>
-                          </a:solidFill>
-                        </a:rPr>
-                        <a:t>KPI</a:t>
-                      </a:r>
-                    </a:p>
-                  </a:txBody>
-                  <a:tcPr marL="32000" marR="32000" marT="26000" marB="26000" anchor="ctr">
-                    <a:lnL w="12700" cap="flat" cmpd="sng" algn="ctr">
-                      <a:solidFill>
-                        <a:srgbClr val="2D2D2D"/>
-                      </a:solidFill>
-                      <a:prstDash val="solid"/>
-                      <a:round/>
-                      <a:headEnd type="none" w="med" len="med"/>
-                      <a:tailEnd type="none" w="med" len="med"/>
-                    </a:lnL>
-                    <a:lnR w="12700" cap="flat" cmpd="sng" algn="ctr">
-                      <a:solidFill>
-                        <a:srgbClr val="2D2D2D"/>
-                      </a:solidFill>
-                      <a:prstDash val="solid"/>
-                      <a:round/>
-                      <a:headEnd type="none" w="med" len="med"/>
-                      <a:tailEnd type="none" w="med" len="med"/>
-                    </a:lnR>
-                    <a:lnT w="12700" cap="flat" cmpd="sng" algn="ctr">
-                      <a:solidFill>
-                        <a:srgbClr val="2D2D2D"/>
-                      </a:solidFill>
-                      <a:prstDash val="solid"/>
-                      <a:round/>
-                      <a:headEnd type="none" w="med" len="med"/>
-                      <a:tailEnd type="none" w="med" len="med"/>
-                    </a:lnT>
-                    <a:lnB w="12700" cap="flat" cmpd="sng" algn="ctr">
-                      <a:solidFill>
-                        <a:srgbClr val="2D2D2D"/>
-                      </a:solidFill>
-                      <a:prstDash val="solid"/>
-                      <a:round/>
-                      <a:headEnd type="none" w="med" len="med"/>
-                      <a:tailEnd type="none" w="med" len="med"/>
-                    </a:lnB>
-                    <a:solidFill>
-                      <a:srgbClr val="161616"/>
-                    </a:solidFill>
-                  </a:tcPr>
-                </a:tc>
-                <a:tc>
-                  <a:txBody>
-                    <a:bodyPr/>
-                    <a:lstStyle/>
-                    <a:p>
-                      <a:pPr marL="0" indent="0">
-                        <a:buNone/>
-                      </a:pPr>
-                      <a:r>
-                        <a:rPr sz="1120" b="1">
-                          <a:solidFill>
-                            <a:srgbClr val="F2F2F2"/>
-                          </a:solidFill>
-                        </a:rPr>
-                        <a:t>Definition</a:t>
-                      </a:r>
-                    </a:p>
-                  </a:txBody>
-                  <a:tcPr marL="32000" marR="32000" marT="26000" marB="26000" anchor="ctr">
-                    <a:lnL w="12700" cap="flat" cmpd="sng" algn="ctr">
-                      <a:solidFill>
-                        <a:srgbClr val="2D2D2D"/>
-                      </a:solidFill>
-                      <a:prstDash val="solid"/>
-                      <a:round/>
-                      <a:headEnd type="none" w="med" len="med"/>
-                      <a:tailEnd type="none" w="med" len="med"/>
-                    </a:lnL>
-                    <a:lnR w="12700" cap="flat" cmpd="sng" algn="ctr">
-                      <a:solidFill>
-                        <a:srgbClr val="2D2D2D"/>
-                      </a:solidFill>
-                      <a:prstDash val="solid"/>
-                      <a:round/>
-                      <a:headEnd type="none" w="med" len="med"/>
-                      <a:tailEnd type="none" w="med" len="med"/>
-                    </a:lnR>
-                    <a:lnT w="12700" cap="flat" cmpd="sng" algn="ctr">
-                      <a:solidFill>
-                        <a:srgbClr val="2D2D2D"/>
-                      </a:solidFill>
-                      <a:prstDash val="solid"/>
-                      <a:round/>
-                      <a:headEnd type="none" w="med" len="med"/>
-                      <a:tailEnd type="none" w="med" len="med"/>
-                    </a:lnT>
-                    <a:lnB w="12700" cap="flat" cmpd="sng" algn="ctr">
-                      <a:solidFill>
-                        <a:srgbClr val="2D2D2D"/>
-                      </a:solidFill>
-                      <a:prstDash val="solid"/>
-                      <a:round/>
-                      <a:headEnd type="none" w="med" len="med"/>
-                      <a:tailEnd type="none" w="med" len="med"/>
-                    </a:lnB>
-                    <a:solidFill>
-                      <a:srgbClr val="161616"/>
-                    </a:solidFill>
-                  </a:tcPr>
-                </a:tc>
-                <a:tc>
-                  <a:txBody>
-                    <a:bodyPr/>
-                    <a:lstStyle/>
-                    <a:p>
-                      <a:pPr marL="0" indent="0">
-                        <a:buNone/>
-                      </a:pPr>
-                      <a:r>
-                        <a:rPr sz="1120" b="1">
-                          <a:solidFill>
-                            <a:srgbClr val="F2F2F2"/>
-                          </a:solidFill>
-                        </a:rPr>
-                        <a:t>Why it matters</a:t>
-                      </a:r>
-                    </a:p>
-                  </a:txBody>
-                  <a:tcPr marL="32000" marR="32000" marT="26000" marB="26000" anchor="ctr">
-                    <a:lnL w="12700" cap="flat" cmpd="sng" algn="ctr">
-                      <a:solidFill>
-                        <a:srgbClr val="2D2D2D"/>
-                      </a:solidFill>
-                      <a:prstDash val="solid"/>
-                      <a:round/>
-                      <a:headEnd type="none" w="med" len="med"/>
-                      <a:tailEnd type="none" w="med" len="med"/>
-                    </a:lnL>
-                    <a:lnR w="12700" cap="flat" cmpd="sng" algn="ctr">
-                      <a:solidFill>
-                        <a:srgbClr val="2D2D2D"/>
-                      </a:solidFill>
-                      <a:prstDash val="solid"/>
-                      <a:round/>
-                      <a:headEnd type="none" w="med" len="med"/>
-                      <a:tailEnd type="none" w="med" len="med"/>
-                    </a:lnR>
-                    <a:lnT w="12700" cap="flat" cmpd="sng" algn="ctr">
-                      <a:solidFill>
-                        <a:srgbClr val="2D2D2D"/>
-                      </a:solidFill>
-                      <a:prstDash val="solid"/>
-                      <a:round/>
-                      <a:headEnd type="none" w="med" len="med"/>
-                      <a:tailEnd type="none" w="med" len="med"/>
-                    </a:lnT>
-                    <a:lnB w="12700" cap="flat" cmpd="sng" algn="ctr">
-                      <a:solidFill>
-                        <a:srgbClr val="2D2D2D"/>
-                      </a:solidFill>
-                      <a:prstDash val="solid"/>
-                      <a:round/>
-                      <a:headEnd type="none" w="med" len="med"/>
-                      <a:tailEnd type="none" w="med" len="med"/>
-                    </a:lnB>
-                    <a:solidFill>
-                      <a:srgbClr val="161616"/>
-                    </a:solidFill>
-                  </a:tcPr>
-                </a:tc>
-                <a:extLst>
-                  <a:ext uri="{0D108BD9-81ED-4DB2-BD59-A6C34878D82A}">
-                    <ns2:rowId val="10000"/>
-                  </a:ext>
-                </a:extLst>
-              </a:tr>
-              <a:tr h="510000">
-                <a:tc>
-                  <a:txBody>
-                    <a:bodyPr/>
-                    <a:lstStyle/>
-                    <a:p>
-                      <a:pPr marL="0" indent="0">
-                        <a:buNone/>
-                      </a:pPr>
-                      <a:r>
-                        <a:rPr sz="1080" b="0">
-                          <a:solidFill>
-                            <a:srgbClr val="D9D9D9"/>
-                          </a:solidFill>
-                        </a:rPr>
-                        <a:t>Incremental SMB Bundle adoption rate</a:t>
-                      </a:r>
-                    </a:p>
-                  </a:txBody>
-                  <a:tcPr marL="32000" marR="32000" marT="26000" marB="26000" anchor="ctr">
-                    <a:lnL w="12700" cap="flat" cmpd="sng" algn="ctr">
-                      <a:solidFill>
-                        <a:srgbClr val="2D2D2D"/>
-                      </a:solidFill>
-                      <a:prstDash val="solid"/>
-                      <a:round/>
-                      <a:headEnd type="none" w="med" len="med"/>
-                      <a:tailEnd type="none" w="med" len="med"/>
-                    </a:lnL>
-                    <a:lnR w="12700" cap="flat" cmpd="sng" algn="ctr">
-                      <a:solidFill>
-                        <a:srgbClr val="2D2D2D"/>
-                      </a:solidFill>
-                      <a:prstDash val="solid"/>
-                      <a:round/>
-                      <a:headEnd type="none" w="med" len="med"/>
-                      <a:tailEnd type="none" w="med" len="med"/>
-                    </a:lnR>
-                    <a:lnT w="12700" cap="flat" cmpd="sng" algn="ctr">
-                      <a:solidFill>
-                        <a:srgbClr val="2D2D2D"/>
-                      </a:solidFill>
-                      <a:prstDash val="solid"/>
-                      <a:round/>
-                      <a:headEnd type="none" w="med" len="med"/>
-                      <a:tailEnd type="none" w="med" len="med"/>
-                    </a:lnT>
-                    <a:lnB w="12700" cap="flat" cmpd="sng" algn="ctr">
-                      <a:solidFill>
-                        <a:srgbClr val="2D2D2D"/>
-                      </a:solidFill>
-                      <a:prstDash val="solid"/>
-                      <a:round/>
-                      <a:headEnd type="none" w="med" len="med"/>
-                      <a:tailEnd type="none" w="med" len="med"/>
-                    </a:lnB>
-                    <a:solidFill>
-                      <a:srgbClr val="101010"/>
-                    </a:solidFill>
-                  </a:tcPr>
-                </a:tc>
-                <a:tc>
-                  <a:txBody>
-                    <a:bodyPr/>
-                    <a:lstStyle/>
-                    <a:p>
-                      <a:pPr marL="0" indent="0">
-                        <a:buNone/>
-                      </a:pPr>
-                      <a:r>
-                        <a:rPr sz="1080" b="0">
-                          <a:solidFill>
-                            <a:srgbClr val="D9D9D9"/>
-                          </a:solidFill>
-                        </a:rPr>
-                        <a:t>Exposed adoption rate minus holdout adoption rate, overall and by tier</a:t>
-                      </a:r>
-                    </a:p>
-                  </a:txBody>
-                  <a:tcPr marL="32000" marR="32000" marT="26000" marB="26000" anchor="ctr">
-                    <a:lnL w="12700" cap="flat" cmpd="sng" algn="ctr">
-                      <a:solidFill>
-                        <a:srgbClr val="2D2D2D"/>
-                      </a:solidFill>
-                      <a:prstDash val="solid"/>
-                      <a:round/>
-                      <a:headEnd type="none" w="med" len="med"/>
-                      <a:tailEnd type="none" w="med" len="med"/>
-                    </a:lnL>
-                    <a:lnR w="12700" cap="flat" cmpd="sng" algn="ctr">
-                      <a:solidFill>
-                        <a:srgbClr val="2D2D2D"/>
-                      </a:solidFill>
-                      <a:prstDash val="solid"/>
-                      <a:round/>
-                      <a:headEnd type="none" w="med" len="med"/>
-                      <a:tailEnd type="none" w="med" len="med"/>
-                    </a:lnR>
-                    <a:lnT w="12700" cap="flat" cmpd="sng" algn="ctr">
-                      <a:solidFill>
-                        <a:srgbClr val="2D2D2D"/>
-                      </a:solidFill>
-                      <a:prstDash val="solid"/>
-                      <a:round/>
-                      <a:headEnd type="none" w="med" len="med"/>
-                      <a:tailEnd type="none" w="med" len="med"/>
-                    </a:lnT>
-                    <a:lnB w="12700" cap="flat" cmpd="sng" algn="ctr">
-                      <a:solidFill>
-                        <a:srgbClr val="2D2D2D"/>
-                      </a:solidFill>
-                      <a:prstDash val="solid"/>
-                      <a:round/>
-                      <a:headEnd type="none" w="med" len="med"/>
-                      <a:tailEnd type="none" w="med" len="med"/>
-                    </a:lnB>
-                    <a:solidFill>
-                      <a:srgbClr val="101010"/>
-                    </a:solidFill>
-                  </a:tcPr>
-                </a:tc>
-                <a:tc>
-                  <a:txBody>
-                    <a:bodyPr/>
-                    <a:lstStyle/>
-                    <a:p>
-                      <a:pPr marL="0" indent="0">
-                        <a:buNone/>
-                      </a:pPr>
-                      <a:r>
-                        <a:rPr sz="1080" b="0">
-                          <a:solidFill>
-                            <a:srgbClr val="D9D9D9"/>
-                          </a:solidFill>
-                        </a:rPr>
-                        <a:t>Separates real lift from natural adoption.</a:t>
-                      </a:r>
-                    </a:p>
-                  </a:txBody>
-                  <a:tcPr marL="32000" marR="32000" marT="26000" marB="26000" anchor="ctr">
-                    <a:lnL w="12700" cap="flat" cmpd="sng" algn="ctr">
-                      <a:solidFill>
-                        <a:srgbClr val="2D2D2D"/>
-                      </a:solidFill>
-                      <a:prstDash val="solid"/>
-                      <a:round/>
-                      <a:headEnd type="none" w="med" len="med"/>
-                      <a:tailEnd type="none" w="med" len="med"/>
-                    </a:lnL>
-                    <a:lnR w="12700" cap="flat" cmpd="sng" algn="ctr">
-                      <a:solidFill>
-                        <a:srgbClr val="2D2D2D"/>
-                      </a:solidFill>
-                      <a:prstDash val="solid"/>
-                      <a:round/>
-                      <a:headEnd type="none" w="med" len="med"/>
-                      <a:tailEnd type="none" w="med" len="med"/>
-                    </a:lnR>
-                    <a:lnT w="12700" cap="flat" cmpd="sng" algn="ctr">
-                      <a:solidFill>
-                        <a:srgbClr val="2D2D2D"/>
-                      </a:solidFill>
-                      <a:prstDash val="solid"/>
-                      <a:round/>
-                      <a:headEnd type="none" w="med" len="med"/>
-                      <a:tailEnd type="none" w="med" len="med"/>
-                    </a:lnT>
-                    <a:lnB w="12700" cap="flat" cmpd="sng" algn="ctr">
-                      <a:solidFill>
-                        <a:srgbClr val="2D2D2D"/>
-                      </a:solidFill>
-                      <a:prstDash val="solid"/>
-                      <a:round/>
-                      <a:headEnd type="none" w="med" len="med"/>
-                      <a:tailEnd type="none" w="med" len="med"/>
-                    </a:lnB>
-                    <a:solidFill>
-                      <a:srgbClr val="101010"/>
-                    </a:solidFill>
-                  </a:tcPr>
-                </a:tc>
-                <a:extLst>
-                  <a:ext uri="{0D108BD9-81ED-4DB2-BD59-A6C34878D82A}">
-                    <ns2:rowId val="10001"/>
-                  </a:ext>
-                </a:extLst>
-              </a:tr>
-            </a:tbl>
-          </a:graphicData>
-        </a:graphic>
-      </p:graphicFrame>
-      <p:sp>
-        <p:nvSpPr>
-          <p:cNvPr id="10" name="Text 7"/>
-          <p:cNvSpPr/>
-          <p:nvPr/>
-        </p:nvSpPr>
-        <p:spPr>
-          <a:xfrm>
-            <a:off x="621792" y="3510000"/>
-            <a:ext cx="3000000" cy="250000"/>
-          </a:xfrm>
-          <a:prstGeom prst="rect">
-            <a:avLst/>
-          </a:prstGeom>
-          <a:noFill/>
-          <a:ln/>
-        </p:spPr>
-        <p:txBody>
-          <a:bodyPr wrap="square" lIns="0" tIns="0" rIns="0" bIns="0" rtlCol="0" anchor="ctr">
-            <a:normAutofit lnSpcReduction="10000"/>
+              <a:t>Measure incremental adoption, diagnose channel response, and monitor seller-fit guardrails.</a:t>
+            </a:r>
+            <a:endParaRPr lang="en-US" sz="1500" dirty="0"/>
+          </a:p>
+        </p:txBody>
+      </p:sp>
+      <p:sp>
+        <p:nvSpPr>
+          <p:cNvPr id="9" name="Primary KPI section label"/>
+          <p:cNvSpPr/>
+          <p:nvPr/>
+        </p:nvSpPr>
+        <p:spPr>
+          <a:xfrm>
+            <a:off x="628650" y="1724025"/>
+            <a:ext cx="2857500" cy="266700"/>
+          </a:xfrm>
+          <a:prstGeom prst="rect">
+            <a:avLst/>
+          </a:prstGeom>
+          <a:noFill/>
+          <a:ln>
+            <a:noFill/>
+          </a:ln>
+        </p:spPr>
+        <p:txBody>
+          <a:bodyPr wrap="square" lIns="0" tIns="0" rIns="0" bIns="0" anchor="t">
+            <a:normAutofit/>
           </a:bodyPr>
           <a:lstStyle/>
           <a:p>
@@ -8901,829 +7786,95 @@
                 <a:ea typeface="Arial" pitchFamily="34" charset="-122"/>
                 <a:cs typeface="Arial" pitchFamily="34" charset="-120"/>
               </a:rPr>
-              <a:t>4.2 Secondary KPIs</a:t>
-            </a:r>
-            <a:endParaRPr lang="en-US" sz="1800" dirty="0"/>
-          </a:p>
-        </p:txBody>
-      </p:sp>
-      <p:graphicFrame>
-        <p:nvGraphicFramePr>
-          <p:cNvPr id="11" name="Table 1"/>
-          <p:cNvGraphicFramePr>
-            <a:graphicFrameLocks noGrp="1"/>
-          </p:cNvGraphicFramePr>
-          <p:nvPr>
-            <p:extLst>
-              <p:ext uri="{D42A27DB-BD31-4B8C-83A1-F6EECF244321}">
-                <ns3:modId val="1579011935"/>
-              </p:ext>
-            </p:extLst>
-          </p:nvPr>
-        </p:nvGraphicFramePr>
-        <p:xfrm>
-          <a:off x="621792" y="3840000"/>
-          <a:ext cx="6250000" cy="1960000"/>
-        </p:xfrm>
-        <a:graphic>
-          <a:graphicData uri="http://schemas.openxmlformats.org/drawingml/2006/table">
-            <a:tbl>
-              <a:tblPr/>
-              <a:tblGrid>
-                <a:gridCol w="1500000">
-                  <a:extLst>
-                    <a:ext uri="{9D8B030D-6E8A-4147-A177-3AD203B41FA5}">
-                      <ns2:colId val="20000"/>
-                    </a:ext>
-                  </a:extLst>
-                </a:gridCol>
-                <a:gridCol w="2450000">
-                  <a:extLst>
-                    <a:ext uri="{9D8B030D-6E8A-4147-A177-3AD203B41FA5}">
-                      <ns2:colId val="20001"/>
-                    </a:ext>
-                  </a:extLst>
-                </a:gridCol>
-                <a:gridCol w="2300000">
-                  <a:extLst>
-                    <a:ext uri="{9D8B030D-6E8A-4147-A177-3AD203B41FA5}">
-                      <ns2:colId val="20002"/>
-                    </a:ext>
-                  </a:extLst>
-                </a:gridCol>
-              </a:tblGrid>
-              <a:tr h="490000">
-                <a:tc>
-                  <a:txBody>
-                    <a:bodyPr/>
-                    <a:lstStyle/>
-                    <a:p>
-                      <a:pPr marL="0" indent="0">
-                        <a:buNone/>
-                      </a:pPr>
-                      <a:r>
-                        <a:rPr sz="920" b="1">
-                          <a:solidFill>
-                            <a:srgbClr val="F2F2F2"/>
-                          </a:solidFill>
-                        </a:rPr>
-                        <a:t>KPI</a:t>
-                      </a:r>
-                    </a:p>
-                  </a:txBody>
-                  <a:tcPr marL="25000" marR="25000" marT="18000" marB="18000" anchor="ctr">
-                    <a:lnL w="12700" cap="flat" cmpd="sng" algn="ctr">
-                      <a:solidFill>
-                        <a:srgbClr val="2D2D2D"/>
-                      </a:solidFill>
-                      <a:prstDash val="solid"/>
-                      <a:round/>
-                      <a:headEnd type="none" w="med" len="med"/>
-                      <a:tailEnd type="none" w="med" len="med"/>
-                    </a:lnL>
-                    <a:lnR w="12700" cap="flat" cmpd="sng" algn="ctr">
-                      <a:solidFill>
-                        <a:srgbClr val="2D2D2D"/>
-                      </a:solidFill>
-                      <a:prstDash val="solid"/>
-                      <a:round/>
-                      <a:headEnd type="none" w="med" len="med"/>
-                      <a:tailEnd type="none" w="med" len="med"/>
-                    </a:lnR>
-                    <a:lnT w="12700" cap="flat" cmpd="sng" algn="ctr">
-                      <a:solidFill>
-                        <a:srgbClr val="2D2D2D"/>
-                      </a:solidFill>
-                      <a:prstDash val="solid"/>
-                      <a:round/>
-                      <a:headEnd type="none" w="med" len="med"/>
-                      <a:tailEnd type="none" w="med" len="med"/>
-                    </a:lnT>
-                    <a:lnB w="12700" cap="flat" cmpd="sng" algn="ctr">
-                      <a:solidFill>
-                        <a:srgbClr val="2D2D2D"/>
-                      </a:solidFill>
-                      <a:prstDash val="solid"/>
-                      <a:round/>
-                      <a:headEnd type="none" w="med" len="med"/>
-                      <a:tailEnd type="none" w="med" len="med"/>
-                    </a:lnB>
-                    <a:solidFill>
-                      <a:srgbClr val="161616"/>
-                    </a:solidFill>
-                  </a:tcPr>
-                </a:tc>
-                <a:tc>
-                  <a:txBody>
-                    <a:bodyPr/>
-                    <a:lstStyle/>
-                    <a:p>
-                      <a:pPr marL="0" indent="0">
-                        <a:buNone/>
-                      </a:pPr>
-                      <a:r>
-                        <a:rPr sz="920" b="1">
-                          <a:solidFill>
-                            <a:srgbClr val="F2F2F2"/>
-                          </a:solidFill>
-                        </a:rPr>
-                        <a:t>Definition</a:t>
-                      </a:r>
-                    </a:p>
-                  </a:txBody>
-                  <a:tcPr marL="25000" marR="25000" marT="18000" marB="18000" anchor="ctr">
-                    <a:lnL w="12700" cap="flat" cmpd="sng" algn="ctr">
-                      <a:solidFill>
-                        <a:srgbClr val="2D2D2D"/>
-                      </a:solidFill>
-                      <a:prstDash val="solid"/>
-                      <a:round/>
-                      <a:headEnd type="none" w="med" len="med"/>
-                      <a:tailEnd type="none" w="med" len="med"/>
-                    </a:lnL>
-                    <a:lnR w="12700" cap="flat" cmpd="sng" algn="ctr">
-                      <a:solidFill>
-                        <a:srgbClr val="2D2D2D"/>
-                      </a:solidFill>
-                      <a:prstDash val="solid"/>
-                      <a:round/>
-                      <a:headEnd type="none" w="med" len="med"/>
-                      <a:tailEnd type="none" w="med" len="med"/>
-                    </a:lnR>
-                    <a:lnT w="12700" cap="flat" cmpd="sng" algn="ctr">
-                      <a:solidFill>
-                        <a:srgbClr val="2D2D2D"/>
-                      </a:solidFill>
-                      <a:prstDash val="solid"/>
-                      <a:round/>
-                      <a:headEnd type="none" w="med" len="med"/>
-                      <a:tailEnd type="none" w="med" len="med"/>
-                    </a:lnT>
-                    <a:lnB w="12700" cap="flat" cmpd="sng" algn="ctr">
-                      <a:solidFill>
-                        <a:srgbClr val="2D2D2D"/>
-                      </a:solidFill>
-                      <a:prstDash val="solid"/>
-                      <a:round/>
-                      <a:headEnd type="none" w="med" len="med"/>
-                      <a:tailEnd type="none" w="med" len="med"/>
-                    </a:lnB>
-                    <a:solidFill>
-                      <a:srgbClr val="161616"/>
-                    </a:solidFill>
-                  </a:tcPr>
-                </a:tc>
-                <a:tc>
-                  <a:txBody>
-                    <a:bodyPr/>
-                    <a:lstStyle/>
-                    <a:p>
-                      <a:pPr marL="0" indent="0">
-                        <a:buNone/>
-                      </a:pPr>
-                      <a:r>
-                        <a:rPr sz="920" b="1">
-                          <a:solidFill>
-                            <a:srgbClr val="F2F2F2"/>
-                          </a:solidFill>
-                        </a:rPr>
-                        <a:t>Why it matters</a:t>
-                      </a:r>
-                    </a:p>
-                  </a:txBody>
-                  <a:tcPr marL="25000" marR="25000" marT="18000" marB="18000" anchor="ctr">
-                    <a:lnL w="12700" cap="flat" cmpd="sng" algn="ctr">
-                      <a:solidFill>
-                        <a:srgbClr val="2D2D2D"/>
-                      </a:solidFill>
-                      <a:prstDash val="solid"/>
-                      <a:round/>
-                      <a:headEnd type="none" w="med" len="med"/>
-                      <a:tailEnd type="none" w="med" len="med"/>
-                    </a:lnL>
-                    <a:lnR w="12700" cap="flat" cmpd="sng" algn="ctr">
-                      <a:solidFill>
-                        <a:srgbClr val="2D2D2D"/>
-                      </a:solidFill>
-                      <a:prstDash val="solid"/>
-                      <a:round/>
-                      <a:headEnd type="none" w="med" len="med"/>
-                      <a:tailEnd type="none" w="med" len="med"/>
-                    </a:lnR>
-                    <a:lnT w="12700" cap="flat" cmpd="sng" algn="ctr">
-                      <a:solidFill>
-                        <a:srgbClr val="2D2D2D"/>
-                      </a:solidFill>
-                      <a:prstDash val="solid"/>
-                      <a:round/>
-                      <a:headEnd type="none" w="med" len="med"/>
-                      <a:tailEnd type="none" w="med" len="med"/>
-                    </a:lnT>
-                    <a:lnB w="12700" cap="flat" cmpd="sng" algn="ctr">
-                      <a:solidFill>
-                        <a:srgbClr val="2D2D2D"/>
-                      </a:solidFill>
-                      <a:prstDash val="solid"/>
-                      <a:round/>
-                      <a:headEnd type="none" w="med" len="med"/>
-                      <a:tailEnd type="none" w="med" len="med"/>
-                    </a:lnB>
-                    <a:solidFill>
-                      <a:srgbClr val="161616"/>
-                    </a:solidFill>
-                  </a:tcPr>
-                </a:tc>
-                <a:extLst>
-                  <a:ext uri="{0D108BD9-81ED-4DB2-BD59-A6C34878D82A}">
-                    <ns2:rowId val="10000"/>
-                  </a:ext>
-                </a:extLst>
-              </a:tr>
-              <a:tr h="490000">
-                <a:tc>
-                  <a:txBody>
-                    <a:bodyPr/>
-                    <a:lstStyle/>
-                    <a:p>
-                      <a:pPr marL="0" indent="0">
-                        <a:buNone/>
-                      </a:pPr>
-                      <a:r>
-                        <a:rPr sz="850" b="0">
-                          <a:solidFill>
-                            <a:srgbClr val="D9D9D9"/>
-                          </a:solidFill>
-                        </a:rPr>
-                        <a:t>Click-through rate</a:t>
-                      </a:r>
-                    </a:p>
-                  </a:txBody>
-                  <a:tcPr marL="25000" marR="25000" marT="18000" marB="18000" anchor="ctr">
-                    <a:lnL w="12700" cap="flat" cmpd="sng" algn="ctr">
-                      <a:solidFill>
-                        <a:srgbClr val="2D2D2D"/>
-                      </a:solidFill>
-                      <a:prstDash val="solid"/>
-                      <a:round/>
-                      <a:headEnd type="none" w="med" len="med"/>
-                      <a:tailEnd type="none" w="med" len="med"/>
-                    </a:lnL>
-                    <a:lnR w="12700" cap="flat" cmpd="sng" algn="ctr">
-                      <a:solidFill>
-                        <a:srgbClr val="2D2D2D"/>
-                      </a:solidFill>
-                      <a:prstDash val="solid"/>
-                      <a:round/>
-                      <a:headEnd type="none" w="med" len="med"/>
-                      <a:tailEnd type="none" w="med" len="med"/>
-                    </a:lnR>
-                    <a:lnT w="12700" cap="flat" cmpd="sng" algn="ctr">
-                      <a:solidFill>
-                        <a:srgbClr val="2D2D2D"/>
-                      </a:solidFill>
-                      <a:prstDash val="solid"/>
-                      <a:round/>
-                      <a:headEnd type="none" w="med" len="med"/>
-                      <a:tailEnd type="none" w="med" len="med"/>
-                    </a:lnT>
-                    <a:lnB w="12700" cap="flat" cmpd="sng" algn="ctr">
-                      <a:solidFill>
-                        <a:srgbClr val="2D2D2D"/>
-                      </a:solidFill>
-                      <a:prstDash val="solid"/>
-                      <a:round/>
-                      <a:headEnd type="none" w="med" len="med"/>
-                      <a:tailEnd type="none" w="med" len="med"/>
-                    </a:lnB>
-                    <a:solidFill>
-                      <a:srgbClr val="101010"/>
-                    </a:solidFill>
-                  </a:tcPr>
-                </a:tc>
-                <a:tc>
-                  <a:txBody>
-                    <a:bodyPr/>
-                    <a:lstStyle/>
-                    <a:p>
-                      <a:pPr marL="0" indent="0">
-                        <a:buNone/>
-                      </a:pPr>
-                      <a:r>
-                        <a:rPr sz="850" b="0">
-                          <a:solidFill>
-                            <a:srgbClr val="D9D9D9"/>
-                          </a:solidFill>
-                        </a:rPr>
-                        <a:t>Share of exposed sellers who click through</a:t>
-                      </a:r>
-                    </a:p>
-                  </a:txBody>
-                  <a:tcPr marL="25000" marR="25000" marT="18000" marB="18000" anchor="ctr">
-                    <a:lnL w="12700" cap="flat" cmpd="sng" algn="ctr">
-                      <a:solidFill>
-                        <a:srgbClr val="2D2D2D"/>
-                      </a:solidFill>
-                      <a:prstDash val="solid"/>
-                      <a:round/>
-                      <a:headEnd type="none" w="med" len="med"/>
-                      <a:tailEnd type="none" w="med" len="med"/>
-                    </a:lnL>
-                    <a:lnR w="12700" cap="flat" cmpd="sng" algn="ctr">
-                      <a:solidFill>
-                        <a:srgbClr val="2D2D2D"/>
-                      </a:solidFill>
-                      <a:prstDash val="solid"/>
-                      <a:round/>
-                      <a:headEnd type="none" w="med" len="med"/>
-                      <a:tailEnd type="none" w="med" len="med"/>
-                    </a:lnR>
-                    <a:lnT w="12700" cap="flat" cmpd="sng" algn="ctr">
-                      <a:solidFill>
-                        <a:srgbClr val="2D2D2D"/>
-                      </a:solidFill>
-                      <a:prstDash val="solid"/>
-                      <a:round/>
-                      <a:headEnd type="none" w="med" len="med"/>
-                      <a:tailEnd type="none" w="med" len="med"/>
-                    </a:lnT>
-                    <a:lnB w="12700" cap="flat" cmpd="sng" algn="ctr">
-                      <a:solidFill>
-                        <a:srgbClr val="2D2D2D"/>
-                      </a:solidFill>
-                      <a:prstDash val="solid"/>
-                      <a:round/>
-                      <a:headEnd type="none" w="med" len="med"/>
-                      <a:tailEnd type="none" w="med" len="med"/>
-                    </a:lnB>
-                    <a:solidFill>
-                      <a:srgbClr val="101010"/>
-                    </a:solidFill>
-                  </a:tcPr>
-                </a:tc>
-                <a:tc>
-                  <a:txBody>
-                    <a:bodyPr/>
-                    <a:lstStyle/>
-                    <a:p>
-                      <a:pPr marL="0" indent="0">
-                        <a:buNone/>
-                      </a:pPr>
-                      <a:r>
-                        <a:rPr sz="850" b="0">
-                          <a:solidFill>
-                            <a:srgbClr val="D9D9D9"/>
-                          </a:solidFill>
-                        </a:rPr>
-                        <a:t>Diagnoses channel and placement relevance.</a:t>
-                      </a:r>
-                    </a:p>
-                  </a:txBody>
-                  <a:tcPr marL="25000" marR="25000" marT="18000" marB="18000" anchor="ctr">
-                    <a:lnL w="12700" cap="flat" cmpd="sng" algn="ctr">
-                      <a:solidFill>
-                        <a:srgbClr val="2D2D2D"/>
-                      </a:solidFill>
-                      <a:prstDash val="solid"/>
-                      <a:round/>
-                      <a:headEnd type="none" w="med" len="med"/>
-                      <a:tailEnd type="none" w="med" len="med"/>
-                    </a:lnL>
-                    <a:lnR w="12700" cap="flat" cmpd="sng" algn="ctr">
-                      <a:solidFill>
-                        <a:srgbClr val="2D2D2D"/>
-                      </a:solidFill>
-                      <a:prstDash val="solid"/>
-                      <a:round/>
-                      <a:headEnd type="none" w="med" len="med"/>
-                      <a:tailEnd type="none" w="med" len="med"/>
-                    </a:lnR>
-                    <a:lnT w="12700" cap="flat" cmpd="sng" algn="ctr">
-                      <a:solidFill>
-                        <a:srgbClr val="2D2D2D"/>
-                      </a:solidFill>
-                      <a:prstDash val="solid"/>
-                      <a:round/>
-                      <a:headEnd type="none" w="med" len="med"/>
-                      <a:tailEnd type="none" w="med" len="med"/>
-                    </a:lnT>
-                    <a:lnB w="12700" cap="flat" cmpd="sng" algn="ctr">
-                      <a:solidFill>
-                        <a:srgbClr val="2D2D2D"/>
-                      </a:solidFill>
-                      <a:prstDash val="solid"/>
-                      <a:round/>
-                      <a:headEnd type="none" w="med" len="med"/>
-                      <a:tailEnd type="none" w="med" len="med"/>
-                    </a:lnB>
-                    <a:solidFill>
-                      <a:srgbClr val="101010"/>
-                    </a:solidFill>
-                  </a:tcPr>
-                </a:tc>
-                <a:extLst>
-                  <a:ext uri="{0D108BD9-81ED-4DB2-BD59-A6C34878D82A}">
-                    <ns2:rowId val="10001"/>
-                  </a:ext>
-                </a:extLst>
-              </a:tr>
-              <a:tr h="490000">
-                <a:tc>
-                  <a:txBody>
-                    <a:bodyPr/>
-                    <a:lstStyle/>
-                    <a:p>
-                      <a:pPr marL="0" indent="0">
-                        <a:buNone/>
-                      </a:pPr>
-                      <a:r>
-                        <a:rPr sz="850" b="0">
-                          <a:solidFill>
-                            <a:srgbClr val="D9D9D9"/>
-                          </a:solidFill>
-                        </a:rPr>
-                        <a:t>Trial start rate</a:t>
-                      </a:r>
-                    </a:p>
-                  </a:txBody>
-                  <a:tcPr marL="25000" marR="25000" marT="18000" marB="18000" anchor="ctr">
-                    <a:lnL w="12700" cap="flat" cmpd="sng" algn="ctr">
-                      <a:solidFill>
-                        <a:srgbClr val="2D2D2D"/>
-                      </a:solidFill>
-                      <a:prstDash val="solid"/>
-                      <a:round/>
-                      <a:headEnd type="none" w="med" len="med"/>
-                      <a:tailEnd type="none" w="med" len="med"/>
-                    </a:lnL>
-                    <a:lnR w="12700" cap="flat" cmpd="sng" algn="ctr">
-                      <a:solidFill>
-                        <a:srgbClr val="2D2D2D"/>
-                      </a:solidFill>
-                      <a:prstDash val="solid"/>
-                      <a:round/>
-                      <a:headEnd type="none" w="med" len="med"/>
-                      <a:tailEnd type="none" w="med" len="med"/>
-                    </a:lnR>
-                    <a:lnT w="12700" cap="flat" cmpd="sng" algn="ctr">
-                      <a:solidFill>
-                        <a:srgbClr val="2D2D2D"/>
-                      </a:solidFill>
-                      <a:prstDash val="solid"/>
-                      <a:round/>
-                      <a:headEnd type="none" w="med" len="med"/>
-                      <a:tailEnd type="none" w="med" len="med"/>
-                    </a:lnT>
-                    <a:lnB w="12700" cap="flat" cmpd="sng" algn="ctr">
-                      <a:solidFill>
-                        <a:srgbClr val="2D2D2D"/>
-                      </a:solidFill>
-                      <a:prstDash val="solid"/>
-                      <a:round/>
-                      <a:headEnd type="none" w="med" len="med"/>
-                      <a:tailEnd type="none" w="med" len="med"/>
-                    </a:lnB>
-                    <a:solidFill>
-                      <a:srgbClr val="101010"/>
-                    </a:solidFill>
-                  </a:tcPr>
-                </a:tc>
-                <a:tc>
-                  <a:txBody>
-                    <a:bodyPr/>
-                    <a:lstStyle/>
-                    <a:p>
-                      <a:pPr marL="0" indent="0">
-                        <a:buNone/>
-                      </a:pPr>
-                      <a:r>
-                        <a:rPr sz="850" b="0">
-                          <a:solidFill>
-                            <a:srgbClr val="D9D9D9"/>
-                          </a:solidFill>
-                        </a:rPr>
-                        <a:t>Share of exposed sellers who start a bundle trial</a:t>
-                      </a:r>
-                    </a:p>
-                  </a:txBody>
-                  <a:tcPr marL="25000" marR="25000" marT="18000" marB="18000" anchor="ctr">
-                    <a:lnL w="12700" cap="flat" cmpd="sng" algn="ctr">
-                      <a:solidFill>
-                        <a:srgbClr val="2D2D2D"/>
-                      </a:solidFill>
-                      <a:prstDash val="solid"/>
-                      <a:round/>
-                      <a:headEnd type="none" w="med" len="med"/>
-                      <a:tailEnd type="none" w="med" len="med"/>
-                    </a:lnL>
-                    <a:lnR w="12700" cap="flat" cmpd="sng" algn="ctr">
-                      <a:solidFill>
-                        <a:srgbClr val="2D2D2D"/>
-                      </a:solidFill>
-                      <a:prstDash val="solid"/>
-                      <a:round/>
-                      <a:headEnd type="none" w="med" len="med"/>
-                      <a:tailEnd type="none" w="med" len="med"/>
-                    </a:lnR>
-                    <a:lnT w="12700" cap="flat" cmpd="sng" algn="ctr">
-                      <a:solidFill>
-                        <a:srgbClr val="2D2D2D"/>
-                      </a:solidFill>
-                      <a:prstDash val="solid"/>
-                      <a:round/>
-                      <a:headEnd type="none" w="med" len="med"/>
-                      <a:tailEnd type="none" w="med" len="med"/>
-                    </a:lnT>
-                    <a:lnB w="12700" cap="flat" cmpd="sng" algn="ctr">
-                      <a:solidFill>
-                        <a:srgbClr val="2D2D2D"/>
-                      </a:solidFill>
-                      <a:prstDash val="solid"/>
-                      <a:round/>
-                      <a:headEnd type="none" w="med" len="med"/>
-                      <a:tailEnd type="none" w="med" len="med"/>
-                    </a:lnB>
-                    <a:solidFill>
-                      <a:srgbClr val="101010"/>
-                    </a:solidFill>
-                  </a:tcPr>
-                </a:tc>
-                <a:tc>
-                  <a:txBody>
-                    <a:bodyPr/>
-                    <a:lstStyle/>
-                    <a:p>
-                      <a:pPr marL="0" indent="0">
-                        <a:buNone/>
-                      </a:pPr>
-                      <a:r>
-                        <a:rPr sz="850" b="0">
-                          <a:solidFill>
-                            <a:srgbClr val="D9D9D9"/>
-                          </a:solidFill>
-                        </a:rPr>
-                        <a:t>Shows whether interest becomes action.</a:t>
-                      </a:r>
-                    </a:p>
-                  </a:txBody>
-                  <a:tcPr marL="25000" marR="25000" marT="18000" marB="18000" anchor="ctr">
-                    <a:lnL w="12700" cap="flat" cmpd="sng" algn="ctr">
-                      <a:solidFill>
-                        <a:srgbClr val="2D2D2D"/>
-                      </a:solidFill>
-                      <a:prstDash val="solid"/>
-                      <a:round/>
-                      <a:headEnd type="none" w="med" len="med"/>
-                      <a:tailEnd type="none" w="med" len="med"/>
-                    </a:lnL>
-                    <a:lnR w="12700" cap="flat" cmpd="sng" algn="ctr">
-                      <a:solidFill>
-                        <a:srgbClr val="2D2D2D"/>
-                      </a:solidFill>
-                      <a:prstDash val="solid"/>
-                      <a:round/>
-                      <a:headEnd type="none" w="med" len="med"/>
-                      <a:tailEnd type="none" w="med" len="med"/>
-                    </a:lnR>
-                    <a:lnT w="12700" cap="flat" cmpd="sng" algn="ctr">
-                      <a:solidFill>
-                        <a:srgbClr val="2D2D2D"/>
-                      </a:solidFill>
-                      <a:prstDash val="solid"/>
-                      <a:round/>
-                      <a:headEnd type="none" w="med" len="med"/>
-                      <a:tailEnd type="none" w="med" len="med"/>
-                    </a:lnT>
-                    <a:lnB w="12700" cap="flat" cmpd="sng" algn="ctr">
-                      <a:solidFill>
-                        <a:srgbClr val="2D2D2D"/>
-                      </a:solidFill>
-                      <a:prstDash val="solid"/>
-                      <a:round/>
-                      <a:headEnd type="none" w="med" len="med"/>
-                      <a:tailEnd type="none" w="med" len="med"/>
-                    </a:lnB>
-                    <a:solidFill>
-                      <a:srgbClr val="101010"/>
-                    </a:solidFill>
-                  </a:tcPr>
-                </a:tc>
-                <a:extLst>
-                  <a:ext uri="{0D108BD9-81ED-4DB2-BD59-A6C34878D82A}">
-                    <ns2:rowId val="193352143"/>
-                  </a:ext>
-                </a:extLst>
-              </a:tr>
-              <a:tr h="490000">
-                <a:tc>
-                  <a:txBody>
-                    <a:bodyPr/>
-                    <a:lstStyle/>
-                    <a:p>
-                      <a:pPr marL="0" indent="0">
-                        <a:buNone/>
-                      </a:pPr>
-                      <a:r>
-                        <a:rPr sz="850" b="0">
-                          <a:solidFill>
-                            <a:srgbClr val="D9D9D9"/>
-                          </a:solidFill>
-                        </a:rPr>
-                        <a:t>Bundle revenue uplift</a:t>
-                      </a:r>
-                    </a:p>
-                  </a:txBody>
-                  <a:tcPr marL="25000" marR="25000" marT="18000" marB="18000" anchor="ctr">
-                    <a:lnL w="12700" cap="flat" cmpd="sng" algn="ctr">
-                      <a:solidFill>
-                        <a:srgbClr val="2D2D2D"/>
-                      </a:solidFill>
-                      <a:prstDash val="solid"/>
-                      <a:round/>
-                      <a:headEnd type="none" w="med" len="med"/>
-                      <a:tailEnd type="none" w="med" len="med"/>
-                    </a:lnL>
-                    <a:lnR w="12700" cap="flat" cmpd="sng" algn="ctr">
-                      <a:solidFill>
-                        <a:srgbClr val="2D2D2D"/>
-                      </a:solidFill>
-                      <a:prstDash val="solid"/>
-                      <a:round/>
-                      <a:headEnd type="none" w="med" len="med"/>
-                      <a:tailEnd type="none" w="med" len="med"/>
-                    </a:lnR>
-                    <a:lnT w="12700" cap="flat" cmpd="sng" algn="ctr">
-                      <a:solidFill>
-                        <a:srgbClr val="2D2D2D"/>
-                      </a:solidFill>
-                      <a:prstDash val="solid"/>
-                      <a:round/>
-                      <a:headEnd type="none" w="med" len="med"/>
-                      <a:tailEnd type="none" w="med" len="med"/>
-                    </a:lnT>
-                    <a:lnB w="12700" cap="flat" cmpd="sng" algn="ctr">
-                      <a:solidFill>
-                        <a:srgbClr val="2D2D2D"/>
-                      </a:solidFill>
-                      <a:prstDash val="solid"/>
-                      <a:round/>
-                      <a:headEnd type="none" w="med" len="med"/>
-                      <a:tailEnd type="none" w="med" len="med"/>
-                    </a:lnB>
-                    <a:solidFill>
-                      <a:srgbClr val="101010"/>
-                    </a:solidFill>
-                  </a:tcPr>
-                </a:tc>
-                <a:tc>
-                  <a:txBody>
-                    <a:bodyPr/>
-                    <a:lstStyle/>
-                    <a:p>
-                      <a:pPr marL="0" indent="0">
-                        <a:buNone/>
-                      </a:pPr>
-                      <a:r>
-                        <a:rPr sz="850" b="0">
-                          <a:solidFill>
-                            <a:srgbClr val="D9D9D9"/>
-                          </a:solidFill>
-                        </a:rPr>
-                        <a:t>Exposed bundle revenue minus holdout bundle revenue</a:t>
-                      </a:r>
-                    </a:p>
-                  </a:txBody>
-                  <a:tcPr marL="25000" marR="25000" marT="18000" marB="18000" anchor="ctr">
-                    <a:lnL w="12700" cap="flat" cmpd="sng" algn="ctr">
-                      <a:solidFill>
-                        <a:srgbClr val="2D2D2D"/>
-                      </a:solidFill>
-                      <a:prstDash val="solid"/>
-                      <a:round/>
-                      <a:headEnd type="none" w="med" len="med"/>
-                      <a:tailEnd type="none" w="med" len="med"/>
-                    </a:lnL>
-                    <a:lnR w="12700" cap="flat" cmpd="sng" algn="ctr">
-                      <a:solidFill>
-                        <a:srgbClr val="2D2D2D"/>
-                      </a:solidFill>
-                      <a:prstDash val="solid"/>
-                      <a:round/>
-                      <a:headEnd type="none" w="med" len="med"/>
-                      <a:tailEnd type="none" w="med" len="med"/>
-                    </a:lnR>
-                    <a:lnT w="12700" cap="flat" cmpd="sng" algn="ctr">
-                      <a:solidFill>
-                        <a:srgbClr val="2D2D2D"/>
-                      </a:solidFill>
-                      <a:prstDash val="solid"/>
-                      <a:round/>
-                      <a:headEnd type="none" w="med" len="med"/>
-                      <a:tailEnd type="none" w="med" len="med"/>
-                    </a:lnT>
-                    <a:lnB w="12700" cap="flat" cmpd="sng" algn="ctr">
-                      <a:solidFill>
-                        <a:srgbClr val="2D2D2D"/>
-                      </a:solidFill>
-                      <a:prstDash val="solid"/>
-                      <a:round/>
-                      <a:headEnd type="none" w="med" len="med"/>
-                      <a:tailEnd type="none" w="med" len="med"/>
-                    </a:lnB>
-                    <a:solidFill>
-                      <a:srgbClr val="101010"/>
-                    </a:solidFill>
-                  </a:tcPr>
-                </a:tc>
-                <a:tc>
-                  <a:txBody>
-                    <a:bodyPr/>
-                    <a:lstStyle/>
-                    <a:p>
-                      <a:pPr marL="0" indent="0">
-                        <a:buNone/>
-                      </a:pPr>
-                      <a:r>
-                        <a:rPr sz="850" b="0">
-                          <a:solidFill>
-                            <a:srgbClr val="D9D9D9"/>
-                          </a:solidFill>
-                        </a:rPr>
-                        <a:t>Links adoption to business value.</a:t>
-                      </a:r>
-                    </a:p>
-                  </a:txBody>
-                  <a:tcPr marL="25000" marR="25000" marT="18000" marB="18000" anchor="ctr">
-                    <a:lnL w="12700" cap="flat" cmpd="sng" algn="ctr">
-                      <a:solidFill>
-                        <a:srgbClr val="2D2D2D"/>
-                      </a:solidFill>
-                      <a:prstDash val="solid"/>
-                      <a:round/>
-                      <a:headEnd type="none" w="med" len="med"/>
-                      <a:tailEnd type="none" w="med" len="med"/>
-                    </a:lnL>
-                    <a:lnR w="12700" cap="flat" cmpd="sng" algn="ctr">
-                      <a:solidFill>
-                        <a:srgbClr val="2D2D2D"/>
-                      </a:solidFill>
-                      <a:prstDash val="solid"/>
-                      <a:round/>
-                      <a:headEnd type="none" w="med" len="med"/>
-                      <a:tailEnd type="none" w="med" len="med"/>
-                    </a:lnR>
-                    <a:lnT w="12700" cap="flat" cmpd="sng" algn="ctr">
-                      <a:solidFill>
-                        <a:srgbClr val="2D2D2D"/>
-                      </a:solidFill>
-                      <a:prstDash val="solid"/>
-                      <a:round/>
-                      <a:headEnd type="none" w="med" len="med"/>
-                      <a:tailEnd type="none" w="med" len="med"/>
-                    </a:lnT>
-                    <a:lnB w="12700" cap="flat" cmpd="sng" algn="ctr">
-                      <a:solidFill>
-                        <a:srgbClr val="2D2D2D"/>
-                      </a:solidFill>
-                      <a:prstDash val="solid"/>
-                      <a:round/>
-                      <a:headEnd type="none" w="med" len="med"/>
-                      <a:tailEnd type="none" w="med" len="med"/>
-                    </a:lnB>
-                    <a:solidFill>
-                      <a:srgbClr val="101010"/>
-                    </a:solidFill>
-                  </a:tcPr>
-                </a:tc>
-                <a:extLst>
-                  <a:ext uri="{0D108BD9-81ED-4DB2-BD59-A6C34878D82A}">
-                    <ns2:rowId val="2131940011"/>
-                  </a:ext>
-                </a:extLst>
-              </a:tr>
-            </a:tbl>
-          </a:graphicData>
-        </a:graphic>
-      </p:graphicFrame>
-      <p:sp>
-        <p:nvSpPr>
-          <p:cNvPr id="12" name="Combined KPI intro"/>
-          <p:cNvSpPr/>
-          <p:nvPr/>
-        </p:nvSpPr>
-        <p:spPr>
-          <a:xfrm>
-            <a:off x="621792" y="1371600"/>
-            <a:ext cx="10424160" cy="365760"/>
-          </a:xfrm>
-          <a:prstGeom prst="rect">
-            <a:avLst/>
-          </a:prstGeom>
-          <a:noFill/>
-          <a:ln/>
-        </p:spPr>
-        <p:txBody>
-          <a:bodyPr wrap="square" lIns="0" tIns="0" rIns="0" bIns="0" rtlCol="0" anchor="t">
-            <a:normAutofit lnSpcReduction="10000"/>
+              <a:t>Primary KPI</a:t>
+            </a:r>
+            <a:endParaRPr lang="en-US" sz="1450" dirty="0"/>
+          </a:p>
+        </p:txBody>
+      </p:sp>
+      <p:sp>
+        <p:nvSpPr>
+          <p:cNvPr id="10" name="Primary KPI card"/>
+          <p:cNvSpPr/>
+          <p:nvPr/>
+        </p:nvSpPr>
+        <p:spPr>
+          <a:xfrm>
+            <a:off x="628650" y="2028825"/>
+            <a:ext cx="10582275" cy="990600"/>
+          </a:xfrm>
+          <a:prstGeom prst="roundRect">
+            <a:avLst/>
+          </a:prstGeom>
+          <a:solidFill>
+            <a:srgbClr val="101010"/>
+          </a:solidFill>
+          <a:ln w="12700">
+            <a:solidFill>
+              <a:srgbClr val="2D2D2D"/>
+            </a:solidFill>
+            <a:prstDash val="solid"/>
+          </a:ln>
+        </p:spPr>
+        <p:txBody>
+          <a:bodyPr/>
+          <a:lstStyle/>
+          <a:p>
+            <a:endParaRPr lang="en-US"/>
+          </a:p>
+        </p:txBody>
+      </p:sp>
+      <p:sp>
+        <p:nvSpPr>
+          <p:cNvPr id="11" name="Primary KPI red accent"/>
+          <p:cNvSpPr/>
+          <p:nvPr/>
+        </p:nvSpPr>
+        <p:spPr>
+          <a:xfrm>
+            <a:off x="628650" y="2105025"/>
+            <a:ext cx="47625" cy="838200"/>
+          </a:xfrm>
+          <a:prstGeom prst="rect">
+            <a:avLst/>
+          </a:prstGeom>
+          <a:solidFill>
+            <a:srgbClr val="FF735B"/>
+          </a:solidFill>
+          <a:ln>
+            <a:noFill/>
+          </a:ln>
+        </p:spPr>
+        <p:txBody>
+          <a:bodyPr/>
+          <a:lstStyle/>
+          <a:p>
+            <a:endParaRPr lang="en-US"/>
+          </a:p>
+        </p:txBody>
+      </p:sp>
+      <p:sp>
+        <p:nvSpPr>
+          <p:cNvPr id="12" name="Primary KPI name"/>
+          <p:cNvSpPr/>
+          <p:nvPr/>
+        </p:nvSpPr>
+        <p:spPr>
+          <a:xfrm>
+            <a:off x="876300" y="2371725"/>
+            <a:ext cx="2952750" cy="523875"/>
+          </a:xfrm>
+          <a:prstGeom prst="rect">
+            <a:avLst/>
+          </a:prstGeom>
+          <a:noFill/>
+          <a:ln>
+            <a:noFill/>
+          </a:ln>
+        </p:spPr>
+        <p:txBody>
+          <a:bodyPr wrap="square" lIns="0" tIns="0" rIns="0" bIns="0" anchor="t">
+            <a:normAutofit/>
           </a:bodyPr>
           <a:lstStyle/>
           <a:p>
@@ -9731,7 +7882,7 @@
               <a:buNone/>
             </a:pPr>
             <a:r>
-              <a:rPr lang="en-US" sz="1500" b="0" dirty="0">
+              <a:rPr lang="en-US" sz="1500" b="1" dirty="0">
                 <a:solidFill>
                   <a:srgbClr val="F2F2F2"/>
                 </a:solidFill>
@@ -9739,32 +7890,35 @@
                 <a:ea typeface="Arial" pitchFamily="34" charset="-122"/>
                 <a:cs typeface="Arial" pitchFamily="34" charset="-120"/>
               </a:rPr>
-              <a:t>Measure incremental adoption, diagnose channel response, and monitor seller-fit guardrails.</a:t>
-            </a:r>
-            <a:endParaRPr lang="en-US" sz="1400" dirty="0"/>
-          </a:p>
-        </p:txBody>
-      </p:sp>
-      <p:sp>
-        <p:nvSpPr>
-          <p:cNvPr id="13" name="Guardrail section label"/>
-          <p:cNvSpPr/>
-          <p:nvPr/>
-        </p:nvSpPr>
-        <p:spPr>
-          <a:xfrm>
-            <a:off x="7260000" y="3510000"/>
-            <a:ext cx="3300000" cy="250000"/>
-          </a:xfrm>
-          <a:prstGeom prst="rect">
-            <a:avLst/>
-          </a:prstGeom>
-          <a:noFill/>
-          <a:ln/>
-        </p:spPr>
-        <p:txBody>
-          <a:bodyPr wrap="square" lIns="0" tIns="0" rIns="0" bIns="0" rtlCol="0" anchor="ctr">
-            <a:normAutofit lnSpcReduction="10000"/>
+              <a:t>Incremental SMB Bundle
+adoption rate (paid)</a:t>
+            </a:r>
+            <a:endParaRPr lang="en-US" sz="1500" dirty="0"/>
+          </a:p>
+        </p:txBody>
+      </p:sp>
+      <p:sp>
+        <p:nvSpPr>
+          <p:cNvPr id="13" name="Primary KPI definition"/>
+          <p:cNvSpPr/>
+          <p:nvPr/>
+        </p:nvSpPr>
+        <p:spPr>
+          <a:xfrm>
+            <a:off x="4343400" y="2305050"/>
+            <a:ext cx="4000500" cy="714375"/>
+          </a:xfrm>
+          <a:prstGeom prst="rect">
+            <a:avLst/>
+          </a:prstGeom>
+          <a:noFill/>
+          <a:ln>
+            <a:noFill/>
+          </a:ln>
+        </p:spPr>
+        <p:txBody>
+          <a:bodyPr wrap="square" lIns="0" tIns="0" rIns="0" bIns="0" anchor="t">
+            <a:normAutofit/>
           </a:bodyPr>
           <a:lstStyle/>
           <a:p>
@@ -9772,48 +7926,24 @@
               <a:buNone/>
             </a:pPr>
             <a:r>
-              <a:rPr lang="en-US" sz="1450" b="1" dirty="0">
-                <a:solidFill>
-                  <a:srgbClr val="FF735B"/>
+              <a:rPr lang="en-US" sz="800" b="1" dirty="0">
+                <a:solidFill>
+                  <a:srgbClr val="A8A8A8"/>
                 </a:solidFill>
                 <a:latin typeface="Arial" pitchFamily="34" charset="0"/>
                 <a:ea typeface="Arial" pitchFamily="34" charset="-122"/>
                 <a:cs typeface="Arial" pitchFamily="34" charset="-120"/>
               </a:rPr>
-              <a:t>4.3 Guardrail KPIs</a:t>
-            </a:r>
-            <a:endParaRPr lang="en-US" sz="1800" dirty="0"/>
-          </a:p>
-        </p:txBody>
-      </p:sp>
-      <p:sp>
-        <p:nvSpPr>
-          <p:cNvPr id="14" name="Guardrail intro"/>
-          <p:cNvSpPr/>
-          <p:nvPr/>
-        </p:nvSpPr>
-        <p:spPr>
-          <a:xfrm>
-            <a:off x="7260000" y="3820000"/>
-            <a:ext cx="3900000" cy="480000"/>
-          </a:xfrm>
-          <a:prstGeom prst="rect">
-            <a:avLst/>
-          </a:prstGeom>
-          <a:noFill/>
-          <a:ln/>
-        </p:spPr>
-        <p:txBody>
-          <a:bodyPr wrap="square" lIns="0" tIns="0" rIns="0" bIns="0" rtlCol="0" anchor="t">
-            <a:normAutofit lnSpcReduction="10000"/>
-          </a:bodyPr>
-          <a:lstStyle/>
+              <a:t>Definition</a:t>
+            </a:r>
+            <a:endParaRPr lang="en-US" sz="800" dirty="0"/>
+          </a:p>
           <a:p>
             <a:pPr marL="0" indent="0">
               <a:buNone/>
             </a:pPr>
             <a:r>
-              <a:rPr lang="en-US" sz="950" b="0" dirty="0">
+              <a:rPr lang="en-US" sz="1150" b="0" dirty="0">
                 <a:solidFill>
                   <a:srgbClr val="D9D9D9"/>
                 </a:solidFill>
@@ -9821,627 +7951,1341 @@
                 <a:ea typeface="Arial" pitchFamily="34" charset="-122"/>
                 <a:cs typeface="Arial" pitchFamily="34" charset="-120"/>
               </a:rPr>
-              <a:t>Guardrails ensure the campaign does not overfit to short-term adoption at the expense of seller fit, product trust, or support burden.</a:t>
-            </a:r>
-            <a:endParaRPr lang="en-US" sz="1400" dirty="0"/>
-          </a:p>
-        </p:txBody>
-      </p:sp>
-      <p:graphicFrame>
-        <p:nvGraphicFramePr>
-          <p:cNvPr id="15" name="Guardrail KPI table combined"/>
-          <p:cNvGraphicFramePr>
-            <a:graphicFrameLocks noGrp="1"/>
-          </p:cNvGraphicFramePr>
-          <p:nvPr>
-            <p:extLst>
-              <p:ext uri="{D42A27DB-BD31-4B8C-83A1-F6EECF244321}">
-                <ns3:modId val="1579011935"/>
-              </p:ext>
-            </p:extLst>
-          </p:nvPr>
-        </p:nvGraphicFramePr>
-        <p:xfrm>
-          <a:off x="7260000" y="4390000"/>
-          <a:ext cx="3900000" cy="1370000"/>
-        </p:xfrm>
-        <a:graphic>
-          <a:graphicData uri="http://schemas.openxmlformats.org/drawingml/2006/table">
-            <a:tbl>
-              <a:tblPr/>
-              <a:tblGrid>
-                <a:gridCol w="1450000">
-                  <a:extLst>
-                    <a:ext uri="{9D8B030D-6E8A-4147-A177-3AD203B41FA5}">
-                      <ns2:colId val="20000"/>
-                    </a:ext>
-                  </a:extLst>
-                </a:gridCol>
-                <a:gridCol w="1400000">
-                  <a:extLst>
-                    <a:ext uri="{9D8B030D-6E8A-4147-A177-3AD203B41FA5}">
-                      <ns2:colId val="20001"/>
-                    </a:ext>
-                  </a:extLst>
-                </a:gridCol>
-                <a:gridCol w="1050000">
-                  <a:extLst>
-                    <a:ext uri="{9D8B030D-6E8A-4147-A177-3AD203B41FA5}">
-                      <ns2:colId val="20002"/>
-                    </a:ext>
-                  </a:extLst>
-                </a:gridCol>
-              </a:tblGrid>
-              <a:tr h="456666">
-                <a:tc>
-                  <a:txBody>
-                    <a:bodyPr/>
-                    <a:lstStyle/>
-                    <a:p>
-                      <a:pPr marL="0" indent="0">
-                        <a:buNone/>
-                      </a:pPr>
-                      <a:r>
-                        <a:rPr sz="760" b="1">
-                          <a:solidFill>
-                            <a:srgbClr val="F2F2F2"/>
-                          </a:solidFill>
-                        </a:rPr>
-                        <a:t>KPI</a:t>
-                      </a:r>
-                    </a:p>
-                  </a:txBody>
-                  <a:tcPr marL="18000" marR="18000" marT="14000" marB="14000" anchor="ctr">
-                    <a:lnL w="12700" cap="flat" cmpd="sng" algn="ctr">
-                      <a:solidFill>
-                        <a:srgbClr val="2D2D2D"/>
-                      </a:solidFill>
-                      <a:prstDash val="solid"/>
-                      <a:round/>
-                      <a:headEnd type="none" w="med" len="med"/>
-                      <a:tailEnd type="none" w="med" len="med"/>
-                    </a:lnL>
-                    <a:lnR w="12700" cap="flat" cmpd="sng" algn="ctr">
-                      <a:solidFill>
-                        <a:srgbClr val="2D2D2D"/>
-                      </a:solidFill>
-                      <a:prstDash val="solid"/>
-                      <a:round/>
-                      <a:headEnd type="none" w="med" len="med"/>
-                      <a:tailEnd type="none" w="med" len="med"/>
-                    </a:lnR>
-                    <a:lnT w="12700" cap="flat" cmpd="sng" algn="ctr">
-                      <a:solidFill>
-                        <a:srgbClr val="2D2D2D"/>
-                      </a:solidFill>
-                      <a:prstDash val="solid"/>
-                      <a:round/>
-                      <a:headEnd type="none" w="med" len="med"/>
-                      <a:tailEnd type="none" w="med" len="med"/>
-                    </a:lnT>
-                    <a:lnB w="12700" cap="flat" cmpd="sng" algn="ctr">
-                      <a:solidFill>
-                        <a:srgbClr val="2D2D2D"/>
-                      </a:solidFill>
-                      <a:prstDash val="solid"/>
-                      <a:round/>
-                      <a:headEnd type="none" w="med" len="med"/>
-                      <a:tailEnd type="none" w="med" len="med"/>
-                    </a:lnB>
-                    <a:solidFill>
-                      <a:srgbClr val="161616"/>
-                    </a:solidFill>
-                  </a:tcPr>
-                </a:tc>
-                <a:tc>
-                  <a:txBody>
-                    <a:bodyPr/>
-                    <a:lstStyle/>
-                    <a:p>
-                      <a:pPr marL="0" indent="0">
-                        <a:buNone/>
-                      </a:pPr>
-                      <a:r>
-                        <a:rPr sz="760" b="1">
-                          <a:solidFill>
-                            <a:srgbClr val="F2F2F2"/>
-                          </a:solidFill>
-                        </a:rPr>
-                        <a:t>Definition</a:t>
-                      </a:r>
-                    </a:p>
-                  </a:txBody>
-                  <a:tcPr marL="18000" marR="18000" marT="14000" marB="14000" anchor="ctr">
-                    <a:lnL w="12700" cap="flat" cmpd="sng" algn="ctr">
-                      <a:solidFill>
-                        <a:srgbClr val="2D2D2D"/>
-                      </a:solidFill>
-                      <a:prstDash val="solid"/>
-                      <a:round/>
-                      <a:headEnd type="none" w="med" len="med"/>
-                      <a:tailEnd type="none" w="med" len="med"/>
-                    </a:lnL>
-                    <a:lnR w="12700" cap="flat" cmpd="sng" algn="ctr">
-                      <a:solidFill>
-                        <a:srgbClr val="2D2D2D"/>
-                      </a:solidFill>
-                      <a:prstDash val="solid"/>
-                      <a:round/>
-                      <a:headEnd type="none" w="med" len="med"/>
-                      <a:tailEnd type="none" w="med" len="med"/>
-                    </a:lnR>
-                    <a:lnT w="12700" cap="flat" cmpd="sng" algn="ctr">
-                      <a:solidFill>
-                        <a:srgbClr val="2D2D2D"/>
-                      </a:solidFill>
-                      <a:prstDash val="solid"/>
-                      <a:round/>
-                      <a:headEnd type="none" w="med" len="med"/>
-                      <a:tailEnd type="none" w="med" len="med"/>
-                    </a:lnT>
-                    <a:lnB w="12700" cap="flat" cmpd="sng" algn="ctr">
-                      <a:solidFill>
-                        <a:srgbClr val="2D2D2D"/>
-                      </a:solidFill>
-                      <a:prstDash val="solid"/>
-                      <a:round/>
-                      <a:headEnd type="none" w="med" len="med"/>
-                      <a:tailEnd type="none" w="med" len="med"/>
-                    </a:lnB>
-                    <a:solidFill>
-                      <a:srgbClr val="161616"/>
-                    </a:solidFill>
-                  </a:tcPr>
-                </a:tc>
-                <a:tc>
-                  <a:txBody>
-                    <a:bodyPr/>
-                    <a:lstStyle/>
-                    <a:p>
-                      <a:pPr marL="0" indent="0">
-                        <a:buNone/>
-                      </a:pPr>
-                      <a:r>
-                        <a:rPr sz="760" b="1">
-                          <a:solidFill>
-                            <a:srgbClr val="F2F2F2"/>
-                          </a:solidFill>
-                        </a:rPr>
-                        <a:t>Why it matters</a:t>
-                      </a:r>
-                    </a:p>
-                  </a:txBody>
-                  <a:tcPr marL="18000" marR="18000" marT="14000" marB="14000" anchor="ctr">
-                    <a:lnL w="12700" cap="flat" cmpd="sng" algn="ctr">
-                      <a:solidFill>
-                        <a:srgbClr val="2D2D2D"/>
-                      </a:solidFill>
-                      <a:prstDash val="solid"/>
-                      <a:round/>
-                      <a:headEnd type="none" w="med" len="med"/>
-                      <a:tailEnd type="none" w="med" len="med"/>
-                    </a:lnL>
-                    <a:lnR w="12700" cap="flat" cmpd="sng" algn="ctr">
-                      <a:solidFill>
-                        <a:srgbClr val="2D2D2D"/>
-                      </a:solidFill>
-                      <a:prstDash val="solid"/>
-                      <a:round/>
-                      <a:headEnd type="none" w="med" len="med"/>
-                      <a:tailEnd type="none" w="med" len="med"/>
-                    </a:lnR>
-                    <a:lnT w="12700" cap="flat" cmpd="sng" algn="ctr">
-                      <a:solidFill>
-                        <a:srgbClr val="2D2D2D"/>
-                      </a:solidFill>
-                      <a:prstDash val="solid"/>
-                      <a:round/>
-                      <a:headEnd type="none" w="med" len="med"/>
-                      <a:tailEnd type="none" w="med" len="med"/>
-                    </a:lnT>
-                    <a:lnB w="12700" cap="flat" cmpd="sng" algn="ctr">
-                      <a:solidFill>
-                        <a:srgbClr val="2D2D2D"/>
-                      </a:solidFill>
-                      <a:prstDash val="solid"/>
-                      <a:round/>
-                      <a:headEnd type="none" w="med" len="med"/>
-                      <a:tailEnd type="none" w="med" len="med"/>
-                    </a:lnB>
-                    <a:solidFill>
-                      <a:srgbClr val="161616"/>
-                    </a:solidFill>
-                  </a:tcPr>
-                </a:tc>
-                <a:extLst>
-                  <a:ext uri="{0D108BD9-81ED-4DB2-BD59-A6C34878D82A}">
-                    <ns2:rowId val="10000"/>
-                  </a:ext>
-                </a:extLst>
-              </a:tr>
-              <a:tr h="456666">
-                <a:tc>
-                  <a:txBody>
-                    <a:bodyPr/>
-                    <a:lstStyle/>
-                    <a:p>
-                      <a:pPr marL="0" indent="0">
-                        <a:buNone/>
-                      </a:pPr>
-                      <a:r>
-                        <a:rPr sz="680" b="0">
-                          <a:solidFill>
-                            <a:srgbClr val="D9D9D9"/>
-                          </a:solidFill>
-                        </a:rPr>
-                        <a:t>Early cancellation / downgrade rate</a:t>
-                      </a:r>
-                    </a:p>
-                  </a:txBody>
-                  <a:tcPr marL="18000" marR="18000" marT="14000" marB="14000" anchor="ctr">
-                    <a:lnL w="12700" cap="flat" cmpd="sng" algn="ctr">
-                      <a:solidFill>
-                        <a:srgbClr val="2D2D2D"/>
-                      </a:solidFill>
-                      <a:prstDash val="solid"/>
-                      <a:round/>
-                      <a:headEnd type="none" w="med" len="med"/>
-                      <a:tailEnd type="none" w="med" len="med"/>
-                    </a:lnL>
-                    <a:lnR w="12700" cap="flat" cmpd="sng" algn="ctr">
-                      <a:solidFill>
-                        <a:srgbClr val="2D2D2D"/>
-                      </a:solidFill>
-                      <a:prstDash val="solid"/>
-                      <a:round/>
-                      <a:headEnd type="none" w="med" len="med"/>
-                      <a:tailEnd type="none" w="med" len="med"/>
-                    </a:lnR>
-                    <a:lnT w="12700" cap="flat" cmpd="sng" algn="ctr">
-                      <a:solidFill>
-                        <a:srgbClr val="2D2D2D"/>
-                      </a:solidFill>
-                      <a:prstDash val="solid"/>
-                      <a:round/>
-                      <a:headEnd type="none" w="med" len="med"/>
-                      <a:tailEnd type="none" w="med" len="med"/>
-                    </a:lnT>
-                    <a:lnB w="12700" cap="flat" cmpd="sng" algn="ctr">
-                      <a:solidFill>
-                        <a:srgbClr val="2D2D2D"/>
-                      </a:solidFill>
-                      <a:prstDash val="solid"/>
-                      <a:round/>
-                      <a:headEnd type="none" w="med" len="med"/>
-                      <a:tailEnd type="none" w="med" len="med"/>
-                    </a:lnB>
-                    <a:solidFill>
-                      <a:srgbClr val="101010"/>
-                    </a:solidFill>
-                  </a:tcPr>
-                </a:tc>
-                <a:tc>
-                  <a:txBody>
-                    <a:bodyPr/>
-                    <a:lstStyle/>
-                    <a:p>
-                      <a:pPr marL="0" indent="0">
-                        <a:buNone/>
-                      </a:pPr>
-                      <a:r>
-                        <a:rPr sz="680" b="0">
-                          <a:solidFill>
-                            <a:srgbClr val="D9D9D9"/>
-                          </a:solidFill>
-                        </a:rPr>
-                        <a:t>Share of adopters who cancel or downgrade early</a:t>
-                      </a:r>
-                    </a:p>
-                  </a:txBody>
-                  <a:tcPr marL="18000" marR="18000" marT="14000" marB="14000" anchor="ctr">
-                    <a:lnL w="12700" cap="flat" cmpd="sng" algn="ctr">
-                      <a:solidFill>
-                        <a:srgbClr val="2D2D2D"/>
-                      </a:solidFill>
-                      <a:prstDash val="solid"/>
-                      <a:round/>
-                      <a:headEnd type="none" w="med" len="med"/>
-                      <a:tailEnd type="none" w="med" len="med"/>
-                    </a:lnL>
-                    <a:lnR w="12700" cap="flat" cmpd="sng" algn="ctr">
-                      <a:solidFill>
-                        <a:srgbClr val="2D2D2D"/>
-                      </a:solidFill>
-                      <a:prstDash val="solid"/>
-                      <a:round/>
-                      <a:headEnd type="none" w="med" len="med"/>
-                      <a:tailEnd type="none" w="med" len="med"/>
-                    </a:lnR>
-                    <a:lnT w="12700" cap="flat" cmpd="sng" algn="ctr">
-                      <a:solidFill>
-                        <a:srgbClr val="2D2D2D"/>
-                      </a:solidFill>
-                      <a:prstDash val="solid"/>
-                      <a:round/>
-                      <a:headEnd type="none" w="med" len="med"/>
-                      <a:tailEnd type="none" w="med" len="med"/>
-                    </a:lnT>
-                    <a:lnB w="12700" cap="flat" cmpd="sng" algn="ctr">
-                      <a:solidFill>
-                        <a:srgbClr val="2D2D2D"/>
-                      </a:solidFill>
-                      <a:prstDash val="solid"/>
-                      <a:round/>
-                      <a:headEnd type="none" w="med" len="med"/>
-                      <a:tailEnd type="none" w="med" len="med"/>
-                    </a:lnB>
-                    <a:solidFill>
-                      <a:srgbClr val="101010"/>
-                    </a:solidFill>
-                  </a:tcPr>
-                </a:tc>
-                <a:tc>
-                  <a:txBody>
-                    <a:bodyPr/>
-                    <a:lstStyle/>
-                    <a:p>
-                      <a:pPr marL="0" indent="0">
-                        <a:buNone/>
-                      </a:pPr>
-                      <a:r>
-                        <a:rPr sz="680" b="0">
-                          <a:solidFill>
-                            <a:srgbClr val="D9D9D9"/>
-                          </a:solidFill>
-                        </a:rPr>
-                        <a:t>Flags poor-fit or over-pushed sellers.</a:t>
-                      </a:r>
-                    </a:p>
-                  </a:txBody>
-                  <a:tcPr marL="18000" marR="18000" marT="14000" marB="14000" anchor="ctr">
-                    <a:lnL w="12700" cap="flat" cmpd="sng" algn="ctr">
-                      <a:solidFill>
-                        <a:srgbClr val="2D2D2D"/>
-                      </a:solidFill>
-                      <a:prstDash val="solid"/>
-                      <a:round/>
-                      <a:headEnd type="none" w="med" len="med"/>
-                      <a:tailEnd type="none" w="med" len="med"/>
-                    </a:lnL>
-                    <a:lnR w="12700" cap="flat" cmpd="sng" algn="ctr">
-                      <a:solidFill>
-                        <a:srgbClr val="2D2D2D"/>
-                      </a:solidFill>
-                      <a:prstDash val="solid"/>
-                      <a:round/>
-                      <a:headEnd type="none" w="med" len="med"/>
-                      <a:tailEnd type="none" w="med" len="med"/>
-                    </a:lnR>
-                    <a:lnT w="12700" cap="flat" cmpd="sng" algn="ctr">
-                      <a:solidFill>
-                        <a:srgbClr val="2D2D2D"/>
-                      </a:solidFill>
-                      <a:prstDash val="solid"/>
-                      <a:round/>
-                      <a:headEnd type="none" w="med" len="med"/>
-                      <a:tailEnd type="none" w="med" len="med"/>
-                    </a:lnT>
-                    <a:lnB w="12700" cap="flat" cmpd="sng" algn="ctr">
-                      <a:solidFill>
-                        <a:srgbClr val="2D2D2D"/>
-                      </a:solidFill>
-                      <a:prstDash val="solid"/>
-                      <a:round/>
-                      <a:headEnd type="none" w="med" len="med"/>
-                      <a:tailEnd type="none" w="med" len="med"/>
-                    </a:lnB>
-                    <a:solidFill>
-                      <a:srgbClr val="101010"/>
-                    </a:solidFill>
-                  </a:tcPr>
-                </a:tc>
-                <a:extLst>
-                  <a:ext uri="{0D108BD9-81ED-4DB2-BD59-A6C34878D82A}">
-                    <ns2:rowId val="10001"/>
-                  </a:ext>
-                </a:extLst>
-              </a:tr>
-              <a:tr h="456668">
-                <a:tc>
-                  <a:txBody>
-                    <a:bodyPr/>
-                    <a:lstStyle/>
-                    <a:p>
-                      <a:pPr marL="0" indent="0">
-                        <a:buNone/>
-                      </a:pPr>
-                      <a:r>
-                        <a:rPr sz="680" b="0">
-                          <a:solidFill>
-                            <a:srgbClr val="D9D9D9"/>
-                          </a:solidFill>
-                        </a:rPr>
-                        <a:t>Seller opt-out or complaint rate</a:t>
-                      </a:r>
-                    </a:p>
-                  </a:txBody>
-                  <a:tcPr marL="18000" marR="18000" marT="14000" marB="14000" anchor="ctr">
-                    <a:lnL w="12700" cap="flat" cmpd="sng" algn="ctr">
-                      <a:solidFill>
-                        <a:srgbClr val="2D2D2D"/>
-                      </a:solidFill>
-                      <a:prstDash val="solid"/>
-                      <a:round/>
-                      <a:headEnd type="none" w="med" len="med"/>
-                      <a:tailEnd type="none" w="med" len="med"/>
-                    </a:lnL>
-                    <a:lnR w="12700" cap="flat" cmpd="sng" algn="ctr">
-                      <a:solidFill>
-                        <a:srgbClr val="2D2D2D"/>
-                      </a:solidFill>
-                      <a:prstDash val="solid"/>
-                      <a:round/>
-                      <a:headEnd type="none" w="med" len="med"/>
-                      <a:tailEnd type="none" w="med" len="med"/>
-                    </a:lnR>
-                    <a:lnT w="12700" cap="flat" cmpd="sng" algn="ctr">
-                      <a:solidFill>
-                        <a:srgbClr val="2D2D2D"/>
-                      </a:solidFill>
-                      <a:prstDash val="solid"/>
-                      <a:round/>
-                      <a:headEnd type="none" w="med" len="med"/>
-                      <a:tailEnd type="none" w="med" len="med"/>
-                    </a:lnT>
-                    <a:lnB w="12700" cap="flat" cmpd="sng" algn="ctr">
-                      <a:solidFill>
-                        <a:srgbClr val="2D2D2D"/>
-                      </a:solidFill>
-                      <a:prstDash val="solid"/>
-                      <a:round/>
-                      <a:headEnd type="none" w="med" len="med"/>
-                      <a:tailEnd type="none" w="med" len="med"/>
-                    </a:lnB>
-                    <a:solidFill>
-                      <a:srgbClr val="101010"/>
-                    </a:solidFill>
-                  </a:tcPr>
-                </a:tc>
-                <a:tc>
-                  <a:txBody>
-                    <a:bodyPr/>
-                    <a:lstStyle/>
-                    <a:p>
-                      <a:pPr marL="0" indent="0">
-                        <a:buNone/>
-                      </a:pPr>
-                      <a:r>
-                        <a:rPr sz="680" b="0">
-                          <a:solidFill>
-                            <a:srgbClr val="D9D9D9"/>
-                          </a:solidFill>
-                        </a:rPr>
-                        <a:t>Share of exposed sellers who opt out or complain</a:t>
-                      </a:r>
-                    </a:p>
-                  </a:txBody>
-                  <a:tcPr marL="18000" marR="18000" marT="14000" marB="14000" anchor="ctr">
-                    <a:lnL w="12700" cap="flat" cmpd="sng" algn="ctr">
-                      <a:solidFill>
-                        <a:srgbClr val="2D2D2D"/>
-                      </a:solidFill>
-                      <a:prstDash val="solid"/>
-                      <a:round/>
-                      <a:headEnd type="none" w="med" len="med"/>
-                      <a:tailEnd type="none" w="med" len="med"/>
-                    </a:lnL>
-                    <a:lnR w="12700" cap="flat" cmpd="sng" algn="ctr">
-                      <a:solidFill>
-                        <a:srgbClr val="2D2D2D"/>
-                      </a:solidFill>
-                      <a:prstDash val="solid"/>
-                      <a:round/>
-                      <a:headEnd type="none" w="med" len="med"/>
-                      <a:tailEnd type="none" w="med" len="med"/>
-                    </a:lnR>
-                    <a:lnT w="12700" cap="flat" cmpd="sng" algn="ctr">
-                      <a:solidFill>
-                        <a:srgbClr val="2D2D2D"/>
-                      </a:solidFill>
-                      <a:prstDash val="solid"/>
-                      <a:round/>
-                      <a:headEnd type="none" w="med" len="med"/>
-                      <a:tailEnd type="none" w="med" len="med"/>
-                    </a:lnT>
-                    <a:lnB w="12700" cap="flat" cmpd="sng" algn="ctr">
-                      <a:solidFill>
-                        <a:srgbClr val="2D2D2D"/>
-                      </a:solidFill>
-                      <a:prstDash val="solid"/>
-                      <a:round/>
-                      <a:headEnd type="none" w="med" len="med"/>
-                      <a:tailEnd type="none" w="med" len="med"/>
-                    </a:lnB>
-                    <a:solidFill>
-                      <a:srgbClr val="101010"/>
-                    </a:solidFill>
-                  </a:tcPr>
-                </a:tc>
-                <a:tc>
-                  <a:txBody>
-                    <a:bodyPr/>
-                    <a:lstStyle/>
-                    <a:p>
-                      <a:pPr marL="0" indent="0">
-                        <a:buNone/>
-                      </a:pPr>
-                      <a:r>
-                        <a:rPr sz="680" b="0">
-                          <a:solidFill>
-                            <a:srgbClr val="D9D9D9"/>
-                          </a:solidFill>
-                        </a:rPr>
-                        <a:t>Caps campaign pressure before trust suffers.</a:t>
-                      </a:r>
-                    </a:p>
-                  </a:txBody>
-                  <a:tcPr marL="18000" marR="18000" marT="14000" marB="14000" anchor="ctr">
-                    <a:lnL w="12700" cap="flat" cmpd="sng" algn="ctr">
-                      <a:solidFill>
-                        <a:srgbClr val="2D2D2D"/>
-                      </a:solidFill>
-                      <a:prstDash val="solid"/>
-                      <a:round/>
-                      <a:headEnd type="none" w="med" len="med"/>
-                      <a:tailEnd type="none" w="med" len="med"/>
-                    </a:lnL>
-                    <a:lnR w="12700" cap="flat" cmpd="sng" algn="ctr">
-                      <a:solidFill>
-                        <a:srgbClr val="2D2D2D"/>
-                      </a:solidFill>
-                      <a:prstDash val="solid"/>
-                      <a:round/>
-                      <a:headEnd type="none" w="med" len="med"/>
-                      <a:tailEnd type="none" w="med" len="med"/>
-                    </a:lnR>
-                    <a:lnT w="12700" cap="flat" cmpd="sng" algn="ctr">
-                      <a:solidFill>
-                        <a:srgbClr val="2D2D2D"/>
-                      </a:solidFill>
-                      <a:prstDash val="solid"/>
-                      <a:round/>
-                      <a:headEnd type="none" w="med" len="med"/>
-                      <a:tailEnd type="none" w="med" len="med"/>
-                    </a:lnT>
-                    <a:lnB w="12700" cap="flat" cmpd="sng" algn="ctr">
-                      <a:solidFill>
-                        <a:srgbClr val="2D2D2D"/>
-                      </a:solidFill>
-                      <a:prstDash val="solid"/>
-                      <a:round/>
-                      <a:headEnd type="none" w="med" len="med"/>
-                      <a:tailEnd type="none" w="med" len="med"/>
-                    </a:lnB>
-                    <a:solidFill>
-                      <a:srgbClr val="101010"/>
-                    </a:solidFill>
-                  </a:tcPr>
-                </a:tc>
-                <a:extLst>
-                  <a:ext uri="{0D108BD9-81ED-4DB2-BD59-A6C34878D82A}">
-                    <ns2:rowId val="4031142651"/>
-                  </a:ext>
-                </a:extLst>
-              </a:tr>
-            </a:tbl>
-          </a:graphicData>
-        </a:graphic>
-      </p:graphicFrame>
+              <a:t>Exposed adoption rate minus holdout adoption rate</a:t>
+            </a:r>
+            <a:endParaRPr lang="en-US" sz="1150" dirty="0"/>
+          </a:p>
+        </p:txBody>
+      </p:sp>
+      <p:sp>
+        <p:nvSpPr>
+          <p:cNvPr id="14" name="Primary KPI why"/>
+          <p:cNvSpPr/>
+          <p:nvPr/>
+        </p:nvSpPr>
+        <p:spPr>
+          <a:xfrm>
+            <a:off x="8439150" y="2305050"/>
+            <a:ext cx="2381250" cy="714375"/>
+          </a:xfrm>
+          <a:prstGeom prst="rect">
+            <a:avLst/>
+          </a:prstGeom>
+          <a:noFill/>
+          <a:ln>
+            <a:noFill/>
+          </a:ln>
+        </p:spPr>
+        <p:txBody>
+          <a:bodyPr wrap="square" lIns="0" tIns="0" rIns="0" bIns="0" anchor="t">
+            <a:normAutofit/>
+          </a:bodyPr>
+          <a:lstStyle/>
+          <a:p>
+            <a:pPr marL="0" indent="0">
+              <a:buNone/>
+            </a:pPr>
+            <a:r>
+              <a:rPr lang="en-US" sz="800" b="1" dirty="0">
+                <a:solidFill>
+                  <a:srgbClr val="A8A8A8"/>
+                </a:solidFill>
+                <a:latin typeface="Arial" pitchFamily="34" charset="0"/>
+                <a:ea typeface="Arial" pitchFamily="34" charset="-122"/>
+                <a:cs typeface="Arial" pitchFamily="34" charset="-120"/>
+              </a:rPr>
+              <a:t>Why it matters</a:t>
+            </a:r>
+            <a:endParaRPr lang="en-US" sz="800" dirty="0"/>
+          </a:p>
+          <a:p>
+            <a:pPr marL="0" indent="0">
+              <a:buNone/>
+            </a:pPr>
+            <a:r>
+              <a:rPr lang="en-US" sz="1150" b="0" dirty="0">
+                <a:solidFill>
+                  <a:srgbClr val="D9D9D9"/>
+                </a:solidFill>
+                <a:latin typeface="Arial" pitchFamily="34" charset="0"/>
+                <a:ea typeface="Arial" pitchFamily="34" charset="-122"/>
+                <a:cs typeface="Arial" pitchFamily="34" charset="-120"/>
+              </a:rPr>
+              <a:t>Separates real lift from natural adoption.</a:t>
+            </a:r>
+            <a:endParaRPr lang="en-US" sz="1150" dirty="0"/>
+          </a:p>
+        </p:txBody>
+      </p:sp>
+      <p:sp>
+        <p:nvSpPr>
+          <p:cNvPr id="15" name="Secondary KPI section label"/>
+          <p:cNvSpPr/>
+          <p:nvPr/>
+        </p:nvSpPr>
+        <p:spPr>
+          <a:xfrm>
+            <a:off x="628650" y="3371850"/>
+            <a:ext cx="3143250" cy="266700"/>
+          </a:xfrm>
+          <a:prstGeom prst="rect">
+            <a:avLst/>
+          </a:prstGeom>
+          <a:noFill/>
+          <a:ln>
+            <a:noFill/>
+          </a:ln>
+        </p:spPr>
+        <p:txBody>
+          <a:bodyPr wrap="square" lIns="0" tIns="0" rIns="0" bIns="0" anchor="t">
+            <a:normAutofit/>
+          </a:bodyPr>
+          <a:lstStyle/>
+          <a:p>
+            <a:pPr marL="0" indent="0">
+              <a:buNone/>
+            </a:pPr>
+            <a:r>
+              <a:rPr lang="en-US" sz="1450" b="1" dirty="0">
+                <a:solidFill>
+                  <a:srgbClr val="FF735B"/>
+                </a:solidFill>
+                <a:latin typeface="Arial" pitchFamily="34" charset="0"/>
+                <a:ea typeface="Arial" pitchFamily="34" charset="-122"/>
+                <a:cs typeface="Arial" pitchFamily="34" charset="-120"/>
+              </a:rPr>
+              <a:t>Secondary KPIs</a:t>
+            </a:r>
+            <a:endParaRPr lang="en-US" sz="1450" dirty="0"/>
+          </a:p>
+        </p:txBody>
+      </p:sp>
+      <p:sp>
+        <p:nvSpPr>
+          <p:cNvPr id="16" name="Click-through rate card"/>
+          <p:cNvSpPr/>
+          <p:nvPr/>
+        </p:nvSpPr>
+        <p:spPr>
+          <a:xfrm>
+            <a:off x="628650" y="3638550"/>
+            <a:ext cx="6048375" cy="742950"/>
+          </a:xfrm>
+          <a:prstGeom prst="roundRect">
+            <a:avLst/>
+          </a:prstGeom>
+          <a:solidFill>
+            <a:srgbClr val="101010"/>
+          </a:solidFill>
+          <a:ln w="12700">
+            <a:solidFill>
+              <a:srgbClr val="2D2D2D"/>
+            </a:solidFill>
+            <a:prstDash val="solid"/>
+          </a:ln>
+        </p:spPr>
+        <p:txBody>
+          <a:bodyPr/>
+          <a:lstStyle/>
+          <a:p>
+            <a:endParaRPr lang="en-US"/>
+          </a:p>
+        </p:txBody>
+      </p:sp>
+      <p:sp>
+        <p:nvSpPr>
+          <p:cNvPr id="17" name="Click-through rate accent"/>
+          <p:cNvSpPr/>
+          <p:nvPr/>
+        </p:nvSpPr>
+        <p:spPr>
+          <a:xfrm>
+            <a:off x="628650" y="3705225"/>
+            <a:ext cx="47625" cy="609600"/>
+          </a:xfrm>
+          <a:prstGeom prst="rect">
+            <a:avLst/>
+          </a:prstGeom>
+          <a:solidFill>
+            <a:srgbClr val="666666"/>
+          </a:solidFill>
+          <a:ln>
+            <a:noFill/>
+          </a:ln>
+        </p:spPr>
+        <p:txBody>
+          <a:bodyPr/>
+          <a:lstStyle/>
+          <a:p>
+            <a:endParaRPr lang="en-US"/>
+          </a:p>
+        </p:txBody>
+      </p:sp>
+      <p:sp>
+        <p:nvSpPr>
+          <p:cNvPr id="18" name="Click-through rate kpi"/>
+          <p:cNvSpPr/>
+          <p:nvPr/>
+        </p:nvSpPr>
+        <p:spPr>
+          <a:xfrm>
+            <a:off x="857250" y="3886200"/>
+            <a:ext cx="1571625" cy="533400"/>
+          </a:xfrm>
+          <a:prstGeom prst="rect">
+            <a:avLst/>
+          </a:prstGeom>
+          <a:noFill/>
+          <a:ln>
+            <a:noFill/>
+          </a:ln>
+        </p:spPr>
+        <p:txBody>
+          <a:bodyPr wrap="square" lIns="0" tIns="0" rIns="0" bIns="0" anchor="t">
+            <a:normAutofit/>
+          </a:bodyPr>
+          <a:lstStyle/>
+          <a:p>
+            <a:pPr marL="0" indent="0">
+              <a:buNone/>
+            </a:pPr>
+            <a:r>
+              <a:rPr lang="en-US" sz="1000" b="1" dirty="0">
+                <a:solidFill>
+                  <a:srgbClr val="F2F2F2"/>
+                </a:solidFill>
+                <a:latin typeface="Arial" pitchFamily="34" charset="0"/>
+                <a:ea typeface="Arial" pitchFamily="34" charset="-122"/>
+                <a:cs typeface="Arial" pitchFamily="34" charset="-120"/>
+              </a:rPr>
+              <a:t>Click-through rate</a:t>
+            </a:r>
+            <a:endParaRPr lang="en-US" sz="1000" dirty="0"/>
+          </a:p>
+        </p:txBody>
+      </p:sp>
+      <p:sp>
+        <p:nvSpPr>
+          <p:cNvPr id="19" name="Click-through rate definition"/>
+          <p:cNvSpPr/>
+          <p:nvPr/>
+        </p:nvSpPr>
+        <p:spPr>
+          <a:xfrm>
+            <a:off x="2619375" y="3771900"/>
+            <a:ext cx="2381250" cy="552450"/>
+          </a:xfrm>
+          <a:prstGeom prst="rect">
+            <a:avLst/>
+          </a:prstGeom>
+          <a:noFill/>
+          <a:ln>
+            <a:noFill/>
+          </a:ln>
+        </p:spPr>
+        <p:txBody>
+          <a:bodyPr wrap="square" lIns="0" tIns="0" rIns="0" bIns="0" anchor="t">
+            <a:normAutofit/>
+          </a:bodyPr>
+          <a:lstStyle/>
+          <a:p>
+            <a:pPr marL="0" indent="0">
+              <a:buNone/>
+            </a:pPr>
+            <a:r>
+              <a:rPr lang="en-US" sz="700" b="1" dirty="0">
+                <a:solidFill>
+                  <a:srgbClr val="A8A8A8"/>
+                </a:solidFill>
+                <a:latin typeface="Arial" pitchFamily="34" charset="0"/>
+                <a:ea typeface="Arial" pitchFamily="34" charset="-122"/>
+                <a:cs typeface="Arial" pitchFamily="34" charset="-120"/>
+              </a:rPr>
+              <a:t>Definition</a:t>
+            </a:r>
+            <a:endParaRPr lang="en-US" sz="700" dirty="0"/>
+          </a:p>
+          <a:p>
+            <a:pPr marL="0" indent="0">
+              <a:buNone/>
+            </a:pPr>
+            <a:r>
+              <a:rPr lang="en-US" sz="900" b="0" dirty="0">
+                <a:solidFill>
+                  <a:srgbClr val="D9D9D9"/>
+                </a:solidFill>
+                <a:latin typeface="Arial" pitchFamily="34" charset="0"/>
+                <a:ea typeface="Arial" pitchFamily="34" charset="-122"/>
+                <a:cs typeface="Arial" pitchFamily="34" charset="-120"/>
+              </a:rPr>
+              <a:t>Share of exposed sellers who click
+through</a:t>
+            </a:r>
+            <a:endParaRPr lang="en-US" sz="900" dirty="0"/>
+          </a:p>
+        </p:txBody>
+      </p:sp>
+      <p:sp>
+        <p:nvSpPr>
+          <p:cNvPr id="20" name="Click-through rate why"/>
+          <p:cNvSpPr/>
+          <p:nvPr/>
+        </p:nvSpPr>
+        <p:spPr>
+          <a:xfrm>
+            <a:off x="4797779" y="3771900"/>
+            <a:ext cx="1774472" cy="552450"/>
+          </a:xfrm>
+          <a:prstGeom prst="rect">
+            <a:avLst/>
+          </a:prstGeom>
+          <a:noFill/>
+          <a:ln>
+            <a:noFill/>
+          </a:ln>
+        </p:spPr>
+        <p:txBody>
+          <a:bodyPr wrap="square" lIns="0" tIns="0" rIns="0" bIns="0" anchor="t">
+            <a:normAutofit/>
+          </a:bodyPr>
+          <a:lstStyle/>
+          <a:p>
+            <a:pPr marL="0" indent="0">
+              <a:buNone/>
+            </a:pPr>
+            <a:r>
+              <a:rPr lang="en-US" sz="700" b="1" dirty="0">
+                <a:solidFill>
+                  <a:srgbClr val="A8A8A8"/>
+                </a:solidFill>
+                <a:latin typeface="Arial" pitchFamily="34" charset="0"/>
+                <a:ea typeface="Arial" pitchFamily="34" charset="-122"/>
+                <a:cs typeface="Arial" pitchFamily="34" charset="-120"/>
+              </a:rPr>
+              <a:t>Why it matters</a:t>
+            </a:r>
+            <a:endParaRPr lang="en-US" sz="700" dirty="0"/>
+          </a:p>
+          <a:p>
+            <a:pPr marL="0" indent="0">
+              <a:buNone/>
+            </a:pPr>
+            <a:r>
+              <a:rPr lang="en-US" sz="900" b="0" dirty="0">
+                <a:solidFill>
+                  <a:srgbClr val="D9D9D9"/>
+                </a:solidFill>
+                <a:latin typeface="Arial" pitchFamily="34" charset="0"/>
+                <a:ea typeface="Arial" pitchFamily="34" charset="-122"/>
+                <a:cs typeface="Arial" pitchFamily="34" charset="-120"/>
+              </a:rPr>
+              <a:t>Diagnoses channel and
+placement relevance.</a:t>
+            </a:r>
+            <a:endParaRPr lang="en-US" sz="900" dirty="0"/>
+          </a:p>
+        </p:txBody>
+      </p:sp>
+      <p:sp>
+        <p:nvSpPr>
+          <p:cNvPr id="21" name="Trial start rate card"/>
+          <p:cNvSpPr/>
+          <p:nvPr/>
+        </p:nvSpPr>
+        <p:spPr>
+          <a:xfrm>
+            <a:off x="628650" y="4495800"/>
+            <a:ext cx="6048375" cy="742950"/>
+          </a:xfrm>
+          <a:prstGeom prst="roundRect">
+            <a:avLst/>
+          </a:prstGeom>
+          <a:solidFill>
+            <a:srgbClr val="101010"/>
+          </a:solidFill>
+          <a:ln w="12700">
+            <a:solidFill>
+              <a:srgbClr val="2D2D2D"/>
+            </a:solidFill>
+            <a:prstDash val="solid"/>
+          </a:ln>
+        </p:spPr>
+        <p:txBody>
+          <a:bodyPr/>
+          <a:lstStyle/>
+          <a:p>
+            <a:endParaRPr lang="en-US"/>
+          </a:p>
+        </p:txBody>
+      </p:sp>
+      <p:sp>
+        <p:nvSpPr>
+          <p:cNvPr id="22" name="Trial start rate accent"/>
+          <p:cNvSpPr/>
+          <p:nvPr/>
+        </p:nvSpPr>
+        <p:spPr>
+          <a:xfrm>
+            <a:off x="628650" y="4562475"/>
+            <a:ext cx="47625" cy="609600"/>
+          </a:xfrm>
+          <a:prstGeom prst="rect">
+            <a:avLst/>
+          </a:prstGeom>
+          <a:solidFill>
+            <a:srgbClr val="666666"/>
+          </a:solidFill>
+          <a:ln>
+            <a:noFill/>
+          </a:ln>
+        </p:spPr>
+        <p:txBody>
+          <a:bodyPr/>
+          <a:lstStyle/>
+          <a:p>
+            <a:endParaRPr lang="en-US"/>
+          </a:p>
+        </p:txBody>
+      </p:sp>
+      <p:sp>
+        <p:nvSpPr>
+          <p:cNvPr id="23" name="Trial start rate kpi"/>
+          <p:cNvSpPr/>
+          <p:nvPr/>
+        </p:nvSpPr>
+        <p:spPr>
+          <a:xfrm>
+            <a:off x="857250" y="4743450"/>
+            <a:ext cx="1571625" cy="533400"/>
+          </a:xfrm>
+          <a:prstGeom prst="rect">
+            <a:avLst/>
+          </a:prstGeom>
+          <a:noFill/>
+          <a:ln>
+            <a:noFill/>
+          </a:ln>
+        </p:spPr>
+        <p:txBody>
+          <a:bodyPr wrap="square" lIns="0" tIns="0" rIns="0" bIns="0" anchor="t">
+            <a:normAutofit/>
+          </a:bodyPr>
+          <a:lstStyle/>
+          <a:p>
+            <a:pPr marL="0" indent="0">
+              <a:buNone/>
+            </a:pPr>
+            <a:r>
+              <a:rPr lang="en-US" sz="1000" b="1" dirty="0">
+                <a:solidFill>
+                  <a:srgbClr val="F2F2F2"/>
+                </a:solidFill>
+                <a:latin typeface="Arial" pitchFamily="34" charset="0"/>
+                <a:ea typeface="Arial" pitchFamily="34" charset="-122"/>
+                <a:cs typeface="Arial" pitchFamily="34" charset="-120"/>
+              </a:rPr>
+              <a:t>Trial start rate</a:t>
+            </a:r>
+            <a:endParaRPr lang="en-US" sz="1000" dirty="0"/>
+          </a:p>
+        </p:txBody>
+      </p:sp>
+      <p:sp>
+        <p:nvSpPr>
+          <p:cNvPr id="24" name="Trial start rate definition"/>
+          <p:cNvSpPr/>
+          <p:nvPr/>
+        </p:nvSpPr>
+        <p:spPr>
+          <a:xfrm>
+            <a:off x="2619375" y="4629150"/>
+            <a:ext cx="2381250" cy="552450"/>
+          </a:xfrm>
+          <a:prstGeom prst="rect">
+            <a:avLst/>
+          </a:prstGeom>
+          <a:noFill/>
+          <a:ln>
+            <a:noFill/>
+          </a:ln>
+        </p:spPr>
+        <p:txBody>
+          <a:bodyPr wrap="square" lIns="0" tIns="0" rIns="0" bIns="0" anchor="t">
+            <a:normAutofit/>
+          </a:bodyPr>
+          <a:lstStyle/>
+          <a:p>
+            <a:pPr marL="0" indent="0">
+              <a:buNone/>
+            </a:pPr>
+            <a:r>
+              <a:rPr lang="en-US" sz="700" b="1" dirty="0">
+                <a:solidFill>
+                  <a:srgbClr val="A8A8A8"/>
+                </a:solidFill>
+                <a:latin typeface="Arial" pitchFamily="34" charset="0"/>
+                <a:ea typeface="Arial" pitchFamily="34" charset="-122"/>
+                <a:cs typeface="Arial" pitchFamily="34" charset="-120"/>
+              </a:rPr>
+              <a:t>Definition</a:t>
+            </a:r>
+            <a:endParaRPr lang="en-US" sz="700" dirty="0"/>
+          </a:p>
+          <a:p>
+            <a:pPr marL="0" indent="0">
+              <a:buNone/>
+            </a:pPr>
+            <a:r>
+              <a:rPr lang="en-US" sz="900" b="0" dirty="0">
+                <a:solidFill>
+                  <a:srgbClr val="D9D9D9"/>
+                </a:solidFill>
+                <a:latin typeface="Arial" pitchFamily="34" charset="0"/>
+                <a:ea typeface="Arial" pitchFamily="34" charset="-122"/>
+                <a:cs typeface="Arial" pitchFamily="34" charset="-120"/>
+              </a:rPr>
+              <a:t>Share of exposed sellers who start a
+bundle trial</a:t>
+            </a:r>
+            <a:endParaRPr lang="en-US" sz="900" dirty="0"/>
+          </a:p>
+        </p:txBody>
+      </p:sp>
+      <p:sp>
+        <p:nvSpPr>
+          <p:cNvPr id="25" name="Trial start rate why"/>
+          <p:cNvSpPr/>
+          <p:nvPr/>
+        </p:nvSpPr>
+        <p:spPr>
+          <a:xfrm>
+            <a:off x="4797779" y="4629150"/>
+            <a:ext cx="1774472" cy="552450"/>
+          </a:xfrm>
+          <a:prstGeom prst="rect">
+            <a:avLst/>
+          </a:prstGeom>
+          <a:noFill/>
+          <a:ln>
+            <a:noFill/>
+          </a:ln>
+        </p:spPr>
+        <p:txBody>
+          <a:bodyPr wrap="square" lIns="0" tIns="0" rIns="0" bIns="0" anchor="t">
+            <a:normAutofit/>
+          </a:bodyPr>
+          <a:lstStyle/>
+          <a:p>
+            <a:pPr marL="0" indent="0">
+              <a:buNone/>
+            </a:pPr>
+            <a:r>
+              <a:rPr lang="en-US" sz="700" b="1" dirty="0">
+                <a:solidFill>
+                  <a:srgbClr val="A8A8A8"/>
+                </a:solidFill>
+                <a:latin typeface="Arial" pitchFamily="34" charset="0"/>
+                <a:ea typeface="Arial" pitchFamily="34" charset="-122"/>
+                <a:cs typeface="Arial" pitchFamily="34" charset="-120"/>
+              </a:rPr>
+              <a:t>Why it matters</a:t>
+            </a:r>
+            <a:endParaRPr lang="en-US" sz="700" dirty="0"/>
+          </a:p>
+          <a:p>
+            <a:pPr marL="0" indent="0">
+              <a:buNone/>
+            </a:pPr>
+            <a:r>
+              <a:rPr lang="en-US" sz="900" b="0" dirty="0">
+                <a:solidFill>
+                  <a:srgbClr val="D9D9D9"/>
+                </a:solidFill>
+                <a:latin typeface="Arial" pitchFamily="34" charset="0"/>
+                <a:ea typeface="Arial" pitchFamily="34" charset="-122"/>
+                <a:cs typeface="Arial" pitchFamily="34" charset="-120"/>
+              </a:rPr>
+              <a:t>Shows whether interest
+becomes action.</a:t>
+            </a:r>
+            <a:endParaRPr lang="en-US" sz="900" dirty="0"/>
+          </a:p>
+        </p:txBody>
+      </p:sp>
+      <p:sp>
+        <p:nvSpPr>
+          <p:cNvPr id="26" name="Bundle revenue uplift card"/>
+          <p:cNvSpPr/>
+          <p:nvPr/>
+        </p:nvSpPr>
+        <p:spPr>
+          <a:xfrm>
+            <a:off x="628650" y="5353050"/>
+            <a:ext cx="6048375" cy="742950"/>
+          </a:xfrm>
+          <a:prstGeom prst="roundRect">
+            <a:avLst/>
+          </a:prstGeom>
+          <a:solidFill>
+            <a:srgbClr val="101010"/>
+          </a:solidFill>
+          <a:ln w="12700">
+            <a:solidFill>
+              <a:srgbClr val="2D2D2D"/>
+            </a:solidFill>
+            <a:prstDash val="solid"/>
+          </a:ln>
+        </p:spPr>
+        <p:txBody>
+          <a:bodyPr/>
+          <a:lstStyle/>
+          <a:p>
+            <a:endParaRPr lang="en-US"/>
+          </a:p>
+        </p:txBody>
+      </p:sp>
+      <p:sp>
+        <p:nvSpPr>
+          <p:cNvPr id="27" name="Bundle revenue uplift accent"/>
+          <p:cNvSpPr/>
+          <p:nvPr/>
+        </p:nvSpPr>
+        <p:spPr>
+          <a:xfrm>
+            <a:off x="628650" y="5419725"/>
+            <a:ext cx="47625" cy="609600"/>
+          </a:xfrm>
+          <a:prstGeom prst="rect">
+            <a:avLst/>
+          </a:prstGeom>
+          <a:solidFill>
+            <a:srgbClr val="666666"/>
+          </a:solidFill>
+          <a:ln>
+            <a:noFill/>
+          </a:ln>
+        </p:spPr>
+        <p:txBody>
+          <a:bodyPr/>
+          <a:lstStyle/>
+          <a:p>
+            <a:endParaRPr lang="en-US"/>
+          </a:p>
+        </p:txBody>
+      </p:sp>
+      <p:sp>
+        <p:nvSpPr>
+          <p:cNvPr id="28" name="Bundle revenue uplift kpi"/>
+          <p:cNvSpPr/>
+          <p:nvPr/>
+        </p:nvSpPr>
+        <p:spPr>
+          <a:xfrm>
+            <a:off x="857250" y="5600700"/>
+            <a:ext cx="1571625" cy="533400"/>
+          </a:xfrm>
+          <a:prstGeom prst="rect">
+            <a:avLst/>
+          </a:prstGeom>
+          <a:noFill/>
+          <a:ln>
+            <a:noFill/>
+          </a:ln>
+        </p:spPr>
+        <p:txBody>
+          <a:bodyPr wrap="square" lIns="0" tIns="0" rIns="0" bIns="0" anchor="t">
+            <a:normAutofit/>
+          </a:bodyPr>
+          <a:lstStyle/>
+          <a:p>
+            <a:pPr marL="0" indent="0">
+              <a:buNone/>
+            </a:pPr>
+            <a:r>
+              <a:rPr lang="en-US" sz="1000" b="1" dirty="0">
+                <a:solidFill>
+                  <a:srgbClr val="F2F2F2"/>
+                </a:solidFill>
+                <a:latin typeface="Arial" pitchFamily="34" charset="0"/>
+                <a:ea typeface="Arial" pitchFamily="34" charset="-122"/>
+                <a:cs typeface="Arial" pitchFamily="34" charset="-120"/>
+              </a:rPr>
+              <a:t>Bundle revenue
+uplift</a:t>
+            </a:r>
+            <a:endParaRPr lang="en-US" sz="1000" dirty="0"/>
+          </a:p>
+        </p:txBody>
+      </p:sp>
+      <p:sp>
+        <p:nvSpPr>
+          <p:cNvPr id="29" name="Bundle revenue uplift definition"/>
+          <p:cNvSpPr/>
+          <p:nvPr/>
+        </p:nvSpPr>
+        <p:spPr>
+          <a:xfrm>
+            <a:off x="2619375" y="5486400"/>
+            <a:ext cx="2381250" cy="552450"/>
+          </a:xfrm>
+          <a:prstGeom prst="rect">
+            <a:avLst/>
+          </a:prstGeom>
+          <a:noFill/>
+          <a:ln>
+            <a:noFill/>
+          </a:ln>
+        </p:spPr>
+        <p:txBody>
+          <a:bodyPr wrap="square" lIns="0" tIns="0" rIns="0" bIns="0" anchor="t">
+            <a:normAutofit/>
+          </a:bodyPr>
+          <a:lstStyle/>
+          <a:p>
+            <a:pPr marL="0" indent="0">
+              <a:buNone/>
+            </a:pPr>
+            <a:r>
+              <a:rPr lang="en-US" sz="700" b="1" dirty="0">
+                <a:solidFill>
+                  <a:srgbClr val="A8A8A8"/>
+                </a:solidFill>
+                <a:latin typeface="Arial" pitchFamily="34" charset="0"/>
+                <a:ea typeface="Arial" pitchFamily="34" charset="-122"/>
+                <a:cs typeface="Arial" pitchFamily="34" charset="-120"/>
+              </a:rPr>
+              <a:t>Definition</a:t>
+            </a:r>
+            <a:endParaRPr lang="en-US" sz="700" dirty="0"/>
+          </a:p>
+          <a:p>
+            <a:pPr marL="0" indent="0">
+              <a:buNone/>
+            </a:pPr>
+            <a:r>
+              <a:rPr lang="en-US" sz="900" b="0" dirty="0">
+                <a:solidFill>
+                  <a:srgbClr val="D9D9D9"/>
+                </a:solidFill>
+                <a:latin typeface="Arial" pitchFamily="34" charset="0"/>
+                <a:ea typeface="Arial" pitchFamily="34" charset="-122"/>
+                <a:cs typeface="Arial" pitchFamily="34" charset="-120"/>
+              </a:rPr>
+              <a:t>Exposed bundle revenue minus holdout
+bundle revenue</a:t>
+            </a:r>
+            <a:endParaRPr lang="en-US" sz="900" dirty="0"/>
+          </a:p>
+        </p:txBody>
+      </p:sp>
+      <p:sp>
+        <p:nvSpPr>
+          <p:cNvPr id="30" name="Bundle revenue uplift why"/>
+          <p:cNvSpPr/>
+          <p:nvPr/>
+        </p:nvSpPr>
+        <p:spPr>
+          <a:xfrm>
+            <a:off x="4797779" y="5486400"/>
+            <a:ext cx="1774472" cy="552450"/>
+          </a:xfrm>
+          <a:prstGeom prst="rect">
+            <a:avLst/>
+          </a:prstGeom>
+          <a:noFill/>
+          <a:ln>
+            <a:noFill/>
+          </a:ln>
+        </p:spPr>
+        <p:txBody>
+          <a:bodyPr wrap="square" lIns="0" tIns="0" rIns="0" bIns="0" anchor="t">
+            <a:normAutofit/>
+          </a:bodyPr>
+          <a:lstStyle/>
+          <a:p>
+            <a:pPr marL="0" indent="0">
+              <a:buNone/>
+            </a:pPr>
+            <a:r>
+              <a:rPr lang="en-US" sz="700" b="1" dirty="0">
+                <a:solidFill>
+                  <a:srgbClr val="A8A8A8"/>
+                </a:solidFill>
+                <a:latin typeface="Arial" pitchFamily="34" charset="0"/>
+                <a:ea typeface="Arial" pitchFamily="34" charset="-122"/>
+                <a:cs typeface="Arial" pitchFamily="34" charset="-120"/>
+              </a:rPr>
+              <a:t>Why it matters</a:t>
+            </a:r>
+            <a:endParaRPr lang="en-US" sz="700" dirty="0"/>
+          </a:p>
+          <a:p>
+            <a:pPr marL="0" indent="0">
+              <a:buNone/>
+            </a:pPr>
+            <a:r>
+              <a:rPr lang="en-US" sz="900" b="0" dirty="0">
+                <a:solidFill>
+                  <a:srgbClr val="D9D9D9"/>
+                </a:solidFill>
+                <a:latin typeface="Arial" pitchFamily="34" charset="0"/>
+                <a:ea typeface="Arial" pitchFamily="34" charset="-122"/>
+                <a:cs typeface="Arial" pitchFamily="34" charset="-120"/>
+              </a:rPr>
+              <a:t>Links adoption to business
+value.</a:t>
+            </a:r>
+            <a:endParaRPr lang="en-US" sz="900" dirty="0"/>
+          </a:p>
+        </p:txBody>
+      </p:sp>
+      <p:sp>
+        <p:nvSpPr>
+          <p:cNvPr id="31" name="Guardrail section label"/>
+          <p:cNvSpPr/>
+          <p:nvPr/>
+        </p:nvSpPr>
+        <p:spPr>
+          <a:xfrm>
+            <a:off x="7000875" y="3371850"/>
+            <a:ext cx="3143250" cy="266700"/>
+          </a:xfrm>
+          <a:prstGeom prst="rect">
+            <a:avLst/>
+          </a:prstGeom>
+          <a:noFill/>
+          <a:ln>
+            <a:noFill/>
+          </a:ln>
+        </p:spPr>
+        <p:txBody>
+          <a:bodyPr wrap="square" lIns="0" tIns="0" rIns="0" bIns="0" anchor="t">
+            <a:normAutofit/>
+          </a:bodyPr>
+          <a:lstStyle/>
+          <a:p>
+            <a:pPr marL="0" indent="0">
+              <a:buNone/>
+            </a:pPr>
+            <a:r>
+              <a:rPr lang="en-US" sz="1450" b="1" dirty="0">
+                <a:solidFill>
+                  <a:srgbClr val="FF735B"/>
+                </a:solidFill>
+                <a:latin typeface="Arial" pitchFamily="34" charset="0"/>
+                <a:ea typeface="Arial" pitchFamily="34" charset="-122"/>
+                <a:cs typeface="Arial" pitchFamily="34" charset="-120"/>
+              </a:rPr>
+              <a:t>Guardrail KPIs</a:t>
+            </a:r>
+            <a:endParaRPr lang="en-US" sz="1450" dirty="0"/>
+          </a:p>
+        </p:txBody>
+      </p:sp>
+      <p:sp>
+        <p:nvSpPr>
+          <p:cNvPr id="32" name="Guardrail intro"/>
+          <p:cNvSpPr/>
+          <p:nvPr/>
+        </p:nvSpPr>
+        <p:spPr>
+          <a:xfrm>
+            <a:off x="7000875" y="3695700"/>
+            <a:ext cx="4191000" cy="457200"/>
+          </a:xfrm>
+          <a:prstGeom prst="rect">
+            <a:avLst/>
+          </a:prstGeom>
+          <a:noFill/>
+          <a:ln>
+            <a:noFill/>
+          </a:ln>
+        </p:spPr>
+        <p:txBody>
+          <a:bodyPr wrap="square" lIns="0" tIns="0" rIns="0" bIns="0" anchor="t">
+            <a:normAutofit/>
+          </a:bodyPr>
+          <a:lstStyle/>
+          <a:p>
+            <a:pPr marL="0" indent="0">
+              <a:buNone/>
+            </a:pPr>
+            <a:r>
+              <a:rPr lang="en-US" sz="760" b="0" dirty="0">
+                <a:solidFill>
+                  <a:srgbClr val="D9D9D9"/>
+                </a:solidFill>
+                <a:latin typeface="Arial" pitchFamily="34" charset="0"/>
+                <a:ea typeface="Arial" pitchFamily="34" charset="-122"/>
+                <a:cs typeface="Arial" pitchFamily="34" charset="-120"/>
+              </a:rPr>
+              <a:t>Guardrails ensure the campaign does not overfit to short-term adoption
+at the expense of seller fit, product trust, or support burden.</a:t>
+            </a:r>
+            <a:endParaRPr lang="en-US" sz="760" dirty="0"/>
+          </a:p>
+        </p:txBody>
+      </p:sp>
+      <p:sp>
+        <p:nvSpPr>
+          <p:cNvPr id="33" name="Early cancellation / downgrade rate card"/>
+          <p:cNvSpPr/>
+          <p:nvPr/>
+        </p:nvSpPr>
+        <p:spPr>
+          <a:xfrm>
+            <a:off x="7000875" y="4343400"/>
+            <a:ext cx="4219575" cy="781050"/>
+          </a:xfrm>
+          <a:prstGeom prst="roundRect">
+            <a:avLst/>
+          </a:prstGeom>
+          <a:solidFill>
+            <a:srgbClr val="101010"/>
+          </a:solidFill>
+          <a:ln w="12700">
+            <a:solidFill>
+              <a:srgbClr val="2D2D2D"/>
+            </a:solidFill>
+            <a:prstDash val="solid"/>
+          </a:ln>
+        </p:spPr>
+        <p:txBody>
+          <a:bodyPr/>
+          <a:lstStyle/>
+          <a:p>
+            <a:endParaRPr lang="en-US" dirty="0"/>
+          </a:p>
+        </p:txBody>
+      </p:sp>
+      <p:sp>
+        <p:nvSpPr>
+          <p:cNvPr id="34" name="Early cancellation / downgrade rate accent"/>
+          <p:cNvSpPr/>
+          <p:nvPr/>
+        </p:nvSpPr>
+        <p:spPr>
+          <a:xfrm>
+            <a:off x="7000875" y="4410075"/>
+            <a:ext cx="47625" cy="647700"/>
+          </a:xfrm>
+          <a:prstGeom prst="rect">
+            <a:avLst/>
+          </a:prstGeom>
+          <a:solidFill>
+            <a:srgbClr val="666666"/>
+          </a:solidFill>
+          <a:ln>
+            <a:noFill/>
+          </a:ln>
+        </p:spPr>
+        <p:txBody>
+          <a:bodyPr/>
+          <a:lstStyle/>
+          <a:p>
+            <a:endParaRPr lang="en-US"/>
+          </a:p>
+        </p:txBody>
+      </p:sp>
+      <p:sp>
+        <p:nvSpPr>
+          <p:cNvPr id="35" name="Early cancellation / downgrade rate kpi"/>
+          <p:cNvSpPr/>
+          <p:nvPr/>
+        </p:nvSpPr>
+        <p:spPr>
+          <a:xfrm>
+            <a:off x="7229475" y="4591050"/>
+            <a:ext cx="1428750" cy="571500"/>
+          </a:xfrm>
+          <a:prstGeom prst="rect">
+            <a:avLst/>
+          </a:prstGeom>
+          <a:noFill/>
+          <a:ln>
+            <a:noFill/>
+          </a:ln>
+        </p:spPr>
+        <p:txBody>
+          <a:bodyPr wrap="square" lIns="0" tIns="0" rIns="0" bIns="0" anchor="t">
+            <a:normAutofit/>
+          </a:bodyPr>
+          <a:lstStyle/>
+          <a:p>
+            <a:pPr marL="0" indent="0">
+              <a:buNone/>
+            </a:pPr>
+            <a:r>
+              <a:rPr lang="en-US" sz="900" b="1" dirty="0">
+                <a:solidFill>
+                  <a:srgbClr val="F2F2F2"/>
+                </a:solidFill>
+                <a:latin typeface="Arial" pitchFamily="34" charset="0"/>
+                <a:ea typeface="Arial" pitchFamily="34" charset="-122"/>
+                <a:cs typeface="Arial" pitchFamily="34" charset="-120"/>
+              </a:rPr>
+              <a:t>Early cancellation /
+downgrade rate</a:t>
+            </a:r>
+            <a:endParaRPr lang="en-US" sz="900" dirty="0"/>
+          </a:p>
+        </p:txBody>
+      </p:sp>
+      <p:sp>
+        <p:nvSpPr>
+          <p:cNvPr id="36" name="Early cancellation / downgrade rate definition"/>
+          <p:cNvSpPr/>
+          <p:nvPr/>
+        </p:nvSpPr>
+        <p:spPr>
+          <a:xfrm>
+            <a:off x="8486777" y="4476750"/>
+            <a:ext cx="1475667" cy="590550"/>
+          </a:xfrm>
+          <a:prstGeom prst="rect">
+            <a:avLst/>
+          </a:prstGeom>
+          <a:noFill/>
+          <a:ln>
+            <a:noFill/>
+          </a:ln>
+        </p:spPr>
+        <p:txBody>
+          <a:bodyPr wrap="square" lIns="0" tIns="0" rIns="0" bIns="0" anchor="t">
+            <a:normAutofit/>
+          </a:bodyPr>
+          <a:lstStyle/>
+          <a:p>
+            <a:pPr marL="0" indent="0">
+              <a:buNone/>
+            </a:pPr>
+            <a:r>
+              <a:rPr lang="en-US" sz="700" b="1" dirty="0">
+                <a:solidFill>
+                  <a:srgbClr val="A8A8A8"/>
+                </a:solidFill>
+                <a:latin typeface="Arial" pitchFamily="34" charset="0"/>
+                <a:ea typeface="Arial" pitchFamily="34" charset="-122"/>
+                <a:cs typeface="Arial" pitchFamily="34" charset="-120"/>
+              </a:rPr>
+              <a:t>Definition</a:t>
+            </a:r>
+            <a:endParaRPr lang="en-US" sz="700" dirty="0"/>
+          </a:p>
+          <a:p>
+            <a:pPr marL="0" indent="0">
+              <a:buNone/>
+            </a:pPr>
+            <a:r>
+              <a:rPr lang="en-US" sz="900" b="0" dirty="0">
+                <a:solidFill>
+                  <a:srgbClr val="D9D9D9"/>
+                </a:solidFill>
+                <a:latin typeface="Arial" pitchFamily="34" charset="0"/>
+                <a:ea typeface="Arial" pitchFamily="34" charset="-122"/>
+                <a:cs typeface="Arial" pitchFamily="34" charset="-120"/>
+              </a:rPr>
+              <a:t>Share of adopters who cancel or downgrade early</a:t>
+            </a:r>
+            <a:endParaRPr lang="en-US" sz="900" dirty="0"/>
+          </a:p>
+        </p:txBody>
+      </p:sp>
+      <p:sp>
+        <p:nvSpPr>
+          <p:cNvPr id="37" name="Early cancellation / downgrade rate why"/>
+          <p:cNvSpPr/>
+          <p:nvPr/>
+        </p:nvSpPr>
+        <p:spPr>
+          <a:xfrm>
+            <a:off x="10096500" y="4476750"/>
+            <a:ext cx="938389" cy="590550"/>
+          </a:xfrm>
+          <a:prstGeom prst="rect">
+            <a:avLst/>
+          </a:prstGeom>
+          <a:noFill/>
+          <a:ln>
+            <a:noFill/>
+          </a:ln>
+        </p:spPr>
+        <p:txBody>
+          <a:bodyPr wrap="square" lIns="0" tIns="0" rIns="0" bIns="0" anchor="t">
+            <a:normAutofit/>
+          </a:bodyPr>
+          <a:lstStyle/>
+          <a:p>
+            <a:pPr marL="0" indent="0">
+              <a:buNone/>
+            </a:pPr>
+            <a:r>
+              <a:rPr lang="en-US" sz="620" b="1" dirty="0">
+                <a:solidFill>
+                  <a:srgbClr val="A8A8A8"/>
+                </a:solidFill>
+                <a:latin typeface="Arial" pitchFamily="34" charset="0"/>
+                <a:ea typeface="Arial" pitchFamily="34" charset="-122"/>
+                <a:cs typeface="Arial" pitchFamily="34" charset="-120"/>
+              </a:rPr>
+              <a:t>Why it matters</a:t>
+            </a:r>
+            <a:endParaRPr lang="en-US" sz="620" dirty="0"/>
+          </a:p>
+          <a:p>
+            <a:pPr marL="0" indent="0">
+              <a:buNone/>
+            </a:pPr>
+            <a:r>
+              <a:rPr lang="en-US" sz="900" b="0" dirty="0">
+                <a:solidFill>
+                  <a:srgbClr val="D9D9D9"/>
+                </a:solidFill>
+                <a:latin typeface="Arial" pitchFamily="34" charset="0"/>
+                <a:ea typeface="Arial" pitchFamily="34" charset="-122"/>
+                <a:cs typeface="Arial" pitchFamily="34" charset="-120"/>
+              </a:rPr>
+              <a:t>Flags poor-fit or over-pushed sellers.</a:t>
+            </a:r>
+            <a:endParaRPr lang="en-US" sz="900" dirty="0"/>
+          </a:p>
+        </p:txBody>
+      </p:sp>
+      <p:sp>
+        <p:nvSpPr>
+          <p:cNvPr id="38" name="Seller opt-out or complaint rate card"/>
+          <p:cNvSpPr/>
+          <p:nvPr/>
+        </p:nvSpPr>
+        <p:spPr>
+          <a:xfrm>
+            <a:off x="7000875" y="5286375"/>
+            <a:ext cx="4219575" cy="781050"/>
+          </a:xfrm>
+          <a:prstGeom prst="roundRect">
+            <a:avLst/>
+          </a:prstGeom>
+          <a:solidFill>
+            <a:srgbClr val="101010"/>
+          </a:solidFill>
+          <a:ln w="12700">
+            <a:solidFill>
+              <a:srgbClr val="2D2D2D"/>
+            </a:solidFill>
+            <a:prstDash val="solid"/>
+          </a:ln>
+        </p:spPr>
+        <p:txBody>
+          <a:bodyPr/>
+          <a:lstStyle/>
+          <a:p>
+            <a:endParaRPr lang="en-US"/>
+          </a:p>
+        </p:txBody>
+      </p:sp>
+      <p:sp>
+        <p:nvSpPr>
+          <p:cNvPr id="39" name="Seller opt-out or complaint rate accent"/>
+          <p:cNvSpPr/>
+          <p:nvPr/>
+        </p:nvSpPr>
+        <p:spPr>
+          <a:xfrm>
+            <a:off x="7000875" y="5353050"/>
+            <a:ext cx="47625" cy="647700"/>
+          </a:xfrm>
+          <a:prstGeom prst="rect">
+            <a:avLst/>
+          </a:prstGeom>
+          <a:solidFill>
+            <a:srgbClr val="666666"/>
+          </a:solidFill>
+          <a:ln>
+            <a:noFill/>
+          </a:ln>
+        </p:spPr>
+        <p:txBody>
+          <a:bodyPr/>
+          <a:lstStyle/>
+          <a:p>
+            <a:endParaRPr lang="en-US"/>
+          </a:p>
+        </p:txBody>
+      </p:sp>
+      <p:sp>
+        <p:nvSpPr>
+          <p:cNvPr id="40" name="Seller opt-out or complaint rate kpi"/>
+          <p:cNvSpPr/>
+          <p:nvPr/>
+        </p:nvSpPr>
+        <p:spPr>
+          <a:xfrm>
+            <a:off x="7229475" y="5534025"/>
+            <a:ext cx="1428750" cy="571500"/>
+          </a:xfrm>
+          <a:prstGeom prst="rect">
+            <a:avLst/>
+          </a:prstGeom>
+          <a:noFill/>
+          <a:ln>
+            <a:noFill/>
+          </a:ln>
+        </p:spPr>
+        <p:txBody>
+          <a:bodyPr wrap="square" lIns="0" tIns="0" rIns="0" bIns="0" anchor="t">
+            <a:normAutofit/>
+          </a:bodyPr>
+          <a:lstStyle/>
+          <a:p>
+            <a:pPr marL="0" indent="0">
+              <a:buNone/>
+            </a:pPr>
+            <a:r>
+              <a:rPr lang="en-US" sz="900" b="1" dirty="0">
+                <a:solidFill>
+                  <a:srgbClr val="F2F2F2"/>
+                </a:solidFill>
+                <a:latin typeface="Arial" pitchFamily="34" charset="0"/>
+                <a:ea typeface="Arial" pitchFamily="34" charset="-122"/>
+                <a:cs typeface="Arial" pitchFamily="34" charset="-120"/>
+              </a:rPr>
+              <a:t>Seller opt-out or
+complaint rate</a:t>
+            </a:r>
+            <a:endParaRPr lang="en-US" sz="900" dirty="0"/>
+          </a:p>
+        </p:txBody>
+      </p:sp>
+      <p:sp>
+        <p:nvSpPr>
+          <p:cNvPr id="41" name="Seller opt-out or complaint rate definition"/>
+          <p:cNvSpPr/>
+          <p:nvPr/>
+        </p:nvSpPr>
+        <p:spPr>
+          <a:xfrm>
+            <a:off x="8486777" y="5419725"/>
+            <a:ext cx="1475667" cy="590550"/>
+          </a:xfrm>
+          <a:prstGeom prst="rect">
+            <a:avLst/>
+          </a:prstGeom>
+          <a:noFill/>
+          <a:ln>
+            <a:noFill/>
+          </a:ln>
+        </p:spPr>
+        <p:txBody>
+          <a:bodyPr wrap="square" lIns="0" tIns="0" rIns="0" bIns="0" anchor="t">
+            <a:normAutofit/>
+          </a:bodyPr>
+          <a:lstStyle/>
+          <a:p>
+            <a:pPr marL="0" indent="0">
+              <a:buNone/>
+            </a:pPr>
+            <a:r>
+              <a:rPr lang="en-US" sz="700" b="1" dirty="0">
+                <a:solidFill>
+                  <a:srgbClr val="A8A8A8"/>
+                </a:solidFill>
+                <a:latin typeface="Arial" pitchFamily="34" charset="0"/>
+                <a:ea typeface="Arial" pitchFamily="34" charset="-122"/>
+                <a:cs typeface="Arial" pitchFamily="34" charset="-120"/>
+              </a:rPr>
+              <a:t>Definition</a:t>
+            </a:r>
+            <a:endParaRPr lang="en-US" sz="700" dirty="0"/>
+          </a:p>
+          <a:p>
+            <a:pPr marL="0" indent="0">
+              <a:buNone/>
+            </a:pPr>
+            <a:r>
+              <a:rPr lang="en-US" sz="900" b="0" dirty="0">
+                <a:solidFill>
+                  <a:srgbClr val="D9D9D9"/>
+                </a:solidFill>
+                <a:latin typeface="Arial" pitchFamily="34" charset="0"/>
+                <a:ea typeface="Arial" pitchFamily="34" charset="-122"/>
+                <a:cs typeface="Arial" pitchFamily="34" charset="-120"/>
+              </a:rPr>
+              <a:t>Share of exposed sellers who opt out or complain</a:t>
+            </a:r>
+            <a:endParaRPr lang="en-US" sz="900" dirty="0"/>
+          </a:p>
+        </p:txBody>
+      </p:sp>
+      <p:sp>
+        <p:nvSpPr>
+          <p:cNvPr id="42" name="Seller opt-out or complaint rate why"/>
+          <p:cNvSpPr/>
+          <p:nvPr/>
+        </p:nvSpPr>
+        <p:spPr>
+          <a:xfrm>
+            <a:off x="10096500" y="5419725"/>
+            <a:ext cx="938389" cy="590550"/>
+          </a:xfrm>
+          <a:prstGeom prst="rect">
+            <a:avLst/>
+          </a:prstGeom>
+          <a:noFill/>
+          <a:ln>
+            <a:noFill/>
+          </a:ln>
+        </p:spPr>
+        <p:txBody>
+          <a:bodyPr wrap="square" lIns="0" tIns="0" rIns="0" bIns="0" anchor="t">
+            <a:normAutofit/>
+          </a:bodyPr>
+          <a:lstStyle/>
+          <a:p>
+            <a:pPr marL="0" indent="0">
+              <a:buNone/>
+            </a:pPr>
+            <a:r>
+              <a:rPr lang="en-US" sz="620" b="1" dirty="0">
+                <a:solidFill>
+                  <a:srgbClr val="A8A8A8"/>
+                </a:solidFill>
+                <a:latin typeface="Arial" pitchFamily="34" charset="0"/>
+                <a:ea typeface="Arial" pitchFamily="34" charset="-122"/>
+                <a:cs typeface="Arial" pitchFamily="34" charset="-120"/>
+              </a:rPr>
+              <a:t>Why it matters</a:t>
+            </a:r>
+            <a:endParaRPr lang="en-US" sz="620" dirty="0"/>
+          </a:p>
+          <a:p>
+            <a:pPr marL="0" indent="0">
+              <a:buNone/>
+            </a:pPr>
+            <a:r>
+              <a:rPr lang="en-US" sz="900" b="0" dirty="0">
+                <a:solidFill>
+                  <a:srgbClr val="D9D9D9"/>
+                </a:solidFill>
+                <a:latin typeface="Arial" pitchFamily="34" charset="0"/>
+                <a:ea typeface="Arial" pitchFamily="34" charset="-122"/>
+                <a:cs typeface="Arial" pitchFamily="34" charset="-120"/>
+              </a:rPr>
+              <a:t>Caps campaign pressure before trust suffers.</a:t>
+            </a:r>
+            <a:endParaRPr lang="en-US" sz="900" dirty="0"/>
+          </a:p>
+        </p:txBody>
+      </p:sp>
     </p:spTree>
   </p:cSld>
   <p:clrMapOvr>
     <a:masterClrMapping/>
   </p:clrMapOvr>
+  <p:extLst>
+    <p:ext uri="{6950BFC3-D8DA-4A85-94F7-54DA5524770B}">
+      <p188:commentRel xmlns:p188="http://schemas.microsoft.com/office/powerpoint/2018/8/main" r:id="rId3"/>
+    </p:ext>
+  </p:extLst>
 </p:sld>
 </file>
 
